--- a/slides/AIMiniProject_presentation.pptx
+++ b/slides/AIMiniProject_presentation.pptx
@@ -5550,10 +5550,7 @@
               </a:defRPr>
             </a:pPr>
             <a:r>
-              <a:rPr>
-                <a:latin typeface="Arial"/>
-              </a:rPr>
-              <a:t>• Cài baseline Naive Bayes từ đầu trong src/baseline_naive_bayes.py.</a:t>
+              <a:t>• Cài thuật toán Naive Bayes từ đầu trong src/naive_bayes_model.py.</a:t>
             </a:r>
           </a:p>
           <a:p>
@@ -5566,10 +5563,7 @@
               </a:defRPr>
             </a:pPr>
             <a:r>
-              <a:rPr>
-                <a:latin typeface="Arial"/>
-              </a:rPr>
-              <a:t>• Train và so sánh mô hình trong:</a:t>
+              <a:t>• Train Naive Bayes và Linear SVM trong:</a:t>
             </a:r>
           </a:p>
           <a:p>

--- a/slides/AIMiniProject_presentation.pptx
+++ b/slides/AIMiniProject_presentation.pptx
@@ -14,13 +14,16 @@
     <p:sldId id="262" r:id="rId8"/>
     <p:sldId id="263" r:id="rId9"/>
     <p:sldId id="271" r:id="rId10"/>
-    <p:sldId id="273" r:id="rId11"/>
-    <p:sldId id="264" r:id="rId12"/>
-    <p:sldId id="265" r:id="rId13"/>
-    <p:sldId id="266" r:id="rId14"/>
-    <p:sldId id="267" r:id="rId15"/>
-    <p:sldId id="269" r:id="rId16"/>
-    <p:sldId id="270" r:id="rId17"/>
+    <p:sldId id="275" r:id="rId11"/>
+    <p:sldId id="276" r:id="rId12"/>
+    <p:sldId id="273" r:id="rId13"/>
+    <p:sldId id="264" r:id="rId14"/>
+    <p:sldId id="265" r:id="rId15"/>
+    <p:sldId id="266" r:id="rId16"/>
+    <p:sldId id="267" r:id="rId17"/>
+    <p:sldId id="269" r:id="rId18"/>
+    <p:sldId id="277" r:id="rId19"/>
+    <p:sldId id="270" r:id="rId20"/>
   </p:sldIdLst>
   <p:sldSz cx="12192000" cy="6858000"/>
   <p:notesSz cx="6858000" cy="9144000"/>
@@ -3213,13 +3216,85 @@
           <a:p>
             <a:pPr algn="l"/>
             <a:r>
-              <a:rPr sz="2000" b="0">
+              <a:rPr sz="2000" b="0" dirty="0">
                 <a:solidFill>
                   <a:srgbClr val="CCFBF1"/>
                 </a:solidFill>
                 <a:latin typeface="Arial"/>
               </a:rPr>
-              <a:t>AI Mini Project - Phân loại bình luận Shopee</a:t>
+              <a:t>AI Mini Project - </a:t>
+            </a:r>
+            <a:r>
+              <a:rPr sz="2000" b="0" dirty="0" err="1">
+                <a:solidFill>
+                  <a:srgbClr val="CCFBF1"/>
+                </a:solidFill>
+                <a:latin typeface="Arial"/>
+              </a:rPr>
+              <a:t>Phân</a:t>
+            </a:r>
+            <a:r>
+              <a:rPr sz="2000" b="0" dirty="0">
+                <a:solidFill>
+                  <a:srgbClr val="CCFBF1"/>
+                </a:solidFill>
+                <a:latin typeface="Arial"/>
+              </a:rPr>
+              <a:t> </a:t>
+            </a:r>
+            <a:r>
+              <a:rPr sz="2000" b="0" dirty="0" err="1">
+                <a:solidFill>
+                  <a:srgbClr val="CCFBF1"/>
+                </a:solidFill>
+                <a:latin typeface="Arial"/>
+              </a:rPr>
+              <a:t>loại</a:t>
+            </a:r>
+            <a:r>
+              <a:rPr sz="2000" b="0" dirty="0">
+                <a:solidFill>
+                  <a:srgbClr val="CCFBF1"/>
+                </a:solidFill>
+                <a:latin typeface="Arial"/>
+              </a:rPr>
+              <a:t> </a:t>
+            </a:r>
+            <a:r>
+              <a:rPr sz="2000" b="0" dirty="0" err="1">
+                <a:solidFill>
+                  <a:srgbClr val="CCFBF1"/>
+                </a:solidFill>
+                <a:latin typeface="Arial"/>
+              </a:rPr>
+              <a:t>bình</a:t>
+            </a:r>
+            <a:r>
+              <a:rPr sz="2000" b="0" dirty="0">
+                <a:solidFill>
+                  <a:srgbClr val="CCFBF1"/>
+                </a:solidFill>
+                <a:latin typeface="Arial"/>
+              </a:rPr>
+              <a:t> </a:t>
+            </a:r>
+            <a:r>
+              <a:rPr sz="2000" b="0" dirty="0" err="1">
+                <a:solidFill>
+                  <a:srgbClr val="CCFBF1"/>
+                </a:solidFill>
+                <a:latin typeface="Arial"/>
+              </a:rPr>
+              <a:t>luận</a:t>
+            </a:r>
+            <a:r>
+              <a:rPr sz="2000" b="0" dirty="0">
+                <a:solidFill>
+                  <a:srgbClr val="CCFBF1"/>
+                </a:solidFill>
+                <a:latin typeface="Arial"/>
+              </a:rPr>
+              <a:t> Shopee</a:t>
             </a:r>
           </a:p>
         </p:txBody>
@@ -3627,7 +3702,43 @@
                 <a:latin typeface="Arial"/>
                 <a:ea typeface="Arial"/>
               </a:rPr>
-              <a:t>Linear SVM</a:t>
+              <a:t>TF-IDF</a:t>
+            </a:r>
+          </a:p>
+          <a:p>
+            <a:pPr>
+              <a:defRPr sz="1550">
+                <a:solidFill>
+                  <a:srgbClr val="0F172A"/>
+                </a:solidFill>
+                <a:latin typeface="Arial"/>
+                <a:ea typeface="Arial"/>
+              </a:defRPr>
+            </a:pPr>
+            <a:r>
+              <a:rPr lang="vi-VN" dirty="0">
+                <a:latin typeface="Arial"/>
+                <a:ea typeface="Arial"/>
+              </a:rPr>
+              <a:t>• Mục đích:</a:t>
+            </a:r>
+          </a:p>
+          <a:p>
+            <a:pPr>
+              <a:defRPr sz="1550">
+                <a:solidFill>
+                  <a:srgbClr val="0F172A"/>
+                </a:solidFill>
+                <a:latin typeface="Arial"/>
+                <a:ea typeface="Arial"/>
+              </a:defRPr>
+            </a:pPr>
+            <a:r>
+              <a:rPr lang="vi-VN" dirty="0">
+                <a:latin typeface="Arial"/>
+                <a:ea typeface="Arial"/>
+              </a:rPr>
+              <a:t>  Biến văn bản review thành vector số để mô hình học máy xử lý được.</a:t>
             </a:r>
           </a:p>
           <a:p>
@@ -3678,7 +3789,7 @@
                 <a:latin typeface="Arial"/>
                 <a:ea typeface="Arial"/>
               </a:rPr>
-              <a:t>  • Mỗi review sau TF-IDF là một vector.</a:t>
+              <a:t>  Từ/cụm từ quan trọng là từ xuất hiện nhiều trong một review</a:t>
             </a:r>
           </a:p>
           <a:p>
@@ -3696,25 +3807,7 @@
                 <a:latin typeface="Arial"/>
                 <a:ea typeface="Arial"/>
               </a:rPr>
-              <a:t>  • SVM học siêu phẳng để tách các lớp.</a:t>
-            </a:r>
-          </a:p>
-          <a:p>
-            <a:pPr>
-              <a:defRPr sz="1550">
-                <a:solidFill>
-                  <a:srgbClr val="0F172A"/>
-                </a:solidFill>
-                <a:latin typeface="Arial"/>
-                <a:ea typeface="Arial"/>
-              </a:defRPr>
-            </a:pPr>
-            <a:r>
-              <a:rPr lang="vi-VN" dirty="0">
-                <a:latin typeface="Arial"/>
-                <a:ea typeface="Arial"/>
-              </a:rPr>
-              <a:t>  • Ưu tiên khoảng cách phân tách lớn nhất giữa các lớp.</a:t>
+              <a:t>  nhưng không xuất hiện quá phổ biến trong toàn bộ dataset.</a:t>
             </a:r>
           </a:p>
           <a:p>
@@ -3747,7 +3840,7 @@
                 <a:latin typeface="Arial"/>
                 <a:ea typeface="Arial"/>
               </a:rPr>
-              <a:t>• Hàm điểm:</a:t>
+              <a:t> Bước 1: Tạo vocabulary từ tập train</a:t>
             </a:r>
           </a:p>
           <a:p>
@@ -3760,7 +3853,21 @@
                 <a:ea typeface="Arial"/>
               </a:defRPr>
             </a:pPr>
-            <a:endParaRPr lang="vi-VN" dirty="0">
+            <a:r>
+              <a:rPr lang="en-US" dirty="0">
+                <a:latin typeface="Arial"/>
+                <a:ea typeface="Arial"/>
+              </a:rPr>
+              <a:t> </a:t>
+            </a:r>
+            <a:r>
+              <a:rPr lang="vi-VN" dirty="0">
+                <a:latin typeface="Arial"/>
+                <a:ea typeface="Arial"/>
+              </a:rPr>
+              <a:t>Bước 2: Mỗi feature là một chiều vector</a:t>
+            </a:r>
+            <a:endParaRPr lang="en-US" dirty="0">
               <a:latin typeface="Arial"/>
               <a:ea typeface="Arial"/>
             </a:endParaRPr>
@@ -3776,11 +3883,67 @@
               </a:defRPr>
             </a:pPr>
             <a:r>
-              <a:rPr lang="vi-VN" dirty="0">
+              <a:rPr lang="en-US" dirty="0">
                 <a:latin typeface="Arial"/>
                 <a:ea typeface="Arial"/>
               </a:rPr>
-              <a:t>• Dự đoán:</a:t>
+              <a:t> </a:t>
+            </a:r>
+            <a:r>
+              <a:rPr lang="en-US" dirty="0" err="1">
+                <a:latin typeface="Arial"/>
+                <a:ea typeface="Arial"/>
+              </a:rPr>
+              <a:t>Bước</a:t>
+            </a:r>
+            <a:r>
+              <a:rPr lang="en-US" dirty="0">
+                <a:latin typeface="Arial"/>
+                <a:ea typeface="Arial"/>
+              </a:rPr>
+              <a:t> 3: </a:t>
+            </a:r>
+            <a:r>
+              <a:rPr lang="en-US" dirty="0" err="1">
+                <a:latin typeface="Arial"/>
+                <a:ea typeface="Arial"/>
+              </a:rPr>
+              <a:t>Tính</a:t>
+            </a:r>
+            <a:r>
+              <a:rPr lang="en-US" dirty="0">
+                <a:latin typeface="Arial"/>
+                <a:ea typeface="Arial"/>
+              </a:rPr>
+              <a:t> TF-IDF </a:t>
+            </a:r>
+            <a:r>
+              <a:rPr lang="en-US" dirty="0" err="1">
+                <a:latin typeface="Arial"/>
+                <a:ea typeface="Arial"/>
+              </a:rPr>
+              <a:t>cho</a:t>
+            </a:r>
+            <a:r>
+              <a:rPr lang="en-US" dirty="0">
+                <a:latin typeface="Arial"/>
+                <a:ea typeface="Arial"/>
+              </a:rPr>
+              <a:t> </a:t>
+            </a:r>
+            <a:r>
+              <a:rPr lang="en-US" dirty="0" err="1">
+                <a:latin typeface="Arial"/>
+                <a:ea typeface="Arial"/>
+              </a:rPr>
+              <a:t>từng</a:t>
+            </a:r>
+            <a:r>
+              <a:rPr lang="en-US" dirty="0">
+                <a:latin typeface="Arial"/>
+                <a:ea typeface="Arial"/>
+              </a:rPr>
+              <a:t> feature</a:t>
             </a:r>
           </a:p>
           <a:p>
@@ -3793,13 +3956,25 @@
                 <a:ea typeface="Arial"/>
               </a:defRPr>
             </a:pPr>
-            <a:r>
-              <a:rPr lang="vi-VN" dirty="0">
+            <a:endParaRPr lang="en-US" dirty="0">
+              <a:latin typeface="Arial"/>
+              <a:ea typeface="Arial"/>
+            </a:endParaRPr>
+          </a:p>
+          <a:p>
+            <a:pPr>
+              <a:defRPr sz="1550">
+                <a:solidFill>
+                  <a:srgbClr val="0F172A"/>
+                </a:solidFill>
                 <a:latin typeface="Arial"/>
                 <a:ea typeface="Arial"/>
-              </a:rPr>
-              <a:t>  </a:t>
-            </a:r>
+              </a:defRPr>
+            </a:pPr>
+            <a:endParaRPr lang="en-US" dirty="0">
+              <a:latin typeface="Arial"/>
+              <a:ea typeface="Arial"/>
+            </a:endParaRPr>
           </a:p>
         </p:txBody>
       </p:sp>
@@ -3808,7 +3983,7 @@
           <p:cNvPr id="8" name="Picture 7">
             <a:extLst>
               <a:ext uri="{FF2B5EF4-FFF2-40B4-BE49-F238E27FC236}">
-                <a16:creationId xmlns:a16="http://schemas.microsoft.com/office/drawing/2014/main" id="{7F074585-FAB2-CEF7-7DE2-E339F2A6C18D}"/>
+                <a16:creationId xmlns:a16="http://schemas.microsoft.com/office/drawing/2014/main" id="{50DF576F-9607-2724-35EE-C1D682CCC13D}"/>
               </a:ext>
             </a:extLst>
           </p:cNvPr>
@@ -3825,38 +4000,8 @@
         </p:blipFill>
         <p:spPr>
           <a:xfrm>
-            <a:off x="1057385" y="3071763"/>
-            <a:ext cx="1152686" cy="238158"/>
-          </a:xfrm>
-          <a:prstGeom prst="rect">
-            <a:avLst/>
-          </a:prstGeom>
-        </p:spPr>
-      </p:pic>
-      <p:pic>
-        <p:nvPicPr>
-          <p:cNvPr id="10" name="Picture 9">
-            <a:extLst>
-              <a:ext uri="{FF2B5EF4-FFF2-40B4-BE49-F238E27FC236}">
-                <a16:creationId xmlns:a16="http://schemas.microsoft.com/office/drawing/2014/main" id="{D9925F4F-6D50-5E89-8F32-1A2F7512E81C}"/>
-              </a:ext>
-            </a:extLst>
-          </p:cNvPr>
-          <p:cNvPicPr>
-            <a:picLocks noChangeAspect="1"/>
-          </p:cNvPicPr>
-          <p:nvPr/>
-        </p:nvPicPr>
-        <p:blipFill>
-          <a:blip r:embed="rId3"/>
-          <a:stretch>
-            <a:fillRect/>
-          </a:stretch>
-        </p:blipFill>
-        <p:spPr>
-          <a:xfrm>
-            <a:off x="1057385" y="3620817"/>
-            <a:ext cx="1143160" cy="285790"/>
+            <a:off x="4356100" y="3628103"/>
+            <a:ext cx="3336347" cy="2589817"/>
           </a:xfrm>
           <a:prstGeom prst="rect">
             <a:avLst/>
@@ -3866,7 +4011,7 @@
     </p:spTree>
     <p:extLst>
       <p:ext uri="{BB962C8B-B14F-4D97-AF65-F5344CB8AC3E}">
-        <p14:creationId xmlns:p14="http://schemas.microsoft.com/office/powerpoint/2010/main" val="4284177420"/>
+        <p14:creationId xmlns:p14="http://schemas.microsoft.com/office/powerpoint/2010/main" val="2383931361"/>
       </p:ext>
     </p:extLst>
   </p:cSld>
@@ -3975,7 +4120,7 @@
                 </a:solidFill>
                 <a:latin typeface="Arial"/>
               </a:rPr>
-              <a:t>Experiments</a:t>
+              <a:t>Models and Baseline</a:t>
             </a:r>
           </a:p>
         </p:txBody>
@@ -4010,7 +4155,7 @@
                 </a:solidFill>
                 <a:latin typeface="Arial"/>
               </a:rPr>
-              <a:t>9/15</a:t>
+              <a:t>8/15</a:t>
             </a:r>
           </a:p>
         </p:txBody>
@@ -4058,8 +4203,8 @@
         </p:nvSpPr>
         <p:spPr>
           <a:xfrm>
-            <a:off x="685800" y="1143000"/>
-            <a:ext cx="4297680" cy="4480560"/>
+            <a:off x="777240" y="1143000"/>
+            <a:ext cx="10698480" cy="5074920"/>
           </a:xfrm>
           <a:prstGeom prst="rect">
             <a:avLst/>
@@ -4073,20 +4218,1214 @@
           <a:lstStyle/>
           <a:p>
             <a:pPr>
-              <a:defRPr sz="1700">
+              <a:defRPr sz="1550">
                 <a:solidFill>
                   <a:srgbClr val="0F172A"/>
                 </a:solidFill>
                 <a:latin typeface="Arial"/>
+                <a:ea typeface="Arial"/>
               </a:defRPr>
             </a:pPr>
             <a:r>
-              <a:rPr dirty="0">
-                <a:latin typeface="Arial"/>
-              </a:rPr>
-              <a:t>• Train/test split: 80/20, stratified by label.</a:t>
-            </a:r>
-          </a:p>
+              <a:rPr lang="vi-VN" dirty="0">
+                <a:latin typeface="Arial"/>
+                <a:ea typeface="Arial"/>
+              </a:rPr>
+              <a:t>TF-IDF</a:t>
+            </a:r>
+          </a:p>
+          <a:p>
+            <a:pPr>
+              <a:defRPr sz="1550">
+                <a:solidFill>
+                  <a:srgbClr val="0F172A"/>
+                </a:solidFill>
+                <a:latin typeface="Arial"/>
+                <a:ea typeface="Arial"/>
+              </a:defRPr>
+            </a:pPr>
+            <a:r>
+              <a:rPr lang="en-US" dirty="0">
+                <a:latin typeface="Arial"/>
+                <a:ea typeface="Arial"/>
+              </a:rPr>
+              <a:t>	</a:t>
+            </a:r>
+            <a:r>
+              <a:rPr lang="en-US" dirty="0" err="1">
+                <a:latin typeface="Arial"/>
+                <a:ea typeface="Arial"/>
+              </a:rPr>
+              <a:t>Bước</a:t>
+            </a:r>
+            <a:r>
+              <a:rPr lang="en-US" dirty="0">
+                <a:latin typeface="Arial"/>
+                <a:ea typeface="Arial"/>
+              </a:rPr>
+              <a:t> 4: </a:t>
+            </a:r>
+            <a:r>
+              <a:rPr lang="en-US" dirty="0" err="1">
+                <a:latin typeface="Arial"/>
+                <a:ea typeface="Arial"/>
+              </a:rPr>
+              <a:t>Chuyển</a:t>
+            </a:r>
+            <a:r>
+              <a:rPr lang="en-US" dirty="0">
+                <a:latin typeface="Arial"/>
+                <a:ea typeface="Arial"/>
+              </a:rPr>
+              <a:t> review </a:t>
+            </a:r>
+            <a:r>
+              <a:rPr lang="en-US" dirty="0" err="1">
+                <a:latin typeface="Arial"/>
+                <a:ea typeface="Arial"/>
+              </a:rPr>
+              <a:t>thành</a:t>
+            </a:r>
+            <a:r>
+              <a:rPr lang="en-US" dirty="0">
+                <a:latin typeface="Arial"/>
+                <a:ea typeface="Arial"/>
+              </a:rPr>
+              <a:t> </a:t>
+            </a:r>
+            <a:r>
+              <a:rPr lang="en-US" dirty="0" err="1">
+                <a:latin typeface="Arial"/>
+                <a:ea typeface="Arial"/>
+              </a:rPr>
+              <a:t>dạng</a:t>
+            </a:r>
+            <a:r>
+              <a:rPr lang="en-US" dirty="0">
+                <a:latin typeface="Arial"/>
+                <a:ea typeface="Arial"/>
+              </a:rPr>
+              <a:t> vector n </a:t>
+            </a:r>
+            <a:r>
+              <a:rPr lang="en-US" dirty="0" err="1">
+                <a:latin typeface="Arial"/>
+                <a:ea typeface="Arial"/>
+              </a:rPr>
+              <a:t>chiều</a:t>
+            </a:r>
+            <a:r>
+              <a:rPr lang="en-US" dirty="0">
+                <a:latin typeface="Arial"/>
+                <a:ea typeface="Arial"/>
+              </a:rPr>
+              <a:t> </a:t>
+            </a:r>
+            <a:r>
+              <a:rPr lang="pt-BR" dirty="0">
+                <a:latin typeface="Arial"/>
+                <a:ea typeface="Arial"/>
+              </a:rPr>
+              <a:t>x = [x_1, x_2, ..., x_n]</a:t>
+            </a:r>
+            <a:r>
+              <a:rPr lang="en-US" dirty="0">
+                <a:latin typeface="Arial"/>
+                <a:ea typeface="Arial"/>
+              </a:rPr>
+              <a:t> </a:t>
+            </a:r>
+            <a:r>
+              <a:rPr lang="en-US" dirty="0" err="1">
+                <a:latin typeface="Arial"/>
+                <a:ea typeface="Arial"/>
+              </a:rPr>
+              <a:t>với</a:t>
+            </a:r>
+            <a:r>
+              <a:rPr lang="en-US" dirty="0">
+                <a:latin typeface="Arial"/>
+                <a:ea typeface="Arial"/>
+              </a:rPr>
+              <a:t>: </a:t>
+            </a:r>
+          </a:p>
+          <a:p>
+            <a:pPr>
+              <a:defRPr sz="1550">
+                <a:solidFill>
+                  <a:srgbClr val="0F172A"/>
+                </a:solidFill>
+                <a:latin typeface="Arial"/>
+                <a:ea typeface="Arial"/>
+              </a:defRPr>
+            </a:pPr>
+            <a:r>
+              <a:rPr lang="en-US" dirty="0">
+                <a:latin typeface="Arial"/>
+                <a:ea typeface="Arial"/>
+              </a:rPr>
+              <a:t>	</a:t>
+            </a:r>
+          </a:p>
+          <a:p>
+            <a:pPr>
+              <a:defRPr sz="1550">
+                <a:solidFill>
+                  <a:srgbClr val="0F172A"/>
+                </a:solidFill>
+                <a:latin typeface="Arial"/>
+                <a:ea typeface="Arial"/>
+              </a:defRPr>
+            </a:pPr>
+            <a:endParaRPr lang="en-US" dirty="0">
+              <a:latin typeface="Arial"/>
+              <a:ea typeface="Arial"/>
+            </a:endParaRPr>
+          </a:p>
+          <a:p>
+            <a:pPr>
+              <a:defRPr sz="1550">
+                <a:solidFill>
+                  <a:srgbClr val="0F172A"/>
+                </a:solidFill>
+                <a:latin typeface="Arial"/>
+                <a:ea typeface="Arial"/>
+              </a:defRPr>
+            </a:pPr>
+            <a:r>
+              <a:rPr lang="en-US" dirty="0">
+                <a:latin typeface="Arial"/>
+                <a:ea typeface="Arial"/>
+              </a:rPr>
+              <a:t>	n </a:t>
+            </a:r>
+            <a:r>
+              <a:rPr lang="en-US" dirty="0" err="1">
+                <a:latin typeface="Arial"/>
+                <a:ea typeface="Arial"/>
+              </a:rPr>
+              <a:t>là</a:t>
+            </a:r>
+            <a:r>
+              <a:rPr lang="en-US" dirty="0">
+                <a:latin typeface="Arial"/>
+                <a:ea typeface="Arial"/>
+              </a:rPr>
+              <a:t> </a:t>
+            </a:r>
+            <a:r>
+              <a:rPr lang="en-US" dirty="0" err="1">
+                <a:latin typeface="Arial"/>
+                <a:ea typeface="Arial"/>
+              </a:rPr>
+              <a:t>số</a:t>
+            </a:r>
+            <a:r>
+              <a:rPr lang="en-US" dirty="0">
+                <a:latin typeface="Arial"/>
+                <a:ea typeface="Arial"/>
+              </a:rPr>
+              <a:t> feature.</a:t>
+            </a:r>
+          </a:p>
+        </p:txBody>
+      </p:sp>
+      <p:pic>
+        <p:nvPicPr>
+          <p:cNvPr id="7" name="Picture 6">
+            <a:extLst>
+              <a:ext uri="{FF2B5EF4-FFF2-40B4-BE49-F238E27FC236}">
+                <a16:creationId xmlns:a16="http://schemas.microsoft.com/office/drawing/2014/main" id="{FF3378A0-8BA6-0567-193B-7F810A7643B2}"/>
+              </a:ext>
+            </a:extLst>
+          </p:cNvPr>
+          <p:cNvPicPr>
+            <a:picLocks noChangeAspect="1"/>
+          </p:cNvPicPr>
+          <p:nvPr/>
+        </p:nvPicPr>
+        <p:blipFill>
+          <a:blip r:embed="rId2"/>
+          <a:stretch>
+            <a:fillRect/>
+          </a:stretch>
+        </p:blipFill>
+        <p:spPr>
+          <a:xfrm>
+            <a:off x="1267251" y="1858864"/>
+            <a:ext cx="2695951" cy="247685"/>
+          </a:xfrm>
+          <a:prstGeom prst="rect">
+            <a:avLst/>
+          </a:prstGeom>
+        </p:spPr>
+      </p:pic>
+    </p:spTree>
+    <p:extLst>
+      <p:ext uri="{BB962C8B-B14F-4D97-AF65-F5344CB8AC3E}">
+        <p14:creationId xmlns:p14="http://schemas.microsoft.com/office/powerpoint/2010/main" val="4262217641"/>
+      </p:ext>
+    </p:extLst>
+  </p:cSld>
+  <p:clrMapOvr>
+    <a:masterClrMapping/>
+  </p:clrMapOvr>
+</p:sld>
+</file>
+
+<file path=ppt/slides/slide12.xml><?xml version="1.0" encoding="utf-8"?>
+<p:sld xmlns:a="http://schemas.openxmlformats.org/drawingml/2006/main" xmlns:r="http://schemas.openxmlformats.org/officeDocument/2006/relationships" xmlns:p="http://schemas.openxmlformats.org/presentationml/2006/main">
+  <p:cSld>
+    <p:bg>
+      <p:bgPr>
+        <a:solidFill>
+          <a:srgbClr val="FFFFFF"/>
+        </a:solidFill>
+        <a:effectLst/>
+      </p:bgPr>
+    </p:bg>
+    <p:spTree>
+      <p:nvGrpSpPr>
+        <p:cNvPr id="1" name=""/>
+        <p:cNvGrpSpPr/>
+        <p:nvPr/>
+      </p:nvGrpSpPr>
+      <p:grpSpPr>
+        <a:xfrm>
+          <a:off x="0" y="0"/>
+          <a:ext cx="0" cy="0"/>
+          <a:chOff x="0" y="0"/>
+          <a:chExt cx="0" cy="0"/>
+        </a:xfrm>
+      </p:grpSpPr>
+      <p:sp>
+        <p:nvSpPr>
+          <p:cNvPr id="2" name="Rectangle 1"/>
+          <p:cNvSpPr/>
+          <p:nvPr/>
+        </p:nvSpPr>
+        <p:spPr>
+          <a:xfrm>
+            <a:off x="0" y="0"/>
+            <a:ext cx="12191695" cy="164592"/>
+          </a:xfrm>
+          <a:prstGeom prst="rect">
+            <a:avLst/>
+          </a:prstGeom>
+          <a:solidFill>
+            <a:srgbClr val="0F766E"/>
+          </a:solidFill>
+          <a:ln>
+            <a:noFill/>
+          </a:ln>
+        </p:spPr>
+        <p:style>
+          <a:lnRef idx="1">
+            <a:schemeClr val="accent1"/>
+          </a:lnRef>
+          <a:fillRef idx="3">
+            <a:schemeClr val="accent1"/>
+          </a:fillRef>
+          <a:effectRef idx="2">
+            <a:schemeClr val="accent1"/>
+          </a:effectRef>
+          <a:fontRef idx="minor">
+            <a:schemeClr val="lt1"/>
+          </a:fontRef>
+        </p:style>
+        <p:txBody>
+          <a:bodyPr rtlCol="0" anchor="ctr"/>
+          <a:lstStyle/>
+          <a:p>
+            <a:pPr algn="ctr"/>
+            <a:endParaRPr/>
+          </a:p>
+        </p:txBody>
+      </p:sp>
+      <p:sp>
+        <p:nvSpPr>
+          <p:cNvPr id="3" name="TextBox 2"/>
+          <p:cNvSpPr txBox="1"/>
+          <p:nvPr/>
+        </p:nvSpPr>
+        <p:spPr>
+          <a:xfrm>
+            <a:off x="502920" y="320040"/>
+            <a:ext cx="9509760" cy="502920"/>
+          </a:xfrm>
+          <a:prstGeom prst="rect">
+            <a:avLst/>
+          </a:prstGeom>
+          <a:noFill/>
+        </p:spPr>
+        <p:txBody>
+          <a:bodyPr wrap="square">
+            <a:normAutofit lnSpcReduction="10000"/>
+          </a:bodyPr>
+          <a:lstStyle/>
+          <a:p>
+            <a:pPr algn="l"/>
+            <a:r>
+              <a:rPr sz="2800" b="1" dirty="0">
+                <a:solidFill>
+                  <a:srgbClr val="142A41"/>
+                </a:solidFill>
+                <a:latin typeface="Arial"/>
+              </a:rPr>
+              <a:t>Models and Baseline</a:t>
+            </a:r>
+          </a:p>
+        </p:txBody>
+      </p:sp>
+      <p:sp>
+        <p:nvSpPr>
+          <p:cNvPr id="4" name="TextBox 3"/>
+          <p:cNvSpPr txBox="1"/>
+          <p:nvPr/>
+        </p:nvSpPr>
+        <p:spPr>
+          <a:xfrm>
+            <a:off x="10972800" y="347472"/>
+            <a:ext cx="685800" cy="274320"/>
+          </a:xfrm>
+          <a:prstGeom prst="rect">
+            <a:avLst/>
+          </a:prstGeom>
+          <a:noFill/>
+        </p:spPr>
+        <p:txBody>
+          <a:bodyPr wrap="square">
+            <a:normAutofit/>
+          </a:bodyPr>
+          <a:lstStyle/>
+          <a:p>
+            <a:pPr algn="r"/>
+            <a:r>
+              <a:rPr sz="1000" b="0">
+                <a:solidFill>
+                  <a:srgbClr val="475569"/>
+                </a:solidFill>
+                <a:latin typeface="Arial"/>
+              </a:rPr>
+              <a:t>8/15</a:t>
+            </a:r>
+          </a:p>
+        </p:txBody>
+      </p:sp>
+      <p:sp>
+        <p:nvSpPr>
+          <p:cNvPr id="5" name="TextBox 4"/>
+          <p:cNvSpPr txBox="1"/>
+          <p:nvPr/>
+        </p:nvSpPr>
+        <p:spPr>
+          <a:xfrm>
+            <a:off x="502920" y="6510528"/>
+            <a:ext cx="2011680" cy="182880"/>
+          </a:xfrm>
+          <a:prstGeom prst="rect">
+            <a:avLst/>
+          </a:prstGeom>
+          <a:noFill/>
+        </p:spPr>
+        <p:txBody>
+          <a:bodyPr wrap="square">
+            <a:normAutofit fontScale="77500" lnSpcReduction="20000"/>
+          </a:bodyPr>
+          <a:lstStyle/>
+          <a:p>
+            <a:pPr algn="l"/>
+            <a:r>
+              <a:rPr sz="900" b="0">
+                <a:solidFill>
+                  <a:srgbClr val="475569"/>
+                </a:solidFill>
+                <a:latin typeface="Arial"/>
+              </a:rPr>
+              <a:t>AIMiniProject</a:t>
+            </a:r>
+          </a:p>
+        </p:txBody>
+      </p:sp>
+      <p:sp>
+        <p:nvSpPr>
+          <p:cNvPr id="6" name="TextBox 5"/>
+          <p:cNvSpPr txBox="1"/>
+          <p:nvPr/>
+        </p:nvSpPr>
+        <p:spPr>
+          <a:xfrm>
+            <a:off x="777240" y="1143000"/>
+            <a:ext cx="10698480" cy="5074920"/>
+          </a:xfrm>
+          <a:prstGeom prst="rect">
+            <a:avLst/>
+          </a:prstGeom>
+          <a:noFill/>
+        </p:spPr>
+        <p:txBody>
+          <a:bodyPr wrap="square">
+            <a:normAutofit/>
+          </a:bodyPr>
+          <a:lstStyle/>
+          <a:p>
+            <a:pPr>
+              <a:defRPr sz="1550">
+                <a:solidFill>
+                  <a:srgbClr val="0F172A"/>
+                </a:solidFill>
+                <a:latin typeface="Arial"/>
+                <a:ea typeface="Arial"/>
+              </a:defRPr>
+            </a:pPr>
+            <a:r>
+              <a:rPr lang="vi-VN" dirty="0">
+                <a:latin typeface="Arial"/>
+                <a:ea typeface="Arial"/>
+              </a:rPr>
+              <a:t>Linear SVM</a:t>
+            </a:r>
+          </a:p>
+          <a:p>
+            <a:pPr>
+              <a:defRPr sz="1550">
+                <a:solidFill>
+                  <a:srgbClr val="0F172A"/>
+                </a:solidFill>
+                <a:latin typeface="Arial"/>
+                <a:ea typeface="Arial"/>
+              </a:defRPr>
+            </a:pPr>
+            <a:endParaRPr lang="vi-VN" dirty="0">
+              <a:latin typeface="Arial"/>
+              <a:ea typeface="Arial"/>
+            </a:endParaRPr>
+          </a:p>
+          <a:p>
+            <a:pPr>
+              <a:defRPr sz="1550">
+                <a:solidFill>
+                  <a:srgbClr val="0F172A"/>
+                </a:solidFill>
+                <a:latin typeface="Arial"/>
+                <a:ea typeface="Arial"/>
+              </a:defRPr>
+            </a:pPr>
+            <a:r>
+              <a:rPr lang="vi-VN" dirty="0">
+                <a:latin typeface="Arial"/>
+                <a:ea typeface="Arial"/>
+              </a:rPr>
+              <a:t>• Ý tưởng:</a:t>
+            </a:r>
+          </a:p>
+          <a:p>
+            <a:pPr>
+              <a:defRPr sz="1550">
+                <a:solidFill>
+                  <a:srgbClr val="0F172A"/>
+                </a:solidFill>
+                <a:latin typeface="Arial"/>
+                <a:ea typeface="Arial"/>
+              </a:defRPr>
+            </a:pPr>
+            <a:r>
+              <a:rPr lang="vi-VN" dirty="0">
+                <a:latin typeface="Arial"/>
+                <a:ea typeface="Arial"/>
+              </a:rPr>
+              <a:t>  • Mỗi review sau TF-IDF là một vector.</a:t>
+            </a:r>
+          </a:p>
+          <a:p>
+            <a:pPr>
+              <a:defRPr sz="1550">
+                <a:solidFill>
+                  <a:srgbClr val="0F172A"/>
+                </a:solidFill>
+                <a:latin typeface="Arial"/>
+                <a:ea typeface="Arial"/>
+              </a:defRPr>
+            </a:pPr>
+            <a:r>
+              <a:rPr lang="vi-VN" dirty="0">
+                <a:latin typeface="Arial"/>
+                <a:ea typeface="Arial"/>
+              </a:rPr>
+              <a:t>  • SVM học siêu phẳng để tách các lớp.</a:t>
+            </a:r>
+          </a:p>
+          <a:p>
+            <a:pPr>
+              <a:defRPr sz="1550">
+                <a:solidFill>
+                  <a:srgbClr val="0F172A"/>
+                </a:solidFill>
+                <a:latin typeface="Arial"/>
+                <a:ea typeface="Arial"/>
+              </a:defRPr>
+            </a:pPr>
+            <a:r>
+              <a:rPr lang="vi-VN" dirty="0">
+                <a:latin typeface="Arial"/>
+                <a:ea typeface="Arial"/>
+              </a:rPr>
+              <a:t>  • Ưu tiên khoảng cách phân tách lớn nhất giữa các lớp</a:t>
+            </a:r>
+            <a:r>
+              <a:rPr lang="en-US" dirty="0">
+                <a:latin typeface="Arial"/>
+                <a:ea typeface="Arial"/>
+              </a:rPr>
+              <a:t> “issue” </a:t>
+            </a:r>
+            <a:r>
+              <a:rPr lang="en-US" dirty="0" err="1">
+                <a:latin typeface="Arial"/>
+                <a:ea typeface="Arial"/>
+              </a:rPr>
+              <a:t>và</a:t>
+            </a:r>
+            <a:r>
+              <a:rPr lang="en-US" dirty="0">
+                <a:latin typeface="Arial"/>
+                <a:ea typeface="Arial"/>
+              </a:rPr>
+              <a:t> “non-issue”</a:t>
+            </a:r>
+            <a:r>
+              <a:rPr lang="vi-VN" dirty="0">
+                <a:latin typeface="Arial"/>
+                <a:ea typeface="Arial"/>
+              </a:rPr>
+              <a:t>.</a:t>
+            </a:r>
+          </a:p>
+          <a:p>
+            <a:pPr>
+              <a:defRPr sz="1550">
+                <a:solidFill>
+                  <a:srgbClr val="0F172A"/>
+                </a:solidFill>
+                <a:latin typeface="Arial"/>
+                <a:ea typeface="Arial"/>
+              </a:defRPr>
+            </a:pPr>
+            <a:endParaRPr lang="vi-VN" dirty="0">
+              <a:latin typeface="Arial"/>
+              <a:ea typeface="Arial"/>
+            </a:endParaRPr>
+          </a:p>
+          <a:p>
+            <a:pPr>
+              <a:defRPr sz="1550">
+                <a:solidFill>
+                  <a:srgbClr val="0F172A"/>
+                </a:solidFill>
+                <a:latin typeface="Arial"/>
+                <a:ea typeface="Arial"/>
+              </a:defRPr>
+            </a:pPr>
+            <a:r>
+              <a:rPr lang="vi-VN" dirty="0">
+                <a:latin typeface="Arial"/>
+                <a:ea typeface="Arial"/>
+              </a:rPr>
+              <a:t>• Hàm điểm:</a:t>
+            </a:r>
+          </a:p>
+          <a:p>
+            <a:pPr>
+              <a:defRPr sz="1550">
+                <a:solidFill>
+                  <a:srgbClr val="0F172A"/>
+                </a:solidFill>
+                <a:latin typeface="Arial"/>
+                <a:ea typeface="Arial"/>
+              </a:defRPr>
+            </a:pPr>
+            <a:endParaRPr lang="vi-VN" dirty="0">
+              <a:latin typeface="Arial"/>
+              <a:ea typeface="Arial"/>
+            </a:endParaRPr>
+          </a:p>
+          <a:p>
+            <a:pPr>
+              <a:defRPr sz="1550">
+                <a:solidFill>
+                  <a:srgbClr val="0F172A"/>
+                </a:solidFill>
+                <a:latin typeface="Arial"/>
+                <a:ea typeface="Arial"/>
+              </a:defRPr>
+            </a:pPr>
+            <a:r>
+              <a:rPr lang="en-US" dirty="0" err="1">
+                <a:latin typeface="Arial"/>
+                <a:ea typeface="Arial"/>
+              </a:rPr>
+              <a:t>Với</a:t>
+            </a:r>
+            <a:endParaRPr lang="en-US" dirty="0">
+              <a:latin typeface="Arial"/>
+              <a:ea typeface="Arial"/>
+            </a:endParaRPr>
+          </a:p>
+          <a:p>
+            <a:pPr>
+              <a:defRPr sz="1550">
+                <a:solidFill>
+                  <a:srgbClr val="0F172A"/>
+                </a:solidFill>
+                <a:latin typeface="Arial"/>
+                <a:ea typeface="Arial"/>
+              </a:defRPr>
+            </a:pPr>
+            <a:endParaRPr lang="vi-VN" dirty="0">
+              <a:latin typeface="Arial"/>
+              <a:ea typeface="Arial"/>
+            </a:endParaRPr>
+          </a:p>
+          <a:p>
+            <a:pPr>
+              <a:defRPr sz="1550">
+                <a:solidFill>
+                  <a:srgbClr val="0F172A"/>
+                </a:solidFill>
+                <a:latin typeface="Arial"/>
+                <a:ea typeface="Arial"/>
+              </a:defRPr>
+            </a:pPr>
+            <a:r>
+              <a:rPr lang="vi-VN" dirty="0">
+                <a:latin typeface="Arial"/>
+                <a:ea typeface="Arial"/>
+              </a:rPr>
+              <a:t>   SVM tìm w_c và b_c bằng cách tối ưu:</a:t>
+            </a:r>
+            <a:r>
+              <a:rPr lang="en-US" dirty="0">
+                <a:latin typeface="Arial"/>
+                <a:ea typeface="Arial"/>
+              </a:rPr>
+              <a:t>  </a:t>
+            </a:r>
+          </a:p>
+          <a:p>
+            <a:pPr>
+              <a:defRPr sz="1550">
+                <a:solidFill>
+                  <a:srgbClr val="0F172A"/>
+                </a:solidFill>
+                <a:latin typeface="Arial"/>
+                <a:ea typeface="Arial"/>
+              </a:defRPr>
+            </a:pPr>
+            <a:r>
+              <a:rPr lang="en-US" dirty="0">
+                <a:latin typeface="Arial"/>
+                <a:ea typeface="Arial"/>
+              </a:rPr>
+              <a:t>   </a:t>
+            </a:r>
+            <a:r>
+              <a:rPr lang="en-US" dirty="0" err="1">
+                <a:latin typeface="Arial"/>
+                <a:ea typeface="Arial"/>
+              </a:rPr>
+              <a:t>Với</a:t>
+            </a:r>
+            <a:r>
+              <a:rPr lang="en-US" dirty="0">
+                <a:latin typeface="Arial"/>
+                <a:ea typeface="Arial"/>
+              </a:rPr>
+              <a:t> </a:t>
+            </a:r>
+            <a:r>
+              <a:rPr lang="en-US" dirty="0" err="1">
+                <a:latin typeface="Arial"/>
+                <a:ea typeface="Arial"/>
+              </a:rPr>
+              <a:t>ràng</a:t>
+            </a:r>
+            <a:r>
+              <a:rPr lang="en-US" dirty="0">
+                <a:latin typeface="Arial"/>
+                <a:ea typeface="Arial"/>
+              </a:rPr>
+              <a:t> </a:t>
+            </a:r>
+            <a:r>
+              <a:rPr lang="en-US" dirty="0" err="1">
+                <a:latin typeface="Arial"/>
+                <a:ea typeface="Arial"/>
+              </a:rPr>
+              <a:t>buộc</a:t>
+            </a:r>
+            <a:r>
+              <a:rPr lang="en-US" dirty="0">
+                <a:latin typeface="Arial"/>
+                <a:ea typeface="Arial"/>
+              </a:rPr>
+              <a:t>: </a:t>
+            </a:r>
+          </a:p>
+          <a:p>
+            <a:pPr>
+              <a:defRPr sz="1550">
+                <a:solidFill>
+                  <a:srgbClr val="0F172A"/>
+                </a:solidFill>
+                <a:latin typeface="Arial"/>
+                <a:ea typeface="Arial"/>
+              </a:defRPr>
+            </a:pPr>
+            <a:endParaRPr lang="en-US" dirty="0">
+              <a:latin typeface="Arial"/>
+              <a:ea typeface="Arial"/>
+            </a:endParaRPr>
+          </a:p>
+          <a:p>
+            <a:pPr>
+              <a:defRPr sz="1550">
+                <a:solidFill>
+                  <a:srgbClr val="0F172A"/>
+                </a:solidFill>
+                <a:latin typeface="Arial"/>
+                <a:ea typeface="Arial"/>
+              </a:defRPr>
+            </a:pPr>
+            <a:r>
+              <a:rPr lang="en-US" dirty="0">
+                <a:latin typeface="Arial"/>
+                <a:ea typeface="Arial"/>
+              </a:rPr>
+              <a:t> </a:t>
+            </a:r>
+            <a:r>
+              <a:rPr lang="en-US" dirty="0" err="1">
+                <a:latin typeface="Arial"/>
+                <a:ea typeface="Arial"/>
+              </a:rPr>
+              <a:t>Dự</a:t>
+            </a:r>
+            <a:r>
+              <a:rPr lang="en-US" dirty="0">
+                <a:latin typeface="Arial"/>
+                <a:ea typeface="Arial"/>
+              </a:rPr>
+              <a:t> </a:t>
+            </a:r>
+            <a:r>
+              <a:rPr lang="en-US" dirty="0" err="1">
+                <a:latin typeface="Arial"/>
+                <a:ea typeface="Arial"/>
+              </a:rPr>
+              <a:t>đoán</a:t>
+            </a:r>
+            <a:r>
+              <a:rPr lang="en-US" dirty="0">
+                <a:latin typeface="Arial"/>
+                <a:ea typeface="Arial"/>
+              </a:rPr>
+              <a:t>: </a:t>
+            </a:r>
+          </a:p>
+          <a:p>
+            <a:pPr>
+              <a:defRPr sz="1550">
+                <a:solidFill>
+                  <a:srgbClr val="0F172A"/>
+                </a:solidFill>
+                <a:latin typeface="Arial"/>
+                <a:ea typeface="Arial"/>
+              </a:defRPr>
+            </a:pPr>
+            <a:endParaRPr lang="en-US" dirty="0">
+              <a:latin typeface="Arial"/>
+              <a:ea typeface="Arial"/>
+            </a:endParaRPr>
+          </a:p>
+          <a:p>
+            <a:pPr>
+              <a:defRPr sz="1550">
+                <a:solidFill>
+                  <a:srgbClr val="0F172A"/>
+                </a:solidFill>
+                <a:latin typeface="Arial"/>
+                <a:ea typeface="Arial"/>
+              </a:defRPr>
+            </a:pPr>
+            <a:r>
+              <a:rPr lang="vi-VN" dirty="0">
+                <a:latin typeface="Arial"/>
+                <a:ea typeface="Arial"/>
+              </a:rPr>
+              <a:t>  </a:t>
+            </a:r>
+          </a:p>
+        </p:txBody>
+      </p:sp>
+      <p:pic>
+        <p:nvPicPr>
+          <p:cNvPr id="16" name="Picture 15">
+            <a:extLst>
+              <a:ext uri="{FF2B5EF4-FFF2-40B4-BE49-F238E27FC236}">
+                <a16:creationId xmlns:a16="http://schemas.microsoft.com/office/drawing/2014/main" id="{78C14A94-6F59-4D41-37B1-3AC8D2CF900B}"/>
+              </a:ext>
+            </a:extLst>
+          </p:cNvPr>
+          <p:cNvPicPr>
+            <a:picLocks noChangeAspect="1"/>
+          </p:cNvPicPr>
+          <p:nvPr/>
+        </p:nvPicPr>
+        <p:blipFill>
+          <a:blip r:embed="rId2"/>
+          <a:stretch>
+            <a:fillRect/>
+          </a:stretch>
+        </p:blipFill>
+        <p:spPr>
+          <a:xfrm>
+            <a:off x="2016709" y="2694565"/>
+            <a:ext cx="1905266" cy="590632"/>
+          </a:xfrm>
+          <a:prstGeom prst="rect">
+            <a:avLst/>
+          </a:prstGeom>
+        </p:spPr>
+      </p:pic>
+      <p:pic>
+        <p:nvPicPr>
+          <p:cNvPr id="18" name="Picture 17">
+            <a:extLst>
+              <a:ext uri="{FF2B5EF4-FFF2-40B4-BE49-F238E27FC236}">
+                <a16:creationId xmlns:a16="http://schemas.microsoft.com/office/drawing/2014/main" id="{DFB5A620-8B2D-51CE-9DFE-772C3FA5B6F8}"/>
+              </a:ext>
+            </a:extLst>
+          </p:cNvPr>
+          <p:cNvPicPr>
+            <a:picLocks noChangeAspect="1"/>
+          </p:cNvPicPr>
+          <p:nvPr/>
+        </p:nvPicPr>
+        <p:blipFill>
+          <a:blip r:embed="rId3"/>
+          <a:stretch>
+            <a:fillRect/>
+          </a:stretch>
+        </p:blipFill>
+        <p:spPr>
+          <a:xfrm>
+            <a:off x="1508760" y="3325597"/>
+            <a:ext cx="2695951" cy="247685"/>
+          </a:xfrm>
+          <a:prstGeom prst="rect">
+            <a:avLst/>
+          </a:prstGeom>
+        </p:spPr>
+      </p:pic>
+      <p:pic>
+        <p:nvPicPr>
+          <p:cNvPr id="19" name="Picture 18">
+            <a:extLst>
+              <a:ext uri="{FF2B5EF4-FFF2-40B4-BE49-F238E27FC236}">
+                <a16:creationId xmlns:a16="http://schemas.microsoft.com/office/drawing/2014/main" id="{0DFED1FB-547F-3215-EACC-24A274A404F4}"/>
+              </a:ext>
+            </a:extLst>
+          </p:cNvPr>
+          <p:cNvPicPr>
+            <a:picLocks noChangeAspect="1"/>
+          </p:cNvPicPr>
+          <p:nvPr/>
+        </p:nvPicPr>
+        <p:blipFill>
+          <a:blip r:embed="rId4"/>
+          <a:stretch>
+            <a:fillRect/>
+          </a:stretch>
+        </p:blipFill>
+        <p:spPr>
+          <a:xfrm>
+            <a:off x="4458780" y="3680460"/>
+            <a:ext cx="2133898" cy="590632"/>
+          </a:xfrm>
+          <a:prstGeom prst="rect">
+            <a:avLst/>
+          </a:prstGeom>
+        </p:spPr>
+      </p:pic>
+      <p:pic>
+        <p:nvPicPr>
+          <p:cNvPr id="20" name="Picture 19">
+            <a:extLst>
+              <a:ext uri="{FF2B5EF4-FFF2-40B4-BE49-F238E27FC236}">
+                <a16:creationId xmlns:a16="http://schemas.microsoft.com/office/drawing/2014/main" id="{9474D3CD-CB04-2870-32A3-5577DD23BDC1}"/>
+              </a:ext>
+            </a:extLst>
+          </p:cNvPr>
+          <p:cNvPicPr>
+            <a:picLocks noChangeAspect="1"/>
+          </p:cNvPicPr>
+          <p:nvPr/>
+        </p:nvPicPr>
+        <p:blipFill>
+          <a:blip r:embed="rId5"/>
+          <a:stretch>
+            <a:fillRect/>
+          </a:stretch>
+        </p:blipFill>
+        <p:spPr>
+          <a:xfrm>
+            <a:off x="2416278" y="4094490"/>
+            <a:ext cx="1943371" cy="276264"/>
+          </a:xfrm>
+          <a:prstGeom prst="rect">
+            <a:avLst/>
+          </a:prstGeom>
+        </p:spPr>
+      </p:pic>
+      <p:pic>
+        <p:nvPicPr>
+          <p:cNvPr id="21" name="Picture 20">
+            <a:extLst>
+              <a:ext uri="{FF2B5EF4-FFF2-40B4-BE49-F238E27FC236}">
+                <a16:creationId xmlns:a16="http://schemas.microsoft.com/office/drawing/2014/main" id="{E6B13598-5EDC-DBB1-4433-4D9A7C803121}"/>
+              </a:ext>
+            </a:extLst>
+          </p:cNvPr>
+          <p:cNvPicPr>
+            <a:picLocks noChangeAspect="1"/>
+          </p:cNvPicPr>
+          <p:nvPr/>
+        </p:nvPicPr>
+        <p:blipFill>
+          <a:blip r:embed="rId6"/>
+          <a:stretch>
+            <a:fillRect/>
+          </a:stretch>
+        </p:blipFill>
+        <p:spPr>
+          <a:xfrm>
+            <a:off x="1826474" y="4491330"/>
+            <a:ext cx="1376252" cy="344063"/>
+          </a:xfrm>
+          <a:prstGeom prst="rect">
+            <a:avLst/>
+          </a:prstGeom>
+        </p:spPr>
+      </p:pic>
+    </p:spTree>
+    <p:extLst>
+      <p:ext uri="{BB962C8B-B14F-4D97-AF65-F5344CB8AC3E}">
+        <p14:creationId xmlns:p14="http://schemas.microsoft.com/office/powerpoint/2010/main" val="4284177420"/>
+      </p:ext>
+    </p:extLst>
+  </p:cSld>
+  <p:clrMapOvr>
+    <a:masterClrMapping/>
+  </p:clrMapOvr>
+</p:sld>
+</file>
+
+<file path=ppt/slides/slide13.xml><?xml version="1.0" encoding="utf-8"?>
+<p:sld xmlns:a="http://schemas.openxmlformats.org/drawingml/2006/main" xmlns:r="http://schemas.openxmlformats.org/officeDocument/2006/relationships" xmlns:p="http://schemas.openxmlformats.org/presentationml/2006/main">
+  <p:cSld>
+    <p:bg>
+      <p:bgPr>
+        <a:solidFill>
+          <a:srgbClr val="FFFFFF"/>
+        </a:solidFill>
+        <a:effectLst/>
+      </p:bgPr>
+    </p:bg>
+    <p:spTree>
+      <p:nvGrpSpPr>
+        <p:cNvPr id="1" name=""/>
+        <p:cNvGrpSpPr/>
+        <p:nvPr/>
+      </p:nvGrpSpPr>
+      <p:grpSpPr>
+        <a:xfrm>
+          <a:off x="0" y="0"/>
+          <a:ext cx="0" cy="0"/>
+          <a:chOff x="0" y="0"/>
+          <a:chExt cx="0" cy="0"/>
+        </a:xfrm>
+      </p:grpSpPr>
+      <p:sp>
+        <p:nvSpPr>
+          <p:cNvPr id="2" name="Rectangle 1"/>
+          <p:cNvSpPr/>
+          <p:nvPr/>
+        </p:nvSpPr>
+        <p:spPr>
+          <a:xfrm>
+            <a:off x="0" y="0"/>
+            <a:ext cx="12191695" cy="164592"/>
+          </a:xfrm>
+          <a:prstGeom prst="rect">
+            <a:avLst/>
+          </a:prstGeom>
+          <a:solidFill>
+            <a:srgbClr val="0F766E"/>
+          </a:solidFill>
+          <a:ln>
+            <a:noFill/>
+          </a:ln>
+        </p:spPr>
+        <p:style>
+          <a:lnRef idx="1">
+            <a:schemeClr val="accent1"/>
+          </a:lnRef>
+          <a:fillRef idx="3">
+            <a:schemeClr val="accent1"/>
+          </a:fillRef>
+          <a:effectRef idx="2">
+            <a:schemeClr val="accent1"/>
+          </a:effectRef>
+          <a:fontRef idx="minor">
+            <a:schemeClr val="lt1"/>
+          </a:fontRef>
+        </p:style>
+        <p:txBody>
+          <a:bodyPr rtlCol="0" anchor="ctr"/>
+          <a:lstStyle/>
+          <a:p>
+            <a:pPr algn="ctr"/>
+            <a:endParaRPr/>
+          </a:p>
+        </p:txBody>
+      </p:sp>
+      <p:sp>
+        <p:nvSpPr>
+          <p:cNvPr id="3" name="TextBox 2"/>
+          <p:cNvSpPr txBox="1"/>
+          <p:nvPr/>
+        </p:nvSpPr>
+        <p:spPr>
+          <a:xfrm>
+            <a:off x="502920" y="320040"/>
+            <a:ext cx="9509760" cy="502920"/>
+          </a:xfrm>
+          <a:prstGeom prst="rect">
+            <a:avLst/>
+          </a:prstGeom>
+          <a:noFill/>
+        </p:spPr>
+        <p:txBody>
+          <a:bodyPr wrap="square">
+            <a:normAutofit lnSpcReduction="10000"/>
+          </a:bodyPr>
+          <a:lstStyle/>
+          <a:p>
+            <a:pPr algn="l"/>
+            <a:r>
+              <a:rPr sz="2800" b="1" dirty="0">
+                <a:solidFill>
+                  <a:srgbClr val="142A41"/>
+                </a:solidFill>
+                <a:latin typeface="Arial"/>
+              </a:rPr>
+              <a:t>Experiments</a:t>
+            </a:r>
+          </a:p>
+        </p:txBody>
+      </p:sp>
+      <p:sp>
+        <p:nvSpPr>
+          <p:cNvPr id="4" name="TextBox 3"/>
+          <p:cNvSpPr txBox="1"/>
+          <p:nvPr/>
+        </p:nvSpPr>
+        <p:spPr>
+          <a:xfrm>
+            <a:off x="10972800" y="347472"/>
+            <a:ext cx="685800" cy="274320"/>
+          </a:xfrm>
+          <a:prstGeom prst="rect">
+            <a:avLst/>
+          </a:prstGeom>
+          <a:noFill/>
+        </p:spPr>
+        <p:txBody>
+          <a:bodyPr wrap="square">
+            <a:normAutofit/>
+          </a:bodyPr>
+          <a:lstStyle/>
+          <a:p>
+            <a:pPr algn="r"/>
+            <a:r>
+              <a:rPr sz="1000" b="0">
+                <a:solidFill>
+                  <a:srgbClr val="475569"/>
+                </a:solidFill>
+                <a:latin typeface="Arial"/>
+              </a:rPr>
+              <a:t>9/15</a:t>
+            </a:r>
+          </a:p>
+        </p:txBody>
+      </p:sp>
+      <p:sp>
+        <p:nvSpPr>
+          <p:cNvPr id="5" name="TextBox 4"/>
+          <p:cNvSpPr txBox="1"/>
+          <p:nvPr/>
+        </p:nvSpPr>
+        <p:spPr>
+          <a:xfrm>
+            <a:off x="502920" y="6510528"/>
+            <a:ext cx="2011680" cy="182880"/>
+          </a:xfrm>
+          <a:prstGeom prst="rect">
+            <a:avLst/>
+          </a:prstGeom>
+          <a:noFill/>
+        </p:spPr>
+        <p:txBody>
+          <a:bodyPr wrap="square">
+            <a:normAutofit fontScale="77500" lnSpcReduction="20000"/>
+          </a:bodyPr>
+          <a:lstStyle/>
+          <a:p>
+            <a:pPr algn="l"/>
+            <a:r>
+              <a:rPr sz="900" b="0">
+                <a:solidFill>
+                  <a:srgbClr val="475569"/>
+                </a:solidFill>
+                <a:latin typeface="Arial"/>
+              </a:rPr>
+              <a:t>AIMiniProject</a:t>
+            </a:r>
+          </a:p>
+        </p:txBody>
+      </p:sp>
+      <p:sp>
+        <p:nvSpPr>
+          <p:cNvPr id="6" name="TextBox 5"/>
+          <p:cNvSpPr txBox="1"/>
+          <p:nvPr/>
+        </p:nvSpPr>
+        <p:spPr>
+          <a:xfrm>
+            <a:off x="685800" y="1143000"/>
+            <a:ext cx="4297680" cy="4480560"/>
+          </a:xfrm>
+          <a:prstGeom prst="rect">
+            <a:avLst/>
+          </a:prstGeom>
+          <a:noFill/>
+        </p:spPr>
+        <p:txBody>
+          <a:bodyPr wrap="square">
+            <a:normAutofit/>
+          </a:bodyPr>
+          <a:lstStyle/>
           <a:p>
             <a:pPr>
               <a:defRPr sz="1700">
@@ -4100,7 +5439,7 @@
               <a:rPr dirty="0">
                 <a:latin typeface="Arial"/>
               </a:rPr>
-              <a:t>• Random state: 62.</a:t>
+              <a:t>• Train/test split: 80/20, stratified by label.</a:t>
             </a:r>
           </a:p>
           <a:p>
@@ -4113,231 +5452,243 @@
               </a:defRPr>
             </a:pPr>
             <a:r>
-              <a:rPr dirty="0">
-                <a:latin typeface="Arial"/>
-              </a:rPr>
-              <a:t>• Metric:</a:t>
-            </a:r>
-          </a:p>
-          <a:p>
-            <a:pPr lvl="1">
-              <a:defRPr sz="1500">
-                <a:solidFill>
-                  <a:srgbClr val="475569"/>
+              <a:rPr lang="en-US" dirty="0">
+                <a:latin typeface="Arial"/>
+              </a:rPr>
+              <a:t>• Stratified split </a:t>
+            </a:r>
+            <a:r>
+              <a:rPr lang="en-US" dirty="0" err="1">
+                <a:latin typeface="Arial"/>
+              </a:rPr>
+              <a:t>theo</a:t>
+            </a:r>
+            <a:r>
+              <a:rPr lang="en-US" dirty="0">
+                <a:latin typeface="Arial"/>
+              </a:rPr>
+              <a:t> label.</a:t>
+            </a:r>
+          </a:p>
+          <a:p>
+            <a:pPr>
+              <a:defRPr sz="1700">
+                <a:solidFill>
+                  <a:srgbClr val="0F172A"/>
                 </a:solidFill>
                 <a:latin typeface="Arial"/>
               </a:defRPr>
             </a:pPr>
             <a:r>
-              <a:rPr dirty="0">
-                <a:latin typeface="Arial"/>
-              </a:rPr>
-              <a:t>• Accuracy </a:t>
-            </a:r>
-            <a:r>
-              <a:rPr dirty="0" err="1">
-                <a:latin typeface="Arial"/>
-              </a:rPr>
-              <a:t>đo</a:t>
-            </a:r>
-            <a:r>
-              <a:rPr dirty="0">
-                <a:latin typeface="Arial"/>
-              </a:rPr>
-              <a:t> </a:t>
-            </a:r>
-            <a:r>
-              <a:rPr dirty="0" err="1">
+              <a:rPr lang="en-US" dirty="0">
+                <a:latin typeface="Arial"/>
+              </a:rPr>
+              <a:t>  • </a:t>
+            </a:r>
+            <a:r>
+              <a:rPr lang="en-US" dirty="0" err="1">
+                <a:latin typeface="Arial"/>
+              </a:rPr>
+              <a:t>Giữ</a:t>
+            </a:r>
+            <a:r>
+              <a:rPr lang="en-US" dirty="0">
+                <a:latin typeface="Arial"/>
+              </a:rPr>
+              <a:t> </a:t>
+            </a:r>
+            <a:r>
+              <a:rPr lang="en-US" dirty="0" err="1">
                 <a:latin typeface="Arial"/>
               </a:rPr>
               <a:t>tỉ</a:t>
             </a:r>
             <a:r>
-              <a:rPr dirty="0">
-                <a:latin typeface="Arial"/>
-              </a:rPr>
-              <a:t> </a:t>
-            </a:r>
-            <a:r>
-              <a:rPr dirty="0" err="1">
+              <a:rPr lang="en-US" dirty="0">
+                <a:latin typeface="Arial"/>
+              </a:rPr>
+              <a:t> </a:t>
+            </a:r>
+            <a:r>
+              <a:rPr lang="en-US" dirty="0" err="1">
                 <a:latin typeface="Arial"/>
               </a:rPr>
               <a:t>lệ</a:t>
             </a:r>
             <a:r>
-              <a:rPr dirty="0">
-                <a:latin typeface="Arial"/>
-              </a:rPr>
-              <a:t> </a:t>
-            </a:r>
-            <a:r>
-              <a:rPr dirty="0" err="1">
-                <a:latin typeface="Arial"/>
-              </a:rPr>
-              <a:t>dự</a:t>
-            </a:r>
-            <a:r>
-              <a:rPr dirty="0">
-                <a:latin typeface="Arial"/>
-              </a:rPr>
-              <a:t> </a:t>
-            </a:r>
-            <a:r>
-              <a:rPr dirty="0" err="1">
-                <a:latin typeface="Arial"/>
-              </a:rPr>
-              <a:t>đoán</a:t>
-            </a:r>
-            <a:r>
-              <a:rPr dirty="0">
-                <a:latin typeface="Arial"/>
-              </a:rPr>
-              <a:t> </a:t>
-            </a:r>
-            <a:r>
-              <a:rPr dirty="0" err="1">
-                <a:latin typeface="Arial"/>
-              </a:rPr>
-              <a:t>đúng</a:t>
-            </a:r>
-            <a:r>
-              <a:rPr dirty="0">
-                <a:latin typeface="Arial"/>
-              </a:rPr>
-              <a:t> </a:t>
-            </a:r>
-            <a:r>
-              <a:rPr dirty="0" err="1">
-                <a:latin typeface="Arial"/>
-              </a:rPr>
-              <a:t>tổng</a:t>
-            </a:r>
-            <a:r>
-              <a:rPr dirty="0">
-                <a:latin typeface="Arial"/>
-              </a:rPr>
-              <a:t> </a:t>
-            </a:r>
-            <a:r>
-              <a:rPr dirty="0" err="1">
-                <a:latin typeface="Arial"/>
-              </a:rPr>
-              <a:t>thể</a:t>
-            </a:r>
-            <a:r>
-              <a:rPr dirty="0">
+              <a:rPr lang="en-US" dirty="0">
+                <a:latin typeface="Arial"/>
+              </a:rPr>
+              <a:t> </a:t>
+            </a:r>
+            <a:r>
+              <a:rPr lang="en-US" dirty="0" err="1">
+                <a:latin typeface="Arial"/>
+              </a:rPr>
+              <a:t>các</a:t>
+            </a:r>
+            <a:r>
+              <a:rPr lang="en-US" dirty="0">
+                <a:latin typeface="Arial"/>
+              </a:rPr>
+              <a:t> </a:t>
+            </a:r>
+            <a:r>
+              <a:rPr lang="en-US" dirty="0" err="1">
+                <a:latin typeface="Arial"/>
+              </a:rPr>
+              <a:t>lớp</a:t>
+            </a:r>
+            <a:r>
+              <a:rPr lang="en-US" dirty="0">
+                <a:latin typeface="Arial"/>
+              </a:rPr>
+              <a:t> </a:t>
+            </a:r>
+            <a:r>
+              <a:rPr lang="en-US" dirty="0" err="1">
+                <a:latin typeface="Arial"/>
+              </a:rPr>
+              <a:t>trong</a:t>
+            </a:r>
+            <a:r>
+              <a:rPr lang="en-US" dirty="0">
+                <a:latin typeface="Arial"/>
+              </a:rPr>
+              <a:t> train/test </a:t>
+            </a:r>
+            <a:r>
+              <a:rPr lang="en-US" dirty="0" err="1">
+                <a:latin typeface="Arial"/>
+              </a:rPr>
+              <a:t>gần</a:t>
+            </a:r>
+            <a:r>
+              <a:rPr lang="en-US" dirty="0">
+                <a:latin typeface="Arial"/>
+              </a:rPr>
+              <a:t> </a:t>
+            </a:r>
+            <a:r>
+              <a:rPr lang="en-US" dirty="0" err="1">
+                <a:latin typeface="Arial"/>
+              </a:rPr>
+              <a:t>giống</a:t>
+            </a:r>
+            <a:r>
+              <a:rPr lang="en-US" dirty="0">
+                <a:latin typeface="Arial"/>
+              </a:rPr>
+              <a:t> </a:t>
+            </a:r>
+            <a:r>
+              <a:rPr lang="en-US" dirty="0" err="1">
+                <a:latin typeface="Arial"/>
+              </a:rPr>
+              <a:t>dữ</a:t>
+            </a:r>
+            <a:r>
+              <a:rPr lang="en-US" dirty="0">
+                <a:latin typeface="Arial"/>
+              </a:rPr>
+              <a:t> </a:t>
+            </a:r>
+            <a:r>
+              <a:rPr lang="en-US" dirty="0" err="1">
+                <a:latin typeface="Arial"/>
+              </a:rPr>
+              <a:t>liệu</a:t>
+            </a:r>
+            <a:r>
+              <a:rPr lang="en-US" dirty="0">
+                <a:latin typeface="Arial"/>
+              </a:rPr>
+              <a:t> </a:t>
+            </a:r>
+            <a:r>
+              <a:rPr lang="en-US" dirty="0" err="1">
+                <a:latin typeface="Arial"/>
+              </a:rPr>
+              <a:t>gốc</a:t>
+            </a:r>
+            <a:r>
+              <a:rPr lang="en-US" dirty="0">
                 <a:latin typeface="Arial"/>
               </a:rPr>
               <a:t>.</a:t>
             </a:r>
           </a:p>
           <a:p>
-            <a:pPr lvl="1">
-              <a:defRPr sz="1500">
-                <a:solidFill>
-                  <a:srgbClr val="475569"/>
+            <a:pPr>
+              <a:defRPr sz="1700">
+                <a:solidFill>
+                  <a:srgbClr val="0F172A"/>
                 </a:solidFill>
                 <a:latin typeface="Arial"/>
               </a:defRPr>
             </a:pPr>
             <a:r>
-              <a:rPr dirty="0">
-                <a:latin typeface="Arial"/>
-              </a:rPr>
-              <a:t>• Macro F1 </a:t>
-            </a:r>
-            <a:r>
-              <a:rPr dirty="0" err="1">
-                <a:latin typeface="Arial"/>
-              </a:rPr>
-              <a:t>đo</a:t>
-            </a:r>
-            <a:r>
-              <a:rPr dirty="0">
-                <a:latin typeface="Arial"/>
-              </a:rPr>
-              <a:t> </a:t>
-            </a:r>
-            <a:r>
-              <a:rPr dirty="0" err="1">
-                <a:latin typeface="Arial"/>
-              </a:rPr>
-              <a:t>chất</a:t>
-            </a:r>
-            <a:r>
-              <a:rPr dirty="0">
-                <a:latin typeface="Arial"/>
-              </a:rPr>
-              <a:t> </a:t>
-            </a:r>
-            <a:r>
-              <a:rPr dirty="0" err="1">
-                <a:latin typeface="Arial"/>
-              </a:rPr>
-              <a:t>lượng</a:t>
-            </a:r>
-            <a:r>
-              <a:rPr dirty="0">
-                <a:latin typeface="Arial"/>
-              </a:rPr>
-              <a:t> </a:t>
-            </a:r>
-            <a:r>
-              <a:rPr dirty="0" err="1">
-                <a:latin typeface="Arial"/>
-              </a:rPr>
-              <a:t>trung</a:t>
-            </a:r>
-            <a:r>
-              <a:rPr dirty="0">
-                <a:latin typeface="Arial"/>
-              </a:rPr>
-              <a:t> </a:t>
-            </a:r>
-            <a:r>
-              <a:rPr dirty="0" err="1">
-                <a:latin typeface="Arial"/>
-              </a:rPr>
-              <a:t>bình</a:t>
-            </a:r>
-            <a:r>
-              <a:rPr dirty="0">
-                <a:latin typeface="Arial"/>
-              </a:rPr>
-              <a:t> </a:t>
-            </a:r>
-            <a:r>
-              <a:rPr dirty="0" err="1">
-                <a:latin typeface="Arial"/>
-              </a:rPr>
-              <a:t>trên</a:t>
-            </a:r>
-            <a:r>
-              <a:rPr dirty="0">
-                <a:latin typeface="Arial"/>
-              </a:rPr>
-              <a:t> </a:t>
-            </a:r>
-            <a:r>
-              <a:rPr dirty="0" err="1">
-                <a:latin typeface="Arial"/>
-              </a:rPr>
-              <a:t>các</a:t>
-            </a:r>
-            <a:r>
-              <a:rPr dirty="0">
-                <a:latin typeface="Arial"/>
-              </a:rPr>
-              <a:t> </a:t>
-            </a:r>
-            <a:r>
-              <a:rPr dirty="0" err="1">
-                <a:latin typeface="Arial"/>
-              </a:rPr>
-              <a:t>lớp</a:t>
-            </a:r>
-            <a:r>
-              <a:rPr dirty="0">
+              <a:rPr lang="en-US" dirty="0">
+                <a:latin typeface="Arial"/>
+              </a:rPr>
+              <a:t>  • </a:t>
+            </a:r>
+            <a:r>
+              <a:rPr lang="en-US" dirty="0" err="1">
+                <a:latin typeface="Arial"/>
+              </a:rPr>
+              <a:t>Tránh</a:t>
+            </a:r>
+            <a:r>
+              <a:rPr lang="en-US" dirty="0">
+                <a:latin typeface="Arial"/>
+              </a:rPr>
+              <a:t> </a:t>
+            </a:r>
+            <a:r>
+              <a:rPr lang="en-US" dirty="0" err="1">
+                <a:latin typeface="Arial"/>
+              </a:rPr>
+              <a:t>tập</a:t>
+            </a:r>
+            <a:r>
+              <a:rPr lang="en-US" dirty="0">
+                <a:latin typeface="Arial"/>
+              </a:rPr>
+              <a:t> test </a:t>
+            </a:r>
+            <a:r>
+              <a:rPr lang="en-US" dirty="0" err="1">
+                <a:latin typeface="Arial"/>
+              </a:rPr>
+              <a:t>bị</a:t>
+            </a:r>
+            <a:r>
+              <a:rPr lang="en-US" dirty="0">
+                <a:latin typeface="Arial"/>
+              </a:rPr>
+              <a:t> </a:t>
+            </a:r>
+            <a:r>
+              <a:rPr lang="en-US" dirty="0" err="1">
+                <a:latin typeface="Arial"/>
+              </a:rPr>
+              <a:t>lệch</a:t>
+            </a:r>
+            <a:r>
+              <a:rPr lang="en-US" dirty="0">
+                <a:latin typeface="Arial"/>
+              </a:rPr>
+              <a:t> </a:t>
+            </a:r>
+            <a:r>
+              <a:rPr lang="en-US" dirty="0" err="1">
+                <a:latin typeface="Arial"/>
+              </a:rPr>
+              <a:t>nhãn</a:t>
+            </a:r>
+            <a:r>
+              <a:rPr lang="en-US" dirty="0">
                 <a:latin typeface="Arial"/>
               </a:rPr>
               <a:t>.</a:t>
@@ -4352,28 +5703,465 @@
                 <a:latin typeface="Arial"/>
               </a:defRPr>
             </a:pPr>
-            <a:r>
-              <a:rPr dirty="0">
-                <a:latin typeface="Arial"/>
-              </a:rPr>
-              <a:t>• Sentiment best:</a:t>
-            </a:r>
-          </a:p>
-          <a:p>
-            <a:pPr lvl="1">
-              <a:defRPr sz="1500">
-                <a:solidFill>
-                  <a:srgbClr val="475569"/>
+            <a:endParaRPr lang="en-US" dirty="0">
+              <a:latin typeface="Arial"/>
+            </a:endParaRPr>
+          </a:p>
+          <a:p>
+            <a:pPr>
+              <a:defRPr sz="1700">
+                <a:solidFill>
+                  <a:srgbClr val="0F172A"/>
                 </a:solidFill>
                 <a:latin typeface="Arial"/>
               </a:defRPr>
             </a:pPr>
             <a:r>
-              <a:rPr dirty="0">
-                <a:latin typeface="Arial"/>
-              </a:rPr>
-              <a:t>• TF-IDF unigram + bigram + Linear SVM.</a:t>
-            </a:r>
+              <a:rPr lang="en-US" dirty="0">
+                <a:latin typeface="Arial"/>
+              </a:rPr>
+              <a:t>• Random state: 62.</a:t>
+            </a:r>
+          </a:p>
+          <a:p>
+            <a:pPr>
+              <a:defRPr sz="1700">
+                <a:solidFill>
+                  <a:srgbClr val="0F172A"/>
+                </a:solidFill>
+                <a:latin typeface="Arial"/>
+              </a:defRPr>
+            </a:pPr>
+            <a:r>
+              <a:rPr lang="en-US" dirty="0">
+                <a:latin typeface="Arial"/>
+              </a:rPr>
+              <a:t>  • </a:t>
+            </a:r>
+            <a:r>
+              <a:rPr lang="en-US" dirty="0" err="1">
+                <a:latin typeface="Arial"/>
+              </a:rPr>
+              <a:t>Giúp</a:t>
+            </a:r>
+            <a:r>
+              <a:rPr lang="en-US" dirty="0">
+                <a:latin typeface="Arial"/>
+              </a:rPr>
+              <a:t> </a:t>
+            </a:r>
+            <a:r>
+              <a:rPr lang="en-US" dirty="0" err="1">
+                <a:latin typeface="Arial"/>
+              </a:rPr>
+              <a:t>kết</a:t>
+            </a:r>
+            <a:r>
+              <a:rPr lang="en-US" dirty="0">
+                <a:latin typeface="Arial"/>
+              </a:rPr>
+              <a:t> </a:t>
+            </a:r>
+            <a:r>
+              <a:rPr lang="en-US" dirty="0" err="1">
+                <a:latin typeface="Arial"/>
+              </a:rPr>
+              <a:t>quả</a:t>
+            </a:r>
+            <a:r>
+              <a:rPr lang="en-US" dirty="0">
+                <a:latin typeface="Arial"/>
+              </a:rPr>
+              <a:t> chia </a:t>
+            </a:r>
+            <a:r>
+              <a:rPr lang="en-US" dirty="0" err="1">
+                <a:latin typeface="Arial"/>
+              </a:rPr>
+              <a:t>dữ</a:t>
+            </a:r>
+            <a:r>
+              <a:rPr lang="en-US" dirty="0">
+                <a:latin typeface="Arial"/>
+              </a:rPr>
+              <a:t> </a:t>
+            </a:r>
+            <a:r>
+              <a:rPr lang="en-US" dirty="0" err="1">
+                <a:latin typeface="Arial"/>
+              </a:rPr>
+              <a:t>liệu</a:t>
+            </a:r>
+            <a:r>
+              <a:rPr lang="en-US" dirty="0">
+                <a:latin typeface="Arial"/>
+              </a:rPr>
+              <a:t> </a:t>
+            </a:r>
+            <a:r>
+              <a:rPr lang="en-US" dirty="0" err="1">
+                <a:latin typeface="Arial"/>
+              </a:rPr>
+              <a:t>có</a:t>
+            </a:r>
+            <a:r>
+              <a:rPr lang="en-US" dirty="0">
+                <a:latin typeface="Arial"/>
+              </a:rPr>
+              <a:t> </a:t>
+            </a:r>
+            <a:r>
+              <a:rPr lang="en-US" dirty="0" err="1">
+                <a:latin typeface="Arial"/>
+              </a:rPr>
+              <a:t>thể</a:t>
+            </a:r>
+            <a:r>
+              <a:rPr lang="en-US" dirty="0">
+                <a:latin typeface="Arial"/>
+              </a:rPr>
+              <a:t> </a:t>
+            </a:r>
+            <a:r>
+              <a:rPr lang="en-US" dirty="0" err="1">
+                <a:latin typeface="Arial"/>
+              </a:rPr>
+              <a:t>lặp</a:t>
+            </a:r>
+            <a:r>
+              <a:rPr lang="en-US" dirty="0">
+                <a:latin typeface="Arial"/>
+              </a:rPr>
+              <a:t> </a:t>
+            </a:r>
+            <a:r>
+              <a:rPr lang="en-US" dirty="0" err="1">
+                <a:latin typeface="Arial"/>
+              </a:rPr>
+              <a:t>lại</a:t>
+            </a:r>
+            <a:r>
+              <a:rPr lang="en-US" dirty="0">
+                <a:latin typeface="Arial"/>
+              </a:rPr>
+              <a:t>.</a:t>
+            </a:r>
+          </a:p>
+          <a:p>
+            <a:pPr>
+              <a:defRPr sz="1700">
+                <a:solidFill>
+                  <a:srgbClr val="0F172A"/>
+                </a:solidFill>
+                <a:latin typeface="Arial"/>
+              </a:defRPr>
+            </a:pPr>
+            <a:endParaRPr lang="en-US" dirty="0">
+              <a:latin typeface="Arial"/>
+            </a:endParaRPr>
+          </a:p>
+          <a:p>
+            <a:pPr>
+              <a:defRPr sz="1700">
+                <a:solidFill>
+                  <a:srgbClr val="0F172A"/>
+                </a:solidFill>
+                <a:latin typeface="Arial"/>
+              </a:defRPr>
+            </a:pPr>
+            <a:r>
+              <a:rPr lang="en-US" dirty="0">
+                <a:latin typeface="Arial"/>
+              </a:rPr>
+              <a:t>• Metrics:</a:t>
+            </a:r>
+          </a:p>
+          <a:p>
+            <a:pPr>
+              <a:defRPr sz="1700">
+                <a:solidFill>
+                  <a:srgbClr val="0F172A"/>
+                </a:solidFill>
+                <a:latin typeface="Arial"/>
+              </a:defRPr>
+            </a:pPr>
+            <a:r>
+              <a:rPr lang="en-US" dirty="0">
+                <a:latin typeface="Arial"/>
+              </a:rPr>
+              <a:t>  • Accuracy: </a:t>
+            </a:r>
+            <a:r>
+              <a:rPr lang="en-US" dirty="0" err="1">
+                <a:latin typeface="Arial"/>
+              </a:rPr>
+              <a:t>tỉ</a:t>
+            </a:r>
+            <a:r>
+              <a:rPr lang="en-US" dirty="0">
+                <a:latin typeface="Arial"/>
+              </a:rPr>
+              <a:t> </a:t>
+            </a:r>
+            <a:r>
+              <a:rPr lang="en-US" dirty="0" err="1">
+                <a:latin typeface="Arial"/>
+              </a:rPr>
+              <a:t>lệ</a:t>
+            </a:r>
+            <a:r>
+              <a:rPr lang="en-US" dirty="0">
+                <a:latin typeface="Arial"/>
+              </a:rPr>
+              <a:t> </a:t>
+            </a:r>
+            <a:r>
+              <a:rPr lang="en-US" dirty="0" err="1">
+                <a:latin typeface="Arial"/>
+              </a:rPr>
+              <a:t>dự</a:t>
+            </a:r>
+            <a:r>
+              <a:rPr lang="en-US" dirty="0">
+                <a:latin typeface="Arial"/>
+              </a:rPr>
+              <a:t> </a:t>
+            </a:r>
+            <a:r>
+              <a:rPr lang="en-US" dirty="0" err="1">
+                <a:latin typeface="Arial"/>
+              </a:rPr>
+              <a:t>đoán</a:t>
+            </a:r>
+            <a:r>
+              <a:rPr lang="en-US" dirty="0">
+                <a:latin typeface="Arial"/>
+              </a:rPr>
+              <a:t> </a:t>
+            </a:r>
+            <a:r>
+              <a:rPr lang="en-US" dirty="0" err="1">
+                <a:latin typeface="Arial"/>
+              </a:rPr>
+              <a:t>đúng</a:t>
+            </a:r>
+            <a:r>
+              <a:rPr lang="en-US" dirty="0">
+                <a:latin typeface="Arial"/>
+              </a:rPr>
+              <a:t> </a:t>
+            </a:r>
+            <a:r>
+              <a:rPr lang="en-US" dirty="0" err="1">
+                <a:latin typeface="Arial"/>
+              </a:rPr>
+              <a:t>trên</a:t>
+            </a:r>
+            <a:r>
+              <a:rPr lang="en-US" dirty="0">
+                <a:latin typeface="Arial"/>
+              </a:rPr>
+              <a:t> </a:t>
+            </a:r>
+            <a:r>
+              <a:rPr lang="en-US" dirty="0" err="1">
+                <a:latin typeface="Arial"/>
+              </a:rPr>
+              <a:t>toàn</a:t>
+            </a:r>
+            <a:r>
+              <a:rPr lang="en-US" dirty="0">
+                <a:latin typeface="Arial"/>
+              </a:rPr>
+              <a:t> </a:t>
+            </a:r>
+            <a:r>
+              <a:rPr lang="en-US" dirty="0" err="1">
+                <a:latin typeface="Arial"/>
+              </a:rPr>
+              <a:t>bộ</a:t>
+            </a:r>
+            <a:r>
+              <a:rPr lang="en-US" dirty="0">
+                <a:latin typeface="Arial"/>
+              </a:rPr>
+              <a:t> </a:t>
+            </a:r>
+            <a:r>
+              <a:rPr lang="en-US" dirty="0" err="1">
+                <a:latin typeface="Arial"/>
+              </a:rPr>
+              <a:t>tập</a:t>
+            </a:r>
+            <a:r>
+              <a:rPr lang="en-US" dirty="0">
+                <a:latin typeface="Arial"/>
+              </a:rPr>
+              <a:t> test.</a:t>
+            </a:r>
+          </a:p>
+          <a:p>
+            <a:pPr>
+              <a:defRPr sz="1700">
+                <a:solidFill>
+                  <a:srgbClr val="0F172A"/>
+                </a:solidFill>
+                <a:latin typeface="Arial"/>
+              </a:defRPr>
+            </a:pPr>
+            <a:r>
+              <a:rPr lang="en-US" dirty="0">
+                <a:latin typeface="Arial"/>
+              </a:rPr>
+              <a:t>  • Macro F1: </a:t>
+            </a:r>
+            <a:r>
+              <a:rPr lang="en-US" dirty="0" err="1">
+                <a:latin typeface="Arial"/>
+              </a:rPr>
+              <a:t>trung</a:t>
+            </a:r>
+            <a:r>
+              <a:rPr lang="en-US" dirty="0">
+                <a:latin typeface="Arial"/>
+              </a:rPr>
+              <a:t> </a:t>
+            </a:r>
+            <a:r>
+              <a:rPr lang="en-US" dirty="0" err="1">
+                <a:latin typeface="Arial"/>
+              </a:rPr>
+              <a:t>bình</a:t>
+            </a:r>
+            <a:r>
+              <a:rPr lang="en-US" dirty="0">
+                <a:latin typeface="Arial"/>
+              </a:rPr>
+              <a:t> F1 </a:t>
+            </a:r>
+            <a:r>
+              <a:rPr lang="en-US" dirty="0" err="1">
+                <a:latin typeface="Arial"/>
+              </a:rPr>
+              <a:t>của</a:t>
+            </a:r>
+            <a:r>
+              <a:rPr lang="en-US" dirty="0">
+                <a:latin typeface="Arial"/>
+              </a:rPr>
+              <a:t> </a:t>
+            </a:r>
+            <a:r>
+              <a:rPr lang="en-US" dirty="0" err="1">
+                <a:latin typeface="Arial"/>
+              </a:rPr>
+              <a:t>các</a:t>
+            </a:r>
+            <a:r>
+              <a:rPr lang="en-US" dirty="0">
+                <a:latin typeface="Arial"/>
+              </a:rPr>
+              <a:t> </a:t>
+            </a:r>
+            <a:r>
+              <a:rPr lang="en-US" dirty="0" err="1">
+                <a:latin typeface="Arial"/>
+              </a:rPr>
+              <a:t>lớp</a:t>
+            </a:r>
+            <a:r>
+              <a:rPr lang="en-US" dirty="0">
+                <a:latin typeface="Arial"/>
+              </a:rPr>
+              <a:t>, </a:t>
+            </a:r>
+            <a:r>
+              <a:rPr lang="en-US" dirty="0" err="1">
+                <a:latin typeface="Arial"/>
+              </a:rPr>
+              <a:t>phù</a:t>
+            </a:r>
+            <a:r>
+              <a:rPr lang="en-US" dirty="0">
+                <a:latin typeface="Arial"/>
+              </a:rPr>
+              <a:t> </a:t>
+            </a:r>
+            <a:r>
+              <a:rPr lang="en-US" dirty="0" err="1">
+                <a:latin typeface="Arial"/>
+              </a:rPr>
+              <a:t>hợp</a:t>
+            </a:r>
+            <a:r>
+              <a:rPr lang="en-US" dirty="0">
+                <a:latin typeface="Arial"/>
+              </a:rPr>
+              <a:t> </a:t>
+            </a:r>
+            <a:r>
+              <a:rPr lang="en-US" dirty="0" err="1">
+                <a:latin typeface="Arial"/>
+              </a:rPr>
+              <a:t>khi</a:t>
+            </a:r>
+            <a:r>
+              <a:rPr lang="en-US" dirty="0">
+                <a:latin typeface="Arial"/>
+              </a:rPr>
+              <a:t> </a:t>
+            </a:r>
+            <a:r>
+              <a:rPr lang="en-US" dirty="0" err="1">
+                <a:latin typeface="Arial"/>
+              </a:rPr>
+              <a:t>dữ</a:t>
+            </a:r>
+            <a:r>
+              <a:rPr lang="en-US" dirty="0">
+                <a:latin typeface="Arial"/>
+              </a:rPr>
+              <a:t> </a:t>
+            </a:r>
+            <a:r>
+              <a:rPr lang="en-US" dirty="0" err="1">
+                <a:latin typeface="Arial"/>
+              </a:rPr>
+              <a:t>liệu</a:t>
+            </a:r>
+            <a:r>
+              <a:rPr lang="en-US" dirty="0">
+                <a:latin typeface="Arial"/>
+              </a:rPr>
+              <a:t> </a:t>
+            </a:r>
+            <a:r>
+              <a:rPr lang="en-US" dirty="0" err="1">
+                <a:latin typeface="Arial"/>
+              </a:rPr>
+              <a:t>lệch</a:t>
+            </a:r>
+            <a:r>
+              <a:rPr lang="en-US" dirty="0">
+                <a:latin typeface="Arial"/>
+              </a:rPr>
+              <a:t> </a:t>
+            </a:r>
+            <a:r>
+              <a:rPr lang="en-US" dirty="0" err="1">
+                <a:latin typeface="Arial"/>
+              </a:rPr>
+              <a:t>nhãn</a:t>
+            </a:r>
+            <a:r>
+              <a:rPr lang="en-US" dirty="0">
+                <a:latin typeface="Arial"/>
+              </a:rPr>
+              <a:t>.</a:t>
+            </a:r>
+            <a:endParaRPr dirty="0">
+              <a:latin typeface="Arial"/>
+            </a:endParaRPr>
           </a:p>
         </p:txBody>
       </p:sp>
@@ -4383,7 +6171,13 @@
           <p:cNvGraphicFramePr>
             <a:graphicFrameLocks noGrp="1"/>
           </p:cNvGraphicFramePr>
-          <p:nvPr/>
+          <p:nvPr>
+            <p:extLst>
+              <p:ext uri="{D42A27DB-BD31-4B8C-83A1-F6EECF244321}">
+                <p14:modId xmlns:p14="http://schemas.microsoft.com/office/powerpoint/2010/main" val="547189928"/>
+              </p:ext>
+            </p:extLst>
+          </p:nvPr>
         </p:nvGraphicFramePr>
         <p:xfrm>
           <a:off x="5257800" y="1417320"/>
@@ -4440,6 +6234,7 @@
                         </a:defRPr>
                       </a:pPr>
                       <a:r>
+                        <a:rPr dirty="0"/>
                         <a:t>Task</a:t>
                       </a:r>
                     </a:p>
@@ -4464,7 +6259,12 @@
                         </a:defRPr>
                       </a:pPr>
                       <a:r>
-                        <a:t>Best configuration</a:t>
+                        <a:rPr lang="en-US" dirty="0"/>
+                        <a:t>C</a:t>
+                      </a:r>
+                      <a:r>
+                        <a:rPr dirty="0"/>
+                        <a:t>onfiguration</a:t>
                       </a:r>
                     </a:p>
                   </a:txBody>
@@ -4567,6 +6367,7 @@
                         </a:defRPr>
                       </a:pPr>
                       <a:r>
+                        <a:rPr dirty="0"/>
                         <a:t>TF-IDF unigram + bigram + Linear SVM</a:t>
                       </a:r>
                     </a:p>
@@ -4646,6 +6447,7 @@
                         </a:defRPr>
                       </a:pPr>
                       <a:r>
+                        <a:rPr dirty="0"/>
                         <a:t>Issue ML-only</a:t>
                       </a:r>
                     </a:p>
@@ -4749,6 +6551,7 @@
                         </a:defRPr>
                       </a:pPr>
                       <a:r>
+                        <a:rPr dirty="0"/>
                         <a:t>Issue final</a:t>
                       </a:r>
                     </a:p>
@@ -4876,8 +6679,10 @@
                         </a:defRPr>
                       </a:pPr>
                       <a:r>
-                        <a:t>From-scratch unigram + bigram counts</a:t>
+                        <a:rPr lang="en-US" dirty="0"/>
+                        <a:t>unigram + bigram counts + Naive Bayes</a:t>
                       </a:r>
+                      <a:endParaRPr dirty="0"/>
                     </a:p>
                   </a:txBody>
                   <a:tcPr>
@@ -4924,6 +6729,7 @@
                         </a:defRPr>
                       </a:pPr>
                       <a:r>
+                        <a:rPr dirty="0"/>
                         <a:t>0.6318</a:t>
                       </a:r>
                     </a:p>
@@ -4998,7 +6804,7 @@
         </p:nvSpPr>
         <p:spPr>
           <a:xfrm>
-            <a:off x="5532120" y="4279392"/>
+            <a:off x="5455767" y="4091940"/>
             <a:ext cx="1280160" cy="228600"/>
           </a:xfrm>
           <a:prstGeom prst="rect">
@@ -5033,8 +6839,8 @@
         </p:nvSpPr>
         <p:spPr>
           <a:xfrm>
-            <a:off x="5532120" y="4572000"/>
-            <a:ext cx="5303520" cy="411480"/>
+            <a:off x="5455767" y="4343400"/>
+            <a:ext cx="5837073" cy="868680"/>
           </a:xfrm>
           <a:prstGeom prst="rect">
             <a:avLst/>
@@ -5043,1581 +6849,53 @@
         </p:spPr>
         <p:txBody>
           <a:bodyPr wrap="square">
-            <a:normAutofit fontScale="92500" lnSpcReduction="20000"/>
+            <a:normAutofit fontScale="92500" lnSpcReduction="10000"/>
           </a:bodyPr>
           <a:lstStyle/>
           <a:p>
             <a:pPr algn="l"/>
             <a:r>
-              <a:rPr sz="1400" b="0">
+              <a:rPr lang="vi-VN" sz="1400" b="0" dirty="0">
                 <a:solidFill>
                   <a:srgbClr val="0F172A"/>
                 </a:solidFill>
                 <a:latin typeface="Arial"/>
               </a:rPr>
-              <a:t>Linear SVM is the strongest model for sparse TF-IDF vectors. Safe rules add value only for clear issue patterns.</a:t>
-            </a:r>
-          </a:p>
-        </p:txBody>
-      </p:sp>
-    </p:spTree>
-  </p:cSld>
-  <p:clrMapOvr>
-    <a:masterClrMapping/>
-  </p:clrMapOvr>
-</p:sld>
-</file>
-
-<file path=ppt/slides/slide12.xml><?xml version="1.0" encoding="utf-8"?>
-<p:sld xmlns:a="http://schemas.openxmlformats.org/drawingml/2006/main" xmlns:r="http://schemas.openxmlformats.org/officeDocument/2006/relationships" xmlns:p="http://schemas.openxmlformats.org/presentationml/2006/main">
-  <p:cSld>
-    <p:bg>
-      <p:bgPr>
-        <a:solidFill>
-          <a:srgbClr val="FFFFFF"/>
-        </a:solidFill>
-        <a:effectLst/>
-      </p:bgPr>
-    </p:bg>
-    <p:spTree>
-      <p:nvGrpSpPr>
-        <p:cNvPr id="1" name=""/>
-        <p:cNvGrpSpPr/>
-        <p:nvPr/>
-      </p:nvGrpSpPr>
-      <p:grpSpPr>
-        <a:xfrm>
-          <a:off x="0" y="0"/>
-          <a:ext cx="0" cy="0"/>
-          <a:chOff x="0" y="0"/>
-          <a:chExt cx="0" cy="0"/>
-        </a:xfrm>
-      </p:grpSpPr>
-      <p:sp>
-        <p:nvSpPr>
-          <p:cNvPr id="2" name="Rectangle 1"/>
-          <p:cNvSpPr/>
-          <p:nvPr/>
-        </p:nvSpPr>
-        <p:spPr>
-          <a:xfrm>
-            <a:off x="0" y="0"/>
-            <a:ext cx="12191695" cy="164592"/>
-          </a:xfrm>
-          <a:prstGeom prst="rect">
-            <a:avLst/>
-          </a:prstGeom>
-          <a:solidFill>
-            <a:srgbClr val="0F766E"/>
-          </a:solidFill>
-          <a:ln>
-            <a:noFill/>
-          </a:ln>
-        </p:spPr>
-        <p:style>
-          <a:lnRef idx="1">
-            <a:schemeClr val="accent1"/>
-          </a:lnRef>
-          <a:fillRef idx="3">
-            <a:schemeClr val="accent1"/>
-          </a:fillRef>
-          <a:effectRef idx="2">
-            <a:schemeClr val="accent1"/>
-          </a:effectRef>
-          <a:fontRef idx="minor">
-            <a:schemeClr val="lt1"/>
-          </a:fontRef>
-        </p:style>
-        <p:txBody>
-          <a:bodyPr rtlCol="0" anchor="ctr"/>
-          <a:lstStyle/>
-          <a:p>
-            <a:pPr algn="ctr"/>
-            <a:endParaRPr/>
-          </a:p>
-        </p:txBody>
-      </p:sp>
-      <p:sp>
-        <p:nvSpPr>
-          <p:cNvPr id="3" name="TextBox 2"/>
-          <p:cNvSpPr txBox="1"/>
-          <p:nvPr/>
-        </p:nvSpPr>
-        <p:spPr>
-          <a:xfrm>
-            <a:off x="502920" y="320040"/>
-            <a:ext cx="9509760" cy="502920"/>
-          </a:xfrm>
-          <a:prstGeom prst="rect">
-            <a:avLst/>
-          </a:prstGeom>
-          <a:noFill/>
-        </p:spPr>
-        <p:txBody>
-          <a:bodyPr wrap="square">
-            <a:normAutofit lnSpcReduction="10000"/>
-          </a:bodyPr>
-          <a:lstStyle/>
+              <a:t>TF-IDF + Linear SVM là mô hình chính vì cho kết quả tốt nhất trên dữ liệu review.</a:t>
+            </a:r>
+          </a:p>
           <a:p>
             <a:pPr algn="l"/>
             <a:r>
-              <a:rPr sz="2800" b="1">
-                <a:solidFill>
-                  <a:srgbClr val="142A41"/>
-                </a:solidFill>
-                <a:latin typeface="Arial"/>
-              </a:rPr>
-              <a:t>Sentiment Results</a:t>
-            </a:r>
-          </a:p>
-        </p:txBody>
-      </p:sp>
-      <p:sp>
-        <p:nvSpPr>
-          <p:cNvPr id="4" name="TextBox 3"/>
-          <p:cNvSpPr txBox="1"/>
-          <p:nvPr/>
-        </p:nvSpPr>
-        <p:spPr>
-          <a:xfrm>
-            <a:off x="10972800" y="347472"/>
-            <a:ext cx="685800" cy="274320"/>
-          </a:xfrm>
-          <a:prstGeom prst="rect">
-            <a:avLst/>
-          </a:prstGeom>
-          <a:noFill/>
-        </p:spPr>
-        <p:txBody>
-          <a:bodyPr wrap="square">
-            <a:normAutofit/>
-          </a:bodyPr>
-          <a:lstStyle/>
-          <a:p>
-            <a:pPr algn="r"/>
-            <a:r>
-              <a:rPr sz="1000" b="0">
-                <a:solidFill>
-                  <a:srgbClr val="475569"/>
-                </a:solidFill>
-                <a:latin typeface="Arial"/>
-              </a:rPr>
-              <a:t>10/15</a:t>
-            </a:r>
-          </a:p>
-        </p:txBody>
-      </p:sp>
-      <p:sp>
-        <p:nvSpPr>
-          <p:cNvPr id="5" name="TextBox 4"/>
-          <p:cNvSpPr txBox="1"/>
-          <p:nvPr/>
-        </p:nvSpPr>
-        <p:spPr>
-          <a:xfrm>
-            <a:off x="502920" y="6510528"/>
-            <a:ext cx="2011680" cy="182880"/>
-          </a:xfrm>
-          <a:prstGeom prst="rect">
-            <a:avLst/>
-          </a:prstGeom>
-          <a:noFill/>
-        </p:spPr>
-        <p:txBody>
-          <a:bodyPr wrap="square">
-            <a:normAutofit fontScale="77500" lnSpcReduction="20000"/>
-          </a:bodyPr>
-          <a:lstStyle/>
+              <a:rPr lang="vi-VN" sz="1400" b="0" dirty="0">
+                <a:solidFill>
+                  <a:srgbClr val="0F172A"/>
+                </a:solidFill>
+                <a:latin typeface="Arial"/>
+              </a:rPr>
+              <a:t>Safe issue rules giúp cải thiện issue classification ở các trường hợp rõ ràng</a:t>
+            </a:r>
+          </a:p>
           <a:p>
             <a:pPr algn="l"/>
             <a:r>
-              <a:rPr sz="900" b="0">
-                <a:solidFill>
-                  <a:srgbClr val="475569"/>
-                </a:solidFill>
-                <a:latin typeface="Arial"/>
-              </a:rPr>
-              <a:t>AIMiniProject</a:t>
-            </a:r>
-          </a:p>
-        </p:txBody>
-      </p:sp>
-      <p:sp>
-        <p:nvSpPr>
-          <p:cNvPr id="6" name="Rounded Rectangle 5"/>
-          <p:cNvSpPr/>
-          <p:nvPr/>
-        </p:nvSpPr>
-        <p:spPr>
-          <a:xfrm>
-            <a:off x="685800" y="1143000"/>
-            <a:ext cx="2011680" cy="914400"/>
-          </a:xfrm>
-          <a:prstGeom prst="roundRect">
-            <a:avLst/>
-          </a:prstGeom>
-          <a:solidFill>
-            <a:srgbClr val="F8FAFC"/>
-          </a:solidFill>
-          <a:ln w="12700">
-            <a:solidFill>
-              <a:srgbClr val="CBD5E1"/>
-            </a:solidFill>
-          </a:ln>
-        </p:spPr>
-        <p:style>
-          <a:lnRef idx="1">
-            <a:schemeClr val="accent1"/>
-          </a:lnRef>
-          <a:fillRef idx="3">
-            <a:schemeClr val="accent1"/>
-          </a:fillRef>
-          <a:effectRef idx="2">
-            <a:schemeClr val="accent1"/>
-          </a:effectRef>
-          <a:fontRef idx="minor">
-            <a:schemeClr val="lt1"/>
-          </a:fontRef>
-        </p:style>
-        <p:txBody>
-          <a:bodyPr rtlCol="0" anchor="ctr"/>
-          <a:lstStyle/>
-          <a:p>
-            <a:pPr algn="ctr"/>
-            <a:endParaRPr/>
-          </a:p>
-        </p:txBody>
-      </p:sp>
-      <p:sp>
-        <p:nvSpPr>
-          <p:cNvPr id="7" name="TextBox 6"/>
-          <p:cNvSpPr txBox="1"/>
-          <p:nvPr/>
-        </p:nvSpPr>
-        <p:spPr>
-          <a:xfrm>
-            <a:off x="822960" y="1280160"/>
-            <a:ext cx="1737360" cy="201168"/>
-          </a:xfrm>
-          <a:prstGeom prst="rect">
-            <a:avLst/>
-          </a:prstGeom>
-          <a:noFill/>
-        </p:spPr>
-        <p:txBody>
-          <a:bodyPr wrap="square">
-            <a:normAutofit fontScale="92500" lnSpcReduction="20000"/>
-          </a:bodyPr>
-          <a:lstStyle/>
-          <a:p>
-            <a:pPr algn="l"/>
-            <a:r>
-              <a:rPr sz="1000" b="1">
-                <a:solidFill>
-                  <a:srgbClr val="475569"/>
-                </a:solidFill>
-                <a:latin typeface="Arial"/>
-              </a:rPr>
-              <a:t>Accuracy</a:t>
-            </a:r>
-          </a:p>
-        </p:txBody>
-      </p:sp>
-      <p:sp>
-        <p:nvSpPr>
-          <p:cNvPr id="8" name="TextBox 7"/>
-          <p:cNvSpPr txBox="1"/>
-          <p:nvPr/>
-        </p:nvSpPr>
-        <p:spPr>
-          <a:xfrm>
-            <a:off x="822960" y="1527048"/>
-            <a:ext cx="1737360" cy="347472"/>
-          </a:xfrm>
-          <a:prstGeom prst="rect">
-            <a:avLst/>
-          </a:prstGeom>
-          <a:noFill/>
-        </p:spPr>
-        <p:txBody>
-          <a:bodyPr wrap="square">
-            <a:normAutofit fontScale="85000" lnSpcReduction="20000"/>
-          </a:bodyPr>
-          <a:lstStyle/>
-          <a:p>
-            <a:pPr algn="l"/>
-            <a:r>
-              <a:rPr sz="2400" b="1">
-                <a:solidFill>
-                  <a:srgbClr val="2563EB"/>
-                </a:solidFill>
-                <a:latin typeface="Arial"/>
-              </a:rPr>
-              <a:t>0.8318</a:t>
-            </a:r>
-          </a:p>
-        </p:txBody>
-      </p:sp>
-      <p:sp>
-        <p:nvSpPr>
-          <p:cNvPr id="9" name="Rounded Rectangle 8"/>
-          <p:cNvSpPr/>
-          <p:nvPr/>
-        </p:nvSpPr>
-        <p:spPr>
-          <a:xfrm>
-            <a:off x="2880360" y="1143000"/>
-            <a:ext cx="2011680" cy="914400"/>
-          </a:xfrm>
-          <a:prstGeom prst="roundRect">
-            <a:avLst/>
-          </a:prstGeom>
-          <a:solidFill>
-            <a:srgbClr val="F8FAFC"/>
-          </a:solidFill>
-          <a:ln w="12700">
-            <a:solidFill>
-              <a:srgbClr val="CBD5E1"/>
-            </a:solidFill>
-          </a:ln>
-        </p:spPr>
-        <p:style>
-          <a:lnRef idx="1">
-            <a:schemeClr val="accent1"/>
-          </a:lnRef>
-          <a:fillRef idx="3">
-            <a:schemeClr val="accent1"/>
-          </a:fillRef>
-          <a:effectRef idx="2">
-            <a:schemeClr val="accent1"/>
-          </a:effectRef>
-          <a:fontRef idx="minor">
-            <a:schemeClr val="lt1"/>
-          </a:fontRef>
-        </p:style>
-        <p:txBody>
-          <a:bodyPr rtlCol="0" anchor="ctr"/>
-          <a:lstStyle/>
-          <a:p>
-            <a:pPr algn="ctr"/>
-            <a:endParaRPr/>
-          </a:p>
-        </p:txBody>
-      </p:sp>
-      <p:sp>
-        <p:nvSpPr>
-          <p:cNvPr id="10" name="TextBox 9"/>
-          <p:cNvSpPr txBox="1"/>
-          <p:nvPr/>
-        </p:nvSpPr>
-        <p:spPr>
-          <a:xfrm>
-            <a:off x="3017520" y="1280160"/>
-            <a:ext cx="1737360" cy="201168"/>
-          </a:xfrm>
-          <a:prstGeom prst="rect">
-            <a:avLst/>
-          </a:prstGeom>
-          <a:noFill/>
-        </p:spPr>
-        <p:txBody>
-          <a:bodyPr wrap="square">
-            <a:normAutofit fontScale="92500" lnSpcReduction="20000"/>
-          </a:bodyPr>
-          <a:lstStyle/>
-          <a:p>
-            <a:pPr algn="l"/>
-            <a:r>
-              <a:rPr sz="1000" b="1">
-                <a:solidFill>
-                  <a:srgbClr val="475569"/>
-                </a:solidFill>
-                <a:latin typeface="Arial"/>
-              </a:rPr>
-              <a:t>Macro F1</a:t>
-            </a:r>
-          </a:p>
-        </p:txBody>
-      </p:sp>
-      <p:sp>
-        <p:nvSpPr>
-          <p:cNvPr id="11" name="TextBox 10"/>
-          <p:cNvSpPr txBox="1"/>
-          <p:nvPr/>
-        </p:nvSpPr>
-        <p:spPr>
-          <a:xfrm>
-            <a:off x="3017520" y="1527048"/>
-            <a:ext cx="1737360" cy="347472"/>
-          </a:xfrm>
-          <a:prstGeom prst="rect">
-            <a:avLst/>
-          </a:prstGeom>
-          <a:noFill/>
-        </p:spPr>
-        <p:txBody>
-          <a:bodyPr wrap="square">
-            <a:normAutofit fontScale="85000" lnSpcReduction="20000"/>
-          </a:bodyPr>
-          <a:lstStyle/>
-          <a:p>
-            <a:pPr algn="l"/>
-            <a:r>
-              <a:rPr sz="2400" b="1">
-                <a:solidFill>
-                  <a:srgbClr val="0F766E"/>
-                </a:solidFill>
-                <a:latin typeface="Arial"/>
-              </a:rPr>
-              <a:t>0.7993</a:t>
-            </a:r>
-          </a:p>
-        </p:txBody>
-      </p:sp>
-      <p:sp>
-        <p:nvSpPr>
-          <p:cNvPr id="12" name="Rounded Rectangle 11"/>
-          <p:cNvSpPr/>
-          <p:nvPr/>
-        </p:nvSpPr>
-        <p:spPr>
-          <a:xfrm>
-            <a:off x="5074920" y="1143000"/>
-            <a:ext cx="2011680" cy="914400"/>
-          </a:xfrm>
-          <a:prstGeom prst="roundRect">
-            <a:avLst/>
-          </a:prstGeom>
-          <a:solidFill>
-            <a:srgbClr val="F8FAFC"/>
-          </a:solidFill>
-          <a:ln w="12700">
-            <a:solidFill>
-              <a:srgbClr val="CBD5E1"/>
-            </a:solidFill>
-          </a:ln>
-        </p:spPr>
-        <p:style>
-          <a:lnRef idx="1">
-            <a:schemeClr val="accent1"/>
-          </a:lnRef>
-          <a:fillRef idx="3">
-            <a:schemeClr val="accent1"/>
-          </a:fillRef>
-          <a:effectRef idx="2">
-            <a:schemeClr val="accent1"/>
-          </a:effectRef>
-          <a:fontRef idx="minor">
-            <a:schemeClr val="lt1"/>
-          </a:fontRef>
-        </p:style>
-        <p:txBody>
-          <a:bodyPr rtlCol="0" anchor="ctr"/>
-          <a:lstStyle/>
-          <a:p>
-            <a:pPr algn="ctr"/>
-            <a:endParaRPr/>
-          </a:p>
-        </p:txBody>
-      </p:sp>
-      <p:sp>
-        <p:nvSpPr>
-          <p:cNvPr id="13" name="TextBox 12"/>
-          <p:cNvSpPr txBox="1"/>
-          <p:nvPr/>
-        </p:nvSpPr>
-        <p:spPr>
-          <a:xfrm>
-            <a:off x="5212080" y="1280160"/>
-            <a:ext cx="1737360" cy="201168"/>
-          </a:xfrm>
-          <a:prstGeom prst="rect">
-            <a:avLst/>
-          </a:prstGeom>
-          <a:noFill/>
-        </p:spPr>
-        <p:txBody>
-          <a:bodyPr wrap="square">
-            <a:normAutofit fontScale="92500" lnSpcReduction="20000"/>
-          </a:bodyPr>
-          <a:lstStyle/>
-          <a:p>
-            <a:pPr algn="l"/>
-            <a:r>
-              <a:rPr sz="1000" b="1">
-                <a:solidFill>
-                  <a:srgbClr val="475569"/>
-                </a:solidFill>
-                <a:latin typeface="Arial"/>
-              </a:rPr>
-              <a:t>Best model</a:t>
-            </a:r>
-          </a:p>
-        </p:txBody>
-      </p:sp>
-      <p:sp>
-        <p:nvSpPr>
-          <p:cNvPr id="14" name="TextBox 13"/>
-          <p:cNvSpPr txBox="1"/>
-          <p:nvPr/>
-        </p:nvSpPr>
-        <p:spPr>
-          <a:xfrm>
-            <a:off x="5212080" y="1527048"/>
-            <a:ext cx="1737360" cy="347472"/>
-          </a:xfrm>
-          <a:prstGeom prst="rect">
-            <a:avLst/>
-          </a:prstGeom>
-          <a:noFill/>
-        </p:spPr>
-        <p:txBody>
-          <a:bodyPr wrap="square">
-            <a:normAutofit fontScale="85000" lnSpcReduction="20000"/>
-          </a:bodyPr>
-          <a:lstStyle/>
-          <a:p>
-            <a:pPr algn="l"/>
-            <a:r>
-              <a:rPr sz="2400" b="1">
-                <a:solidFill>
-                  <a:srgbClr val="D97706"/>
-                </a:solidFill>
-                <a:latin typeface="Arial"/>
-              </a:rPr>
-              <a:t>SVM</a:t>
-            </a:r>
-          </a:p>
-        </p:txBody>
-      </p:sp>
-      <p:sp>
-        <p:nvSpPr>
-          <p:cNvPr id="15" name="TextBox 14"/>
-          <p:cNvSpPr txBox="1"/>
-          <p:nvPr/>
-        </p:nvSpPr>
-        <p:spPr>
-          <a:xfrm>
-            <a:off x="777240" y="2423160"/>
-            <a:ext cx="4480560" cy="3291840"/>
-          </a:xfrm>
-          <a:prstGeom prst="rect">
-            <a:avLst/>
-          </a:prstGeom>
-          <a:noFill/>
-        </p:spPr>
-        <p:txBody>
-          <a:bodyPr wrap="square">
-            <a:normAutofit/>
-          </a:bodyPr>
-          <a:lstStyle/>
-          <a:p>
-            <a:pPr>
-              <a:defRPr sz="1700">
+              <a:rPr lang="vi-VN" sz="1400" b="0" dirty="0">
                 <a:solidFill>
                   <a:srgbClr val="0F172A"/>
                 </a:solidFill>
                 <a:latin typeface="Arial"/>
-              </a:defRPr>
-            </a:pPr>
-            <a:r>
-              <a:rPr>
-                <a:latin typeface="Arial"/>
-              </a:rPr>
-              <a:t>• F1 theo lớp:</a:t>
-            </a:r>
-          </a:p>
-          <a:p>
-            <a:pPr lvl="1">
-              <a:defRPr sz="1500">
-                <a:solidFill>
-                  <a:srgbClr val="475569"/>
-                </a:solidFill>
-                <a:latin typeface="Arial"/>
-              </a:defRPr>
-            </a:pPr>
-            <a:r>
-              <a:rPr>
-                <a:latin typeface="Arial"/>
-              </a:rPr>
-              <a:t>• negative: 0.89</a:t>
-            </a:r>
-          </a:p>
-          <a:p>
-            <a:pPr lvl="1">
-              <a:defRPr sz="1500">
-                <a:solidFill>
-                  <a:srgbClr val="475569"/>
-                </a:solidFill>
-                <a:latin typeface="Arial"/>
-              </a:defRPr>
-            </a:pPr>
-            <a:r>
-              <a:rPr>
-                <a:latin typeface="Arial"/>
-              </a:rPr>
-              <a:t>• neutral: 0.66</a:t>
-            </a:r>
-          </a:p>
-          <a:p>
-            <a:pPr lvl="1">
-              <a:defRPr sz="1500">
-                <a:solidFill>
-                  <a:srgbClr val="475569"/>
-                </a:solidFill>
-                <a:latin typeface="Arial"/>
-              </a:defRPr>
-            </a:pPr>
-            <a:r>
-              <a:rPr>
-                <a:latin typeface="Arial"/>
-              </a:rPr>
-              <a:t>• positive: 0.85</a:t>
-            </a:r>
-          </a:p>
-          <a:p>
-            <a:pPr>
-              <a:defRPr sz="1700">
-                <a:solidFill>
-                  <a:srgbClr val="0F172A"/>
-                </a:solidFill>
-                <a:latin typeface="Arial"/>
-              </a:defRPr>
-            </a:pPr>
-            <a:r>
-              <a:rPr>
-                <a:latin typeface="Arial"/>
-              </a:rPr>
-              <a:t>• Lớp khó nhất là neutral vì nhiều bình luận nằm giữa khen nhẹ, chê nhẹ hoặc chỉ nhận xu.</a:t>
-            </a:r>
-          </a:p>
-        </p:txBody>
-      </p:sp>
-      <p:pic>
-        <p:nvPicPr>
-          <p:cNvPr id="16" name="Picture 15" descr="confusion_matrix_sentiment.png"/>
-          <p:cNvPicPr>
-            <a:picLocks noChangeAspect="1"/>
-          </p:cNvPicPr>
-          <p:nvPr/>
-        </p:nvPicPr>
-        <p:blipFill>
-          <a:blip r:embed="rId2"/>
-          <a:stretch>
-            <a:fillRect/>
-          </a:stretch>
-        </p:blipFill>
-        <p:spPr>
-          <a:xfrm>
-            <a:off x="6400800" y="2197018"/>
-            <a:ext cx="5257800" cy="3755571"/>
-          </a:xfrm>
-          <a:prstGeom prst="rect">
-            <a:avLst/>
-          </a:prstGeom>
-        </p:spPr>
-      </p:pic>
-    </p:spTree>
-  </p:cSld>
-  <p:clrMapOvr>
-    <a:masterClrMapping/>
-  </p:clrMapOvr>
-</p:sld>
-</file>
-
-<file path=ppt/slides/slide13.xml><?xml version="1.0" encoding="utf-8"?>
-<p:sld xmlns:a="http://schemas.openxmlformats.org/drawingml/2006/main" xmlns:r="http://schemas.openxmlformats.org/officeDocument/2006/relationships" xmlns:p="http://schemas.openxmlformats.org/presentationml/2006/main">
-  <p:cSld>
-    <p:bg>
-      <p:bgPr>
-        <a:solidFill>
-          <a:srgbClr val="FFFFFF"/>
-        </a:solidFill>
-        <a:effectLst/>
-      </p:bgPr>
-    </p:bg>
-    <p:spTree>
-      <p:nvGrpSpPr>
-        <p:cNvPr id="1" name=""/>
-        <p:cNvGrpSpPr/>
-        <p:nvPr/>
-      </p:nvGrpSpPr>
-      <p:grpSpPr>
-        <a:xfrm>
-          <a:off x="0" y="0"/>
-          <a:ext cx="0" cy="0"/>
-          <a:chOff x="0" y="0"/>
-          <a:chExt cx="0" cy="0"/>
-        </a:xfrm>
-      </p:grpSpPr>
-      <p:sp>
-        <p:nvSpPr>
-          <p:cNvPr id="2" name="Rectangle 1"/>
-          <p:cNvSpPr/>
-          <p:nvPr/>
-        </p:nvSpPr>
-        <p:spPr>
-          <a:xfrm>
-            <a:off x="0" y="0"/>
-            <a:ext cx="12191695" cy="164592"/>
-          </a:xfrm>
-          <a:prstGeom prst="rect">
-            <a:avLst/>
-          </a:prstGeom>
-          <a:solidFill>
-            <a:srgbClr val="0F766E"/>
-          </a:solidFill>
-          <a:ln>
-            <a:noFill/>
-          </a:ln>
-        </p:spPr>
-        <p:style>
-          <a:lnRef idx="1">
-            <a:schemeClr val="accent1"/>
-          </a:lnRef>
-          <a:fillRef idx="3">
-            <a:schemeClr val="accent1"/>
-          </a:fillRef>
-          <a:effectRef idx="2">
-            <a:schemeClr val="accent1"/>
-          </a:effectRef>
-          <a:fontRef idx="minor">
-            <a:schemeClr val="lt1"/>
-          </a:fontRef>
-        </p:style>
-        <p:txBody>
-          <a:bodyPr rtlCol="0" anchor="ctr"/>
-          <a:lstStyle/>
-          <a:p>
-            <a:pPr algn="ctr"/>
-            <a:endParaRPr/>
-          </a:p>
-        </p:txBody>
-      </p:sp>
-      <p:sp>
-        <p:nvSpPr>
-          <p:cNvPr id="3" name="TextBox 2"/>
-          <p:cNvSpPr txBox="1"/>
-          <p:nvPr/>
-        </p:nvSpPr>
-        <p:spPr>
-          <a:xfrm>
-            <a:off x="502920" y="320040"/>
-            <a:ext cx="9509760" cy="502920"/>
-          </a:xfrm>
-          <a:prstGeom prst="rect">
-            <a:avLst/>
-          </a:prstGeom>
-          <a:noFill/>
-        </p:spPr>
-        <p:txBody>
-          <a:bodyPr wrap="square">
-            <a:normAutofit lnSpcReduction="10000"/>
-          </a:bodyPr>
-          <a:lstStyle/>
-          <a:p>
-            <a:pPr algn="l"/>
-            <a:r>
-              <a:rPr sz="2800" b="1">
-                <a:solidFill>
-                  <a:srgbClr val="142A41"/>
-                </a:solidFill>
-                <a:latin typeface="Arial"/>
-              </a:rPr>
-              <a:t>Issue Results</a:t>
-            </a:r>
-          </a:p>
-        </p:txBody>
-      </p:sp>
-      <p:sp>
-        <p:nvSpPr>
-          <p:cNvPr id="4" name="TextBox 3"/>
-          <p:cNvSpPr txBox="1"/>
-          <p:nvPr/>
-        </p:nvSpPr>
-        <p:spPr>
-          <a:xfrm>
-            <a:off x="10972800" y="347472"/>
-            <a:ext cx="685800" cy="274320"/>
-          </a:xfrm>
-          <a:prstGeom prst="rect">
-            <a:avLst/>
-          </a:prstGeom>
-          <a:noFill/>
-        </p:spPr>
-        <p:txBody>
-          <a:bodyPr wrap="square">
-            <a:normAutofit/>
-          </a:bodyPr>
-          <a:lstStyle/>
-          <a:p>
-            <a:pPr algn="r"/>
-            <a:r>
-              <a:rPr sz="1000" b="0">
-                <a:solidFill>
-                  <a:srgbClr val="475569"/>
-                </a:solidFill>
-                <a:latin typeface="Arial"/>
-              </a:rPr>
-              <a:t>11/15</a:t>
-            </a:r>
-          </a:p>
-        </p:txBody>
-      </p:sp>
-      <p:sp>
-        <p:nvSpPr>
-          <p:cNvPr id="5" name="TextBox 4"/>
-          <p:cNvSpPr txBox="1"/>
-          <p:nvPr/>
-        </p:nvSpPr>
-        <p:spPr>
-          <a:xfrm>
-            <a:off x="502920" y="6510528"/>
-            <a:ext cx="2011680" cy="182880"/>
-          </a:xfrm>
-          <a:prstGeom prst="rect">
-            <a:avLst/>
-          </a:prstGeom>
-          <a:noFill/>
-        </p:spPr>
-        <p:txBody>
-          <a:bodyPr wrap="square">
-            <a:normAutofit fontScale="77500" lnSpcReduction="20000"/>
-          </a:bodyPr>
-          <a:lstStyle/>
-          <a:p>
-            <a:pPr algn="l"/>
-            <a:r>
-              <a:rPr sz="900" b="0">
-                <a:solidFill>
-                  <a:srgbClr val="475569"/>
-                </a:solidFill>
-                <a:latin typeface="Arial"/>
-              </a:rPr>
-              <a:t>AIMiniProject</a:t>
-            </a:r>
-          </a:p>
-        </p:txBody>
-      </p:sp>
-      <p:sp>
-        <p:nvSpPr>
-          <p:cNvPr id="6" name="Rounded Rectangle 5"/>
-          <p:cNvSpPr/>
-          <p:nvPr/>
-        </p:nvSpPr>
-        <p:spPr>
-          <a:xfrm>
-            <a:off x="685800" y="1143000"/>
-            <a:ext cx="2011680" cy="914400"/>
-          </a:xfrm>
-          <a:prstGeom prst="roundRect">
-            <a:avLst/>
-          </a:prstGeom>
-          <a:solidFill>
-            <a:srgbClr val="F8FAFC"/>
-          </a:solidFill>
-          <a:ln w="12700">
-            <a:solidFill>
-              <a:srgbClr val="CBD5E1"/>
-            </a:solidFill>
-          </a:ln>
-        </p:spPr>
-        <p:style>
-          <a:lnRef idx="1">
-            <a:schemeClr val="accent1"/>
-          </a:lnRef>
-          <a:fillRef idx="3">
-            <a:schemeClr val="accent1"/>
-          </a:fillRef>
-          <a:effectRef idx="2">
-            <a:schemeClr val="accent1"/>
-          </a:effectRef>
-          <a:fontRef idx="minor">
-            <a:schemeClr val="lt1"/>
-          </a:fontRef>
-        </p:style>
-        <p:txBody>
-          <a:bodyPr rtlCol="0" anchor="ctr"/>
-          <a:lstStyle/>
-          <a:p>
-            <a:pPr algn="ctr"/>
-            <a:endParaRPr/>
-          </a:p>
-        </p:txBody>
-      </p:sp>
-      <p:sp>
-        <p:nvSpPr>
-          <p:cNvPr id="7" name="TextBox 6"/>
-          <p:cNvSpPr txBox="1"/>
-          <p:nvPr/>
-        </p:nvSpPr>
-        <p:spPr>
-          <a:xfrm>
-            <a:off x="822960" y="1280160"/>
-            <a:ext cx="1737360" cy="201168"/>
-          </a:xfrm>
-          <a:prstGeom prst="rect">
-            <a:avLst/>
-          </a:prstGeom>
-          <a:noFill/>
-        </p:spPr>
-        <p:txBody>
-          <a:bodyPr wrap="square">
-            <a:normAutofit fontScale="92500" lnSpcReduction="20000"/>
-          </a:bodyPr>
-          <a:lstStyle/>
-          <a:p>
-            <a:pPr algn="l"/>
-            <a:r>
-              <a:rPr sz="1000" b="1">
-                <a:solidFill>
-                  <a:srgbClr val="475569"/>
-                </a:solidFill>
-                <a:latin typeface="Arial"/>
-              </a:rPr>
-              <a:t>Accuracy</a:t>
-            </a:r>
-          </a:p>
-        </p:txBody>
-      </p:sp>
-      <p:sp>
-        <p:nvSpPr>
-          <p:cNvPr id="8" name="TextBox 7"/>
-          <p:cNvSpPr txBox="1"/>
-          <p:nvPr/>
-        </p:nvSpPr>
-        <p:spPr>
-          <a:xfrm>
-            <a:off x="822960" y="1527048"/>
-            <a:ext cx="1737360" cy="347472"/>
-          </a:xfrm>
-          <a:prstGeom prst="rect">
-            <a:avLst/>
-          </a:prstGeom>
-          <a:noFill/>
-        </p:spPr>
-        <p:txBody>
-          <a:bodyPr wrap="square">
-            <a:normAutofit fontScale="85000" lnSpcReduction="20000"/>
-          </a:bodyPr>
-          <a:lstStyle/>
-          <a:p>
-            <a:pPr algn="l"/>
-            <a:r>
-              <a:rPr sz="2400" b="1">
-                <a:solidFill>
-                  <a:srgbClr val="2563EB"/>
-                </a:solidFill>
-                <a:latin typeface="Arial"/>
-              </a:rPr>
-              <a:t>0.7849</a:t>
-            </a:r>
-          </a:p>
-        </p:txBody>
-      </p:sp>
-      <p:sp>
-        <p:nvSpPr>
-          <p:cNvPr id="9" name="Rounded Rectangle 8"/>
-          <p:cNvSpPr/>
-          <p:nvPr/>
-        </p:nvSpPr>
-        <p:spPr>
-          <a:xfrm>
-            <a:off x="2880360" y="1143000"/>
-            <a:ext cx="2011680" cy="914400"/>
-          </a:xfrm>
-          <a:prstGeom prst="roundRect">
-            <a:avLst/>
-          </a:prstGeom>
-          <a:solidFill>
-            <a:srgbClr val="F8FAFC"/>
-          </a:solidFill>
-          <a:ln w="12700">
-            <a:solidFill>
-              <a:srgbClr val="CBD5E1"/>
-            </a:solidFill>
-          </a:ln>
-        </p:spPr>
-        <p:style>
-          <a:lnRef idx="1">
-            <a:schemeClr val="accent1"/>
-          </a:lnRef>
-          <a:fillRef idx="3">
-            <a:schemeClr val="accent1"/>
-          </a:fillRef>
-          <a:effectRef idx="2">
-            <a:schemeClr val="accent1"/>
-          </a:effectRef>
-          <a:fontRef idx="minor">
-            <a:schemeClr val="lt1"/>
-          </a:fontRef>
-        </p:style>
-        <p:txBody>
-          <a:bodyPr rtlCol="0" anchor="ctr"/>
-          <a:lstStyle/>
-          <a:p>
-            <a:pPr algn="ctr"/>
-            <a:endParaRPr/>
-          </a:p>
-        </p:txBody>
-      </p:sp>
-      <p:sp>
-        <p:nvSpPr>
-          <p:cNvPr id="10" name="TextBox 9"/>
-          <p:cNvSpPr txBox="1"/>
-          <p:nvPr/>
-        </p:nvSpPr>
-        <p:spPr>
-          <a:xfrm>
-            <a:off x="3017520" y="1280160"/>
-            <a:ext cx="1737360" cy="201168"/>
-          </a:xfrm>
-          <a:prstGeom prst="rect">
-            <a:avLst/>
-          </a:prstGeom>
-          <a:noFill/>
-        </p:spPr>
-        <p:txBody>
-          <a:bodyPr wrap="square">
-            <a:normAutofit fontScale="92500" lnSpcReduction="20000"/>
-          </a:bodyPr>
-          <a:lstStyle/>
-          <a:p>
-            <a:pPr algn="l"/>
-            <a:r>
-              <a:rPr sz="1000" b="1">
-                <a:solidFill>
-                  <a:srgbClr val="475569"/>
-                </a:solidFill>
-                <a:latin typeface="Arial"/>
-              </a:rPr>
-              <a:t>Macro F1</a:t>
-            </a:r>
-          </a:p>
-        </p:txBody>
-      </p:sp>
-      <p:sp>
-        <p:nvSpPr>
-          <p:cNvPr id="11" name="TextBox 10"/>
-          <p:cNvSpPr txBox="1"/>
-          <p:nvPr/>
-        </p:nvSpPr>
-        <p:spPr>
-          <a:xfrm>
-            <a:off x="3017520" y="1527048"/>
-            <a:ext cx="1737360" cy="347472"/>
-          </a:xfrm>
-          <a:prstGeom prst="rect">
-            <a:avLst/>
-          </a:prstGeom>
-          <a:noFill/>
-        </p:spPr>
-        <p:txBody>
-          <a:bodyPr wrap="square">
-            <a:normAutofit fontScale="85000" lnSpcReduction="20000"/>
-          </a:bodyPr>
-          <a:lstStyle/>
-          <a:p>
-            <a:pPr algn="l"/>
-            <a:r>
-              <a:rPr sz="2400" b="1">
-                <a:solidFill>
-                  <a:srgbClr val="0F766E"/>
-                </a:solidFill>
-                <a:latin typeface="Arial"/>
-              </a:rPr>
-              <a:t>0.7323</a:t>
-            </a:r>
-          </a:p>
-        </p:txBody>
-      </p:sp>
-      <p:sp>
-        <p:nvSpPr>
-          <p:cNvPr id="12" name="Rounded Rectangle 11"/>
-          <p:cNvSpPr/>
-          <p:nvPr/>
-        </p:nvSpPr>
-        <p:spPr>
-          <a:xfrm>
-            <a:off x="5074920" y="1143000"/>
-            <a:ext cx="2011680" cy="914400"/>
-          </a:xfrm>
-          <a:prstGeom prst="roundRect">
-            <a:avLst/>
-          </a:prstGeom>
-          <a:solidFill>
-            <a:srgbClr val="F8FAFC"/>
-          </a:solidFill>
-          <a:ln w="12700">
-            <a:solidFill>
-              <a:srgbClr val="CBD5E1"/>
-            </a:solidFill>
-          </a:ln>
-        </p:spPr>
-        <p:style>
-          <a:lnRef idx="1">
-            <a:schemeClr val="accent1"/>
-          </a:lnRef>
-          <a:fillRef idx="3">
-            <a:schemeClr val="accent1"/>
-          </a:fillRef>
-          <a:effectRef idx="2">
-            <a:schemeClr val="accent1"/>
-          </a:effectRef>
-          <a:fontRef idx="minor">
-            <a:schemeClr val="lt1"/>
-          </a:fontRef>
-        </p:style>
-        <p:txBody>
-          <a:bodyPr rtlCol="0" anchor="ctr"/>
-          <a:lstStyle/>
-          <a:p>
-            <a:pPr algn="ctr"/>
-            <a:endParaRPr/>
-          </a:p>
-        </p:txBody>
-      </p:sp>
-      <p:sp>
-        <p:nvSpPr>
-          <p:cNvPr id="13" name="TextBox 12"/>
-          <p:cNvSpPr txBox="1"/>
-          <p:nvPr/>
-        </p:nvSpPr>
-        <p:spPr>
-          <a:xfrm>
-            <a:off x="5212080" y="1280160"/>
-            <a:ext cx="1737360" cy="201168"/>
-          </a:xfrm>
-          <a:prstGeom prst="rect">
-            <a:avLst/>
-          </a:prstGeom>
-          <a:noFill/>
-        </p:spPr>
-        <p:txBody>
-          <a:bodyPr wrap="square">
-            <a:normAutofit fontScale="92500" lnSpcReduction="20000"/>
-          </a:bodyPr>
-          <a:lstStyle/>
-          <a:p>
-            <a:pPr algn="l"/>
-            <a:r>
-              <a:rPr sz="1000" b="1">
-                <a:solidFill>
-                  <a:srgbClr val="475569"/>
-                </a:solidFill>
-                <a:latin typeface="Arial"/>
-              </a:rPr>
-              <a:t>Issue labels</a:t>
-            </a:r>
-          </a:p>
-        </p:txBody>
-      </p:sp>
-      <p:sp>
-        <p:nvSpPr>
-          <p:cNvPr id="14" name="TextBox 13"/>
-          <p:cNvSpPr txBox="1"/>
-          <p:nvPr/>
-        </p:nvSpPr>
-        <p:spPr>
-          <a:xfrm>
-            <a:off x="5212080" y="1527048"/>
-            <a:ext cx="1737360" cy="347472"/>
-          </a:xfrm>
-          <a:prstGeom prst="rect">
-            <a:avLst/>
-          </a:prstGeom>
-          <a:noFill/>
-        </p:spPr>
-        <p:txBody>
-          <a:bodyPr wrap="square">
-            <a:normAutofit fontScale="85000" lnSpcReduction="20000"/>
-          </a:bodyPr>
-          <a:lstStyle/>
-          <a:p>
-            <a:pPr algn="l"/>
-            <a:r>
-              <a:rPr sz="2400" b="1">
-                <a:solidFill>
-                  <a:srgbClr val="D97706"/>
-                </a:solidFill>
-                <a:latin typeface="Arial"/>
-              </a:rPr>
-              <a:t>9</a:t>
-            </a:r>
-          </a:p>
-        </p:txBody>
-      </p:sp>
-      <p:sp>
-        <p:nvSpPr>
-          <p:cNvPr id="15" name="TextBox 14"/>
-          <p:cNvSpPr txBox="1"/>
-          <p:nvPr/>
-        </p:nvSpPr>
-        <p:spPr>
-          <a:xfrm>
-            <a:off x="777240" y="2423160"/>
-            <a:ext cx="4480560" cy="3291840"/>
-          </a:xfrm>
-          <a:prstGeom prst="rect">
-            <a:avLst/>
-          </a:prstGeom>
-          <a:noFill/>
-        </p:spPr>
-        <p:txBody>
-          <a:bodyPr wrap="square">
-            <a:normAutofit/>
-          </a:bodyPr>
-          <a:lstStyle/>
-          <a:p>
-            <a:pPr>
-              <a:defRPr sz="1600">
-                <a:solidFill>
-                  <a:srgbClr val="0F172A"/>
-                </a:solidFill>
-                <a:latin typeface="Arial"/>
-              </a:defRPr>
-            </a:pPr>
-            <a:r>
-              <a:rPr dirty="0">
-                <a:latin typeface="Arial"/>
-              </a:rPr>
-              <a:t>• </a:t>
-            </a:r>
-            <a:r>
-              <a:rPr dirty="0" err="1">
-                <a:latin typeface="Arial"/>
-              </a:rPr>
-              <a:t>Nhóm</a:t>
-            </a:r>
-            <a:r>
-              <a:rPr dirty="0">
-                <a:latin typeface="Arial"/>
-              </a:rPr>
-              <a:t> </a:t>
-            </a:r>
-            <a:r>
-              <a:rPr dirty="0" err="1">
-                <a:latin typeface="Arial"/>
-              </a:rPr>
-              <a:t>có</a:t>
-            </a:r>
-            <a:r>
-              <a:rPr dirty="0">
-                <a:latin typeface="Arial"/>
-              </a:rPr>
-              <a:t> F1 </a:t>
-            </a:r>
-            <a:r>
-              <a:rPr dirty="0" err="1">
-                <a:latin typeface="Arial"/>
-              </a:rPr>
-              <a:t>tốt</a:t>
-            </a:r>
-            <a:r>
-              <a:rPr dirty="0">
-                <a:latin typeface="Arial"/>
-              </a:rPr>
-              <a:t>:</a:t>
-            </a:r>
-          </a:p>
-          <a:p>
-            <a:pPr lvl="1">
-              <a:defRPr sz="1400">
-                <a:solidFill>
-                  <a:srgbClr val="475569"/>
-                </a:solidFill>
-                <a:latin typeface="Arial"/>
-              </a:defRPr>
-            </a:pPr>
-            <a:r>
-              <a:rPr dirty="0">
-                <a:latin typeface="Arial"/>
-              </a:rPr>
-              <a:t>• </a:t>
-            </a:r>
-            <a:r>
-              <a:rPr dirty="0" err="1">
-                <a:latin typeface="Arial"/>
-              </a:rPr>
-              <a:t>no_issue</a:t>
-            </a:r>
-            <a:r>
-              <a:rPr dirty="0">
-                <a:latin typeface="Arial"/>
-              </a:rPr>
-              <a:t>: 0.86</a:t>
-            </a:r>
-          </a:p>
-          <a:p>
-            <a:pPr lvl="1">
-              <a:defRPr sz="1400">
-                <a:solidFill>
-                  <a:srgbClr val="475569"/>
-                </a:solidFill>
-                <a:latin typeface="Arial"/>
-              </a:defRPr>
-            </a:pPr>
-            <a:r>
-              <a:rPr dirty="0">
-                <a:latin typeface="Arial"/>
-              </a:rPr>
-              <a:t>• </a:t>
-            </a:r>
-            <a:r>
-              <a:rPr dirty="0" err="1">
-                <a:latin typeface="Arial"/>
-              </a:rPr>
-              <a:t>product_quality</a:t>
-            </a:r>
-            <a:r>
-              <a:rPr dirty="0">
-                <a:latin typeface="Arial"/>
-              </a:rPr>
-              <a:t>: 0.80</a:t>
-            </a:r>
-          </a:p>
-          <a:p>
-            <a:pPr lvl="1">
-              <a:defRPr sz="1400">
-                <a:solidFill>
-                  <a:srgbClr val="475569"/>
-                </a:solidFill>
-                <a:latin typeface="Arial"/>
-              </a:defRPr>
-            </a:pPr>
-            <a:r>
-              <a:rPr dirty="0">
-                <a:latin typeface="Arial"/>
-              </a:rPr>
-              <a:t>• </a:t>
-            </a:r>
-            <a:r>
-              <a:rPr dirty="0" err="1">
-                <a:latin typeface="Arial"/>
-              </a:rPr>
-              <a:t>seller_service</a:t>
-            </a:r>
-            <a:r>
-              <a:rPr dirty="0">
-                <a:latin typeface="Arial"/>
-              </a:rPr>
-              <a:t>: 0.81</a:t>
-            </a:r>
-          </a:p>
-          <a:p>
-            <a:pPr lvl="1">
-              <a:defRPr sz="1400">
-                <a:solidFill>
-                  <a:srgbClr val="475569"/>
-                </a:solidFill>
-                <a:latin typeface="Arial"/>
-              </a:defRPr>
-            </a:pPr>
-            <a:r>
-              <a:rPr dirty="0">
-                <a:latin typeface="Arial"/>
-              </a:rPr>
-              <a:t>• </a:t>
-            </a:r>
-            <a:r>
-              <a:rPr dirty="0" err="1">
-                <a:latin typeface="Arial"/>
-              </a:rPr>
-              <a:t>wrong_missing_item</a:t>
-            </a:r>
-            <a:r>
-              <a:rPr dirty="0">
-                <a:latin typeface="Arial"/>
-              </a:rPr>
-              <a:t>: 0.79</a:t>
-            </a:r>
-          </a:p>
-          <a:p>
-            <a:pPr>
-              <a:defRPr sz="1600">
-                <a:solidFill>
-                  <a:srgbClr val="0F172A"/>
-                </a:solidFill>
-                <a:latin typeface="Arial"/>
-              </a:defRPr>
-            </a:pPr>
-            <a:r>
-              <a:rPr dirty="0">
-                <a:latin typeface="Arial"/>
-              </a:rPr>
-              <a:t>• </a:t>
-            </a:r>
-            <a:r>
-              <a:rPr dirty="0" err="1">
-                <a:latin typeface="Arial"/>
-              </a:rPr>
-              <a:t>Nhóm</a:t>
-            </a:r>
-            <a:r>
-              <a:rPr dirty="0">
-                <a:latin typeface="Arial"/>
-              </a:rPr>
-              <a:t> </a:t>
-            </a:r>
-            <a:r>
-              <a:rPr dirty="0" err="1">
-                <a:latin typeface="Arial"/>
-              </a:rPr>
-              <a:t>còn</a:t>
-            </a:r>
-            <a:r>
-              <a:rPr dirty="0">
-                <a:latin typeface="Arial"/>
-              </a:rPr>
-              <a:t> </a:t>
-            </a:r>
-            <a:r>
-              <a:rPr lang="en-US" dirty="0" err="1">
-                <a:latin typeface="Arial"/>
-              </a:rPr>
-              <a:t>yếu</a:t>
-            </a:r>
-            <a:r>
-              <a:rPr dirty="0">
-                <a:latin typeface="Arial"/>
-              </a:rPr>
-              <a:t>:</a:t>
-            </a:r>
-          </a:p>
-          <a:p>
-            <a:pPr lvl="1">
-              <a:defRPr sz="1400">
-                <a:solidFill>
-                  <a:srgbClr val="475569"/>
-                </a:solidFill>
-                <a:latin typeface="Arial"/>
-              </a:defRPr>
-            </a:pPr>
-            <a:r>
-              <a:rPr dirty="0">
-                <a:latin typeface="Arial"/>
-              </a:rPr>
-              <a:t>• </a:t>
-            </a:r>
-            <a:r>
-              <a:rPr dirty="0" err="1">
-                <a:latin typeface="Arial"/>
-              </a:rPr>
-              <a:t>product_attribute</a:t>
-            </a:r>
-            <a:r>
-              <a:rPr dirty="0">
-                <a:latin typeface="Arial"/>
-              </a:rPr>
-              <a:t>: 0.59</a:t>
-            </a:r>
-          </a:p>
-          <a:p>
-            <a:pPr lvl="1">
-              <a:defRPr sz="1400">
-                <a:solidFill>
-                  <a:srgbClr val="475569"/>
-                </a:solidFill>
-                <a:latin typeface="Arial"/>
-              </a:defRPr>
-            </a:pPr>
-            <a:r>
-              <a:rPr dirty="0">
-                <a:latin typeface="Arial"/>
-              </a:rPr>
-              <a:t>• </a:t>
-            </a:r>
-            <a:r>
-              <a:rPr dirty="0" err="1">
-                <a:latin typeface="Arial"/>
-              </a:rPr>
-              <a:t>spam_irrelevant</a:t>
-            </a:r>
-            <a:r>
-              <a:rPr dirty="0">
-                <a:latin typeface="Arial"/>
-              </a:rPr>
-              <a:t>: 0.60</a:t>
-            </a:r>
-          </a:p>
-          <a:p>
-            <a:pPr lvl="1">
-              <a:defRPr sz="1400">
-                <a:solidFill>
-                  <a:srgbClr val="475569"/>
-                </a:solidFill>
-                <a:latin typeface="Arial"/>
-              </a:defRPr>
-            </a:pPr>
-            <a:r>
-              <a:rPr dirty="0">
-                <a:latin typeface="Arial"/>
-              </a:rPr>
-              <a:t>• </a:t>
-            </a:r>
-            <a:r>
-              <a:rPr dirty="0" err="1">
-                <a:latin typeface="Arial"/>
-              </a:rPr>
-              <a:t>price_value</a:t>
-            </a:r>
-            <a:r>
-              <a:rPr dirty="0">
-                <a:latin typeface="Arial"/>
-              </a:rPr>
-              <a:t>: </a:t>
-            </a:r>
-            <a:r>
-              <a:rPr dirty="0" err="1">
-                <a:latin typeface="Arial"/>
-              </a:rPr>
-              <a:t>ít</a:t>
-            </a:r>
-            <a:r>
-              <a:rPr dirty="0">
-                <a:latin typeface="Arial"/>
-              </a:rPr>
-              <a:t> </a:t>
-            </a:r>
-            <a:r>
-              <a:rPr dirty="0" err="1">
-                <a:latin typeface="Arial"/>
-              </a:rPr>
-              <a:t>mẫu</a:t>
-            </a:r>
-            <a:r>
-              <a:rPr dirty="0">
-                <a:latin typeface="Arial"/>
-              </a:rPr>
-              <a:t>, F1 0.67</a:t>
-            </a:r>
-          </a:p>
-        </p:txBody>
-      </p:sp>
-      <p:pic>
-        <p:nvPicPr>
-          <p:cNvPr id="16" name="Picture 15" descr="confusion_matrix_issue.png"/>
-          <p:cNvPicPr>
-            <a:picLocks noChangeAspect="1"/>
-          </p:cNvPicPr>
-          <p:nvPr/>
-        </p:nvPicPr>
-        <p:blipFill>
-          <a:blip r:embed="rId2"/>
-          <a:stretch>
-            <a:fillRect/>
-          </a:stretch>
-        </p:blipFill>
-        <p:spPr>
-          <a:xfrm>
-            <a:off x="5654040" y="2113878"/>
-            <a:ext cx="5760720" cy="4744122"/>
-          </a:xfrm>
-          <a:prstGeom prst="rect">
-            <a:avLst/>
-          </a:prstGeom>
-        </p:spPr>
-      </p:pic>
+              </a:rPr>
+              <a:t>như giao chậm, thiếu hàng, giao sai hoặc đóng gói lỗi.</a:t>
+            </a:r>
+            <a:endParaRPr sz="1400" b="0" dirty="0">
+              <a:solidFill>
+                <a:srgbClr val="0F172A"/>
+              </a:solidFill>
+              <a:latin typeface="Arial"/>
+            </a:endParaRPr>
+          </a:p>
+        </p:txBody>
+      </p:sp>
     </p:spTree>
   </p:cSld>
   <p:clrMapOvr>
@@ -6725,7 +7003,7 @@
                 </a:solidFill>
                 <a:latin typeface="Arial"/>
               </a:rPr>
-              <a:t>Error Analysis</a:t>
+              <a:t>Sentiment Results</a:t>
             </a:r>
           </a:p>
         </p:txBody>
@@ -6760,7 +7038,7 @@
                 </a:solidFill>
                 <a:latin typeface="Arial"/>
               </a:rPr>
-              <a:t>12/15</a:t>
+              <a:t>10/15</a:t>
             </a:r>
           </a:p>
         </p:txBody>
@@ -6809,7 +7087,7 @@
         <p:spPr>
           <a:xfrm>
             <a:off x="685800" y="1143000"/>
-            <a:ext cx="5303520" cy="4892040"/>
+            <a:ext cx="2011680" cy="914400"/>
           </a:xfrm>
           <a:prstGeom prst="roundRect">
             <a:avLst/>
@@ -6848,14 +7126,84 @@
       </p:sp>
       <p:sp>
         <p:nvSpPr>
-          <p:cNvPr id="7" name="Rounded Rectangle 6"/>
+          <p:cNvPr id="7" name="TextBox 6"/>
+          <p:cNvSpPr txBox="1"/>
+          <p:nvPr/>
+        </p:nvSpPr>
+        <p:spPr>
+          <a:xfrm>
+            <a:off x="822960" y="1280160"/>
+            <a:ext cx="1737360" cy="201168"/>
+          </a:xfrm>
+          <a:prstGeom prst="rect">
+            <a:avLst/>
+          </a:prstGeom>
+          <a:noFill/>
+        </p:spPr>
+        <p:txBody>
+          <a:bodyPr wrap="square">
+            <a:normAutofit fontScale="92500" lnSpcReduction="20000"/>
+          </a:bodyPr>
+          <a:lstStyle/>
+          <a:p>
+            <a:pPr algn="l"/>
+            <a:r>
+              <a:rPr sz="1000" b="1">
+                <a:solidFill>
+                  <a:srgbClr val="475569"/>
+                </a:solidFill>
+                <a:latin typeface="Arial"/>
+              </a:rPr>
+              <a:t>Accuracy</a:t>
+            </a:r>
+          </a:p>
+        </p:txBody>
+      </p:sp>
+      <p:sp>
+        <p:nvSpPr>
+          <p:cNvPr id="8" name="TextBox 7"/>
+          <p:cNvSpPr txBox="1"/>
+          <p:nvPr/>
+        </p:nvSpPr>
+        <p:spPr>
+          <a:xfrm>
+            <a:off x="822960" y="1527048"/>
+            <a:ext cx="1737360" cy="347472"/>
+          </a:xfrm>
+          <a:prstGeom prst="rect">
+            <a:avLst/>
+          </a:prstGeom>
+          <a:noFill/>
+        </p:spPr>
+        <p:txBody>
+          <a:bodyPr wrap="square">
+            <a:normAutofit fontScale="85000" lnSpcReduction="20000"/>
+          </a:bodyPr>
+          <a:lstStyle/>
+          <a:p>
+            <a:pPr algn="l"/>
+            <a:r>
+              <a:rPr sz="2400" b="1">
+                <a:solidFill>
+                  <a:srgbClr val="2563EB"/>
+                </a:solidFill>
+                <a:latin typeface="Arial"/>
+              </a:rPr>
+              <a:t>0.8318</a:t>
+            </a:r>
+          </a:p>
+        </p:txBody>
+      </p:sp>
+      <p:sp>
+        <p:nvSpPr>
+          <p:cNvPr id="9" name="Rounded Rectangle 8"/>
           <p:cNvSpPr/>
           <p:nvPr/>
         </p:nvSpPr>
         <p:spPr>
           <a:xfrm>
-            <a:off x="6263640" y="1143000"/>
-            <a:ext cx="5257800" cy="4892040"/>
+            <a:off x="2880360" y="1143000"/>
+            <a:ext cx="2011680" cy="914400"/>
           </a:xfrm>
           <a:prstGeom prst="roundRect">
             <a:avLst/>
@@ -6894,14 +7242,200 @@
       </p:sp>
       <p:sp>
         <p:nvSpPr>
-          <p:cNvPr id="8" name="TextBox 7"/>
+          <p:cNvPr id="10" name="TextBox 9"/>
           <p:cNvSpPr txBox="1"/>
           <p:nvPr/>
         </p:nvSpPr>
         <p:spPr>
           <a:xfrm>
-            <a:off x="960120" y="1417320"/>
-            <a:ext cx="4754880" cy="4297680"/>
+            <a:off x="3017520" y="1280160"/>
+            <a:ext cx="1737360" cy="201168"/>
+          </a:xfrm>
+          <a:prstGeom prst="rect">
+            <a:avLst/>
+          </a:prstGeom>
+          <a:noFill/>
+        </p:spPr>
+        <p:txBody>
+          <a:bodyPr wrap="square">
+            <a:normAutofit fontScale="92500" lnSpcReduction="20000"/>
+          </a:bodyPr>
+          <a:lstStyle/>
+          <a:p>
+            <a:pPr algn="l"/>
+            <a:r>
+              <a:rPr sz="1000" b="1">
+                <a:solidFill>
+                  <a:srgbClr val="475569"/>
+                </a:solidFill>
+                <a:latin typeface="Arial"/>
+              </a:rPr>
+              <a:t>Macro F1</a:t>
+            </a:r>
+          </a:p>
+        </p:txBody>
+      </p:sp>
+      <p:sp>
+        <p:nvSpPr>
+          <p:cNvPr id="11" name="TextBox 10"/>
+          <p:cNvSpPr txBox="1"/>
+          <p:nvPr/>
+        </p:nvSpPr>
+        <p:spPr>
+          <a:xfrm>
+            <a:off x="3017520" y="1527048"/>
+            <a:ext cx="1737360" cy="347472"/>
+          </a:xfrm>
+          <a:prstGeom prst="rect">
+            <a:avLst/>
+          </a:prstGeom>
+          <a:noFill/>
+        </p:spPr>
+        <p:txBody>
+          <a:bodyPr wrap="square">
+            <a:normAutofit fontScale="85000" lnSpcReduction="20000"/>
+          </a:bodyPr>
+          <a:lstStyle/>
+          <a:p>
+            <a:pPr algn="l"/>
+            <a:r>
+              <a:rPr sz="2400" b="1">
+                <a:solidFill>
+                  <a:srgbClr val="0F766E"/>
+                </a:solidFill>
+                <a:latin typeface="Arial"/>
+              </a:rPr>
+              <a:t>0.7993</a:t>
+            </a:r>
+          </a:p>
+        </p:txBody>
+      </p:sp>
+      <p:sp>
+        <p:nvSpPr>
+          <p:cNvPr id="12" name="Rounded Rectangle 11"/>
+          <p:cNvSpPr/>
+          <p:nvPr/>
+        </p:nvSpPr>
+        <p:spPr>
+          <a:xfrm>
+            <a:off x="5074920" y="1143000"/>
+            <a:ext cx="2011680" cy="914400"/>
+          </a:xfrm>
+          <a:prstGeom prst="roundRect">
+            <a:avLst/>
+          </a:prstGeom>
+          <a:solidFill>
+            <a:srgbClr val="F8FAFC"/>
+          </a:solidFill>
+          <a:ln w="12700">
+            <a:solidFill>
+              <a:srgbClr val="CBD5E1"/>
+            </a:solidFill>
+          </a:ln>
+        </p:spPr>
+        <p:style>
+          <a:lnRef idx="1">
+            <a:schemeClr val="accent1"/>
+          </a:lnRef>
+          <a:fillRef idx="3">
+            <a:schemeClr val="accent1"/>
+          </a:fillRef>
+          <a:effectRef idx="2">
+            <a:schemeClr val="accent1"/>
+          </a:effectRef>
+          <a:fontRef idx="minor">
+            <a:schemeClr val="lt1"/>
+          </a:fontRef>
+        </p:style>
+        <p:txBody>
+          <a:bodyPr rtlCol="0" anchor="ctr"/>
+          <a:lstStyle/>
+          <a:p>
+            <a:pPr algn="ctr"/>
+            <a:endParaRPr/>
+          </a:p>
+        </p:txBody>
+      </p:sp>
+      <p:sp>
+        <p:nvSpPr>
+          <p:cNvPr id="13" name="TextBox 12"/>
+          <p:cNvSpPr txBox="1"/>
+          <p:nvPr/>
+        </p:nvSpPr>
+        <p:spPr>
+          <a:xfrm>
+            <a:off x="5212080" y="1280160"/>
+            <a:ext cx="1737360" cy="201168"/>
+          </a:xfrm>
+          <a:prstGeom prst="rect">
+            <a:avLst/>
+          </a:prstGeom>
+          <a:noFill/>
+        </p:spPr>
+        <p:txBody>
+          <a:bodyPr wrap="square">
+            <a:normAutofit fontScale="92500" lnSpcReduction="20000"/>
+          </a:bodyPr>
+          <a:lstStyle/>
+          <a:p>
+            <a:pPr algn="l"/>
+            <a:r>
+              <a:rPr sz="1000" b="1">
+                <a:solidFill>
+                  <a:srgbClr val="475569"/>
+                </a:solidFill>
+                <a:latin typeface="Arial"/>
+              </a:rPr>
+              <a:t>Best model</a:t>
+            </a:r>
+          </a:p>
+        </p:txBody>
+      </p:sp>
+      <p:sp>
+        <p:nvSpPr>
+          <p:cNvPr id="14" name="TextBox 13"/>
+          <p:cNvSpPr txBox="1"/>
+          <p:nvPr/>
+        </p:nvSpPr>
+        <p:spPr>
+          <a:xfrm>
+            <a:off x="5212080" y="1527048"/>
+            <a:ext cx="1737360" cy="347472"/>
+          </a:xfrm>
+          <a:prstGeom prst="rect">
+            <a:avLst/>
+          </a:prstGeom>
+          <a:noFill/>
+        </p:spPr>
+        <p:txBody>
+          <a:bodyPr wrap="square">
+            <a:normAutofit fontScale="85000" lnSpcReduction="20000"/>
+          </a:bodyPr>
+          <a:lstStyle/>
+          <a:p>
+            <a:pPr algn="l"/>
+            <a:r>
+              <a:rPr sz="2400" b="1">
+                <a:solidFill>
+                  <a:srgbClr val="D97706"/>
+                </a:solidFill>
+                <a:latin typeface="Arial"/>
+              </a:rPr>
+              <a:t>SVM</a:t>
+            </a:r>
+          </a:p>
+        </p:txBody>
+      </p:sp>
+      <p:sp>
+        <p:nvSpPr>
+          <p:cNvPr id="15" name="TextBox 14"/>
+          <p:cNvSpPr txBox="1"/>
+          <p:nvPr/>
+        </p:nvSpPr>
+        <p:spPr>
+          <a:xfrm>
+            <a:off x="777240" y="2423160"/>
+            <a:ext cx="4480560" cy="3291840"/>
           </a:xfrm>
           <a:prstGeom prst="rect">
             <a:avLst/>
@@ -6926,7 +7460,7 @@
               <a:rPr>
                 <a:latin typeface="Arial"/>
               </a:rPr>
-              <a:t>• Sentiment:</a:t>
+              <a:t>• F1 theo lớp:</a:t>
             </a:r>
           </a:p>
           <a:p>
@@ -6942,7 +7476,7 @@
               <a:rPr>
                 <a:latin typeface="Arial"/>
               </a:rPr>
-              <a:t>• neutral thường bị dự đoán thành negative.</a:t>
+              <a:t>• negative: 0.89</a:t>
             </a:r>
           </a:p>
           <a:p>
@@ -6958,7 +7492,23 @@
               <a:rPr>
                 <a:latin typeface="Arial"/>
               </a:rPr>
-              <a:t>• Một số positive bị dự đoán thành neutral.</a:t>
+              <a:t>• neutral: 0.66</a:t>
+            </a:r>
+          </a:p>
+          <a:p>
+            <a:pPr lvl="1">
+              <a:defRPr sz="1500">
+                <a:solidFill>
+                  <a:srgbClr val="475569"/>
+                </a:solidFill>
+                <a:latin typeface="Arial"/>
+              </a:defRPr>
+            </a:pPr>
+            <a:r>
+              <a:rPr>
+                <a:latin typeface="Arial"/>
+              </a:rPr>
+              <a:t>• positive: 0.85</a:t>
             </a:r>
           </a:p>
           <a:p>
@@ -6974,146 +7524,35 @@
               <a:rPr>
                 <a:latin typeface="Arial"/>
               </a:rPr>
-              <a:t>• Issue:</a:t>
-            </a:r>
-          </a:p>
-          <a:p>
-            <a:pPr lvl="1">
-              <a:defRPr sz="1500">
-                <a:solidFill>
-                  <a:srgbClr val="475569"/>
-                </a:solidFill>
-                <a:latin typeface="Arial"/>
-              </a:defRPr>
-            </a:pPr>
-            <a:r>
-              <a:rPr>
-                <a:latin typeface="Arial"/>
-              </a:rPr>
-              <a:t>• product_quality và product_attribute dễ nhầm với nhau.</a:t>
-            </a:r>
-          </a:p>
-          <a:p>
-            <a:pPr lvl="1">
-              <a:defRPr sz="1500">
-                <a:solidFill>
-                  <a:srgbClr val="475569"/>
-                </a:solidFill>
-                <a:latin typeface="Arial"/>
-              </a:defRPr>
-            </a:pPr>
-            <a:r>
-              <a:rPr>
-                <a:latin typeface="Arial"/>
-              </a:rPr>
-              <a:t>• Một số no_issue bị nhầm sang issue liên quan đến sản phẩm.</a:t>
-            </a:r>
-          </a:p>
-        </p:txBody>
-      </p:sp>
-      <p:sp>
-        <p:nvSpPr>
-          <p:cNvPr id="9" name="TextBox 8"/>
-          <p:cNvSpPr txBox="1"/>
-          <p:nvPr/>
-        </p:nvSpPr>
-        <p:spPr>
-          <a:xfrm>
-            <a:off x="6537960" y="1417320"/>
-            <a:ext cx="4663440" cy="4297680"/>
+              <a:t>• Lớp khó nhất là neutral vì nhiều bình luận nằm giữa khen nhẹ, chê nhẹ hoặc chỉ nhận xu.</a:t>
+            </a:r>
+          </a:p>
+        </p:txBody>
+      </p:sp>
+      <p:pic>
+        <p:nvPicPr>
+          <p:cNvPr id="16" name="Picture 15" descr="confusion_matrix_sentiment.png"/>
+          <p:cNvPicPr>
+            <a:picLocks noChangeAspect="1"/>
+          </p:cNvPicPr>
+          <p:nvPr/>
+        </p:nvPicPr>
+        <p:blipFill>
+          <a:blip r:embed="rId2"/>
+          <a:stretch>
+            <a:fillRect/>
+          </a:stretch>
+        </p:blipFill>
+        <p:spPr>
+          <a:xfrm>
+            <a:off x="6400800" y="2197018"/>
+            <a:ext cx="5257800" cy="3755571"/>
           </a:xfrm>
           <a:prstGeom prst="rect">
             <a:avLst/>
           </a:prstGeom>
-          <a:noFill/>
-        </p:spPr>
-        <p:txBody>
-          <a:bodyPr wrap="square">
-            <a:normAutofit/>
-          </a:bodyPr>
-          <a:lstStyle/>
-          <a:p>
-            <a:pPr>
-              <a:defRPr sz="1700">
-                <a:solidFill>
-                  <a:srgbClr val="0F172A"/>
-                </a:solidFill>
-                <a:latin typeface="Arial"/>
-              </a:defRPr>
-            </a:pPr>
-            <a:r>
-              <a:rPr>
-                <a:latin typeface="Arial"/>
-              </a:rPr>
-              <a:t>• Nguyên nhân:</a:t>
-            </a:r>
-          </a:p>
-          <a:p>
-            <a:pPr lvl="1">
-              <a:defRPr sz="1500">
-                <a:solidFill>
-                  <a:srgbClr val="475569"/>
-                </a:solidFill>
-                <a:latin typeface="Arial"/>
-              </a:defRPr>
-            </a:pPr>
-            <a:r>
-              <a:rPr>
-                <a:latin typeface="Arial"/>
-              </a:rPr>
-              <a:t>• Review ngắn và thiếu ngữ cảnh.</a:t>
-            </a:r>
-          </a:p>
-          <a:p>
-            <a:pPr lvl="1">
-              <a:defRPr sz="1500">
-                <a:solidFill>
-                  <a:srgbClr val="475569"/>
-                </a:solidFill>
-                <a:latin typeface="Arial"/>
-              </a:defRPr>
-            </a:pPr>
-            <a:r>
-              <a:rPr>
-                <a:latin typeface="Arial"/>
-              </a:rPr>
-              <a:t>• Cách viết informal, nhiều biến thể.</a:t>
-            </a:r>
-          </a:p>
-          <a:p>
-            <a:pPr lvl="1">
-              <a:defRPr sz="1500">
-                <a:solidFill>
-                  <a:srgbClr val="475569"/>
-                </a:solidFill>
-                <a:latin typeface="Arial"/>
-              </a:defRPr>
-            </a:pPr>
-            <a:r>
-              <a:rPr>
-                <a:latin typeface="Arial"/>
-              </a:rPr>
-              <a:t>• Một review có thể chứa nhiều vấn đề.</a:t>
-            </a:r>
-          </a:p>
-          <a:p>
-            <a:pPr lvl="1">
-              <a:defRPr sz="1500">
-                <a:solidFill>
-                  <a:srgbClr val="475569"/>
-                </a:solidFill>
-                <a:latin typeface="Arial"/>
-              </a:defRPr>
-            </a:pPr>
-            <a:r>
-              <a:rPr>
-                <a:latin typeface="Arial"/>
-              </a:rPr>
-              <a:t>• Bài toán issue hiện là single-label nên chỉ chọn một issue chính.</a:t>
-            </a:r>
-          </a:p>
-        </p:txBody>
-      </p:sp>
+        </p:spPr>
+      </p:pic>
     </p:spTree>
   </p:cSld>
   <p:clrMapOvr>
@@ -7221,7 +7660,7 @@
                 </a:solidFill>
                 <a:latin typeface="Arial"/>
               </a:rPr>
-              <a:t>Demo</a:t>
+              <a:t>Issue Results</a:t>
             </a:r>
           </a:p>
         </p:txBody>
@@ -7256,7 +7695,7 @@
                 </a:solidFill>
                 <a:latin typeface="Arial"/>
               </a:rPr>
-              <a:t>14/15</a:t>
+              <a:t>11/15</a:t>
             </a:r>
           </a:p>
         </p:txBody>
@@ -7304,18 +7743,18 @@
         </p:nvSpPr>
         <p:spPr>
           <a:xfrm>
-            <a:off x="777240" y="1234440"/>
-            <a:ext cx="10698480" cy="960120"/>
+            <a:off x="685800" y="1143000"/>
+            <a:ext cx="2011680" cy="914400"/>
           </a:xfrm>
           <a:prstGeom prst="roundRect">
             <a:avLst/>
           </a:prstGeom>
           <a:solidFill>
-            <a:srgbClr val="EFF6FF"/>
+            <a:srgbClr val="F8FAFC"/>
           </a:solidFill>
           <a:ln w="12700">
             <a:solidFill>
-              <a:srgbClr val="93C5FD"/>
+              <a:srgbClr val="CBD5E1"/>
             </a:solidFill>
           </a:ln>
         </p:spPr>
@@ -7350,6 +7789,1726 @@
         </p:nvSpPr>
         <p:spPr>
           <a:xfrm>
+            <a:off x="822960" y="1280160"/>
+            <a:ext cx="1737360" cy="201168"/>
+          </a:xfrm>
+          <a:prstGeom prst="rect">
+            <a:avLst/>
+          </a:prstGeom>
+          <a:noFill/>
+        </p:spPr>
+        <p:txBody>
+          <a:bodyPr wrap="square">
+            <a:normAutofit fontScale="92500" lnSpcReduction="20000"/>
+          </a:bodyPr>
+          <a:lstStyle/>
+          <a:p>
+            <a:pPr algn="l"/>
+            <a:r>
+              <a:rPr sz="1000" b="1">
+                <a:solidFill>
+                  <a:srgbClr val="475569"/>
+                </a:solidFill>
+                <a:latin typeface="Arial"/>
+              </a:rPr>
+              <a:t>Accuracy</a:t>
+            </a:r>
+          </a:p>
+        </p:txBody>
+      </p:sp>
+      <p:sp>
+        <p:nvSpPr>
+          <p:cNvPr id="8" name="TextBox 7"/>
+          <p:cNvSpPr txBox="1"/>
+          <p:nvPr/>
+        </p:nvSpPr>
+        <p:spPr>
+          <a:xfrm>
+            <a:off x="822960" y="1527048"/>
+            <a:ext cx="1737360" cy="347472"/>
+          </a:xfrm>
+          <a:prstGeom prst="rect">
+            <a:avLst/>
+          </a:prstGeom>
+          <a:noFill/>
+        </p:spPr>
+        <p:txBody>
+          <a:bodyPr wrap="square">
+            <a:normAutofit fontScale="85000" lnSpcReduction="20000"/>
+          </a:bodyPr>
+          <a:lstStyle/>
+          <a:p>
+            <a:pPr algn="l"/>
+            <a:r>
+              <a:rPr sz="2400" b="1">
+                <a:solidFill>
+                  <a:srgbClr val="2563EB"/>
+                </a:solidFill>
+                <a:latin typeface="Arial"/>
+              </a:rPr>
+              <a:t>0.7849</a:t>
+            </a:r>
+          </a:p>
+        </p:txBody>
+      </p:sp>
+      <p:sp>
+        <p:nvSpPr>
+          <p:cNvPr id="9" name="Rounded Rectangle 8"/>
+          <p:cNvSpPr/>
+          <p:nvPr/>
+        </p:nvSpPr>
+        <p:spPr>
+          <a:xfrm>
+            <a:off x="2880360" y="1143000"/>
+            <a:ext cx="2011680" cy="914400"/>
+          </a:xfrm>
+          <a:prstGeom prst="roundRect">
+            <a:avLst/>
+          </a:prstGeom>
+          <a:solidFill>
+            <a:srgbClr val="F8FAFC"/>
+          </a:solidFill>
+          <a:ln w="12700">
+            <a:solidFill>
+              <a:srgbClr val="CBD5E1"/>
+            </a:solidFill>
+          </a:ln>
+        </p:spPr>
+        <p:style>
+          <a:lnRef idx="1">
+            <a:schemeClr val="accent1"/>
+          </a:lnRef>
+          <a:fillRef idx="3">
+            <a:schemeClr val="accent1"/>
+          </a:fillRef>
+          <a:effectRef idx="2">
+            <a:schemeClr val="accent1"/>
+          </a:effectRef>
+          <a:fontRef idx="minor">
+            <a:schemeClr val="lt1"/>
+          </a:fontRef>
+        </p:style>
+        <p:txBody>
+          <a:bodyPr rtlCol="0" anchor="ctr"/>
+          <a:lstStyle/>
+          <a:p>
+            <a:pPr algn="ctr"/>
+            <a:endParaRPr/>
+          </a:p>
+        </p:txBody>
+      </p:sp>
+      <p:sp>
+        <p:nvSpPr>
+          <p:cNvPr id="10" name="TextBox 9"/>
+          <p:cNvSpPr txBox="1"/>
+          <p:nvPr/>
+        </p:nvSpPr>
+        <p:spPr>
+          <a:xfrm>
+            <a:off x="3017520" y="1280160"/>
+            <a:ext cx="1737360" cy="201168"/>
+          </a:xfrm>
+          <a:prstGeom prst="rect">
+            <a:avLst/>
+          </a:prstGeom>
+          <a:noFill/>
+        </p:spPr>
+        <p:txBody>
+          <a:bodyPr wrap="square">
+            <a:normAutofit fontScale="92500" lnSpcReduction="20000"/>
+          </a:bodyPr>
+          <a:lstStyle/>
+          <a:p>
+            <a:pPr algn="l"/>
+            <a:r>
+              <a:rPr sz="1000" b="1">
+                <a:solidFill>
+                  <a:srgbClr val="475569"/>
+                </a:solidFill>
+                <a:latin typeface="Arial"/>
+              </a:rPr>
+              <a:t>Macro F1</a:t>
+            </a:r>
+          </a:p>
+        </p:txBody>
+      </p:sp>
+      <p:sp>
+        <p:nvSpPr>
+          <p:cNvPr id="11" name="TextBox 10"/>
+          <p:cNvSpPr txBox="1"/>
+          <p:nvPr/>
+        </p:nvSpPr>
+        <p:spPr>
+          <a:xfrm>
+            <a:off x="3017520" y="1527048"/>
+            <a:ext cx="1737360" cy="347472"/>
+          </a:xfrm>
+          <a:prstGeom prst="rect">
+            <a:avLst/>
+          </a:prstGeom>
+          <a:noFill/>
+        </p:spPr>
+        <p:txBody>
+          <a:bodyPr wrap="square">
+            <a:normAutofit fontScale="85000" lnSpcReduction="20000"/>
+          </a:bodyPr>
+          <a:lstStyle/>
+          <a:p>
+            <a:pPr algn="l"/>
+            <a:r>
+              <a:rPr sz="2400" b="1">
+                <a:solidFill>
+                  <a:srgbClr val="0F766E"/>
+                </a:solidFill>
+                <a:latin typeface="Arial"/>
+              </a:rPr>
+              <a:t>0.7323</a:t>
+            </a:r>
+          </a:p>
+        </p:txBody>
+      </p:sp>
+      <p:sp>
+        <p:nvSpPr>
+          <p:cNvPr id="12" name="Rounded Rectangle 11"/>
+          <p:cNvSpPr/>
+          <p:nvPr/>
+        </p:nvSpPr>
+        <p:spPr>
+          <a:xfrm>
+            <a:off x="5074920" y="1143000"/>
+            <a:ext cx="2011680" cy="914400"/>
+          </a:xfrm>
+          <a:prstGeom prst="roundRect">
+            <a:avLst/>
+          </a:prstGeom>
+          <a:solidFill>
+            <a:srgbClr val="F8FAFC"/>
+          </a:solidFill>
+          <a:ln w="12700">
+            <a:solidFill>
+              <a:srgbClr val="CBD5E1"/>
+            </a:solidFill>
+          </a:ln>
+        </p:spPr>
+        <p:style>
+          <a:lnRef idx="1">
+            <a:schemeClr val="accent1"/>
+          </a:lnRef>
+          <a:fillRef idx="3">
+            <a:schemeClr val="accent1"/>
+          </a:fillRef>
+          <a:effectRef idx="2">
+            <a:schemeClr val="accent1"/>
+          </a:effectRef>
+          <a:fontRef idx="minor">
+            <a:schemeClr val="lt1"/>
+          </a:fontRef>
+        </p:style>
+        <p:txBody>
+          <a:bodyPr rtlCol="0" anchor="ctr"/>
+          <a:lstStyle/>
+          <a:p>
+            <a:pPr algn="ctr"/>
+            <a:endParaRPr/>
+          </a:p>
+        </p:txBody>
+      </p:sp>
+      <p:sp>
+        <p:nvSpPr>
+          <p:cNvPr id="13" name="TextBox 12"/>
+          <p:cNvSpPr txBox="1"/>
+          <p:nvPr/>
+        </p:nvSpPr>
+        <p:spPr>
+          <a:xfrm>
+            <a:off x="5212080" y="1280160"/>
+            <a:ext cx="1737360" cy="201168"/>
+          </a:xfrm>
+          <a:prstGeom prst="rect">
+            <a:avLst/>
+          </a:prstGeom>
+          <a:noFill/>
+        </p:spPr>
+        <p:txBody>
+          <a:bodyPr wrap="square">
+            <a:normAutofit fontScale="92500" lnSpcReduction="20000"/>
+          </a:bodyPr>
+          <a:lstStyle/>
+          <a:p>
+            <a:pPr algn="l"/>
+            <a:r>
+              <a:rPr sz="1000" b="1">
+                <a:solidFill>
+                  <a:srgbClr val="475569"/>
+                </a:solidFill>
+                <a:latin typeface="Arial"/>
+              </a:rPr>
+              <a:t>Issue labels</a:t>
+            </a:r>
+          </a:p>
+        </p:txBody>
+      </p:sp>
+      <p:sp>
+        <p:nvSpPr>
+          <p:cNvPr id="14" name="TextBox 13"/>
+          <p:cNvSpPr txBox="1"/>
+          <p:nvPr/>
+        </p:nvSpPr>
+        <p:spPr>
+          <a:xfrm>
+            <a:off x="5212080" y="1527048"/>
+            <a:ext cx="1737360" cy="347472"/>
+          </a:xfrm>
+          <a:prstGeom prst="rect">
+            <a:avLst/>
+          </a:prstGeom>
+          <a:noFill/>
+        </p:spPr>
+        <p:txBody>
+          <a:bodyPr wrap="square">
+            <a:normAutofit fontScale="85000" lnSpcReduction="20000"/>
+          </a:bodyPr>
+          <a:lstStyle/>
+          <a:p>
+            <a:pPr algn="l"/>
+            <a:r>
+              <a:rPr sz="2400" b="1">
+                <a:solidFill>
+                  <a:srgbClr val="D97706"/>
+                </a:solidFill>
+                <a:latin typeface="Arial"/>
+              </a:rPr>
+              <a:t>9</a:t>
+            </a:r>
+          </a:p>
+        </p:txBody>
+      </p:sp>
+      <p:sp>
+        <p:nvSpPr>
+          <p:cNvPr id="15" name="TextBox 14"/>
+          <p:cNvSpPr txBox="1"/>
+          <p:nvPr/>
+        </p:nvSpPr>
+        <p:spPr>
+          <a:xfrm>
+            <a:off x="777240" y="2423160"/>
+            <a:ext cx="4480560" cy="3291840"/>
+          </a:xfrm>
+          <a:prstGeom prst="rect">
+            <a:avLst/>
+          </a:prstGeom>
+          <a:noFill/>
+        </p:spPr>
+        <p:txBody>
+          <a:bodyPr wrap="square">
+            <a:normAutofit/>
+          </a:bodyPr>
+          <a:lstStyle/>
+          <a:p>
+            <a:pPr>
+              <a:defRPr sz="1600">
+                <a:solidFill>
+                  <a:srgbClr val="0F172A"/>
+                </a:solidFill>
+                <a:latin typeface="Arial"/>
+              </a:defRPr>
+            </a:pPr>
+            <a:r>
+              <a:rPr dirty="0">
+                <a:latin typeface="Arial"/>
+              </a:rPr>
+              <a:t>• </a:t>
+            </a:r>
+            <a:r>
+              <a:rPr dirty="0" err="1">
+                <a:latin typeface="Arial"/>
+              </a:rPr>
+              <a:t>Nhóm</a:t>
+            </a:r>
+            <a:r>
+              <a:rPr dirty="0">
+                <a:latin typeface="Arial"/>
+              </a:rPr>
+              <a:t> </a:t>
+            </a:r>
+            <a:r>
+              <a:rPr dirty="0" err="1">
+                <a:latin typeface="Arial"/>
+              </a:rPr>
+              <a:t>có</a:t>
+            </a:r>
+            <a:r>
+              <a:rPr dirty="0">
+                <a:latin typeface="Arial"/>
+              </a:rPr>
+              <a:t> F1 </a:t>
+            </a:r>
+            <a:r>
+              <a:rPr dirty="0" err="1">
+                <a:latin typeface="Arial"/>
+              </a:rPr>
+              <a:t>tốt</a:t>
+            </a:r>
+            <a:r>
+              <a:rPr dirty="0">
+                <a:latin typeface="Arial"/>
+              </a:rPr>
+              <a:t>:</a:t>
+            </a:r>
+          </a:p>
+          <a:p>
+            <a:pPr lvl="1">
+              <a:defRPr sz="1400">
+                <a:solidFill>
+                  <a:srgbClr val="475569"/>
+                </a:solidFill>
+                <a:latin typeface="Arial"/>
+              </a:defRPr>
+            </a:pPr>
+            <a:r>
+              <a:rPr dirty="0">
+                <a:latin typeface="Arial"/>
+              </a:rPr>
+              <a:t>• </a:t>
+            </a:r>
+            <a:r>
+              <a:rPr dirty="0" err="1">
+                <a:latin typeface="Arial"/>
+              </a:rPr>
+              <a:t>no_issue</a:t>
+            </a:r>
+            <a:r>
+              <a:rPr dirty="0">
+                <a:latin typeface="Arial"/>
+              </a:rPr>
+              <a:t>: 0.86</a:t>
+            </a:r>
+          </a:p>
+          <a:p>
+            <a:pPr lvl="1">
+              <a:defRPr sz="1400">
+                <a:solidFill>
+                  <a:srgbClr val="475569"/>
+                </a:solidFill>
+                <a:latin typeface="Arial"/>
+              </a:defRPr>
+            </a:pPr>
+            <a:r>
+              <a:rPr dirty="0">
+                <a:latin typeface="Arial"/>
+              </a:rPr>
+              <a:t>• </a:t>
+            </a:r>
+            <a:r>
+              <a:rPr dirty="0" err="1">
+                <a:latin typeface="Arial"/>
+              </a:rPr>
+              <a:t>product_quality</a:t>
+            </a:r>
+            <a:r>
+              <a:rPr dirty="0">
+                <a:latin typeface="Arial"/>
+              </a:rPr>
+              <a:t>: 0.80</a:t>
+            </a:r>
+          </a:p>
+          <a:p>
+            <a:pPr lvl="1">
+              <a:defRPr sz="1400">
+                <a:solidFill>
+                  <a:srgbClr val="475569"/>
+                </a:solidFill>
+                <a:latin typeface="Arial"/>
+              </a:defRPr>
+            </a:pPr>
+            <a:r>
+              <a:rPr dirty="0">
+                <a:latin typeface="Arial"/>
+              </a:rPr>
+              <a:t>• </a:t>
+            </a:r>
+            <a:r>
+              <a:rPr dirty="0" err="1">
+                <a:latin typeface="Arial"/>
+              </a:rPr>
+              <a:t>seller_service</a:t>
+            </a:r>
+            <a:r>
+              <a:rPr dirty="0">
+                <a:latin typeface="Arial"/>
+              </a:rPr>
+              <a:t>: 0.81</a:t>
+            </a:r>
+          </a:p>
+          <a:p>
+            <a:pPr lvl="1">
+              <a:defRPr sz="1400">
+                <a:solidFill>
+                  <a:srgbClr val="475569"/>
+                </a:solidFill>
+                <a:latin typeface="Arial"/>
+              </a:defRPr>
+            </a:pPr>
+            <a:r>
+              <a:rPr dirty="0">
+                <a:latin typeface="Arial"/>
+              </a:rPr>
+              <a:t>• </a:t>
+            </a:r>
+            <a:r>
+              <a:rPr dirty="0" err="1">
+                <a:latin typeface="Arial"/>
+              </a:rPr>
+              <a:t>wrong_missing_item</a:t>
+            </a:r>
+            <a:r>
+              <a:rPr dirty="0">
+                <a:latin typeface="Arial"/>
+              </a:rPr>
+              <a:t>: 0.79</a:t>
+            </a:r>
+          </a:p>
+          <a:p>
+            <a:pPr>
+              <a:defRPr sz="1600">
+                <a:solidFill>
+                  <a:srgbClr val="0F172A"/>
+                </a:solidFill>
+                <a:latin typeface="Arial"/>
+              </a:defRPr>
+            </a:pPr>
+            <a:r>
+              <a:rPr dirty="0">
+                <a:latin typeface="Arial"/>
+              </a:rPr>
+              <a:t>• </a:t>
+            </a:r>
+            <a:r>
+              <a:rPr dirty="0" err="1">
+                <a:latin typeface="Arial"/>
+              </a:rPr>
+              <a:t>Nhóm</a:t>
+            </a:r>
+            <a:r>
+              <a:rPr dirty="0">
+                <a:latin typeface="Arial"/>
+              </a:rPr>
+              <a:t> </a:t>
+            </a:r>
+            <a:r>
+              <a:rPr dirty="0" err="1">
+                <a:latin typeface="Arial"/>
+              </a:rPr>
+              <a:t>còn</a:t>
+            </a:r>
+            <a:r>
+              <a:rPr dirty="0">
+                <a:latin typeface="Arial"/>
+              </a:rPr>
+              <a:t> </a:t>
+            </a:r>
+            <a:r>
+              <a:rPr lang="en-US" dirty="0" err="1">
+                <a:latin typeface="Arial"/>
+              </a:rPr>
+              <a:t>yếu</a:t>
+            </a:r>
+            <a:r>
+              <a:rPr dirty="0">
+                <a:latin typeface="Arial"/>
+              </a:rPr>
+              <a:t>:</a:t>
+            </a:r>
+          </a:p>
+          <a:p>
+            <a:pPr lvl="1">
+              <a:defRPr sz="1400">
+                <a:solidFill>
+                  <a:srgbClr val="475569"/>
+                </a:solidFill>
+                <a:latin typeface="Arial"/>
+              </a:defRPr>
+            </a:pPr>
+            <a:r>
+              <a:rPr dirty="0">
+                <a:latin typeface="Arial"/>
+              </a:rPr>
+              <a:t>• </a:t>
+            </a:r>
+            <a:r>
+              <a:rPr dirty="0" err="1">
+                <a:latin typeface="Arial"/>
+              </a:rPr>
+              <a:t>product_attribute</a:t>
+            </a:r>
+            <a:r>
+              <a:rPr dirty="0">
+                <a:latin typeface="Arial"/>
+              </a:rPr>
+              <a:t>: 0.59</a:t>
+            </a:r>
+          </a:p>
+          <a:p>
+            <a:pPr lvl="1">
+              <a:defRPr sz="1400">
+                <a:solidFill>
+                  <a:srgbClr val="475569"/>
+                </a:solidFill>
+                <a:latin typeface="Arial"/>
+              </a:defRPr>
+            </a:pPr>
+            <a:r>
+              <a:rPr dirty="0">
+                <a:latin typeface="Arial"/>
+              </a:rPr>
+              <a:t>• </a:t>
+            </a:r>
+            <a:r>
+              <a:rPr dirty="0" err="1">
+                <a:latin typeface="Arial"/>
+              </a:rPr>
+              <a:t>spam_irrelevant</a:t>
+            </a:r>
+            <a:r>
+              <a:rPr dirty="0">
+                <a:latin typeface="Arial"/>
+              </a:rPr>
+              <a:t>: 0.60</a:t>
+            </a:r>
+          </a:p>
+          <a:p>
+            <a:pPr lvl="1">
+              <a:defRPr sz="1400">
+                <a:solidFill>
+                  <a:srgbClr val="475569"/>
+                </a:solidFill>
+                <a:latin typeface="Arial"/>
+              </a:defRPr>
+            </a:pPr>
+            <a:r>
+              <a:rPr dirty="0">
+                <a:latin typeface="Arial"/>
+              </a:rPr>
+              <a:t>• </a:t>
+            </a:r>
+            <a:r>
+              <a:rPr dirty="0" err="1">
+                <a:latin typeface="Arial"/>
+              </a:rPr>
+              <a:t>price_value</a:t>
+            </a:r>
+            <a:r>
+              <a:rPr dirty="0">
+                <a:latin typeface="Arial"/>
+              </a:rPr>
+              <a:t>: </a:t>
+            </a:r>
+            <a:r>
+              <a:rPr dirty="0" err="1">
+                <a:latin typeface="Arial"/>
+              </a:rPr>
+              <a:t>ít</a:t>
+            </a:r>
+            <a:r>
+              <a:rPr dirty="0">
+                <a:latin typeface="Arial"/>
+              </a:rPr>
+              <a:t> </a:t>
+            </a:r>
+            <a:r>
+              <a:rPr dirty="0" err="1">
+                <a:latin typeface="Arial"/>
+              </a:rPr>
+              <a:t>mẫu</a:t>
+            </a:r>
+            <a:r>
+              <a:rPr dirty="0">
+                <a:latin typeface="Arial"/>
+              </a:rPr>
+              <a:t>, F1 0.67</a:t>
+            </a:r>
+          </a:p>
+        </p:txBody>
+      </p:sp>
+      <p:pic>
+        <p:nvPicPr>
+          <p:cNvPr id="16" name="Picture 15" descr="confusion_matrix_issue.png"/>
+          <p:cNvPicPr>
+            <a:picLocks noChangeAspect="1"/>
+          </p:cNvPicPr>
+          <p:nvPr/>
+        </p:nvPicPr>
+        <p:blipFill>
+          <a:blip r:embed="rId2"/>
+          <a:stretch>
+            <a:fillRect/>
+          </a:stretch>
+        </p:blipFill>
+        <p:spPr>
+          <a:xfrm>
+            <a:off x="5654040" y="2113878"/>
+            <a:ext cx="5760720" cy="4744122"/>
+          </a:xfrm>
+          <a:prstGeom prst="rect">
+            <a:avLst/>
+          </a:prstGeom>
+        </p:spPr>
+      </p:pic>
+    </p:spTree>
+  </p:cSld>
+  <p:clrMapOvr>
+    <a:masterClrMapping/>
+  </p:clrMapOvr>
+</p:sld>
+</file>
+
+<file path=ppt/slides/slide16.xml><?xml version="1.0" encoding="utf-8"?>
+<p:sld xmlns:a="http://schemas.openxmlformats.org/drawingml/2006/main" xmlns:r="http://schemas.openxmlformats.org/officeDocument/2006/relationships" xmlns:p="http://schemas.openxmlformats.org/presentationml/2006/main">
+  <p:cSld>
+    <p:bg>
+      <p:bgPr>
+        <a:solidFill>
+          <a:srgbClr val="FFFFFF"/>
+        </a:solidFill>
+        <a:effectLst/>
+      </p:bgPr>
+    </p:bg>
+    <p:spTree>
+      <p:nvGrpSpPr>
+        <p:cNvPr id="1" name=""/>
+        <p:cNvGrpSpPr/>
+        <p:nvPr/>
+      </p:nvGrpSpPr>
+      <p:grpSpPr>
+        <a:xfrm>
+          <a:off x="0" y="0"/>
+          <a:ext cx="0" cy="0"/>
+          <a:chOff x="0" y="0"/>
+          <a:chExt cx="0" cy="0"/>
+        </a:xfrm>
+      </p:grpSpPr>
+      <p:sp>
+        <p:nvSpPr>
+          <p:cNvPr id="2" name="Rectangle 1"/>
+          <p:cNvSpPr/>
+          <p:nvPr/>
+        </p:nvSpPr>
+        <p:spPr>
+          <a:xfrm>
+            <a:off x="0" y="0"/>
+            <a:ext cx="12191695" cy="164592"/>
+          </a:xfrm>
+          <a:prstGeom prst="rect">
+            <a:avLst/>
+          </a:prstGeom>
+          <a:solidFill>
+            <a:srgbClr val="0F766E"/>
+          </a:solidFill>
+          <a:ln>
+            <a:noFill/>
+          </a:ln>
+        </p:spPr>
+        <p:style>
+          <a:lnRef idx="1">
+            <a:schemeClr val="accent1"/>
+          </a:lnRef>
+          <a:fillRef idx="3">
+            <a:schemeClr val="accent1"/>
+          </a:fillRef>
+          <a:effectRef idx="2">
+            <a:schemeClr val="accent1"/>
+          </a:effectRef>
+          <a:fontRef idx="minor">
+            <a:schemeClr val="lt1"/>
+          </a:fontRef>
+        </p:style>
+        <p:txBody>
+          <a:bodyPr rtlCol="0" anchor="ctr"/>
+          <a:lstStyle/>
+          <a:p>
+            <a:pPr algn="ctr"/>
+            <a:endParaRPr/>
+          </a:p>
+        </p:txBody>
+      </p:sp>
+      <p:sp>
+        <p:nvSpPr>
+          <p:cNvPr id="3" name="TextBox 2"/>
+          <p:cNvSpPr txBox="1"/>
+          <p:nvPr/>
+        </p:nvSpPr>
+        <p:spPr>
+          <a:xfrm>
+            <a:off x="502920" y="320040"/>
+            <a:ext cx="9509760" cy="502920"/>
+          </a:xfrm>
+          <a:prstGeom prst="rect">
+            <a:avLst/>
+          </a:prstGeom>
+          <a:noFill/>
+        </p:spPr>
+        <p:txBody>
+          <a:bodyPr wrap="square">
+            <a:normAutofit lnSpcReduction="10000"/>
+          </a:bodyPr>
+          <a:lstStyle/>
+          <a:p>
+            <a:pPr algn="l"/>
+            <a:r>
+              <a:rPr sz="2800" b="1">
+                <a:solidFill>
+                  <a:srgbClr val="142A41"/>
+                </a:solidFill>
+                <a:latin typeface="Arial"/>
+              </a:rPr>
+              <a:t>Error Analysis</a:t>
+            </a:r>
+          </a:p>
+        </p:txBody>
+      </p:sp>
+      <p:sp>
+        <p:nvSpPr>
+          <p:cNvPr id="4" name="TextBox 3"/>
+          <p:cNvSpPr txBox="1"/>
+          <p:nvPr/>
+        </p:nvSpPr>
+        <p:spPr>
+          <a:xfrm>
+            <a:off x="10972800" y="347472"/>
+            <a:ext cx="685800" cy="274320"/>
+          </a:xfrm>
+          <a:prstGeom prst="rect">
+            <a:avLst/>
+          </a:prstGeom>
+          <a:noFill/>
+        </p:spPr>
+        <p:txBody>
+          <a:bodyPr wrap="square">
+            <a:normAutofit/>
+          </a:bodyPr>
+          <a:lstStyle/>
+          <a:p>
+            <a:pPr algn="r"/>
+            <a:r>
+              <a:rPr sz="1000" b="0">
+                <a:solidFill>
+                  <a:srgbClr val="475569"/>
+                </a:solidFill>
+                <a:latin typeface="Arial"/>
+              </a:rPr>
+              <a:t>12/15</a:t>
+            </a:r>
+          </a:p>
+        </p:txBody>
+      </p:sp>
+      <p:sp>
+        <p:nvSpPr>
+          <p:cNvPr id="5" name="TextBox 4"/>
+          <p:cNvSpPr txBox="1"/>
+          <p:nvPr/>
+        </p:nvSpPr>
+        <p:spPr>
+          <a:xfrm>
+            <a:off x="502920" y="6510528"/>
+            <a:ext cx="2011680" cy="182880"/>
+          </a:xfrm>
+          <a:prstGeom prst="rect">
+            <a:avLst/>
+          </a:prstGeom>
+          <a:noFill/>
+        </p:spPr>
+        <p:txBody>
+          <a:bodyPr wrap="square">
+            <a:normAutofit fontScale="77500" lnSpcReduction="20000"/>
+          </a:bodyPr>
+          <a:lstStyle/>
+          <a:p>
+            <a:pPr algn="l"/>
+            <a:r>
+              <a:rPr sz="900" b="0">
+                <a:solidFill>
+                  <a:srgbClr val="475569"/>
+                </a:solidFill>
+                <a:latin typeface="Arial"/>
+              </a:rPr>
+              <a:t>AIMiniProject</a:t>
+            </a:r>
+          </a:p>
+        </p:txBody>
+      </p:sp>
+      <p:sp>
+        <p:nvSpPr>
+          <p:cNvPr id="6" name="Rounded Rectangle 5"/>
+          <p:cNvSpPr/>
+          <p:nvPr/>
+        </p:nvSpPr>
+        <p:spPr>
+          <a:xfrm>
+            <a:off x="685800" y="1143000"/>
+            <a:ext cx="5303520" cy="4892040"/>
+          </a:xfrm>
+          <a:prstGeom prst="roundRect">
+            <a:avLst/>
+          </a:prstGeom>
+          <a:solidFill>
+            <a:srgbClr val="F8FAFC"/>
+          </a:solidFill>
+          <a:ln w="12700">
+            <a:solidFill>
+              <a:srgbClr val="CBD5E1"/>
+            </a:solidFill>
+          </a:ln>
+        </p:spPr>
+        <p:style>
+          <a:lnRef idx="1">
+            <a:schemeClr val="accent1"/>
+          </a:lnRef>
+          <a:fillRef idx="3">
+            <a:schemeClr val="accent1"/>
+          </a:fillRef>
+          <a:effectRef idx="2">
+            <a:schemeClr val="accent1"/>
+          </a:effectRef>
+          <a:fontRef idx="minor">
+            <a:schemeClr val="lt1"/>
+          </a:fontRef>
+        </p:style>
+        <p:txBody>
+          <a:bodyPr rtlCol="0" anchor="ctr"/>
+          <a:lstStyle/>
+          <a:p>
+            <a:pPr algn="ctr"/>
+            <a:endParaRPr/>
+          </a:p>
+        </p:txBody>
+      </p:sp>
+      <p:sp>
+        <p:nvSpPr>
+          <p:cNvPr id="7" name="Rounded Rectangle 6"/>
+          <p:cNvSpPr/>
+          <p:nvPr/>
+        </p:nvSpPr>
+        <p:spPr>
+          <a:xfrm>
+            <a:off x="6263640" y="1143000"/>
+            <a:ext cx="5257800" cy="4892040"/>
+          </a:xfrm>
+          <a:prstGeom prst="roundRect">
+            <a:avLst/>
+          </a:prstGeom>
+          <a:solidFill>
+            <a:srgbClr val="F8FAFC"/>
+          </a:solidFill>
+          <a:ln w="12700">
+            <a:solidFill>
+              <a:srgbClr val="CBD5E1"/>
+            </a:solidFill>
+          </a:ln>
+        </p:spPr>
+        <p:style>
+          <a:lnRef idx="1">
+            <a:schemeClr val="accent1"/>
+          </a:lnRef>
+          <a:fillRef idx="3">
+            <a:schemeClr val="accent1"/>
+          </a:fillRef>
+          <a:effectRef idx="2">
+            <a:schemeClr val="accent1"/>
+          </a:effectRef>
+          <a:fontRef idx="minor">
+            <a:schemeClr val="lt1"/>
+          </a:fontRef>
+        </p:style>
+        <p:txBody>
+          <a:bodyPr rtlCol="0" anchor="ctr"/>
+          <a:lstStyle/>
+          <a:p>
+            <a:pPr algn="ctr"/>
+            <a:endParaRPr/>
+          </a:p>
+        </p:txBody>
+      </p:sp>
+      <p:sp>
+        <p:nvSpPr>
+          <p:cNvPr id="8" name="TextBox 7"/>
+          <p:cNvSpPr txBox="1"/>
+          <p:nvPr/>
+        </p:nvSpPr>
+        <p:spPr>
+          <a:xfrm>
+            <a:off x="960120" y="1417320"/>
+            <a:ext cx="4754880" cy="4297680"/>
+          </a:xfrm>
+          <a:prstGeom prst="rect">
+            <a:avLst/>
+          </a:prstGeom>
+          <a:noFill/>
+        </p:spPr>
+        <p:txBody>
+          <a:bodyPr wrap="square">
+            <a:normAutofit/>
+          </a:bodyPr>
+          <a:lstStyle/>
+          <a:p>
+            <a:pPr>
+              <a:defRPr sz="1700">
+                <a:solidFill>
+                  <a:srgbClr val="0F172A"/>
+                </a:solidFill>
+                <a:latin typeface="Arial"/>
+              </a:defRPr>
+            </a:pPr>
+            <a:r>
+              <a:rPr dirty="0">
+                <a:latin typeface="Arial"/>
+              </a:rPr>
+              <a:t>• Sentiment:</a:t>
+            </a:r>
+          </a:p>
+          <a:p>
+            <a:pPr lvl="1">
+              <a:defRPr sz="1500">
+                <a:solidFill>
+                  <a:srgbClr val="475569"/>
+                </a:solidFill>
+                <a:latin typeface="Arial"/>
+              </a:defRPr>
+            </a:pPr>
+            <a:r>
+              <a:rPr dirty="0">
+                <a:latin typeface="Arial"/>
+              </a:rPr>
+              <a:t>• neutral </a:t>
+            </a:r>
+            <a:r>
+              <a:rPr dirty="0" err="1">
+                <a:latin typeface="Arial"/>
+              </a:rPr>
+              <a:t>thường</a:t>
+            </a:r>
+            <a:r>
+              <a:rPr dirty="0">
+                <a:latin typeface="Arial"/>
+              </a:rPr>
+              <a:t> </a:t>
+            </a:r>
+            <a:r>
+              <a:rPr dirty="0" err="1">
+                <a:latin typeface="Arial"/>
+              </a:rPr>
+              <a:t>bị</a:t>
+            </a:r>
+            <a:r>
+              <a:rPr dirty="0">
+                <a:latin typeface="Arial"/>
+              </a:rPr>
+              <a:t> </a:t>
+            </a:r>
+            <a:r>
+              <a:rPr dirty="0" err="1">
+                <a:latin typeface="Arial"/>
+              </a:rPr>
+              <a:t>dự</a:t>
+            </a:r>
+            <a:r>
+              <a:rPr dirty="0">
+                <a:latin typeface="Arial"/>
+              </a:rPr>
+              <a:t> </a:t>
+            </a:r>
+            <a:r>
+              <a:rPr dirty="0" err="1">
+                <a:latin typeface="Arial"/>
+              </a:rPr>
+              <a:t>đoán</a:t>
+            </a:r>
+            <a:r>
+              <a:rPr dirty="0">
+                <a:latin typeface="Arial"/>
+              </a:rPr>
+              <a:t> </a:t>
+            </a:r>
+            <a:r>
+              <a:rPr dirty="0" err="1">
+                <a:latin typeface="Arial"/>
+              </a:rPr>
+              <a:t>thành</a:t>
+            </a:r>
+            <a:r>
+              <a:rPr dirty="0">
+                <a:latin typeface="Arial"/>
+              </a:rPr>
+              <a:t> negative.</a:t>
+            </a:r>
+          </a:p>
+          <a:p>
+            <a:pPr lvl="1">
+              <a:defRPr sz="1500">
+                <a:solidFill>
+                  <a:srgbClr val="475569"/>
+                </a:solidFill>
+                <a:latin typeface="Arial"/>
+              </a:defRPr>
+            </a:pPr>
+            <a:r>
+              <a:rPr dirty="0">
+                <a:latin typeface="Arial"/>
+              </a:rPr>
+              <a:t>• </a:t>
+            </a:r>
+            <a:r>
+              <a:rPr dirty="0" err="1">
+                <a:latin typeface="Arial"/>
+              </a:rPr>
+              <a:t>Một</a:t>
+            </a:r>
+            <a:r>
+              <a:rPr dirty="0">
+                <a:latin typeface="Arial"/>
+              </a:rPr>
+              <a:t> </a:t>
+            </a:r>
+            <a:r>
+              <a:rPr dirty="0" err="1">
+                <a:latin typeface="Arial"/>
+              </a:rPr>
+              <a:t>số</a:t>
+            </a:r>
+            <a:r>
+              <a:rPr dirty="0">
+                <a:latin typeface="Arial"/>
+              </a:rPr>
+              <a:t> positive </a:t>
+            </a:r>
+            <a:r>
+              <a:rPr dirty="0" err="1">
+                <a:latin typeface="Arial"/>
+              </a:rPr>
+              <a:t>bị</a:t>
+            </a:r>
+            <a:r>
+              <a:rPr dirty="0">
+                <a:latin typeface="Arial"/>
+              </a:rPr>
+              <a:t> </a:t>
+            </a:r>
+            <a:r>
+              <a:rPr dirty="0" err="1">
+                <a:latin typeface="Arial"/>
+              </a:rPr>
+              <a:t>dự</a:t>
+            </a:r>
+            <a:r>
+              <a:rPr dirty="0">
+                <a:latin typeface="Arial"/>
+              </a:rPr>
+              <a:t> </a:t>
+            </a:r>
+            <a:r>
+              <a:rPr dirty="0" err="1">
+                <a:latin typeface="Arial"/>
+              </a:rPr>
+              <a:t>đoán</a:t>
+            </a:r>
+            <a:r>
+              <a:rPr dirty="0">
+                <a:latin typeface="Arial"/>
+              </a:rPr>
+              <a:t> </a:t>
+            </a:r>
+            <a:r>
+              <a:rPr dirty="0" err="1">
+                <a:latin typeface="Arial"/>
+              </a:rPr>
+              <a:t>thành</a:t>
+            </a:r>
+            <a:r>
+              <a:rPr dirty="0">
+                <a:latin typeface="Arial"/>
+              </a:rPr>
+              <a:t> neutral.</a:t>
+            </a:r>
+          </a:p>
+          <a:p>
+            <a:pPr>
+              <a:defRPr sz="1700">
+                <a:solidFill>
+                  <a:srgbClr val="0F172A"/>
+                </a:solidFill>
+                <a:latin typeface="Arial"/>
+              </a:defRPr>
+            </a:pPr>
+            <a:r>
+              <a:rPr dirty="0">
+                <a:latin typeface="Arial"/>
+              </a:rPr>
+              <a:t>• Issue:</a:t>
+            </a:r>
+          </a:p>
+          <a:p>
+            <a:pPr lvl="1">
+              <a:defRPr sz="1500">
+                <a:solidFill>
+                  <a:srgbClr val="475569"/>
+                </a:solidFill>
+                <a:latin typeface="Arial"/>
+              </a:defRPr>
+            </a:pPr>
+            <a:r>
+              <a:rPr dirty="0">
+                <a:latin typeface="Arial"/>
+              </a:rPr>
+              <a:t>• </a:t>
+            </a:r>
+            <a:r>
+              <a:rPr dirty="0" err="1">
+                <a:latin typeface="Arial"/>
+              </a:rPr>
+              <a:t>product_quality</a:t>
+            </a:r>
+            <a:r>
+              <a:rPr dirty="0">
+                <a:latin typeface="Arial"/>
+              </a:rPr>
+              <a:t> </a:t>
+            </a:r>
+            <a:r>
+              <a:rPr dirty="0" err="1">
+                <a:latin typeface="Arial"/>
+              </a:rPr>
+              <a:t>và</a:t>
+            </a:r>
+            <a:r>
+              <a:rPr dirty="0">
+                <a:latin typeface="Arial"/>
+              </a:rPr>
+              <a:t> </a:t>
+            </a:r>
+            <a:r>
+              <a:rPr dirty="0" err="1">
+                <a:latin typeface="Arial"/>
+              </a:rPr>
+              <a:t>product_attribute</a:t>
+            </a:r>
+            <a:r>
+              <a:rPr dirty="0">
+                <a:latin typeface="Arial"/>
+              </a:rPr>
+              <a:t> </a:t>
+            </a:r>
+            <a:r>
+              <a:rPr dirty="0" err="1">
+                <a:latin typeface="Arial"/>
+              </a:rPr>
+              <a:t>dễ</a:t>
+            </a:r>
+            <a:r>
+              <a:rPr dirty="0">
+                <a:latin typeface="Arial"/>
+              </a:rPr>
+              <a:t> </a:t>
+            </a:r>
+            <a:r>
+              <a:rPr dirty="0" err="1">
+                <a:latin typeface="Arial"/>
+              </a:rPr>
+              <a:t>nhầm</a:t>
+            </a:r>
+            <a:r>
+              <a:rPr dirty="0">
+                <a:latin typeface="Arial"/>
+              </a:rPr>
+              <a:t> </a:t>
+            </a:r>
+            <a:r>
+              <a:rPr dirty="0" err="1">
+                <a:latin typeface="Arial"/>
+              </a:rPr>
+              <a:t>với</a:t>
+            </a:r>
+            <a:r>
+              <a:rPr dirty="0">
+                <a:latin typeface="Arial"/>
+              </a:rPr>
+              <a:t> </a:t>
+            </a:r>
+            <a:r>
+              <a:rPr dirty="0" err="1">
+                <a:latin typeface="Arial"/>
+              </a:rPr>
+              <a:t>nhau</a:t>
+            </a:r>
+            <a:r>
+              <a:rPr dirty="0">
+                <a:latin typeface="Arial"/>
+              </a:rPr>
+              <a:t>.</a:t>
+            </a:r>
+          </a:p>
+          <a:p>
+            <a:pPr lvl="1">
+              <a:defRPr sz="1500">
+                <a:solidFill>
+                  <a:srgbClr val="475569"/>
+                </a:solidFill>
+                <a:latin typeface="Arial"/>
+              </a:defRPr>
+            </a:pPr>
+            <a:r>
+              <a:rPr dirty="0">
+                <a:latin typeface="Arial"/>
+              </a:rPr>
+              <a:t>• </a:t>
+            </a:r>
+            <a:r>
+              <a:rPr dirty="0" err="1">
+                <a:latin typeface="Arial"/>
+              </a:rPr>
+              <a:t>Một</a:t>
+            </a:r>
+            <a:r>
+              <a:rPr dirty="0">
+                <a:latin typeface="Arial"/>
+              </a:rPr>
+              <a:t> </a:t>
+            </a:r>
+            <a:r>
+              <a:rPr dirty="0" err="1">
+                <a:latin typeface="Arial"/>
+              </a:rPr>
+              <a:t>số</a:t>
+            </a:r>
+            <a:r>
+              <a:rPr dirty="0">
+                <a:latin typeface="Arial"/>
+              </a:rPr>
+              <a:t> </a:t>
+            </a:r>
+            <a:r>
+              <a:rPr dirty="0" err="1">
+                <a:latin typeface="Arial"/>
+              </a:rPr>
+              <a:t>no_issue</a:t>
+            </a:r>
+            <a:r>
+              <a:rPr dirty="0">
+                <a:latin typeface="Arial"/>
+              </a:rPr>
+              <a:t> </a:t>
+            </a:r>
+            <a:r>
+              <a:rPr dirty="0" err="1">
+                <a:latin typeface="Arial"/>
+              </a:rPr>
+              <a:t>bị</a:t>
+            </a:r>
+            <a:r>
+              <a:rPr dirty="0">
+                <a:latin typeface="Arial"/>
+              </a:rPr>
+              <a:t> </a:t>
+            </a:r>
+            <a:r>
+              <a:rPr dirty="0" err="1">
+                <a:latin typeface="Arial"/>
+              </a:rPr>
+              <a:t>nhầm</a:t>
+            </a:r>
+            <a:r>
+              <a:rPr dirty="0">
+                <a:latin typeface="Arial"/>
+              </a:rPr>
+              <a:t> sang issue </a:t>
+            </a:r>
+            <a:r>
+              <a:rPr dirty="0" err="1">
+                <a:latin typeface="Arial"/>
+              </a:rPr>
+              <a:t>liên</a:t>
+            </a:r>
+            <a:r>
+              <a:rPr dirty="0">
+                <a:latin typeface="Arial"/>
+              </a:rPr>
+              <a:t> </a:t>
+            </a:r>
+            <a:r>
+              <a:rPr dirty="0" err="1">
+                <a:latin typeface="Arial"/>
+              </a:rPr>
+              <a:t>quan</a:t>
+            </a:r>
+            <a:r>
+              <a:rPr dirty="0">
+                <a:latin typeface="Arial"/>
+              </a:rPr>
+              <a:t> </a:t>
+            </a:r>
+            <a:r>
+              <a:rPr dirty="0" err="1">
+                <a:latin typeface="Arial"/>
+              </a:rPr>
+              <a:t>đến</a:t>
+            </a:r>
+            <a:r>
+              <a:rPr dirty="0">
+                <a:latin typeface="Arial"/>
+              </a:rPr>
+              <a:t> </a:t>
+            </a:r>
+            <a:r>
+              <a:rPr dirty="0" err="1">
+                <a:latin typeface="Arial"/>
+              </a:rPr>
+              <a:t>sản</a:t>
+            </a:r>
+            <a:r>
+              <a:rPr dirty="0">
+                <a:latin typeface="Arial"/>
+              </a:rPr>
+              <a:t> </a:t>
+            </a:r>
+            <a:r>
+              <a:rPr dirty="0" err="1">
+                <a:latin typeface="Arial"/>
+              </a:rPr>
+              <a:t>phẩm</a:t>
+            </a:r>
+            <a:r>
+              <a:rPr dirty="0">
+                <a:latin typeface="Arial"/>
+              </a:rPr>
+              <a:t>.</a:t>
+            </a:r>
+          </a:p>
+        </p:txBody>
+      </p:sp>
+      <p:sp>
+        <p:nvSpPr>
+          <p:cNvPr id="9" name="TextBox 8"/>
+          <p:cNvSpPr txBox="1"/>
+          <p:nvPr/>
+        </p:nvSpPr>
+        <p:spPr>
+          <a:xfrm>
+            <a:off x="6537960" y="1417320"/>
+            <a:ext cx="4663440" cy="4297680"/>
+          </a:xfrm>
+          <a:prstGeom prst="rect">
+            <a:avLst/>
+          </a:prstGeom>
+          <a:noFill/>
+        </p:spPr>
+        <p:txBody>
+          <a:bodyPr wrap="square">
+            <a:normAutofit/>
+          </a:bodyPr>
+          <a:lstStyle/>
+          <a:p>
+            <a:pPr>
+              <a:defRPr sz="1700">
+                <a:solidFill>
+                  <a:srgbClr val="0F172A"/>
+                </a:solidFill>
+                <a:latin typeface="Arial"/>
+              </a:defRPr>
+            </a:pPr>
+            <a:r>
+              <a:rPr>
+                <a:latin typeface="Arial"/>
+              </a:rPr>
+              <a:t>• Nguyên nhân:</a:t>
+            </a:r>
+          </a:p>
+          <a:p>
+            <a:pPr lvl="1">
+              <a:defRPr sz="1500">
+                <a:solidFill>
+                  <a:srgbClr val="475569"/>
+                </a:solidFill>
+                <a:latin typeface="Arial"/>
+              </a:defRPr>
+            </a:pPr>
+            <a:r>
+              <a:rPr>
+                <a:latin typeface="Arial"/>
+              </a:rPr>
+              <a:t>• Review ngắn và thiếu ngữ cảnh.</a:t>
+            </a:r>
+          </a:p>
+          <a:p>
+            <a:pPr lvl="1">
+              <a:defRPr sz="1500">
+                <a:solidFill>
+                  <a:srgbClr val="475569"/>
+                </a:solidFill>
+                <a:latin typeface="Arial"/>
+              </a:defRPr>
+            </a:pPr>
+            <a:r>
+              <a:rPr>
+                <a:latin typeface="Arial"/>
+              </a:rPr>
+              <a:t>• Cách viết informal, nhiều biến thể.</a:t>
+            </a:r>
+          </a:p>
+          <a:p>
+            <a:pPr lvl="1">
+              <a:defRPr sz="1500">
+                <a:solidFill>
+                  <a:srgbClr val="475569"/>
+                </a:solidFill>
+                <a:latin typeface="Arial"/>
+              </a:defRPr>
+            </a:pPr>
+            <a:r>
+              <a:rPr>
+                <a:latin typeface="Arial"/>
+              </a:rPr>
+              <a:t>• Một review có thể chứa nhiều vấn đề.</a:t>
+            </a:r>
+          </a:p>
+          <a:p>
+            <a:pPr lvl="1">
+              <a:defRPr sz="1500">
+                <a:solidFill>
+                  <a:srgbClr val="475569"/>
+                </a:solidFill>
+                <a:latin typeface="Arial"/>
+              </a:defRPr>
+            </a:pPr>
+            <a:r>
+              <a:rPr>
+                <a:latin typeface="Arial"/>
+              </a:rPr>
+              <a:t>• Bài toán issue hiện là single-label nên chỉ chọn một issue chính.</a:t>
+            </a:r>
+          </a:p>
+        </p:txBody>
+      </p:sp>
+    </p:spTree>
+  </p:cSld>
+  <p:clrMapOvr>
+    <a:masterClrMapping/>
+  </p:clrMapOvr>
+</p:sld>
+</file>
+
+<file path=ppt/slides/slide17.xml><?xml version="1.0" encoding="utf-8"?>
+<p:sld xmlns:a="http://schemas.openxmlformats.org/drawingml/2006/main" xmlns:r="http://schemas.openxmlformats.org/officeDocument/2006/relationships" xmlns:p="http://schemas.openxmlformats.org/presentationml/2006/main">
+  <p:cSld>
+    <p:bg>
+      <p:bgPr>
+        <a:solidFill>
+          <a:srgbClr val="FFFFFF"/>
+        </a:solidFill>
+        <a:effectLst/>
+      </p:bgPr>
+    </p:bg>
+    <p:spTree>
+      <p:nvGrpSpPr>
+        <p:cNvPr id="1" name=""/>
+        <p:cNvGrpSpPr/>
+        <p:nvPr/>
+      </p:nvGrpSpPr>
+      <p:grpSpPr>
+        <a:xfrm>
+          <a:off x="0" y="0"/>
+          <a:ext cx="0" cy="0"/>
+          <a:chOff x="0" y="0"/>
+          <a:chExt cx="0" cy="0"/>
+        </a:xfrm>
+      </p:grpSpPr>
+      <p:sp>
+        <p:nvSpPr>
+          <p:cNvPr id="2" name="Rectangle 1"/>
+          <p:cNvSpPr/>
+          <p:nvPr/>
+        </p:nvSpPr>
+        <p:spPr>
+          <a:xfrm>
+            <a:off x="0" y="0"/>
+            <a:ext cx="12191695" cy="164592"/>
+          </a:xfrm>
+          <a:prstGeom prst="rect">
+            <a:avLst/>
+          </a:prstGeom>
+          <a:solidFill>
+            <a:srgbClr val="0F766E"/>
+          </a:solidFill>
+          <a:ln>
+            <a:noFill/>
+          </a:ln>
+        </p:spPr>
+        <p:style>
+          <a:lnRef idx="1">
+            <a:schemeClr val="accent1"/>
+          </a:lnRef>
+          <a:fillRef idx="3">
+            <a:schemeClr val="accent1"/>
+          </a:fillRef>
+          <a:effectRef idx="2">
+            <a:schemeClr val="accent1"/>
+          </a:effectRef>
+          <a:fontRef idx="minor">
+            <a:schemeClr val="lt1"/>
+          </a:fontRef>
+        </p:style>
+        <p:txBody>
+          <a:bodyPr rtlCol="0" anchor="ctr"/>
+          <a:lstStyle/>
+          <a:p>
+            <a:pPr algn="ctr"/>
+            <a:endParaRPr/>
+          </a:p>
+        </p:txBody>
+      </p:sp>
+      <p:sp>
+        <p:nvSpPr>
+          <p:cNvPr id="3" name="TextBox 2"/>
+          <p:cNvSpPr txBox="1"/>
+          <p:nvPr/>
+        </p:nvSpPr>
+        <p:spPr>
+          <a:xfrm>
+            <a:off x="502920" y="320040"/>
+            <a:ext cx="9509760" cy="502920"/>
+          </a:xfrm>
+          <a:prstGeom prst="rect">
+            <a:avLst/>
+          </a:prstGeom>
+          <a:noFill/>
+        </p:spPr>
+        <p:txBody>
+          <a:bodyPr wrap="square">
+            <a:normAutofit lnSpcReduction="10000"/>
+          </a:bodyPr>
+          <a:lstStyle/>
+          <a:p>
+            <a:pPr algn="l"/>
+            <a:r>
+              <a:rPr lang="en-US" sz="2800" b="1" dirty="0" err="1">
+                <a:solidFill>
+                  <a:srgbClr val="142A41"/>
+                </a:solidFill>
+                <a:latin typeface="Arial"/>
+              </a:rPr>
+              <a:t>Nhận</a:t>
+            </a:r>
+            <a:r>
+              <a:rPr lang="en-US" sz="2800" b="1" dirty="0">
+                <a:solidFill>
+                  <a:srgbClr val="142A41"/>
+                </a:solidFill>
+                <a:latin typeface="Arial"/>
+              </a:rPr>
+              <a:t> </a:t>
+            </a:r>
+            <a:r>
+              <a:rPr lang="en-US" sz="2800" b="1" dirty="0" err="1">
+                <a:solidFill>
+                  <a:srgbClr val="142A41"/>
+                </a:solidFill>
+                <a:latin typeface="Arial"/>
+              </a:rPr>
+              <a:t>xét</a:t>
+            </a:r>
+            <a:r>
+              <a:rPr lang="en-US" sz="2800" b="1" dirty="0">
+                <a:solidFill>
+                  <a:srgbClr val="142A41"/>
+                </a:solidFill>
+                <a:latin typeface="Arial"/>
+              </a:rPr>
+              <a:t> 2 models</a:t>
+            </a:r>
+            <a:endParaRPr sz="2800" b="1" dirty="0">
+              <a:solidFill>
+                <a:srgbClr val="142A41"/>
+              </a:solidFill>
+              <a:latin typeface="Arial"/>
+            </a:endParaRPr>
+          </a:p>
+        </p:txBody>
+      </p:sp>
+      <p:sp>
+        <p:nvSpPr>
+          <p:cNvPr id="4" name="TextBox 3"/>
+          <p:cNvSpPr txBox="1"/>
+          <p:nvPr/>
+        </p:nvSpPr>
+        <p:spPr>
+          <a:xfrm>
+            <a:off x="10972800" y="347472"/>
+            <a:ext cx="685800" cy="274320"/>
+          </a:xfrm>
+          <a:prstGeom prst="rect">
+            <a:avLst/>
+          </a:prstGeom>
+          <a:noFill/>
+        </p:spPr>
+        <p:txBody>
+          <a:bodyPr wrap="square">
+            <a:normAutofit/>
+          </a:bodyPr>
+          <a:lstStyle/>
+          <a:p>
+            <a:pPr algn="r"/>
+            <a:r>
+              <a:rPr sz="1000" b="0">
+                <a:solidFill>
+                  <a:srgbClr val="475569"/>
+                </a:solidFill>
+                <a:latin typeface="Arial"/>
+              </a:rPr>
+              <a:t>14/15</a:t>
+            </a:r>
+          </a:p>
+        </p:txBody>
+      </p:sp>
+      <p:sp>
+        <p:nvSpPr>
+          <p:cNvPr id="5" name="TextBox 4"/>
+          <p:cNvSpPr txBox="1"/>
+          <p:nvPr/>
+        </p:nvSpPr>
+        <p:spPr>
+          <a:xfrm>
+            <a:off x="502920" y="6510528"/>
+            <a:ext cx="2011680" cy="182880"/>
+          </a:xfrm>
+          <a:prstGeom prst="rect">
+            <a:avLst/>
+          </a:prstGeom>
+          <a:noFill/>
+        </p:spPr>
+        <p:txBody>
+          <a:bodyPr wrap="square">
+            <a:normAutofit fontScale="77500" lnSpcReduction="20000"/>
+          </a:bodyPr>
+          <a:lstStyle/>
+          <a:p>
+            <a:pPr algn="l"/>
+            <a:r>
+              <a:rPr sz="900" b="0">
+                <a:solidFill>
+                  <a:srgbClr val="475569"/>
+                </a:solidFill>
+                <a:latin typeface="Arial"/>
+              </a:rPr>
+              <a:t>AIMiniProject</a:t>
+            </a:r>
+          </a:p>
+        </p:txBody>
+      </p:sp>
+      <p:sp>
+        <p:nvSpPr>
+          <p:cNvPr id="7" name="TextBox 6"/>
+          <p:cNvSpPr txBox="1"/>
+          <p:nvPr/>
+        </p:nvSpPr>
+        <p:spPr>
+          <a:xfrm>
             <a:off x="1051560" y="1444752"/>
             <a:ext cx="685800" cy="274320"/>
           </a:xfrm>
@@ -7365,6 +9524,370 @@
           <a:lstStyle/>
           <a:p>
             <a:pPr algn="l"/>
+            <a:endParaRPr sz="1400" b="1" dirty="0">
+              <a:solidFill>
+                <a:srgbClr val="2563EB"/>
+              </a:solidFill>
+              <a:latin typeface="Arial"/>
+            </a:endParaRPr>
+          </a:p>
+        </p:txBody>
+      </p:sp>
+      <p:sp>
+        <p:nvSpPr>
+          <p:cNvPr id="10" name="TextBox 9"/>
+          <p:cNvSpPr txBox="1"/>
+          <p:nvPr/>
+        </p:nvSpPr>
+        <p:spPr>
+          <a:xfrm>
+            <a:off x="1325880" y="5486400"/>
+            <a:ext cx="9509760" cy="320040"/>
+          </a:xfrm>
+          <a:prstGeom prst="rect">
+            <a:avLst/>
+          </a:prstGeom>
+          <a:noFill/>
+        </p:spPr>
+        <p:txBody>
+          <a:bodyPr wrap="square">
+            <a:normAutofit/>
+          </a:bodyPr>
+          <a:lstStyle/>
+          <a:p>
+            <a:pPr algn="ctr"/>
+            <a:endParaRPr sz="1500" b="0" dirty="0">
+              <a:solidFill>
+                <a:srgbClr val="475569"/>
+              </a:solidFill>
+              <a:latin typeface="Arial"/>
+            </a:endParaRPr>
+          </a:p>
+        </p:txBody>
+      </p:sp>
+      <p:sp>
+        <p:nvSpPr>
+          <p:cNvPr id="11" name="TextBox 10">
+            <a:extLst>
+              <a:ext uri="{FF2B5EF4-FFF2-40B4-BE49-F238E27FC236}">
+                <a16:creationId xmlns:a16="http://schemas.microsoft.com/office/drawing/2014/main" id="{36C59F95-1DB0-EDBB-594D-0372870AD2B6}"/>
+              </a:ext>
+            </a:extLst>
+          </p:cNvPr>
+          <p:cNvSpPr txBox="1"/>
+          <p:nvPr/>
+        </p:nvSpPr>
+        <p:spPr>
+          <a:xfrm>
+            <a:off x="747252" y="1153619"/>
+            <a:ext cx="10393188" cy="3693319"/>
+          </a:xfrm>
+          <a:prstGeom prst="rect">
+            <a:avLst/>
+          </a:prstGeom>
+          <a:noFill/>
+        </p:spPr>
+        <p:txBody>
+          <a:bodyPr wrap="square" rtlCol="0">
+            <a:spAutoFit/>
+          </a:bodyPr>
+          <a:lstStyle/>
+          <a:p>
+            <a:r>
+              <a:rPr lang="vi-VN" dirty="0"/>
+              <a:t>• Naive Bayes được dùng làm baseline vì đơn giản, dễ cài đặt và dễ giải thích bằng xác suất.</a:t>
+            </a:r>
+          </a:p>
+          <a:p>
+            <a:endParaRPr lang="vi-VN" dirty="0"/>
+          </a:p>
+          <a:p>
+            <a:r>
+              <a:rPr lang="vi-VN" dirty="0"/>
+              <a:t>• Tuy nhiên, Naive Bayes giả định các từ độc lập với nhau, nên khó xử lý tốt các review có ngữ cảnh phức tạp hoặc nhiều cụm từ mang nghĩa kết hợp.</a:t>
+            </a:r>
+          </a:p>
+          <a:p>
+            <a:endParaRPr lang="vi-VN" dirty="0"/>
+          </a:p>
+          <a:p>
+            <a:r>
+              <a:rPr lang="vi-VN" dirty="0"/>
+              <a:t>• Linear SVM hoạt động tốt hơn vì mô hình học trọng số cho từng feature TF-IDF và tìm biên phân tách giữa các lớp trong không gian vector.</a:t>
+            </a:r>
+          </a:p>
+          <a:p>
+            <a:endParaRPr lang="vi-VN" dirty="0"/>
+          </a:p>
+          <a:p>
+            <a:r>
+              <a:rPr lang="vi-VN" dirty="0"/>
+              <a:t>• Với dữ liệu review Shopee, TF-IDF + Linear SVM phù hợp hơn do dữ liệu nhiều chiều, thưa và có nhiều từ/cụm từ đặc trưng cho từng lớp.</a:t>
+            </a:r>
+          </a:p>
+          <a:p>
+            <a:endParaRPr lang="vi-VN" dirty="0"/>
+          </a:p>
+          <a:p>
+            <a:r>
+              <a:rPr lang="vi-VN" dirty="0"/>
+              <a:t>• Với issue classification, safe issue rules giúp sửa một số lỗi rõ ràng của model như giao chậm, thiếu hàng, giao sai hoặc đóng gói lỗi.</a:t>
+            </a:r>
+            <a:endParaRPr lang="en-US" dirty="0"/>
+          </a:p>
+        </p:txBody>
+      </p:sp>
+    </p:spTree>
+  </p:cSld>
+  <p:clrMapOvr>
+    <a:masterClrMapping/>
+  </p:clrMapOvr>
+</p:sld>
+</file>
+
+<file path=ppt/slides/slide18.xml><?xml version="1.0" encoding="utf-8"?>
+<p:sld xmlns:a="http://schemas.openxmlformats.org/drawingml/2006/main" xmlns:r="http://schemas.openxmlformats.org/officeDocument/2006/relationships" xmlns:p="http://schemas.openxmlformats.org/presentationml/2006/main">
+  <p:cSld>
+    <p:bg>
+      <p:bgPr>
+        <a:solidFill>
+          <a:srgbClr val="FFFFFF"/>
+        </a:solidFill>
+        <a:effectLst/>
+      </p:bgPr>
+    </p:bg>
+    <p:spTree>
+      <p:nvGrpSpPr>
+        <p:cNvPr id="1" name=""/>
+        <p:cNvGrpSpPr/>
+        <p:nvPr/>
+      </p:nvGrpSpPr>
+      <p:grpSpPr>
+        <a:xfrm>
+          <a:off x="0" y="0"/>
+          <a:ext cx="0" cy="0"/>
+          <a:chOff x="0" y="0"/>
+          <a:chExt cx="0" cy="0"/>
+        </a:xfrm>
+      </p:grpSpPr>
+      <p:sp>
+        <p:nvSpPr>
+          <p:cNvPr id="2" name="Rectangle 1"/>
+          <p:cNvSpPr/>
+          <p:nvPr/>
+        </p:nvSpPr>
+        <p:spPr>
+          <a:xfrm>
+            <a:off x="0" y="0"/>
+            <a:ext cx="12191695" cy="164592"/>
+          </a:xfrm>
+          <a:prstGeom prst="rect">
+            <a:avLst/>
+          </a:prstGeom>
+          <a:solidFill>
+            <a:srgbClr val="0F766E"/>
+          </a:solidFill>
+          <a:ln>
+            <a:noFill/>
+          </a:ln>
+        </p:spPr>
+        <p:style>
+          <a:lnRef idx="1">
+            <a:schemeClr val="accent1"/>
+          </a:lnRef>
+          <a:fillRef idx="3">
+            <a:schemeClr val="accent1"/>
+          </a:fillRef>
+          <a:effectRef idx="2">
+            <a:schemeClr val="accent1"/>
+          </a:effectRef>
+          <a:fontRef idx="minor">
+            <a:schemeClr val="lt1"/>
+          </a:fontRef>
+        </p:style>
+        <p:txBody>
+          <a:bodyPr rtlCol="0" anchor="ctr"/>
+          <a:lstStyle/>
+          <a:p>
+            <a:pPr algn="ctr"/>
+            <a:endParaRPr/>
+          </a:p>
+        </p:txBody>
+      </p:sp>
+      <p:sp>
+        <p:nvSpPr>
+          <p:cNvPr id="3" name="TextBox 2"/>
+          <p:cNvSpPr txBox="1"/>
+          <p:nvPr/>
+        </p:nvSpPr>
+        <p:spPr>
+          <a:xfrm>
+            <a:off x="502920" y="320040"/>
+            <a:ext cx="9509760" cy="502920"/>
+          </a:xfrm>
+          <a:prstGeom prst="rect">
+            <a:avLst/>
+          </a:prstGeom>
+          <a:noFill/>
+        </p:spPr>
+        <p:txBody>
+          <a:bodyPr wrap="square">
+            <a:normAutofit lnSpcReduction="10000"/>
+          </a:bodyPr>
+          <a:lstStyle/>
+          <a:p>
+            <a:pPr algn="l"/>
+            <a:r>
+              <a:rPr sz="2800" b="1">
+                <a:solidFill>
+                  <a:srgbClr val="142A41"/>
+                </a:solidFill>
+                <a:latin typeface="Arial"/>
+              </a:rPr>
+              <a:t>Demo</a:t>
+            </a:r>
+          </a:p>
+        </p:txBody>
+      </p:sp>
+      <p:sp>
+        <p:nvSpPr>
+          <p:cNvPr id="4" name="TextBox 3"/>
+          <p:cNvSpPr txBox="1"/>
+          <p:nvPr/>
+        </p:nvSpPr>
+        <p:spPr>
+          <a:xfrm>
+            <a:off x="10972800" y="347472"/>
+            <a:ext cx="685800" cy="274320"/>
+          </a:xfrm>
+          <a:prstGeom prst="rect">
+            <a:avLst/>
+          </a:prstGeom>
+          <a:noFill/>
+        </p:spPr>
+        <p:txBody>
+          <a:bodyPr wrap="square">
+            <a:normAutofit/>
+          </a:bodyPr>
+          <a:lstStyle/>
+          <a:p>
+            <a:pPr algn="r"/>
+            <a:r>
+              <a:rPr sz="1000" b="0">
+                <a:solidFill>
+                  <a:srgbClr val="475569"/>
+                </a:solidFill>
+                <a:latin typeface="Arial"/>
+              </a:rPr>
+              <a:t>14/15</a:t>
+            </a:r>
+          </a:p>
+        </p:txBody>
+      </p:sp>
+      <p:sp>
+        <p:nvSpPr>
+          <p:cNvPr id="5" name="TextBox 4"/>
+          <p:cNvSpPr txBox="1"/>
+          <p:nvPr/>
+        </p:nvSpPr>
+        <p:spPr>
+          <a:xfrm>
+            <a:off x="502920" y="6510528"/>
+            <a:ext cx="2011680" cy="182880"/>
+          </a:xfrm>
+          <a:prstGeom prst="rect">
+            <a:avLst/>
+          </a:prstGeom>
+          <a:noFill/>
+        </p:spPr>
+        <p:txBody>
+          <a:bodyPr wrap="square">
+            <a:normAutofit fontScale="77500" lnSpcReduction="20000"/>
+          </a:bodyPr>
+          <a:lstStyle/>
+          <a:p>
+            <a:pPr algn="l"/>
+            <a:r>
+              <a:rPr sz="900" b="0">
+                <a:solidFill>
+                  <a:srgbClr val="475569"/>
+                </a:solidFill>
+                <a:latin typeface="Arial"/>
+              </a:rPr>
+              <a:t>AIMiniProject</a:t>
+            </a:r>
+          </a:p>
+        </p:txBody>
+      </p:sp>
+      <p:sp>
+        <p:nvSpPr>
+          <p:cNvPr id="6" name="Rounded Rectangle 5"/>
+          <p:cNvSpPr/>
+          <p:nvPr/>
+        </p:nvSpPr>
+        <p:spPr>
+          <a:xfrm>
+            <a:off x="777240" y="1234440"/>
+            <a:ext cx="10698480" cy="960120"/>
+          </a:xfrm>
+          <a:prstGeom prst="roundRect">
+            <a:avLst/>
+          </a:prstGeom>
+          <a:solidFill>
+            <a:srgbClr val="EFF6FF"/>
+          </a:solidFill>
+          <a:ln w="12700">
+            <a:solidFill>
+              <a:srgbClr val="93C5FD"/>
+            </a:solidFill>
+          </a:ln>
+        </p:spPr>
+        <p:style>
+          <a:lnRef idx="1">
+            <a:schemeClr val="accent1"/>
+          </a:lnRef>
+          <a:fillRef idx="3">
+            <a:schemeClr val="accent1"/>
+          </a:fillRef>
+          <a:effectRef idx="2">
+            <a:schemeClr val="accent1"/>
+          </a:effectRef>
+          <a:fontRef idx="minor">
+            <a:schemeClr val="lt1"/>
+          </a:fontRef>
+        </p:style>
+        <p:txBody>
+          <a:bodyPr rtlCol="0" anchor="ctr"/>
+          <a:lstStyle/>
+          <a:p>
+            <a:pPr algn="ctr"/>
+            <a:endParaRPr/>
+          </a:p>
+        </p:txBody>
+      </p:sp>
+      <p:sp>
+        <p:nvSpPr>
+          <p:cNvPr id="7" name="TextBox 6"/>
+          <p:cNvSpPr txBox="1"/>
+          <p:nvPr/>
+        </p:nvSpPr>
+        <p:spPr>
+          <a:xfrm>
+            <a:off x="1051560" y="1444752"/>
+            <a:ext cx="685800" cy="274320"/>
+          </a:xfrm>
+          <a:prstGeom prst="rect">
+            <a:avLst/>
+          </a:prstGeom>
+          <a:noFill/>
+        </p:spPr>
+        <p:txBody>
+          <a:bodyPr wrap="square">
+            <a:normAutofit fontScale="92500" lnSpcReduction="10000"/>
+          </a:bodyPr>
+          <a:lstStyle/>
+          <a:p>
+            <a:pPr algn="l"/>
             <a:r>
               <a:rPr sz="1400" b="1">
                 <a:solidFill>
@@ -7386,7 +9909,7 @@
         <p:spPr>
           <a:xfrm>
             <a:off x="1828800" y="1417320"/>
-            <a:ext cx="8686800" cy="320040"/>
+            <a:ext cx="8686800" cy="777240"/>
           </a:xfrm>
           <a:prstGeom prst="rect">
             <a:avLst/>
@@ -7401,14 +9924,20 @@
           <a:p>
             <a:pPr algn="l"/>
             <a:r>
-              <a:rPr sz="2100" b="1">
+              <a:rPr lang="vi-VN" sz="2100" b="1" dirty="0">
                 <a:solidFill>
                   <a:srgbClr val="142A41"/>
                 </a:solidFill>
                 <a:latin typeface="Consolas"/>
               </a:rPr>
-              <a:t>shop giao cham, hop bi mop</a:t>
-            </a:r>
+              <a:t>Giao hàng nhanh, đóng gói cũng đc tuy nhiên ốp bị ố ở viền , k lau sạch được ! Ốp cũng k ôm hết máy ! Bửa nhẹ phần viền để ốp máy vào thì bung! Hơi thất vọng!</a:t>
+            </a:r>
+            <a:endParaRPr sz="2100" b="1" dirty="0">
+              <a:solidFill>
+                <a:srgbClr val="142A41"/>
+              </a:solidFill>
+              <a:latin typeface="Consolas"/>
+            </a:endParaRPr>
           </a:p>
         </p:txBody>
       </p:sp>
@@ -7418,11 +9947,17 @@
           <p:cNvGraphicFramePr>
             <a:graphicFrameLocks noGrp="1"/>
           </p:cNvGraphicFramePr>
-          <p:nvPr/>
+          <p:nvPr>
+            <p:extLst>
+              <p:ext uri="{D42A27DB-BD31-4B8C-83A1-F6EECF244321}">
+                <p14:modId xmlns:p14="http://schemas.microsoft.com/office/powerpoint/2010/main" val="4087847612"/>
+              </p:ext>
+            </p:extLst>
+          </p:nvPr>
         </p:nvGraphicFramePr>
         <p:xfrm>
           <a:off x="1325880" y="2743200"/>
-          <a:ext cx="9509760" cy="2240280"/>
+          <a:ext cx="9509760" cy="1516380"/>
         </p:xfrm>
         <a:graphic>
           <a:graphicData uri="http://schemas.openxmlformats.org/drawingml/2006/table">
@@ -7540,8 +10075,10 @@
                         </a:defRPr>
                       </a:pPr>
                       <a:r>
-                        <a:t>shop giao cham hop bi mop</a:t>
+                        <a:rPr lang="vi-VN" dirty="0"/>
+                        <a:t>giao hàng nhanh đóng gói cũng duoc tuy nhiên ốp bị ố ở viền khong lau sạch duoc ốp cũng khong ôm hết máy bửa nhẹ phần viền để ốp máy vào thì bung hơi thất vọng</a:t>
                       </a:r>
+                      <a:endParaRPr dirty="0"/>
                     </a:p>
                   </a:txBody>
                   <a:tcPr>
@@ -7626,6 +10163,7 @@
                         </a:defRPr>
                       </a:pPr>
                       <a:r>
+                        <a:rPr dirty="0"/>
                         <a:t>Issue</a:t>
                       </a:r>
                     </a:p>
@@ -7650,8 +10188,10 @@
                         </a:defRPr>
                       </a:pPr>
                       <a:r>
-                        <a:t>packaging</a:t>
+                        <a:rPr lang="en-US" dirty="0" err="1"/>
+                        <a:t>product_quality</a:t>
                       </a:r>
+                      <a:endParaRPr dirty="0"/>
                     </a:p>
                   </a:txBody>
                   <a:tcPr>
@@ -7666,156 +10206,16 @@
                   </a:ext>
                 </a:extLst>
               </a:tr>
-              <a:tr h="373380">
-                <a:tc>
-                  <a:txBody>
-                    <a:bodyPr/>
-                    <a:lstStyle/>
-                    <a:p>
-                      <a:pPr>
-                        <a:defRPr sz="1100" b="0">
-                          <a:solidFill>
-                            <a:srgbClr val="0F172A"/>
-                          </a:solidFill>
-                          <a:latin typeface="Arial"/>
-                        </a:defRPr>
-                      </a:pPr>
-                      <a:r>
-                        <a:t>Sentiment rule</a:t>
-                      </a:r>
-                    </a:p>
-                  </a:txBody>
-                  <a:tcPr>
-                    <a:solidFill>
-                      <a:srgbClr val="FFFFFF"/>
-                    </a:solidFill>
-                  </a:tcPr>
-                </a:tc>
-                <a:tc>
-                  <a:txBody>
-                    <a:bodyPr/>
-                    <a:lstStyle/>
-                    <a:p>
-                      <a:pPr>
-                        <a:defRPr sz="1100" b="0">
-                          <a:solidFill>
-                            <a:srgbClr val="0F172A"/>
-                          </a:solidFill>
-                          <a:latin typeface="Arial"/>
-                        </a:defRPr>
-                      </a:pPr>
-                      <a:r>
-                        <a:t>clear_negative_rule</a:t>
-                      </a:r>
-                    </a:p>
-                  </a:txBody>
-                  <a:tcPr>
-                    <a:solidFill>
-                      <a:srgbClr val="FFFFFF"/>
-                    </a:solidFill>
-                  </a:tcPr>
-                </a:tc>
-                <a:extLst>
-                  <a:ext uri="{0D108BD9-81ED-4DB2-BD59-A6C34878D82A}">
-                    <a16:rowId xmlns:a16="http://schemas.microsoft.com/office/drawing/2014/main" val="10004"/>
-                  </a:ext>
-                </a:extLst>
-              </a:tr>
-              <a:tr h="373380">
-                <a:tc>
-                  <a:txBody>
-                    <a:bodyPr/>
-                    <a:lstStyle/>
-                    <a:p>
-                      <a:pPr>
-                        <a:defRPr sz="1100" b="0">
-                          <a:solidFill>
-                            <a:srgbClr val="0F172A"/>
-                          </a:solidFill>
-                          <a:latin typeface="Arial"/>
-                        </a:defRPr>
-                      </a:pPr>
-                      <a:r>
-                        <a:t>Issue rule</a:t>
-                      </a:r>
-                    </a:p>
-                  </a:txBody>
-                  <a:tcPr>
-                    <a:solidFill>
-                      <a:srgbClr val="F8FAFC"/>
-                    </a:solidFill>
-                  </a:tcPr>
-                </a:tc>
-                <a:tc>
-                  <a:txBody>
-                    <a:bodyPr/>
-                    <a:lstStyle/>
-                    <a:p>
-                      <a:pPr>
-                        <a:defRPr sz="1100" b="0">
-                          <a:solidFill>
-                            <a:srgbClr val="0F172A"/>
-                          </a:solidFill>
-                          <a:latin typeface="Arial"/>
-                        </a:defRPr>
-                      </a:pPr>
-                      <a:r>
-                        <a:t>packaging_priority_rule</a:t>
-                      </a:r>
-                    </a:p>
-                  </a:txBody>
-                  <a:tcPr>
-                    <a:solidFill>
-                      <a:srgbClr val="F8FAFC"/>
-                    </a:solidFill>
-                  </a:tcPr>
-                </a:tc>
-                <a:extLst>
-                  <a:ext uri="{0D108BD9-81ED-4DB2-BD59-A6C34878D82A}">
-                    <a16:rowId xmlns:a16="http://schemas.microsoft.com/office/drawing/2014/main" val="10005"/>
-                  </a:ext>
-                </a:extLst>
-              </a:tr>
             </a:tbl>
           </a:graphicData>
         </a:graphic>
       </p:graphicFrame>
-      <p:sp>
-        <p:nvSpPr>
-          <p:cNvPr id="10" name="TextBox 9"/>
-          <p:cNvSpPr txBox="1"/>
-          <p:nvPr/>
-        </p:nvSpPr>
-        <p:spPr>
-          <a:xfrm>
-            <a:off x="1325880" y="5486400"/>
-            <a:ext cx="9509760" cy="320040"/>
-          </a:xfrm>
-          <a:prstGeom prst="rect">
-            <a:avLst/>
-          </a:prstGeom>
-          <a:noFill/>
-        </p:spPr>
-        <p:txBody>
-          <a:bodyPr wrap="square">
-            <a:normAutofit/>
-          </a:bodyPr>
-          <a:lstStyle/>
-          <a:p>
-            <a:pPr algn="ctr"/>
-            <a:r>
-              <a:rPr sz="1500" b="0">
-                <a:solidFill>
-                  <a:srgbClr val="475569"/>
-                </a:solidFill>
-                <a:latin typeface="Arial"/>
-              </a:rPr>
-              <a:t>The rule layer reinforces clear complaints such as slow delivery or damaged packaging.</a:t>
-            </a:r>
-          </a:p>
-        </p:txBody>
-      </p:sp>
     </p:spTree>
+    <p:extLst>
+      <p:ext uri="{BB962C8B-B14F-4D97-AF65-F5344CB8AC3E}">
+        <p14:creationId xmlns:p14="http://schemas.microsoft.com/office/powerpoint/2010/main" val="1572754077"/>
+      </p:ext>
+    </p:extLst>
   </p:cSld>
   <p:clrMapOvr>
     <a:masterClrMapping/>
@@ -7823,7 +10223,7 @@
 </p:sld>
 </file>
 
-<file path=ppt/slides/slide16.xml><?xml version="1.0" encoding="utf-8"?>
+<file path=ppt/slides/slide19.xml><?xml version="1.0" encoding="utf-8"?>
 <p:sld xmlns:a="http://schemas.openxmlformats.org/drawingml/2006/main" xmlns:r="http://schemas.openxmlformats.org/officeDocument/2006/relationships" xmlns:p="http://schemas.openxmlformats.org/presentationml/2006/main">
   <p:cSld>
     <p:bg>
@@ -10787,73 +13187,13 @@
               <a:t>• </a:t>
             </a:r>
             <a:r>
-              <a:rPr dirty="0" err="1">
-                <a:latin typeface="Arial"/>
-              </a:rPr>
-              <a:t>Đây</a:t>
-            </a:r>
-            <a:r>
-              <a:rPr dirty="0">
-                <a:latin typeface="Arial"/>
-              </a:rPr>
-              <a:t> </a:t>
-            </a:r>
-            <a:r>
-              <a:rPr dirty="0" err="1">
-                <a:latin typeface="Arial"/>
-              </a:rPr>
-              <a:t>là</a:t>
-            </a:r>
-            <a:r>
-              <a:rPr dirty="0">
-                <a:latin typeface="Arial"/>
-              </a:rPr>
-              <a:t> </a:t>
-            </a:r>
-            <a:r>
-              <a:rPr dirty="0" err="1">
-                <a:latin typeface="Arial"/>
-              </a:rPr>
-              <a:t>bài</a:t>
-            </a:r>
-            <a:r>
-              <a:rPr dirty="0">
-                <a:latin typeface="Arial"/>
-              </a:rPr>
-              <a:t> </a:t>
-            </a:r>
-            <a:r>
-              <a:rPr dirty="0" err="1">
-                <a:latin typeface="Arial"/>
-              </a:rPr>
-              <a:t>toán</a:t>
-            </a:r>
-            <a:r>
-              <a:rPr dirty="0">
-                <a:latin typeface="Arial"/>
-              </a:rPr>
-              <a:t> supervised text classification </a:t>
-            </a:r>
-            <a:r>
-              <a:rPr dirty="0" err="1">
-                <a:latin typeface="Arial"/>
-              </a:rPr>
-              <a:t>vì</a:t>
-            </a:r>
-            <a:r>
-              <a:rPr dirty="0">
-                <a:latin typeface="Arial"/>
-              </a:rPr>
-              <a:t> </a:t>
-            </a:r>
-            <a:r>
-              <a:rPr dirty="0" err="1">
-                <a:latin typeface="Arial"/>
-              </a:rPr>
-              <a:t>dữ</a:t>
-            </a:r>
-            <a:r>
-              <a:rPr dirty="0">
+              <a:rPr lang="en-US" dirty="0" err="1">
+                <a:latin typeface="Arial"/>
+              </a:rPr>
+              <a:t>Dữ</a:t>
+            </a:r>
+            <a:r>
+              <a:rPr lang="en-US" dirty="0">
                 <a:latin typeface="Arial"/>
               </a:rPr>
               <a:t> </a:t>
@@ -10907,10 +13247,22 @@
               <a:t> </a:t>
             </a:r>
             <a:r>
-              <a:rPr dirty="0" err="1">
-                <a:latin typeface="Arial"/>
-              </a:rPr>
-              <a:t>có</a:t>
+              <a:rPr lang="en-US" dirty="0" err="1">
+                <a:latin typeface="Arial"/>
+              </a:rPr>
+              <a:t>được</a:t>
+            </a:r>
+            <a:r>
+              <a:rPr lang="en-US" dirty="0">
+                <a:latin typeface="Arial"/>
+              </a:rPr>
+              <a:t> </a:t>
+            </a:r>
+            <a:r>
+              <a:rPr lang="en-US" dirty="0" err="1">
+                <a:latin typeface="Arial"/>
+              </a:rPr>
+              <a:t>gán</a:t>
             </a:r>
             <a:r>
               <a:rPr dirty="0">
@@ -12809,11 +15161,33 @@
               </a:defRPr>
             </a:pPr>
             <a:r>
-              <a:rPr>
-                <a:latin typeface="Arial"/>
-              </a:rPr>
-              <a:t>• Rule-based classification: dễ giải thích và tốt với pattern rõ ràng, nhưng khó bao phủ hết trường hợp thực tế.</a:t>
-            </a:r>
+              <a:rPr lang="vi-VN" dirty="0"/>
+              <a:t>• Phân loại cảm xúc là bài toán phổ biến trong NLP.</a:t>
+            </a:r>
+            <a:br>
+              <a:rPr lang="vi-VN" dirty="0"/>
+            </a:br>
+            <a:r>
+              <a:rPr lang="vi-VN" dirty="0"/>
+              <a:t>• Các phương pháp truyền thống: Naive Bayes, Logistic Regression, SVM.</a:t>
+            </a:r>
+            <a:br>
+              <a:rPr lang="vi-VN" dirty="0"/>
+            </a:br>
+            <a:r>
+              <a:rPr lang="vi-VN" dirty="0"/>
+              <a:t>• Cách biểu diễn văn bản phổ biến: Bag-of-Words, TF-IDF.</a:t>
+            </a:r>
+            <a:br>
+              <a:rPr lang="vi-VN" dirty="0"/>
+            </a:br>
+            <a:r>
+              <a:rPr lang="vi-VN" dirty="0"/>
+              <a:t>• Các mô hình hiện đại: LSTM, BERT.</a:t>
+            </a:r>
+            <a:endParaRPr lang="vi-VN" dirty="0">
+              <a:latin typeface="Arial"/>
+            </a:endParaRPr>
           </a:p>
           <a:p>
             <a:pPr>
@@ -12825,56 +15199,14 @@
               </a:defRPr>
             </a:pPr>
             <a:r>
-              <a:rPr>
-                <a:latin typeface="Arial"/>
-              </a:rPr>
-              <a:t>• Bag-of-words và TF-IDF: cách biểu diễn văn bản phổ biến cho các mô hình học máy truyền thống.</a:t>
-            </a:r>
-          </a:p>
-          <a:p>
-            <a:pPr>
-              <a:defRPr sz="1900">
-                <a:solidFill>
-                  <a:srgbClr val="0F172A"/>
-                </a:solidFill>
-                <a:latin typeface="Arial"/>
-              </a:defRPr>
-            </a:pPr>
-            <a:r>
-              <a:rPr>
-                <a:latin typeface="Arial"/>
-              </a:rPr>
-              <a:t>• Naive Bayes: baseline đơn giản, phù hợp để minh họa nguyên lý xác suất trong text classification.</a:t>
-            </a:r>
-          </a:p>
-          <a:p>
-            <a:pPr>
-              <a:defRPr sz="1900">
-                <a:solidFill>
-                  <a:srgbClr val="0F172A"/>
-                </a:solidFill>
-                <a:latin typeface="Arial"/>
-              </a:defRPr>
-            </a:pPr>
-            <a:r>
-              <a:t>• Linear SVM: mạnh nhất trong bản nộp với vector TF-IDF thưa.</a:t>
-            </a:r>
-          </a:p>
-          <a:p>
-            <a:pPr>
-              <a:defRPr sz="1900">
-                <a:solidFill>
-                  <a:srgbClr val="0F172A"/>
-                </a:solidFill>
-                <a:latin typeface="Arial"/>
-              </a:defRPr>
-            </a:pPr>
-            <a:r>
-              <a:rPr>
-                <a:latin typeface="Arial"/>
-              </a:rPr>
-              <a:t>• Hybrid approach: mô hình học máy xử lý trường hợp tổng quát, rule sửa các pattern chắc chắn.</a:t>
-            </a:r>
+              <a:rPr lang="vi-VN" dirty="0">
+                <a:latin typeface="Arial"/>
+              </a:rPr>
+              <a:t>• Project kết hợp Naive Bayes baseline, TF-IDF + Linear SVM và safe issue rules.</a:t>
+            </a:r>
+            <a:endParaRPr dirty="0">
+              <a:latin typeface="Arial"/>
+            </a:endParaRPr>
           </a:p>
         </p:txBody>
       </p:sp>
@@ -13613,13 +15945,121 @@
           <a:p>
             <a:pPr algn="l"/>
             <a:r>
-              <a:rPr sz="1300" b="0">
+              <a:rPr sz="1300" b="0" dirty="0">
                 <a:solidFill>
                   <a:srgbClr val="0F172A"/>
                 </a:solidFill>
                 <a:latin typeface="Arial"/>
               </a:rPr>
-              <a:t>Chia train/test theo tỉ lệ 80/20 và stratify theo nhãn.</a:t>
+              <a:t>Chia train/test </a:t>
+            </a:r>
+            <a:r>
+              <a:rPr sz="1300" b="0" dirty="0" err="1">
+                <a:solidFill>
+                  <a:srgbClr val="0F172A"/>
+                </a:solidFill>
+                <a:latin typeface="Arial"/>
+              </a:rPr>
+              <a:t>theo</a:t>
+            </a:r>
+            <a:r>
+              <a:rPr sz="1300" b="0" dirty="0">
+                <a:solidFill>
+                  <a:srgbClr val="0F172A"/>
+                </a:solidFill>
+                <a:latin typeface="Arial"/>
+              </a:rPr>
+              <a:t> </a:t>
+            </a:r>
+            <a:r>
+              <a:rPr sz="1300" b="0" dirty="0" err="1">
+                <a:solidFill>
+                  <a:srgbClr val="0F172A"/>
+                </a:solidFill>
+                <a:latin typeface="Arial"/>
+              </a:rPr>
+              <a:t>tỉ</a:t>
+            </a:r>
+            <a:r>
+              <a:rPr sz="1300" b="0" dirty="0">
+                <a:solidFill>
+                  <a:srgbClr val="0F172A"/>
+                </a:solidFill>
+                <a:latin typeface="Arial"/>
+              </a:rPr>
+              <a:t> </a:t>
+            </a:r>
+            <a:r>
+              <a:rPr sz="1300" b="0" dirty="0" err="1">
+                <a:solidFill>
+                  <a:srgbClr val="0F172A"/>
+                </a:solidFill>
+                <a:latin typeface="Arial"/>
+              </a:rPr>
+              <a:t>lệ</a:t>
+            </a:r>
+            <a:r>
+              <a:rPr sz="1300" b="0" dirty="0">
+                <a:solidFill>
+                  <a:srgbClr val="0F172A"/>
+                </a:solidFill>
+                <a:latin typeface="Arial"/>
+              </a:rPr>
+              <a:t> 80/20 </a:t>
+            </a:r>
+            <a:r>
+              <a:rPr sz="1300" b="0" dirty="0" err="1">
+                <a:solidFill>
+                  <a:srgbClr val="0F172A"/>
+                </a:solidFill>
+                <a:latin typeface="Arial"/>
+              </a:rPr>
+              <a:t>và</a:t>
+            </a:r>
+            <a:r>
+              <a:rPr sz="1300" b="0" dirty="0">
+                <a:solidFill>
+                  <a:srgbClr val="0F172A"/>
+                </a:solidFill>
+                <a:latin typeface="Arial"/>
+              </a:rPr>
+              <a:t> stratify </a:t>
+            </a:r>
+            <a:r>
+              <a:rPr sz="1300" b="0" dirty="0" err="1">
+                <a:solidFill>
+                  <a:srgbClr val="0F172A"/>
+                </a:solidFill>
+                <a:latin typeface="Arial"/>
+              </a:rPr>
+              <a:t>theo</a:t>
+            </a:r>
+            <a:r>
+              <a:rPr sz="1300" b="0" dirty="0">
+                <a:solidFill>
+                  <a:srgbClr val="0F172A"/>
+                </a:solidFill>
+                <a:latin typeface="Arial"/>
+              </a:rPr>
+              <a:t> </a:t>
+            </a:r>
+            <a:r>
+              <a:rPr sz="1300" b="0" dirty="0" err="1">
+                <a:solidFill>
+                  <a:srgbClr val="0F172A"/>
+                </a:solidFill>
+                <a:latin typeface="Arial"/>
+              </a:rPr>
+              <a:t>nhãn</a:t>
+            </a:r>
+            <a:r>
+              <a:rPr sz="1300" b="0" dirty="0">
+                <a:solidFill>
+                  <a:srgbClr val="0F172A"/>
+                </a:solidFill>
+                <a:latin typeface="Arial"/>
+              </a:rPr>
+              <a:t>.</a:t>
             </a:r>
           </a:p>
         </p:txBody>

--- a/slides/AIMiniProject_presentation.pptx
+++ b/slides/AIMiniProject_presentation.pptx
@@ -320,7 +320,7 @@
           <a:p>
             <a:fld id="{5BCAD085-E8A6-8845-BD4E-CB4CCA059FC4}" type="datetimeFigureOut">
               <a:rPr lang="en-US" smtClean="0"/>
-              <a:t>5/19/2026</a:t>
+              <a:t>5/20/2026</a:t>
             </a:fld>
             <a:endParaRPr lang="en-US"/>
           </a:p>
@@ -488,7 +488,7 @@
           <a:p>
             <a:fld id="{5BCAD085-E8A6-8845-BD4E-CB4CCA059FC4}" type="datetimeFigureOut">
               <a:rPr lang="en-US" smtClean="0"/>
-              <a:t>5/19/2026</a:t>
+              <a:t>5/20/2026</a:t>
             </a:fld>
             <a:endParaRPr lang="en-US"/>
           </a:p>
@@ -666,7 +666,7 @@
           <a:p>
             <a:fld id="{5BCAD085-E8A6-8845-BD4E-CB4CCA059FC4}" type="datetimeFigureOut">
               <a:rPr lang="en-US" smtClean="0"/>
-              <a:t>5/19/2026</a:t>
+              <a:t>5/20/2026</a:t>
             </a:fld>
             <a:endParaRPr lang="en-US"/>
           </a:p>
@@ -834,7 +834,7 @@
           <a:p>
             <a:fld id="{5BCAD085-E8A6-8845-BD4E-CB4CCA059FC4}" type="datetimeFigureOut">
               <a:rPr lang="en-US" smtClean="0"/>
-              <a:t>5/19/2026</a:t>
+              <a:t>5/20/2026</a:t>
             </a:fld>
             <a:endParaRPr lang="en-US"/>
           </a:p>
@@ -1079,7 +1079,7 @@
           <a:p>
             <a:fld id="{5BCAD085-E8A6-8845-BD4E-CB4CCA059FC4}" type="datetimeFigureOut">
               <a:rPr lang="en-US" smtClean="0"/>
-              <a:t>5/19/2026</a:t>
+              <a:t>5/20/2026</a:t>
             </a:fld>
             <a:endParaRPr lang="en-US"/>
           </a:p>
@@ -1364,7 +1364,7 @@
           <a:p>
             <a:fld id="{5BCAD085-E8A6-8845-BD4E-CB4CCA059FC4}" type="datetimeFigureOut">
               <a:rPr lang="en-US" smtClean="0"/>
-              <a:t>5/19/2026</a:t>
+              <a:t>5/20/2026</a:t>
             </a:fld>
             <a:endParaRPr lang="en-US"/>
           </a:p>
@@ -1783,7 +1783,7 @@
           <a:p>
             <a:fld id="{5BCAD085-E8A6-8845-BD4E-CB4CCA059FC4}" type="datetimeFigureOut">
               <a:rPr lang="en-US" smtClean="0"/>
-              <a:t>5/19/2026</a:t>
+              <a:t>5/20/2026</a:t>
             </a:fld>
             <a:endParaRPr lang="en-US"/>
           </a:p>
@@ -1900,7 +1900,7 @@
           <a:p>
             <a:fld id="{5BCAD085-E8A6-8845-BD4E-CB4CCA059FC4}" type="datetimeFigureOut">
               <a:rPr lang="en-US" smtClean="0"/>
-              <a:t>5/19/2026</a:t>
+              <a:t>5/20/2026</a:t>
             </a:fld>
             <a:endParaRPr lang="en-US"/>
           </a:p>
@@ -1995,7 +1995,7 @@
           <a:p>
             <a:fld id="{5BCAD085-E8A6-8845-BD4E-CB4CCA059FC4}" type="datetimeFigureOut">
               <a:rPr lang="en-US" smtClean="0"/>
-              <a:t>5/19/2026</a:t>
+              <a:t>5/20/2026</a:t>
             </a:fld>
             <a:endParaRPr lang="en-US"/>
           </a:p>
@@ -2270,7 +2270,7 @@
           <a:p>
             <a:fld id="{5BCAD085-E8A6-8845-BD4E-CB4CCA059FC4}" type="datetimeFigureOut">
               <a:rPr lang="en-US" smtClean="0"/>
-              <a:t>5/19/2026</a:t>
+              <a:t>5/20/2026</a:t>
             </a:fld>
             <a:endParaRPr lang="en-US"/>
           </a:p>
@@ -2522,7 +2522,7 @@
           <a:p>
             <a:fld id="{5BCAD085-E8A6-8845-BD4E-CB4CCA059FC4}" type="datetimeFigureOut">
               <a:rPr lang="en-US" smtClean="0"/>
-              <a:t>5/19/2026</a:t>
+              <a:t>5/20/2026</a:t>
             </a:fld>
             <a:endParaRPr lang="en-US"/>
           </a:p>
@@ -2733,7 +2733,7 @@
           <a:p>
             <a:fld id="{5BCAD085-E8A6-8845-BD4E-CB4CCA059FC4}" type="datetimeFigureOut">
               <a:rPr lang="en-US" smtClean="0"/>
-              <a:t>5/19/2026</a:t>
+              <a:t>5/20/2026</a:t>
             </a:fld>
             <a:endParaRPr lang="en-US"/>
           </a:p>
@@ -5004,6 +5004,17 @@
               </a:rPr>
               <a:t> </a:t>
             </a:r>
+          </a:p>
+          <a:p>
+            <a:pPr>
+              <a:defRPr sz="1550">
+                <a:solidFill>
+                  <a:srgbClr val="0F172A"/>
+                </a:solidFill>
+                <a:latin typeface="Arial"/>
+                <a:ea typeface="Arial"/>
+              </a:defRPr>
+            </a:pPr>
             <a:r>
               <a:rPr lang="en-US" dirty="0" err="1">
                 <a:latin typeface="Arial"/>
@@ -5160,36 +5171,6 @@
       </p:pic>
       <p:pic>
         <p:nvPicPr>
-          <p:cNvPr id="20" name="Picture 19">
-            <a:extLst>
-              <a:ext uri="{FF2B5EF4-FFF2-40B4-BE49-F238E27FC236}">
-                <a16:creationId xmlns:a16="http://schemas.microsoft.com/office/drawing/2014/main" id="{9474D3CD-CB04-2870-32A3-5577DD23BDC1}"/>
-              </a:ext>
-            </a:extLst>
-          </p:cNvPr>
-          <p:cNvPicPr>
-            <a:picLocks noChangeAspect="1"/>
-          </p:cNvPicPr>
-          <p:nvPr/>
-        </p:nvPicPr>
-        <p:blipFill>
-          <a:blip r:embed="rId5"/>
-          <a:stretch>
-            <a:fillRect/>
-          </a:stretch>
-        </p:blipFill>
-        <p:spPr>
-          <a:xfrm>
-            <a:off x="2416278" y="4094490"/>
-            <a:ext cx="1943371" cy="276264"/>
-          </a:xfrm>
-          <a:prstGeom prst="rect">
-            <a:avLst/>
-          </a:prstGeom>
-        </p:spPr>
-      </p:pic>
-      <p:pic>
-        <p:nvPicPr>
           <p:cNvPr id="21" name="Picture 20">
             <a:extLst>
               <a:ext uri="{FF2B5EF4-FFF2-40B4-BE49-F238E27FC236}">
@@ -5203,6 +5184,36 @@
           <p:nvPr/>
         </p:nvPicPr>
         <p:blipFill>
+          <a:blip r:embed="rId5"/>
+          <a:stretch>
+            <a:fillRect/>
+          </a:stretch>
+        </p:blipFill>
+        <p:spPr>
+          <a:xfrm>
+            <a:off x="1788241" y="4737976"/>
+            <a:ext cx="1376252" cy="344063"/>
+          </a:xfrm>
+          <a:prstGeom prst="rect">
+            <a:avLst/>
+          </a:prstGeom>
+        </p:spPr>
+      </p:pic>
+      <p:pic>
+        <p:nvPicPr>
+          <p:cNvPr id="8" name="Picture 7">
+            <a:extLst>
+              <a:ext uri="{FF2B5EF4-FFF2-40B4-BE49-F238E27FC236}">
+                <a16:creationId xmlns:a16="http://schemas.microsoft.com/office/drawing/2014/main" id="{18782067-9A94-BDAF-3068-775108B35483}"/>
+              </a:ext>
+            </a:extLst>
+          </p:cNvPr>
+          <p:cNvPicPr>
+            <a:picLocks noChangeAspect="1"/>
+          </p:cNvPicPr>
+          <p:nvPr/>
+        </p:nvPicPr>
+        <p:blipFill>
           <a:blip r:embed="rId6"/>
           <a:stretch>
             <a:fillRect/>
@@ -5210,8 +5221,8 @@
         </p:blipFill>
         <p:spPr>
           <a:xfrm>
-            <a:off x="1826474" y="4491330"/>
-            <a:ext cx="1376252" cy="344063"/>
+            <a:off x="2337619" y="4039767"/>
+            <a:ext cx="2495898" cy="676369"/>
           </a:xfrm>
           <a:prstGeom prst="rect">
             <a:avLst/>

--- a/slides/AIMiniProject_presentation.pptx
+++ b/slides/AIMiniProject_presentation.pptx
@@ -5243,7 +5243,7 @@
 </file>
 
 <file path=ppt/slides/slide13.xml><?xml version="1.0" encoding="utf-8"?>
-<p:sld xmlns:a="http://schemas.openxmlformats.org/drawingml/2006/main" xmlns:r="http://schemas.openxmlformats.org/officeDocument/2006/relationships" xmlns:p="http://schemas.openxmlformats.org/presentationml/2006/main">
+<p:sld xmlns:a="http://schemas.openxmlformats.org/drawingml/2006/main" xmlns:ns2="http://schemas.microsoft.com/office/powerpoint/2010/main" xmlns:ns3="http://schemas.microsoft.com/office/drawing/2014/main" xmlns:p="http://schemas.openxmlformats.org/presentationml/2006/main">
   <p:cSld>
     <p:bg>
       <p:bgPr>
@@ -6185,7 +6185,7 @@
           <p:nvPr>
             <p:extLst>
               <p:ext uri="{D42A27DB-BD31-4B8C-83A1-F6EECF244321}">
-                <p14:modId xmlns:p14="http://schemas.microsoft.com/office/powerpoint/2010/main" val="547189928"/>
+                <ns2:modId val="547189928"/>
               </p:ext>
             </p:extLst>
           </p:nvPr>
@@ -6204,28 +6204,28 @@
                 <a:gridCol w="1143000">
                   <a:extLst>
                     <a:ext uri="{9D8B030D-6E8A-4147-A177-3AD203B41FA5}">
-                      <a16:colId xmlns:a16="http://schemas.microsoft.com/office/drawing/2014/main" val="20000"/>
+                      <ns3:colId val="20000"/>
                     </a:ext>
                   </a:extLst>
                 </a:gridCol>
                 <a:gridCol w="3063240">
                   <a:extLst>
                     <a:ext uri="{9D8B030D-6E8A-4147-A177-3AD203B41FA5}">
-                      <a16:colId xmlns:a16="http://schemas.microsoft.com/office/drawing/2014/main" val="20001"/>
+                      <ns3:colId val="20001"/>
                     </a:ext>
                   </a:extLst>
                 </a:gridCol>
                 <a:gridCol w="960120">
                   <a:extLst>
                     <a:ext uri="{9D8B030D-6E8A-4147-A177-3AD203B41FA5}">
-                      <a16:colId xmlns:a16="http://schemas.microsoft.com/office/drawing/2014/main" val="20002"/>
+                      <ns3:colId val="20002"/>
                     </a:ext>
                   </a:extLst>
                 </a:gridCol>
                 <a:gridCol w="1051560">
                   <a:extLst>
                     <a:ext uri="{9D8B030D-6E8A-4147-A177-3AD203B41FA5}">
-                      <a16:colId xmlns:a16="http://schemas.microsoft.com/office/drawing/2014/main" val="20003"/>
+                      <ns3:colId val="20003"/>
                     </a:ext>
                   </a:extLst>
                 </a:gridCol>
@@ -6335,7 +6335,7 @@
                 </a:tc>
                 <a:extLst>
                   <a:ext uri="{0D108BD9-81ED-4DB2-BD59-A6C34878D82A}">
-                    <a16:rowId xmlns:a16="http://schemas.microsoft.com/office/drawing/2014/main" val="10000"/>
+                    <ns3:rowId val="10000"/>
                   </a:ext>
                 </a:extLst>
               </a:tr>
@@ -6403,7 +6403,7 @@
                         </a:defRPr>
                       </a:pPr>
                       <a:r>
-                        <a:t>0.8318</a:t>
+                        <a:t>0.8410</a:t>
                       </a:r>
                     </a:p>
                   </a:txBody>
@@ -6427,7 +6427,7 @@
                         </a:defRPr>
                       </a:pPr>
                       <a:r>
-                        <a:t>0.7993</a:t>
+                        <a:t>0.8093</a:t>
                       </a:r>
                     </a:p>
                   </a:txBody>
@@ -6439,7 +6439,7 @@
                 </a:tc>
                 <a:extLst>
                   <a:ext uri="{0D108BD9-81ED-4DB2-BD59-A6C34878D82A}">
-                    <a16:rowId xmlns:a16="http://schemas.microsoft.com/office/drawing/2014/main" val="10001"/>
+                    <ns3:rowId val="10001"/>
                   </a:ext>
                 </a:extLst>
               </a:tr>
@@ -6543,7 +6543,7 @@
                 </a:tc>
                 <a:extLst>
                   <a:ext uri="{0D108BD9-81ED-4DB2-BD59-A6C34878D82A}">
-                    <a16:rowId xmlns:a16="http://schemas.microsoft.com/office/drawing/2014/main" val="10002"/>
+                    <ns3:rowId val="10002"/>
                   </a:ext>
                 </a:extLst>
               </a:tr>
@@ -6647,7 +6647,7 @@
                 </a:tc>
                 <a:extLst>
                   <a:ext uri="{0D108BD9-81ED-4DB2-BD59-A6C34878D82A}">
-                    <a16:rowId xmlns:a16="http://schemas.microsoft.com/office/drawing/2014/main" val="10003"/>
+                    <ns3:rowId val="10003"/>
                   </a:ext>
                 </a:extLst>
               </a:tr>
@@ -6753,7 +6753,7 @@
                 </a:tc>
                 <a:extLst>
                   <a:ext uri="{0D108BD9-81ED-4DB2-BD59-A6C34878D82A}">
-                    <a16:rowId xmlns:a16="http://schemas.microsoft.com/office/drawing/2014/main" val="10004"/>
+                    <ns3:rowId val="10004"/>
                   </a:ext>
                 </a:extLst>
               </a:tr>
@@ -6916,7 +6916,7 @@
 </file>
 
 <file path=ppt/slides/slide14.xml><?xml version="1.0" encoding="utf-8"?>
-<p:sld xmlns:a="http://schemas.openxmlformats.org/drawingml/2006/main" xmlns:r="http://schemas.openxmlformats.org/officeDocument/2006/relationships" xmlns:p="http://schemas.openxmlformats.org/presentationml/2006/main">
+<p:sld xmlns:a="http://schemas.openxmlformats.org/drawingml/2006/main" xmlns:p="http://schemas.openxmlformats.org/presentationml/2006/main" xmlns:r="http://schemas.openxmlformats.org/officeDocument/2006/relationships">
   <p:cSld>
     <p:bg>
       <p:bgPr>
@@ -7200,7 +7200,7 @@
                 </a:solidFill>
                 <a:latin typeface="Arial"/>
               </a:rPr>
-              <a:t>0.8318</a:t>
+              <a:t>0.8410</a:t>
             </a:r>
           </a:p>
         </p:txBody>
@@ -7316,7 +7316,7 @@
                 </a:solidFill>
                 <a:latin typeface="Arial"/>
               </a:rPr>
-              <a:t>0.7993</a:t>
+              <a:t>0.8093</a:t>
             </a:r>
           </a:p>
         </p:txBody>
@@ -7503,7 +7503,7 @@
               <a:rPr>
                 <a:latin typeface="Arial"/>
               </a:rPr>
-              <a:t>• neutral: 0.66</a:t>
+              <a:t>• neutral: 0.67</a:t>
             </a:r>
           </a:p>
           <a:p>
@@ -7519,7 +7519,7 @@
               <a:rPr>
                 <a:latin typeface="Arial"/>
               </a:rPr>
-              <a:t>• positive: 0.85</a:t>
+              <a:t>• positive: 0.86</a:t>
             </a:r>
           </a:p>
           <a:p>
@@ -9935,7 +9935,7 @@
           <a:p>
             <a:pPr algn="l"/>
             <a:r>
-              <a:rPr lang="vi-VN" sz="2100" b="1" dirty="0">
+              <a:rPr lang="vi-VN" sz="2100" dirty="0">
                 <a:solidFill>
                   <a:srgbClr val="142A41"/>
                 </a:solidFill>
@@ -9943,7 +9943,7 @@
               </a:rPr>
               <a:t>Giao hàng nhanh, đóng gói cũng đc tuy nhiên ốp bị ố ở viền , k lau sạch được ! Ốp cũng k ôm hết máy ! Bửa nhẹ phần viền để ốp máy vào thì bung! Hơi thất vọng!</a:t>
             </a:r>
-            <a:endParaRPr sz="2100" b="1" dirty="0">
+            <a:endParaRPr sz="2100" dirty="0">
               <a:solidFill>
                 <a:srgbClr val="142A41"/>
               </a:solidFill>
@@ -11327,7 +11327,7 @@
 </file>
 
 <file path=ppt/slides/slide2.xml><?xml version="1.0" encoding="utf-8"?>
-<p:sld xmlns:a="http://schemas.openxmlformats.org/drawingml/2006/main" xmlns:r="http://schemas.openxmlformats.org/officeDocument/2006/relationships" xmlns:p="http://schemas.openxmlformats.org/presentationml/2006/main">
+<p:sld xmlns:a="http://schemas.openxmlformats.org/drawingml/2006/main" xmlns:p="http://schemas.openxmlformats.org/presentationml/2006/main">
   <p:cSld>
     <p:bg>
       <p:bgPr>
@@ -12206,7 +12206,7 @@
               <a:rPr dirty="0">
                 <a:latin typeface="Arial"/>
               </a:rPr>
-              <a:t>: sentiment Accuracy 0.8318 / Macro F1 0.7993; issue Accuracy 0.7849 / Macro F1 0.7323.</a:t>
+              <a:t>: sentiment Accuracy 0.8410 / Macro F1 0.8093; issue Accuracy 0.7849 / Macro F1 0.7323.</a:t>
             </a:r>
           </a:p>
         </p:txBody>

--- a/slides/AIMiniProject_presentation.pptx
+++ b/slides/AIMiniProject_presentation.pptx
@@ -3301,156 +3301,6 @@
       </p:sp>
       <p:sp>
         <p:nvSpPr>
-          <p:cNvPr id="5" name="Rounded Rectangle 4"/>
-          <p:cNvSpPr/>
-          <p:nvPr/>
-        </p:nvSpPr>
-        <p:spPr>
-          <a:xfrm>
-            <a:off x="749808" y="3794760"/>
-            <a:ext cx="4480560" cy="914400"/>
-          </a:xfrm>
-          <a:prstGeom prst="roundRect">
-            <a:avLst/>
-          </a:prstGeom>
-          <a:solidFill>
-            <a:srgbClr val="1E405B"/>
-          </a:solidFill>
-          <a:ln w="12700">
-            <a:solidFill>
-              <a:srgbClr val="1E405B"/>
-            </a:solidFill>
-          </a:ln>
-        </p:spPr>
-        <p:style>
-          <a:lnRef idx="1">
-            <a:schemeClr val="accent1"/>
-          </a:lnRef>
-          <a:fillRef idx="3">
-            <a:schemeClr val="accent1"/>
-          </a:fillRef>
-          <a:effectRef idx="2">
-            <a:schemeClr val="accent1"/>
-          </a:effectRef>
-          <a:fontRef idx="minor">
-            <a:schemeClr val="lt1"/>
-          </a:fontRef>
-        </p:style>
-        <p:txBody>
-          <a:bodyPr rtlCol="0" anchor="ctr"/>
-          <a:lstStyle/>
-          <a:p>
-            <a:pPr algn="ctr"/>
-            <a:endParaRPr/>
-          </a:p>
-        </p:txBody>
-      </p:sp>
-      <p:sp>
-        <p:nvSpPr>
-          <p:cNvPr id="6" name="TextBox 5"/>
-          <p:cNvSpPr txBox="1"/>
-          <p:nvPr/>
-        </p:nvSpPr>
-        <p:spPr>
-          <a:xfrm>
-            <a:off x="960120" y="4050791"/>
-            <a:ext cx="3931920" cy="320040"/>
-          </a:xfrm>
-          <a:prstGeom prst="rect">
-            <a:avLst/>
-          </a:prstGeom>
-          <a:noFill/>
-        </p:spPr>
-        <p:txBody>
-          <a:bodyPr wrap="square">
-            <a:normAutofit fontScale="92500" lnSpcReduction="20000"/>
-          </a:bodyPr>
-          <a:lstStyle/>
-          <a:p>
-            <a:pPr algn="l"/>
-            <a:r>
-              <a:rPr sz="1800" b="1" dirty="0" err="1">
-                <a:solidFill>
-                  <a:srgbClr val="FFFFFF"/>
-                </a:solidFill>
-                <a:latin typeface="Arial"/>
-              </a:rPr>
-              <a:t>Người</a:t>
-            </a:r>
-            <a:r>
-              <a:rPr sz="1800" b="1" dirty="0">
-                <a:solidFill>
-                  <a:srgbClr val="FFFFFF"/>
-                </a:solidFill>
-                <a:latin typeface="Arial"/>
-              </a:rPr>
-              <a:t> </a:t>
-            </a:r>
-            <a:r>
-              <a:rPr sz="1800" b="1" dirty="0" err="1">
-                <a:solidFill>
-                  <a:srgbClr val="FFFFFF"/>
-                </a:solidFill>
-                <a:latin typeface="Arial"/>
-              </a:rPr>
-              <a:t>trình</a:t>
-            </a:r>
-            <a:r>
-              <a:rPr sz="1800" b="1" dirty="0">
-                <a:solidFill>
-                  <a:srgbClr val="FFFFFF"/>
-                </a:solidFill>
-                <a:latin typeface="Arial"/>
-              </a:rPr>
-              <a:t> </a:t>
-            </a:r>
-            <a:r>
-              <a:rPr sz="1800" b="1" dirty="0" err="1">
-                <a:solidFill>
-                  <a:srgbClr val="FFFFFF"/>
-                </a:solidFill>
-                <a:latin typeface="Arial"/>
-              </a:rPr>
-              <a:t>bày</a:t>
-            </a:r>
-            <a:r>
-              <a:rPr sz="1800" b="1" dirty="0">
-                <a:solidFill>
-                  <a:srgbClr val="FFFFFF"/>
-                </a:solidFill>
-                <a:latin typeface="Arial"/>
-              </a:rPr>
-              <a:t>: </a:t>
-            </a:r>
-            <a:r>
-              <a:rPr lang="en-US" b="1" dirty="0" err="1">
-                <a:solidFill>
-                  <a:srgbClr val="FFFFFF"/>
-                </a:solidFill>
-                <a:latin typeface="Arial"/>
-              </a:rPr>
-              <a:t>Lương</a:t>
-            </a:r>
-            <a:r>
-              <a:rPr lang="en-US" b="1" dirty="0">
-                <a:solidFill>
-                  <a:srgbClr val="FFFFFF"/>
-                </a:solidFill>
-                <a:latin typeface="Arial"/>
-              </a:rPr>
-              <a:t> Đức Kiên</a:t>
-            </a:r>
-            <a:endParaRPr sz="1800" b="1" dirty="0">
-              <a:solidFill>
-                <a:srgbClr val="FFFFFF"/>
-              </a:solidFill>
-              <a:latin typeface="Arial"/>
-            </a:endParaRPr>
-          </a:p>
-        </p:txBody>
-      </p:sp>
-      <p:sp>
-        <p:nvSpPr>
           <p:cNvPr id="7" name="TextBox 6"/>
           <p:cNvSpPr txBox="1"/>
           <p:nvPr/>
@@ -4666,7 +4516,7 @@
         </p:spPr>
         <p:txBody>
           <a:bodyPr wrap="square">
-            <a:normAutofit/>
+            <a:normAutofit lnSpcReduction="10000"/>
           </a:bodyPr>
           <a:lstStyle/>
           <a:p>
@@ -4929,48 +4779,6 @@
               </a:rPr>
               <a:t>   </a:t>
             </a:r>
-            <a:r>
-              <a:rPr lang="en-US" dirty="0" err="1">
-                <a:latin typeface="Arial"/>
-                <a:ea typeface="Arial"/>
-              </a:rPr>
-              <a:t>Với</a:t>
-            </a:r>
-            <a:r>
-              <a:rPr lang="en-US" dirty="0">
-                <a:latin typeface="Arial"/>
-                <a:ea typeface="Arial"/>
-              </a:rPr>
-              <a:t> </a:t>
-            </a:r>
-            <a:r>
-              <a:rPr lang="en-US" dirty="0" err="1">
-                <a:latin typeface="Arial"/>
-                <a:ea typeface="Arial"/>
-              </a:rPr>
-              <a:t>ràng</a:t>
-            </a:r>
-            <a:r>
-              <a:rPr lang="en-US" dirty="0">
-                <a:latin typeface="Arial"/>
-                <a:ea typeface="Arial"/>
-              </a:rPr>
-              <a:t> </a:t>
-            </a:r>
-            <a:r>
-              <a:rPr lang="en-US" dirty="0" err="1">
-                <a:latin typeface="Arial"/>
-                <a:ea typeface="Arial"/>
-              </a:rPr>
-              <a:t>buộc</a:t>
-            </a:r>
-            <a:r>
-              <a:rPr lang="en-US" dirty="0">
-                <a:latin typeface="Arial"/>
-                <a:ea typeface="Arial"/>
-              </a:rPr>
-              <a:t>: </a:t>
-            </a:r>
           </a:p>
           <a:p>
             <a:pPr>
@@ -5002,6 +4810,20 @@
                 <a:latin typeface="Arial"/>
                 <a:ea typeface="Arial"/>
               </a:rPr>
+              <a:t>   </a:t>
+            </a:r>
+            <a:r>
+              <a:rPr lang="en-US" dirty="0" err="1">
+                <a:latin typeface="Arial"/>
+                <a:ea typeface="Arial"/>
+              </a:rPr>
+              <a:t>Với</a:t>
+            </a:r>
+            <a:r>
+              <a:rPr lang="en-US" dirty="0">
+                <a:latin typeface="Arial"/>
+                <a:ea typeface="Arial"/>
+              </a:rPr>
               <a:t> </a:t>
             </a:r>
           </a:p>
@@ -5016,11 +4838,54 @@
               </a:defRPr>
             </a:pPr>
             <a:r>
+              <a:rPr lang="en-US" dirty="0">
+                <a:latin typeface="Arial"/>
+                <a:ea typeface="Arial"/>
+              </a:rPr>
+              <a:t> </a:t>
+            </a:r>
+          </a:p>
+          <a:p>
+            <a:pPr>
+              <a:defRPr sz="1550">
+                <a:solidFill>
+                  <a:srgbClr val="0F172A"/>
+                </a:solidFill>
+                <a:latin typeface="Arial"/>
+                <a:ea typeface="Arial"/>
+              </a:defRPr>
+            </a:pPr>
+            <a:r>
+              <a:rPr lang="en-US" dirty="0">
+                <a:latin typeface="Arial"/>
+                <a:ea typeface="Arial"/>
+              </a:rPr>
+              <a:t>  </a:t>
+            </a:r>
+          </a:p>
+          <a:p>
+            <a:pPr>
+              <a:defRPr sz="1550">
+                <a:solidFill>
+                  <a:srgbClr val="0F172A"/>
+                </a:solidFill>
+                <a:latin typeface="Arial"/>
+                <a:ea typeface="Arial"/>
+              </a:defRPr>
+            </a:pPr>
+            <a:r>
+              <a:rPr lang="en-US" dirty="0">
+                <a:latin typeface="Arial"/>
+                <a:ea typeface="Arial"/>
+              </a:rPr>
+              <a:t>   </a:t>
+            </a:r>
+            <a:r>
               <a:rPr lang="en-US" dirty="0" err="1">
                 <a:latin typeface="Arial"/>
                 <a:ea typeface="Arial"/>
               </a:rPr>
-              <a:t>Dự</a:t>
+              <a:t>Ràng</a:t>
             </a:r>
             <a:r>
               <a:rPr lang="en-US" dirty="0">
@@ -5034,7 +4899,7 @@
                 <a:latin typeface="Arial"/>
                 <a:ea typeface="Arial"/>
               </a:rPr>
-              <a:t>đoán</a:t>
+              <a:t>buộc</a:t>
             </a:r>
             <a:r>
               <a:rPr lang="en-US" dirty="0">
@@ -5069,6 +4934,82 @@
                 <a:ea typeface="Arial"/>
               </a:defRPr>
             </a:pPr>
+            <a:endParaRPr lang="en-US" dirty="0">
+              <a:latin typeface="Arial"/>
+              <a:ea typeface="Arial"/>
+            </a:endParaRPr>
+          </a:p>
+          <a:p>
+            <a:pPr>
+              <a:defRPr sz="1550">
+                <a:solidFill>
+                  <a:srgbClr val="0F172A"/>
+                </a:solidFill>
+                <a:latin typeface="Arial"/>
+                <a:ea typeface="Arial"/>
+              </a:defRPr>
+            </a:pPr>
+            <a:r>
+              <a:rPr lang="en-US" dirty="0">
+                <a:latin typeface="Arial"/>
+                <a:ea typeface="Arial"/>
+              </a:rPr>
+              <a:t>   </a:t>
+            </a:r>
+            <a:r>
+              <a:rPr lang="en-US" dirty="0" err="1">
+                <a:latin typeface="Arial"/>
+                <a:ea typeface="Arial"/>
+              </a:rPr>
+              <a:t>Dự</a:t>
+            </a:r>
+            <a:r>
+              <a:rPr lang="en-US" dirty="0">
+                <a:latin typeface="Arial"/>
+                <a:ea typeface="Arial"/>
+              </a:rPr>
+              <a:t> </a:t>
+            </a:r>
+            <a:r>
+              <a:rPr lang="en-US" dirty="0" err="1">
+                <a:latin typeface="Arial"/>
+                <a:ea typeface="Arial"/>
+              </a:rPr>
+              <a:t>đoán</a:t>
+            </a:r>
+            <a:r>
+              <a:rPr lang="en-US" dirty="0">
+                <a:latin typeface="Arial"/>
+                <a:ea typeface="Arial"/>
+              </a:rPr>
+              <a:t>: </a:t>
+            </a:r>
+          </a:p>
+          <a:p>
+            <a:pPr>
+              <a:defRPr sz="1550">
+                <a:solidFill>
+                  <a:srgbClr val="0F172A"/>
+                </a:solidFill>
+                <a:latin typeface="Arial"/>
+                <a:ea typeface="Arial"/>
+              </a:defRPr>
+            </a:pPr>
+            <a:endParaRPr lang="en-US" dirty="0">
+              <a:latin typeface="Arial"/>
+              <a:ea typeface="Arial"/>
+            </a:endParaRPr>
+          </a:p>
+          <a:p>
+            <a:pPr>
+              <a:defRPr sz="1550">
+                <a:solidFill>
+                  <a:srgbClr val="0F172A"/>
+                </a:solidFill>
+                <a:latin typeface="Arial"/>
+                <a:ea typeface="Arial"/>
+              </a:defRPr>
+            </a:pPr>
             <a:r>
               <a:rPr lang="vi-VN" dirty="0">
                 <a:latin typeface="Arial"/>
@@ -5076,6 +5017,17 @@
               </a:rPr>
               <a:t>  </a:t>
             </a:r>
+            <a:r>
+              <a:rPr lang="en-US" dirty="0">
+                <a:latin typeface="Arial"/>
+                <a:ea typeface="Arial"/>
+              </a:rPr>
+              <a:t> </a:t>
+            </a:r>
+            <a:endParaRPr lang="vi-VN" dirty="0">
+              <a:latin typeface="Arial"/>
+              <a:ea typeface="Arial"/>
+            </a:endParaRPr>
           </a:p>
         </p:txBody>
       </p:sp>
@@ -5161,8 +5113,8 @@
         </p:blipFill>
         <p:spPr>
           <a:xfrm>
-            <a:off x="4458780" y="3680460"/>
-            <a:ext cx="2133898" cy="590632"/>
+            <a:off x="4427877" y="3325597"/>
+            <a:ext cx="2425207" cy="671262"/>
           </a:xfrm>
           <a:prstGeom prst="rect">
             <a:avLst/>
@@ -5191,8 +5143,8 @@
         </p:blipFill>
         <p:spPr>
           <a:xfrm>
-            <a:off x="1788241" y="4737976"/>
-            <a:ext cx="1376252" cy="344063"/>
+            <a:off x="2016709" y="5411816"/>
+            <a:ext cx="1523996" cy="380999"/>
           </a:xfrm>
           <a:prstGeom prst="rect">
             <a:avLst/>
@@ -5221,8 +5173,38 @@
         </p:blipFill>
         <p:spPr>
           <a:xfrm>
-            <a:off x="2337619" y="4039767"/>
+            <a:off x="2460986" y="4572566"/>
             <a:ext cx="2495898" cy="676369"/>
+          </a:xfrm>
+          <a:prstGeom prst="rect">
+            <a:avLst/>
+          </a:prstGeom>
+        </p:spPr>
+      </p:pic>
+      <p:pic>
+        <p:nvPicPr>
+          <p:cNvPr id="9" name="Picture 8">
+            <a:extLst>
+              <a:ext uri="{FF2B5EF4-FFF2-40B4-BE49-F238E27FC236}">
+                <a16:creationId xmlns:a16="http://schemas.microsoft.com/office/drawing/2014/main" id="{1C8A8FAE-4882-E522-CBAE-714C8759709B}"/>
+              </a:ext>
+            </a:extLst>
+          </p:cNvPr>
+          <p:cNvPicPr>
+            <a:picLocks noChangeAspect="1"/>
+          </p:cNvPicPr>
+          <p:nvPr/>
+        </p:nvPicPr>
+        <p:blipFill>
+          <a:blip r:embed="rId7"/>
+          <a:stretch>
+            <a:fillRect/>
+          </a:stretch>
+        </p:blipFill>
+        <p:spPr>
+          <a:xfrm>
+            <a:off x="1524007" y="4078349"/>
+            <a:ext cx="4571993" cy="380999"/>
           </a:xfrm>
           <a:prstGeom prst="rect">
             <a:avLst/>
@@ -5243,7 +5225,7 @@
 </file>
 
 <file path=ppt/slides/slide13.xml><?xml version="1.0" encoding="utf-8"?>
-<p:sld xmlns:a="http://schemas.openxmlformats.org/drawingml/2006/main" xmlns:ns2="http://schemas.microsoft.com/office/powerpoint/2010/main" xmlns:ns3="http://schemas.microsoft.com/office/drawing/2014/main" xmlns:p="http://schemas.openxmlformats.org/presentationml/2006/main">
+<p:sld xmlns:a="http://schemas.openxmlformats.org/drawingml/2006/main" xmlns:r="http://schemas.openxmlformats.org/officeDocument/2006/relationships" xmlns:p="http://schemas.openxmlformats.org/presentationml/2006/main">
   <p:cSld>
     <p:bg>
       <p:bgPr>
@@ -6176,591 +6158,6 @@
           </a:p>
         </p:txBody>
       </p:sp>
-      <p:graphicFrame>
-        <p:nvGraphicFramePr>
-          <p:cNvPr id="7" name="Table 6"/>
-          <p:cNvGraphicFramePr>
-            <a:graphicFrameLocks noGrp="1"/>
-          </p:cNvGraphicFramePr>
-          <p:nvPr>
-            <p:extLst>
-              <p:ext uri="{D42A27DB-BD31-4B8C-83A1-F6EECF244321}">
-                <ns2:modId val="547189928"/>
-              </p:ext>
-            </p:extLst>
-          </p:nvPr>
-        </p:nvGraphicFramePr>
-        <p:xfrm>
-          <a:off x="5257800" y="1417320"/>
-          <a:ext cx="6217920" cy="1828800"/>
-        </p:xfrm>
-        <a:graphic>
-          <a:graphicData uri="http://schemas.openxmlformats.org/drawingml/2006/table">
-            <a:tbl>
-              <a:tblPr firstRow="1" bandRow="1">
-                <a:tableStyleId>{5C22544A-7EE6-4342-B048-85BDC9FD1C3A}</a:tableStyleId>
-              </a:tblPr>
-              <a:tblGrid>
-                <a:gridCol w="1143000">
-                  <a:extLst>
-                    <a:ext uri="{9D8B030D-6E8A-4147-A177-3AD203B41FA5}">
-                      <ns3:colId val="20000"/>
-                    </a:ext>
-                  </a:extLst>
-                </a:gridCol>
-                <a:gridCol w="3063240">
-                  <a:extLst>
-                    <a:ext uri="{9D8B030D-6E8A-4147-A177-3AD203B41FA5}">
-                      <ns3:colId val="20001"/>
-                    </a:ext>
-                  </a:extLst>
-                </a:gridCol>
-                <a:gridCol w="960120">
-                  <a:extLst>
-                    <a:ext uri="{9D8B030D-6E8A-4147-A177-3AD203B41FA5}">
-                      <ns3:colId val="20002"/>
-                    </a:ext>
-                  </a:extLst>
-                </a:gridCol>
-                <a:gridCol w="1051560">
-                  <a:extLst>
-                    <a:ext uri="{9D8B030D-6E8A-4147-A177-3AD203B41FA5}">
-                      <ns3:colId val="20003"/>
-                    </a:ext>
-                  </a:extLst>
-                </a:gridCol>
-              </a:tblGrid>
-              <a:tr h="365760">
-                <a:tc>
-                  <a:txBody>
-                    <a:bodyPr/>
-                    <a:lstStyle/>
-                    <a:p>
-                      <a:pPr>
-                        <a:defRPr sz="1100" b="1">
-                          <a:solidFill>
-                            <a:srgbClr val="FFFFFF"/>
-                          </a:solidFill>
-                          <a:latin typeface="Arial"/>
-                        </a:defRPr>
-                      </a:pPr>
-                      <a:r>
-                        <a:rPr dirty="0"/>
-                        <a:t>Task</a:t>
-                      </a:r>
-                    </a:p>
-                  </a:txBody>
-                  <a:tcPr>
-                    <a:solidFill>
-                      <a:srgbClr val="142A41"/>
-                    </a:solidFill>
-                  </a:tcPr>
-                </a:tc>
-                <a:tc>
-                  <a:txBody>
-                    <a:bodyPr/>
-                    <a:lstStyle/>
-                    <a:p>
-                      <a:pPr>
-                        <a:defRPr sz="1100" b="1">
-                          <a:solidFill>
-                            <a:srgbClr val="FFFFFF"/>
-                          </a:solidFill>
-                          <a:latin typeface="Arial"/>
-                        </a:defRPr>
-                      </a:pPr>
-                      <a:r>
-                        <a:rPr lang="en-US" dirty="0"/>
-                        <a:t>C</a:t>
-                      </a:r>
-                      <a:r>
-                        <a:rPr dirty="0"/>
-                        <a:t>onfiguration</a:t>
-                      </a:r>
-                    </a:p>
-                  </a:txBody>
-                  <a:tcPr>
-                    <a:solidFill>
-                      <a:srgbClr val="142A41"/>
-                    </a:solidFill>
-                  </a:tcPr>
-                </a:tc>
-                <a:tc>
-                  <a:txBody>
-                    <a:bodyPr/>
-                    <a:lstStyle/>
-                    <a:p>
-                      <a:pPr>
-                        <a:defRPr sz="1100" b="1">
-                          <a:solidFill>
-                            <a:srgbClr val="FFFFFF"/>
-                          </a:solidFill>
-                          <a:latin typeface="Arial"/>
-                        </a:defRPr>
-                      </a:pPr>
-                      <a:r>
-                        <a:t>Accuracy</a:t>
-                      </a:r>
-                    </a:p>
-                  </a:txBody>
-                  <a:tcPr>
-                    <a:solidFill>
-                      <a:srgbClr val="142A41"/>
-                    </a:solidFill>
-                  </a:tcPr>
-                </a:tc>
-                <a:tc>
-                  <a:txBody>
-                    <a:bodyPr/>
-                    <a:lstStyle/>
-                    <a:p>
-                      <a:pPr>
-                        <a:defRPr sz="1100" b="1">
-                          <a:solidFill>
-                            <a:srgbClr val="FFFFFF"/>
-                          </a:solidFill>
-                          <a:latin typeface="Arial"/>
-                        </a:defRPr>
-                      </a:pPr>
-                      <a:r>
-                        <a:t>Macro F1</a:t>
-                      </a:r>
-                    </a:p>
-                  </a:txBody>
-                  <a:tcPr>
-                    <a:solidFill>
-                      <a:srgbClr val="142A41"/>
-                    </a:solidFill>
-                  </a:tcPr>
-                </a:tc>
-                <a:extLst>
-                  <a:ext uri="{0D108BD9-81ED-4DB2-BD59-A6C34878D82A}">
-                    <ns3:rowId val="10000"/>
-                  </a:ext>
-                </a:extLst>
-              </a:tr>
-              <a:tr h="365760">
-                <a:tc>
-                  <a:txBody>
-                    <a:bodyPr/>
-                    <a:lstStyle/>
-                    <a:p>
-                      <a:pPr>
-                        <a:defRPr sz="1100" b="0">
-                          <a:solidFill>
-                            <a:srgbClr val="0F172A"/>
-                          </a:solidFill>
-                          <a:latin typeface="Arial"/>
-                        </a:defRPr>
-                      </a:pPr>
-                      <a:r>
-                        <a:t>Sentiment</a:t>
-                      </a:r>
-                    </a:p>
-                  </a:txBody>
-                  <a:tcPr>
-                    <a:solidFill>
-                      <a:srgbClr val="F8FAFC"/>
-                    </a:solidFill>
-                  </a:tcPr>
-                </a:tc>
-                <a:tc>
-                  <a:txBody>
-                    <a:bodyPr/>
-                    <a:lstStyle/>
-                    <a:p>
-                      <a:pPr>
-                        <a:defRPr sz="1000" b="0">
-                          <a:solidFill>
-                            <a:srgbClr val="0F172A"/>
-                          </a:solidFill>
-                          <a:latin typeface="Arial"/>
-                        </a:defRPr>
-                      </a:pPr>
-                      <a:r>
-                        <a:rPr dirty="0"/>
-                        <a:t>TF-IDF unigram + bigram + Linear SVM</a:t>
-                      </a:r>
-                    </a:p>
-                  </a:txBody>
-                  <a:tcPr>
-                    <a:solidFill>
-                      <a:srgbClr val="F8FAFC"/>
-                    </a:solidFill>
-                  </a:tcPr>
-                </a:tc>
-                <a:tc>
-                  <a:txBody>
-                    <a:bodyPr/>
-                    <a:lstStyle/>
-                    <a:p>
-                      <a:pPr>
-                        <a:defRPr sz="1100" b="0">
-                          <a:solidFill>
-                            <a:srgbClr val="0F172A"/>
-                          </a:solidFill>
-                          <a:latin typeface="Arial"/>
-                        </a:defRPr>
-                      </a:pPr>
-                      <a:r>
-                        <a:t>0.8410</a:t>
-                      </a:r>
-                    </a:p>
-                  </a:txBody>
-                  <a:tcPr>
-                    <a:solidFill>
-                      <a:srgbClr val="F8FAFC"/>
-                    </a:solidFill>
-                  </a:tcPr>
-                </a:tc>
-                <a:tc>
-                  <a:txBody>
-                    <a:bodyPr/>
-                    <a:lstStyle/>
-                    <a:p>
-                      <a:pPr>
-                        <a:defRPr sz="1100" b="0">
-                          <a:solidFill>
-                            <a:srgbClr val="0F172A"/>
-                          </a:solidFill>
-                          <a:latin typeface="Arial"/>
-                        </a:defRPr>
-                      </a:pPr>
-                      <a:r>
-                        <a:t>0.8093</a:t>
-                      </a:r>
-                    </a:p>
-                  </a:txBody>
-                  <a:tcPr>
-                    <a:solidFill>
-                      <a:srgbClr val="F8FAFC"/>
-                    </a:solidFill>
-                  </a:tcPr>
-                </a:tc>
-                <a:extLst>
-                  <a:ext uri="{0D108BD9-81ED-4DB2-BD59-A6C34878D82A}">
-                    <ns3:rowId val="10001"/>
-                  </a:ext>
-                </a:extLst>
-              </a:tr>
-              <a:tr h="365760">
-                <a:tc>
-                  <a:txBody>
-                    <a:bodyPr/>
-                    <a:lstStyle/>
-                    <a:p>
-                      <a:pPr>
-                        <a:defRPr sz="1100" b="0">
-                          <a:solidFill>
-                            <a:srgbClr val="0F172A"/>
-                          </a:solidFill>
-                          <a:latin typeface="Arial"/>
-                        </a:defRPr>
-                      </a:pPr>
-                      <a:r>
-                        <a:rPr dirty="0"/>
-                        <a:t>Issue ML-only</a:t>
-                      </a:r>
-                    </a:p>
-                  </a:txBody>
-                  <a:tcPr>
-                    <a:solidFill>
-                      <a:srgbClr val="FFFFFF"/>
-                    </a:solidFill>
-                  </a:tcPr>
-                </a:tc>
-                <a:tc>
-                  <a:txBody>
-                    <a:bodyPr/>
-                    <a:lstStyle/>
-                    <a:p>
-                      <a:pPr>
-                        <a:defRPr sz="1000" b="0">
-                          <a:solidFill>
-                            <a:srgbClr val="0F172A"/>
-                          </a:solidFill>
-                          <a:latin typeface="Arial"/>
-                        </a:defRPr>
-                      </a:pPr>
-                      <a:r>
-                        <a:t>TF-IDF word + char + Linear SVM</a:t>
-                      </a:r>
-                    </a:p>
-                  </a:txBody>
-                  <a:tcPr>
-                    <a:solidFill>
-                      <a:srgbClr val="FFFFFF"/>
-                    </a:solidFill>
-                  </a:tcPr>
-                </a:tc>
-                <a:tc>
-                  <a:txBody>
-                    <a:bodyPr/>
-                    <a:lstStyle/>
-                    <a:p>
-                      <a:pPr>
-                        <a:defRPr sz="1100" b="0">
-                          <a:solidFill>
-                            <a:srgbClr val="0F172A"/>
-                          </a:solidFill>
-                          <a:latin typeface="Arial"/>
-                        </a:defRPr>
-                      </a:pPr>
-                      <a:r>
-                        <a:t>0.7773</a:t>
-                      </a:r>
-                    </a:p>
-                  </a:txBody>
-                  <a:tcPr>
-                    <a:solidFill>
-                      <a:srgbClr val="FFFFFF"/>
-                    </a:solidFill>
-                  </a:tcPr>
-                </a:tc>
-                <a:tc>
-                  <a:txBody>
-                    <a:bodyPr/>
-                    <a:lstStyle/>
-                    <a:p>
-                      <a:pPr>
-                        <a:defRPr sz="1100" b="0">
-                          <a:solidFill>
-                            <a:srgbClr val="0F172A"/>
-                          </a:solidFill>
-                          <a:latin typeface="Arial"/>
-                        </a:defRPr>
-                      </a:pPr>
-                      <a:r>
-                        <a:t>0.7101</a:t>
-                      </a:r>
-                    </a:p>
-                  </a:txBody>
-                  <a:tcPr>
-                    <a:solidFill>
-                      <a:srgbClr val="FFFFFF"/>
-                    </a:solidFill>
-                  </a:tcPr>
-                </a:tc>
-                <a:extLst>
-                  <a:ext uri="{0D108BD9-81ED-4DB2-BD59-A6C34878D82A}">
-                    <ns3:rowId val="10002"/>
-                  </a:ext>
-                </a:extLst>
-              </a:tr>
-              <a:tr h="365760">
-                <a:tc>
-                  <a:txBody>
-                    <a:bodyPr/>
-                    <a:lstStyle/>
-                    <a:p>
-                      <a:pPr>
-                        <a:defRPr sz="1100" b="0">
-                          <a:solidFill>
-                            <a:srgbClr val="0F172A"/>
-                          </a:solidFill>
-                          <a:latin typeface="Arial"/>
-                        </a:defRPr>
-                      </a:pPr>
-                      <a:r>
-                        <a:rPr dirty="0"/>
-                        <a:t>Issue final</a:t>
-                      </a:r>
-                    </a:p>
-                  </a:txBody>
-                  <a:tcPr>
-                    <a:solidFill>
-                      <a:srgbClr val="F8FAFC"/>
-                    </a:solidFill>
-                  </a:tcPr>
-                </a:tc>
-                <a:tc>
-                  <a:txBody>
-                    <a:bodyPr/>
-                    <a:lstStyle/>
-                    <a:p>
-                      <a:pPr>
-                        <a:defRPr sz="1000" b="0">
-                          <a:solidFill>
-                            <a:srgbClr val="0F172A"/>
-                          </a:solidFill>
-                          <a:latin typeface="Arial"/>
-                        </a:defRPr>
-                      </a:pPr>
-                      <a:r>
-                        <a:t>Linear SVM + safe issue rules</a:t>
-                      </a:r>
-                    </a:p>
-                  </a:txBody>
-                  <a:tcPr>
-                    <a:solidFill>
-                      <a:srgbClr val="F8FAFC"/>
-                    </a:solidFill>
-                  </a:tcPr>
-                </a:tc>
-                <a:tc>
-                  <a:txBody>
-                    <a:bodyPr/>
-                    <a:lstStyle/>
-                    <a:p>
-                      <a:pPr>
-                        <a:defRPr sz="1100" b="0">
-                          <a:solidFill>
-                            <a:srgbClr val="0F172A"/>
-                          </a:solidFill>
-                          <a:latin typeface="Arial"/>
-                        </a:defRPr>
-                      </a:pPr>
-                      <a:r>
-                        <a:t>0.7849</a:t>
-                      </a:r>
-                    </a:p>
-                  </a:txBody>
-                  <a:tcPr>
-                    <a:solidFill>
-                      <a:srgbClr val="F8FAFC"/>
-                    </a:solidFill>
-                  </a:tcPr>
-                </a:tc>
-                <a:tc>
-                  <a:txBody>
-                    <a:bodyPr/>
-                    <a:lstStyle/>
-                    <a:p>
-                      <a:pPr>
-                        <a:defRPr sz="1100" b="0">
-                          <a:solidFill>
-                            <a:srgbClr val="0F172A"/>
-                          </a:solidFill>
-                          <a:latin typeface="Arial"/>
-                        </a:defRPr>
-                      </a:pPr>
-                      <a:r>
-                        <a:t>0.7323</a:t>
-                      </a:r>
-                    </a:p>
-                  </a:txBody>
-                  <a:tcPr>
-                    <a:solidFill>
-                      <a:srgbClr val="F8FAFC"/>
-                    </a:solidFill>
-                  </a:tcPr>
-                </a:tc>
-                <a:extLst>
-                  <a:ext uri="{0D108BD9-81ED-4DB2-BD59-A6C34878D82A}">
-                    <ns3:rowId val="10003"/>
-                  </a:ext>
-                </a:extLst>
-              </a:tr>
-              <a:tr h="365760">
-                <a:tc>
-                  <a:txBody>
-                    <a:bodyPr/>
-                    <a:lstStyle/>
-                    <a:p>
-                      <a:pPr>
-                        <a:defRPr sz="1100" b="0">
-                          <a:solidFill>
-                            <a:srgbClr val="0F172A"/>
-                          </a:solidFill>
-                          <a:latin typeface="Arial"/>
-                        </a:defRPr>
-                      </a:pPr>
-                      <a:r>
-                        <a:t>NB baseline</a:t>
-                      </a:r>
-                    </a:p>
-                  </a:txBody>
-                  <a:tcPr>
-                    <a:solidFill>
-                      <a:srgbClr val="FFFFFF"/>
-                    </a:solidFill>
-                  </a:tcPr>
-                </a:tc>
-                <a:tc>
-                  <a:txBody>
-                    <a:bodyPr/>
-                    <a:lstStyle/>
-                    <a:p>
-                      <a:pPr>
-                        <a:defRPr sz="1000" b="0">
-                          <a:solidFill>
-                            <a:srgbClr val="0F172A"/>
-                          </a:solidFill>
-                          <a:latin typeface="Arial"/>
-                        </a:defRPr>
-                      </a:pPr>
-                      <a:r>
-                        <a:rPr lang="en-US" dirty="0"/>
-                        <a:t>unigram + bigram counts + Naive Bayes</a:t>
-                      </a:r>
-                      <a:endParaRPr dirty="0"/>
-                    </a:p>
-                  </a:txBody>
-                  <a:tcPr>
-                    <a:solidFill>
-                      <a:srgbClr val="FFFFFF"/>
-                    </a:solidFill>
-                  </a:tcPr>
-                </a:tc>
-                <a:tc>
-                  <a:txBody>
-                    <a:bodyPr/>
-                    <a:lstStyle/>
-                    <a:p>
-                      <a:pPr>
-                        <a:defRPr sz="1100" b="0">
-                          <a:solidFill>
-                            <a:srgbClr val="0F172A"/>
-                          </a:solidFill>
-                          <a:latin typeface="Arial"/>
-                        </a:defRPr>
-                      </a:pPr>
-                      <a:r>
-                        <a:t>0.6997</a:t>
-                      </a:r>
-                    </a:p>
-                  </a:txBody>
-                  <a:tcPr>
-                    <a:solidFill>
-                      <a:srgbClr val="FFFFFF"/>
-                    </a:solidFill>
-                  </a:tcPr>
-                </a:tc>
-                <a:tc>
-                  <a:txBody>
-                    <a:bodyPr/>
-                    <a:lstStyle/>
-                    <a:p>
-                      <a:pPr>
-                        <a:defRPr sz="1100" b="0">
-                          <a:solidFill>
-                            <a:srgbClr val="0F172A"/>
-                          </a:solidFill>
-                          <a:latin typeface="Arial"/>
-                        </a:defRPr>
-                      </a:pPr>
-                      <a:r>
-                        <a:rPr dirty="0"/>
-                        <a:t>0.6318</a:t>
-                      </a:r>
-                    </a:p>
-                  </a:txBody>
-                  <a:tcPr>
-                    <a:solidFill>
-                      <a:srgbClr val="FFFFFF"/>
-                    </a:solidFill>
-                  </a:tcPr>
-                </a:tc>
-                <a:extLst>
-                  <a:ext uri="{0D108BD9-81ED-4DB2-BD59-A6C34878D82A}">
-                    <ns3:rowId val="10004"/>
-                  </a:ext>
-                </a:extLst>
-              </a:tr>
-            </a:tbl>
-          </a:graphicData>
-        </a:graphic>
-      </p:graphicFrame>
       <p:sp>
         <p:nvSpPr>
           <p:cNvPr id="8" name="Rounded Rectangle 7"/>
@@ -6769,7 +6166,7 @@
         </p:nvSpPr>
         <p:spPr>
           <a:xfrm>
-            <a:off x="5303520" y="4069080"/>
+            <a:off x="5257800" y="1540764"/>
             <a:ext cx="5989320" cy="1143000"/>
           </a:xfrm>
           <a:prstGeom prst="roundRect">
@@ -6815,7 +6212,7 @@
         </p:nvSpPr>
         <p:spPr>
           <a:xfrm>
-            <a:off x="5455767" y="4091940"/>
+            <a:off x="5257800" y="1565788"/>
             <a:ext cx="1280160" cy="228600"/>
           </a:xfrm>
           <a:prstGeom prst="rect">
@@ -6831,7 +6228,7 @@
           <a:p>
             <a:pPr algn="l"/>
             <a:r>
-              <a:rPr sz="1300" b="1">
+              <a:rPr sz="1300" b="1" dirty="0">
                 <a:solidFill>
                   <a:srgbClr val="142A41"/>
                 </a:solidFill>
@@ -6850,7 +6247,7 @@
         </p:nvSpPr>
         <p:spPr>
           <a:xfrm>
-            <a:off x="5455767" y="4343400"/>
+            <a:off x="5257800" y="1794388"/>
             <a:ext cx="5837073" cy="868680"/>
           </a:xfrm>
           <a:prstGeom prst="rect">
@@ -6916,7 +6313,7 @@
 </file>
 
 <file path=ppt/slides/slide14.xml><?xml version="1.0" encoding="utf-8"?>
-<p:sld xmlns:a="http://schemas.openxmlformats.org/drawingml/2006/main" xmlns:p="http://schemas.openxmlformats.org/presentationml/2006/main" xmlns:r="http://schemas.openxmlformats.org/officeDocument/2006/relationships">
+<p:sld xmlns:a="http://schemas.openxmlformats.org/drawingml/2006/main" xmlns:r="http://schemas.openxmlformats.org/officeDocument/2006/relationships" xmlns:p="http://schemas.openxmlformats.org/presentationml/2006/main">
   <p:cSld>
     <p:bg>
       <p:bgPr>
@@ -11327,7 +10724,7 @@
 </file>
 
 <file path=ppt/slides/slide2.xml><?xml version="1.0" encoding="utf-8"?>
-<p:sld xmlns:a="http://schemas.openxmlformats.org/drawingml/2006/main" xmlns:p="http://schemas.openxmlformats.org/presentationml/2006/main">
+<p:sld xmlns:a="http://schemas.openxmlformats.org/drawingml/2006/main" xmlns:r="http://schemas.openxmlformats.org/officeDocument/2006/relationships" xmlns:p="http://schemas.openxmlformats.org/presentationml/2006/main">
   <p:cSld>
     <p:bg>
       <p:bgPr>
@@ -15190,30 +14587,19 @@
               <a:t>• Cách biểu diễn văn bản phổ biến: Bag-of-Words, TF-IDF.</a:t>
             </a:r>
             <a:br>
-              <a:rPr lang="vi-VN" dirty="0"/>
+              <a:rPr lang="vi-VN"/>
             </a:br>
             <a:r>
-              <a:rPr lang="vi-VN" dirty="0"/>
-              <a:t>• Các mô hình hiện đại: LSTM, BERT.</a:t>
-            </a:r>
-            <a:endParaRPr lang="vi-VN" dirty="0">
-              <a:latin typeface="Arial"/>
-            </a:endParaRPr>
-          </a:p>
-          <a:p>
-            <a:pPr>
-              <a:defRPr sz="1900">
-                <a:solidFill>
-                  <a:srgbClr val="0F172A"/>
-                </a:solidFill>
-                <a:latin typeface="Arial"/>
-              </a:defRPr>
-            </a:pPr>
+              <a:rPr lang="vi-VN">
+                <a:latin typeface="Arial"/>
+              </a:rPr>
+              <a:t>• </a:t>
+            </a:r>
             <a:r>
               <a:rPr lang="vi-VN" dirty="0">
                 <a:latin typeface="Arial"/>
               </a:rPr>
-              <a:t>• Project kết hợp Naive Bayes baseline, TF-IDF + Linear SVM và safe issue rules.</a:t>
+              <a:t>Project kết hợp Naive Bayes baseline, TF-IDF + Linear SVM và safe issue rules.</a:t>
             </a:r>
             <a:endParaRPr dirty="0">
               <a:latin typeface="Arial"/>

--- a/slides/AIMiniProject_presentation.pptx
+++ b/slides/AIMiniProject_presentation.pptx
@@ -9,21 +9,20 @@
     <p:sldId id="257" r:id="rId3"/>
     <p:sldId id="258" r:id="rId4"/>
     <p:sldId id="259" r:id="rId5"/>
-    <p:sldId id="260" r:id="rId6"/>
-    <p:sldId id="261" r:id="rId7"/>
-    <p:sldId id="262" r:id="rId8"/>
-    <p:sldId id="263" r:id="rId9"/>
-    <p:sldId id="271" r:id="rId10"/>
-    <p:sldId id="275" r:id="rId11"/>
-    <p:sldId id="276" r:id="rId12"/>
-    <p:sldId id="273" r:id="rId13"/>
+    <p:sldId id="261" r:id="rId6"/>
+    <p:sldId id="262" r:id="rId7"/>
+    <p:sldId id="263" r:id="rId8"/>
+    <p:sldId id="271" r:id="rId9"/>
+    <p:sldId id="275" r:id="rId10"/>
+    <p:sldId id="276" r:id="rId11"/>
+    <p:sldId id="273" r:id="rId12"/>
+    <p:sldId id="277" r:id="rId13"/>
     <p:sldId id="264" r:id="rId14"/>
     <p:sldId id="265" r:id="rId15"/>
     <p:sldId id="266" r:id="rId16"/>
     <p:sldId id="267" r:id="rId17"/>
     <p:sldId id="269" r:id="rId18"/>
-    <p:sldId id="277" r:id="rId19"/>
-    <p:sldId id="270" r:id="rId20"/>
+    <p:sldId id="270" r:id="rId19"/>
   </p:sldIdLst>
   <p:sldSz cx="12192000" cy="6858000"/>
   <p:notesSz cx="6858000" cy="9144000"/>
@@ -320,7 +319,7 @@
           <a:p>
             <a:fld id="{5BCAD085-E8A6-8845-BD4E-CB4CCA059FC4}" type="datetimeFigureOut">
               <a:rPr lang="en-US" smtClean="0"/>
-              <a:t>5/20/2026</a:t>
+              <a:t>5/27/2026</a:t>
             </a:fld>
             <a:endParaRPr lang="en-US"/>
           </a:p>
@@ -488,7 +487,7 @@
           <a:p>
             <a:fld id="{5BCAD085-E8A6-8845-BD4E-CB4CCA059FC4}" type="datetimeFigureOut">
               <a:rPr lang="en-US" smtClean="0"/>
-              <a:t>5/20/2026</a:t>
+              <a:t>5/27/2026</a:t>
             </a:fld>
             <a:endParaRPr lang="en-US"/>
           </a:p>
@@ -666,7 +665,7 @@
           <a:p>
             <a:fld id="{5BCAD085-E8A6-8845-BD4E-CB4CCA059FC4}" type="datetimeFigureOut">
               <a:rPr lang="en-US" smtClean="0"/>
-              <a:t>5/20/2026</a:t>
+              <a:t>5/27/2026</a:t>
             </a:fld>
             <a:endParaRPr lang="en-US"/>
           </a:p>
@@ -834,7 +833,7 @@
           <a:p>
             <a:fld id="{5BCAD085-E8A6-8845-BD4E-CB4CCA059FC4}" type="datetimeFigureOut">
               <a:rPr lang="en-US" smtClean="0"/>
-              <a:t>5/20/2026</a:t>
+              <a:t>5/27/2026</a:t>
             </a:fld>
             <a:endParaRPr lang="en-US"/>
           </a:p>
@@ -1079,7 +1078,7 @@
           <a:p>
             <a:fld id="{5BCAD085-E8A6-8845-BD4E-CB4CCA059FC4}" type="datetimeFigureOut">
               <a:rPr lang="en-US" smtClean="0"/>
-              <a:t>5/20/2026</a:t>
+              <a:t>5/27/2026</a:t>
             </a:fld>
             <a:endParaRPr lang="en-US"/>
           </a:p>
@@ -1364,7 +1363,7 @@
           <a:p>
             <a:fld id="{5BCAD085-E8A6-8845-BD4E-CB4CCA059FC4}" type="datetimeFigureOut">
               <a:rPr lang="en-US" smtClean="0"/>
-              <a:t>5/20/2026</a:t>
+              <a:t>5/27/2026</a:t>
             </a:fld>
             <a:endParaRPr lang="en-US"/>
           </a:p>
@@ -1783,7 +1782,7 @@
           <a:p>
             <a:fld id="{5BCAD085-E8A6-8845-BD4E-CB4CCA059FC4}" type="datetimeFigureOut">
               <a:rPr lang="en-US" smtClean="0"/>
-              <a:t>5/20/2026</a:t>
+              <a:t>5/27/2026</a:t>
             </a:fld>
             <a:endParaRPr lang="en-US"/>
           </a:p>
@@ -1900,7 +1899,7 @@
           <a:p>
             <a:fld id="{5BCAD085-E8A6-8845-BD4E-CB4CCA059FC4}" type="datetimeFigureOut">
               <a:rPr lang="en-US" smtClean="0"/>
-              <a:t>5/20/2026</a:t>
+              <a:t>5/27/2026</a:t>
             </a:fld>
             <a:endParaRPr lang="en-US"/>
           </a:p>
@@ -1995,7 +1994,7 @@
           <a:p>
             <a:fld id="{5BCAD085-E8A6-8845-BD4E-CB4CCA059FC4}" type="datetimeFigureOut">
               <a:rPr lang="en-US" smtClean="0"/>
-              <a:t>5/20/2026</a:t>
+              <a:t>5/27/2026</a:t>
             </a:fld>
             <a:endParaRPr lang="en-US"/>
           </a:p>
@@ -2270,7 +2269,7 @@
           <a:p>
             <a:fld id="{5BCAD085-E8A6-8845-BD4E-CB4CCA059FC4}" type="datetimeFigureOut">
               <a:rPr lang="en-US" smtClean="0"/>
-              <a:t>5/20/2026</a:t>
+              <a:t>5/27/2026</a:t>
             </a:fld>
             <a:endParaRPr lang="en-US"/>
           </a:p>
@@ -2522,7 +2521,7 @@
           <a:p>
             <a:fld id="{5BCAD085-E8A6-8845-BD4E-CB4CCA059FC4}" type="datetimeFigureOut">
               <a:rPr lang="en-US" smtClean="0"/>
-              <a:t>5/20/2026</a:t>
+              <a:t>5/27/2026</a:t>
             </a:fld>
             <a:endParaRPr lang="en-US"/>
           </a:p>
@@ -2733,7 +2732,7 @@
           <a:p>
             <a:fld id="{5BCAD085-E8A6-8845-BD4E-CB4CCA059FC4}" type="datetimeFigureOut">
               <a:rPr lang="en-US" smtClean="0"/>
-              <a:t>5/20/2026</a:t>
+              <a:t>5/27/2026</a:t>
             </a:fld>
             <a:endParaRPr lang="en-US"/>
           </a:p>
@@ -3566,11 +3565,109 @@
               </a:defRPr>
             </a:pPr>
             <a:r>
-              <a:rPr lang="vi-VN" dirty="0">
-                <a:latin typeface="Arial"/>
-                <a:ea typeface="Arial"/>
-              </a:rPr>
-              <a:t>• Mục đích:</a:t>
+              <a:rPr lang="en-US" dirty="0">
+                <a:latin typeface="Arial"/>
+                <a:ea typeface="Arial"/>
+              </a:rPr>
+              <a:t>	</a:t>
+            </a:r>
+            <a:r>
+              <a:rPr lang="en-US" dirty="0" err="1">
+                <a:latin typeface="Arial"/>
+                <a:ea typeface="Arial"/>
+              </a:rPr>
+              <a:t>Bước</a:t>
+            </a:r>
+            <a:r>
+              <a:rPr lang="en-US" dirty="0">
+                <a:latin typeface="Arial"/>
+                <a:ea typeface="Arial"/>
+              </a:rPr>
+              <a:t> 4: </a:t>
+            </a:r>
+            <a:r>
+              <a:rPr lang="en-US" dirty="0" err="1">
+                <a:latin typeface="Arial"/>
+                <a:ea typeface="Arial"/>
+              </a:rPr>
+              <a:t>Chuyển</a:t>
+            </a:r>
+            <a:r>
+              <a:rPr lang="en-US" dirty="0">
+                <a:latin typeface="Arial"/>
+                <a:ea typeface="Arial"/>
+              </a:rPr>
+              <a:t> review </a:t>
+            </a:r>
+            <a:r>
+              <a:rPr lang="en-US" dirty="0" err="1">
+                <a:latin typeface="Arial"/>
+                <a:ea typeface="Arial"/>
+              </a:rPr>
+              <a:t>thành</a:t>
+            </a:r>
+            <a:r>
+              <a:rPr lang="en-US" dirty="0">
+                <a:latin typeface="Arial"/>
+                <a:ea typeface="Arial"/>
+              </a:rPr>
+              <a:t> </a:t>
+            </a:r>
+            <a:r>
+              <a:rPr lang="en-US" dirty="0" err="1">
+                <a:latin typeface="Arial"/>
+                <a:ea typeface="Arial"/>
+              </a:rPr>
+              <a:t>dạng</a:t>
+            </a:r>
+            <a:r>
+              <a:rPr lang="en-US" dirty="0">
+                <a:latin typeface="Arial"/>
+                <a:ea typeface="Arial"/>
+              </a:rPr>
+              <a:t> vector n </a:t>
+            </a:r>
+            <a:r>
+              <a:rPr lang="en-US" dirty="0" err="1">
+                <a:latin typeface="Arial"/>
+                <a:ea typeface="Arial"/>
+              </a:rPr>
+              <a:t>chiều</a:t>
+            </a:r>
+            <a:r>
+              <a:rPr lang="en-US" dirty="0">
+                <a:latin typeface="Arial"/>
+                <a:ea typeface="Arial"/>
+              </a:rPr>
+              <a:t> </a:t>
+            </a:r>
+            <a:r>
+              <a:rPr lang="pt-BR" dirty="0">
+                <a:latin typeface="Arial"/>
+                <a:ea typeface="Arial"/>
+              </a:rPr>
+              <a:t>x = [x_1, x_2, ..., x_n]</a:t>
+            </a:r>
+            <a:r>
+              <a:rPr lang="en-US" dirty="0">
+                <a:latin typeface="Arial"/>
+                <a:ea typeface="Arial"/>
+              </a:rPr>
+              <a:t> </a:t>
+            </a:r>
+            <a:r>
+              <a:rPr lang="en-US" dirty="0" err="1">
+                <a:latin typeface="Arial"/>
+                <a:ea typeface="Arial"/>
+              </a:rPr>
+              <a:t>với</a:t>
+            </a:r>
+            <a:r>
+              <a:rPr lang="en-US" dirty="0">
+                <a:latin typeface="Arial"/>
+                <a:ea typeface="Arial"/>
+              </a:rPr>
+              <a:t>: </a:t>
             </a:r>
           </a:p>
           <a:p>
@@ -3584,216 +3681,11 @@
               </a:defRPr>
             </a:pPr>
             <a:r>
-              <a:rPr lang="vi-VN" dirty="0">
-                <a:latin typeface="Arial"/>
-                <a:ea typeface="Arial"/>
-              </a:rPr>
-              <a:t>  Biến văn bản review thành vector số để mô hình học máy xử lý được.</a:t>
-            </a:r>
-          </a:p>
-          <a:p>
-            <a:pPr>
-              <a:defRPr sz="1550">
-                <a:solidFill>
-                  <a:srgbClr val="0F172A"/>
-                </a:solidFill>
-                <a:latin typeface="Arial"/>
-                <a:ea typeface="Arial"/>
-              </a:defRPr>
-            </a:pPr>
-            <a:endParaRPr lang="vi-VN" dirty="0">
-              <a:latin typeface="Arial"/>
-              <a:ea typeface="Arial"/>
-            </a:endParaRPr>
-          </a:p>
-          <a:p>
-            <a:pPr>
-              <a:defRPr sz="1550">
-                <a:solidFill>
-                  <a:srgbClr val="0F172A"/>
-                </a:solidFill>
-                <a:latin typeface="Arial"/>
-                <a:ea typeface="Arial"/>
-              </a:defRPr>
-            </a:pPr>
-            <a:r>
-              <a:rPr lang="vi-VN" dirty="0">
-                <a:latin typeface="Arial"/>
-                <a:ea typeface="Arial"/>
-              </a:rPr>
-              <a:t>• Ý tưởng:</a:t>
-            </a:r>
-          </a:p>
-          <a:p>
-            <a:pPr>
-              <a:defRPr sz="1550">
-                <a:solidFill>
-                  <a:srgbClr val="0F172A"/>
-                </a:solidFill>
-                <a:latin typeface="Arial"/>
-                <a:ea typeface="Arial"/>
-              </a:defRPr>
-            </a:pPr>
-            <a:r>
-              <a:rPr lang="vi-VN" dirty="0">
-                <a:latin typeface="Arial"/>
-                <a:ea typeface="Arial"/>
-              </a:rPr>
-              <a:t>  Từ/cụm từ quan trọng là từ xuất hiện nhiều trong một review</a:t>
-            </a:r>
-          </a:p>
-          <a:p>
-            <a:pPr>
-              <a:defRPr sz="1550">
-                <a:solidFill>
-                  <a:srgbClr val="0F172A"/>
-                </a:solidFill>
-                <a:latin typeface="Arial"/>
-                <a:ea typeface="Arial"/>
-              </a:defRPr>
-            </a:pPr>
-            <a:r>
-              <a:rPr lang="vi-VN" dirty="0">
-                <a:latin typeface="Arial"/>
-                <a:ea typeface="Arial"/>
-              </a:rPr>
-              <a:t>  nhưng không xuất hiện quá phổ biến trong toàn bộ dataset.</a:t>
-            </a:r>
-          </a:p>
-          <a:p>
-            <a:pPr>
-              <a:defRPr sz="1550">
-                <a:solidFill>
-                  <a:srgbClr val="0F172A"/>
-                </a:solidFill>
-                <a:latin typeface="Arial"/>
-                <a:ea typeface="Arial"/>
-              </a:defRPr>
-            </a:pPr>
-            <a:endParaRPr lang="vi-VN" dirty="0">
-              <a:latin typeface="Arial"/>
-              <a:ea typeface="Arial"/>
-            </a:endParaRPr>
-          </a:p>
-          <a:p>
-            <a:pPr>
-              <a:defRPr sz="1550">
-                <a:solidFill>
-                  <a:srgbClr val="0F172A"/>
-                </a:solidFill>
-                <a:latin typeface="Arial"/>
-                <a:ea typeface="Arial"/>
-              </a:defRPr>
-            </a:pPr>
-            <a:r>
-              <a:rPr lang="vi-VN" dirty="0">
-                <a:latin typeface="Arial"/>
-                <a:ea typeface="Arial"/>
-              </a:rPr>
-              <a:t> Bước 1: Tạo vocabulary từ tập train</a:t>
-            </a:r>
-          </a:p>
-          <a:p>
-            <a:pPr>
-              <a:defRPr sz="1550">
-                <a:solidFill>
-                  <a:srgbClr val="0F172A"/>
-                </a:solidFill>
-                <a:latin typeface="Arial"/>
-                <a:ea typeface="Arial"/>
-              </a:defRPr>
-            </a:pPr>
-            <a:r>
               <a:rPr lang="en-US" dirty="0">
                 <a:latin typeface="Arial"/>
                 <a:ea typeface="Arial"/>
               </a:rPr>
-              <a:t> </a:t>
-            </a:r>
-            <a:r>
-              <a:rPr lang="vi-VN" dirty="0">
-                <a:latin typeface="Arial"/>
-                <a:ea typeface="Arial"/>
-              </a:rPr>
-              <a:t>Bước 2: Mỗi feature là một chiều vector</a:t>
-            </a:r>
-            <a:endParaRPr lang="en-US" dirty="0">
-              <a:latin typeface="Arial"/>
-              <a:ea typeface="Arial"/>
-            </a:endParaRPr>
-          </a:p>
-          <a:p>
-            <a:pPr>
-              <a:defRPr sz="1550">
-                <a:solidFill>
-                  <a:srgbClr val="0F172A"/>
-                </a:solidFill>
-                <a:latin typeface="Arial"/>
-                <a:ea typeface="Arial"/>
-              </a:defRPr>
-            </a:pPr>
-            <a:r>
-              <a:rPr lang="en-US" dirty="0">
-                <a:latin typeface="Arial"/>
-                <a:ea typeface="Arial"/>
-              </a:rPr>
-              <a:t> </a:t>
-            </a:r>
-            <a:r>
-              <a:rPr lang="en-US" dirty="0" err="1">
-                <a:latin typeface="Arial"/>
-                <a:ea typeface="Arial"/>
-              </a:rPr>
-              <a:t>Bước</a:t>
-            </a:r>
-            <a:r>
-              <a:rPr lang="en-US" dirty="0">
-                <a:latin typeface="Arial"/>
-                <a:ea typeface="Arial"/>
-              </a:rPr>
-              <a:t> 3: </a:t>
-            </a:r>
-            <a:r>
-              <a:rPr lang="en-US" dirty="0" err="1">
-                <a:latin typeface="Arial"/>
-                <a:ea typeface="Arial"/>
-              </a:rPr>
-              <a:t>Tính</a:t>
-            </a:r>
-            <a:r>
-              <a:rPr lang="en-US" dirty="0">
-                <a:latin typeface="Arial"/>
-                <a:ea typeface="Arial"/>
-              </a:rPr>
-              <a:t> TF-IDF </a:t>
-            </a:r>
-            <a:r>
-              <a:rPr lang="en-US" dirty="0" err="1">
-                <a:latin typeface="Arial"/>
-                <a:ea typeface="Arial"/>
-              </a:rPr>
-              <a:t>cho</a:t>
-            </a:r>
-            <a:r>
-              <a:rPr lang="en-US" dirty="0">
-                <a:latin typeface="Arial"/>
-                <a:ea typeface="Arial"/>
-              </a:rPr>
-              <a:t> </a:t>
-            </a:r>
-            <a:r>
-              <a:rPr lang="en-US" dirty="0" err="1">
-                <a:latin typeface="Arial"/>
-                <a:ea typeface="Arial"/>
-              </a:rPr>
-              <a:t>từng</a:t>
-            </a:r>
-            <a:r>
-              <a:rPr lang="en-US" dirty="0">
-                <a:latin typeface="Arial"/>
-                <a:ea typeface="Arial"/>
-              </a:rPr>
-              <a:t> feature</a:t>
+              <a:t>	</a:t>
             </a:r>
           </a:p>
           <a:p>
@@ -3821,19 +3713,50 @@
                 <a:ea typeface="Arial"/>
               </a:defRPr>
             </a:pPr>
-            <a:endParaRPr lang="en-US" dirty="0">
-              <a:latin typeface="Arial"/>
-              <a:ea typeface="Arial"/>
-            </a:endParaRPr>
+            <a:r>
+              <a:rPr lang="en-US" dirty="0">
+                <a:latin typeface="Arial"/>
+                <a:ea typeface="Arial"/>
+              </a:rPr>
+              <a:t>	n </a:t>
+            </a:r>
+            <a:r>
+              <a:rPr lang="en-US" dirty="0" err="1">
+                <a:latin typeface="Arial"/>
+                <a:ea typeface="Arial"/>
+              </a:rPr>
+              <a:t>là</a:t>
+            </a:r>
+            <a:r>
+              <a:rPr lang="en-US" dirty="0">
+                <a:latin typeface="Arial"/>
+                <a:ea typeface="Arial"/>
+              </a:rPr>
+              <a:t> </a:t>
+            </a:r>
+            <a:r>
+              <a:rPr lang="en-US" dirty="0" err="1">
+                <a:latin typeface="Arial"/>
+                <a:ea typeface="Arial"/>
+              </a:rPr>
+              <a:t>số</a:t>
+            </a:r>
+            <a:r>
+              <a:rPr lang="en-US" dirty="0">
+                <a:latin typeface="Arial"/>
+                <a:ea typeface="Arial"/>
+              </a:rPr>
+              <a:t> feature.</a:t>
+            </a:r>
           </a:p>
         </p:txBody>
       </p:sp>
       <p:pic>
         <p:nvPicPr>
-          <p:cNvPr id="8" name="Picture 7">
+          <p:cNvPr id="7" name="Picture 6">
             <a:extLst>
               <a:ext uri="{FF2B5EF4-FFF2-40B4-BE49-F238E27FC236}">
-                <a16:creationId xmlns:a16="http://schemas.microsoft.com/office/drawing/2014/main" id="{50DF576F-9607-2724-35EE-C1D682CCC13D}"/>
+                <a16:creationId xmlns:a16="http://schemas.microsoft.com/office/drawing/2014/main" id="{FF3378A0-8BA6-0567-193B-7F810A7643B2}"/>
               </a:ext>
             </a:extLst>
           </p:cNvPr>
@@ -3850,8 +3773,8 @@
         </p:blipFill>
         <p:spPr>
           <a:xfrm>
-            <a:off x="4356100" y="3628103"/>
-            <a:ext cx="3336347" cy="2589817"/>
+            <a:off x="1267251" y="1858864"/>
+            <a:ext cx="2695951" cy="247685"/>
           </a:xfrm>
           <a:prstGeom prst="rect">
             <a:avLst/>
@@ -3861,7 +3784,7 @@
     </p:spTree>
     <p:extLst>
       <p:ext uri="{BB962C8B-B14F-4D97-AF65-F5344CB8AC3E}">
-        <p14:creationId xmlns:p14="http://schemas.microsoft.com/office/powerpoint/2010/main" val="2383931361"/>
+        <p14:creationId xmlns:p14="http://schemas.microsoft.com/office/powerpoint/2010/main" val="4262217641"/>
       </p:ext>
     </p:extLst>
   </p:cSld>
@@ -4063,7 +3986,7 @@
         </p:spPr>
         <p:txBody>
           <a:bodyPr wrap="square">
-            <a:normAutofit/>
+            <a:normAutofit lnSpcReduction="10000"/>
           </a:bodyPr>
           <a:lstStyle/>
           <a:p>
@@ -4081,7 +4004,7 @@
                 <a:latin typeface="Arial"/>
                 <a:ea typeface="Arial"/>
               </a:rPr>
-              <a:t>TF-IDF</a:t>
+              <a:t>Linear SVM</a:t>
             </a:r>
           </a:p>
           <a:p>
@@ -4094,111 +4017,10 @@
                 <a:ea typeface="Arial"/>
               </a:defRPr>
             </a:pPr>
-            <a:r>
-              <a:rPr lang="en-US" dirty="0">
-                <a:latin typeface="Arial"/>
-                <a:ea typeface="Arial"/>
-              </a:rPr>
-              <a:t>	</a:t>
-            </a:r>
-            <a:r>
-              <a:rPr lang="en-US" dirty="0" err="1">
-                <a:latin typeface="Arial"/>
-                <a:ea typeface="Arial"/>
-              </a:rPr>
-              <a:t>Bước</a:t>
-            </a:r>
-            <a:r>
-              <a:rPr lang="en-US" dirty="0">
-                <a:latin typeface="Arial"/>
-                <a:ea typeface="Arial"/>
-              </a:rPr>
-              <a:t> 4: </a:t>
-            </a:r>
-            <a:r>
-              <a:rPr lang="en-US" dirty="0" err="1">
-                <a:latin typeface="Arial"/>
-                <a:ea typeface="Arial"/>
-              </a:rPr>
-              <a:t>Chuyển</a:t>
-            </a:r>
-            <a:r>
-              <a:rPr lang="en-US" dirty="0">
-                <a:latin typeface="Arial"/>
-                <a:ea typeface="Arial"/>
-              </a:rPr>
-              <a:t> review </a:t>
-            </a:r>
-            <a:r>
-              <a:rPr lang="en-US" dirty="0" err="1">
-                <a:latin typeface="Arial"/>
-                <a:ea typeface="Arial"/>
-              </a:rPr>
-              <a:t>thành</a:t>
-            </a:r>
-            <a:r>
-              <a:rPr lang="en-US" dirty="0">
-                <a:latin typeface="Arial"/>
-                <a:ea typeface="Arial"/>
-              </a:rPr>
-              <a:t> </a:t>
-            </a:r>
-            <a:r>
-              <a:rPr lang="en-US" dirty="0" err="1">
-                <a:latin typeface="Arial"/>
-                <a:ea typeface="Arial"/>
-              </a:rPr>
-              <a:t>dạng</a:t>
-            </a:r>
-            <a:r>
-              <a:rPr lang="en-US" dirty="0">
-                <a:latin typeface="Arial"/>
-                <a:ea typeface="Arial"/>
-              </a:rPr>
-              <a:t> vector n </a:t>
-            </a:r>
-            <a:r>
-              <a:rPr lang="en-US" dirty="0" err="1">
-                <a:latin typeface="Arial"/>
-                <a:ea typeface="Arial"/>
-              </a:rPr>
-              <a:t>chiều</a:t>
-            </a:r>
-            <a:r>
-              <a:rPr lang="en-US" dirty="0">
-                <a:latin typeface="Arial"/>
-                <a:ea typeface="Arial"/>
-              </a:rPr>
-              <a:t> </a:t>
-            </a:r>
-            <a:r>
-              <a:rPr lang="pt-BR" dirty="0">
-                <a:latin typeface="Arial"/>
-                <a:ea typeface="Arial"/>
-              </a:rPr>
-              <a:t>x = [x_1, x_2, ..., x_n]</a:t>
-            </a:r>
-            <a:r>
-              <a:rPr lang="en-US" dirty="0">
-                <a:latin typeface="Arial"/>
-                <a:ea typeface="Arial"/>
-              </a:rPr>
-              <a:t> </a:t>
-            </a:r>
-            <a:r>
-              <a:rPr lang="en-US" dirty="0" err="1">
-                <a:latin typeface="Arial"/>
-                <a:ea typeface="Arial"/>
-              </a:rPr>
-              <a:t>với</a:t>
-            </a:r>
-            <a:r>
-              <a:rPr lang="en-US" dirty="0">
-                <a:latin typeface="Arial"/>
-                <a:ea typeface="Arial"/>
-              </a:rPr>
-              <a:t>: </a:t>
-            </a:r>
+            <a:endParaRPr lang="vi-VN" dirty="0">
+              <a:latin typeface="Arial"/>
+              <a:ea typeface="Arial"/>
+            </a:endParaRPr>
           </a:p>
           <a:p>
             <a:pPr>
@@ -4211,11 +4033,281 @@
               </a:defRPr>
             </a:pPr>
             <a:r>
+              <a:rPr lang="vi-VN" dirty="0">
+                <a:latin typeface="Arial"/>
+                <a:ea typeface="Arial"/>
+              </a:rPr>
+              <a:t>• Ý tưởng:</a:t>
+            </a:r>
+          </a:p>
+          <a:p>
+            <a:pPr>
+              <a:defRPr sz="1550">
+                <a:solidFill>
+                  <a:srgbClr val="0F172A"/>
+                </a:solidFill>
+                <a:latin typeface="Arial"/>
+                <a:ea typeface="Arial"/>
+              </a:defRPr>
+            </a:pPr>
+            <a:r>
+              <a:rPr lang="vi-VN" dirty="0">
+                <a:latin typeface="Arial"/>
+                <a:ea typeface="Arial"/>
+              </a:rPr>
+              <a:t>  • Mỗi review sau TF-IDF được biểu diễn thành vector x.</a:t>
+            </a:r>
+          </a:p>
+          <a:p>
+            <a:pPr>
+              <a:defRPr sz="1550">
+                <a:solidFill>
+                  <a:srgbClr val="0F172A"/>
+                </a:solidFill>
+                <a:latin typeface="Arial"/>
+                <a:ea typeface="Arial"/>
+              </a:defRPr>
+            </a:pPr>
+            <a:r>
+              <a:rPr lang="vi-VN" dirty="0">
+                <a:latin typeface="Arial"/>
+                <a:ea typeface="Arial"/>
+              </a:rPr>
+              <a:t>  • SVM học siêu phẳng để tách các lớp.</a:t>
+            </a:r>
+          </a:p>
+          <a:p>
+            <a:pPr>
+              <a:defRPr sz="1550">
+                <a:solidFill>
+                  <a:srgbClr val="0F172A"/>
+                </a:solidFill>
+                <a:latin typeface="Arial"/>
+                <a:ea typeface="Arial"/>
+              </a:defRPr>
+            </a:pPr>
+            <a:r>
+              <a:rPr lang="vi-VN" dirty="0">
+                <a:latin typeface="Arial"/>
+                <a:ea typeface="Arial"/>
+              </a:rPr>
+              <a:t>  • Ưu tiên khoảng cách phân tách lớn nhất giữa các lớp</a:t>
+            </a:r>
+            <a:r>
               <a:rPr lang="en-US" dirty="0">
                 <a:latin typeface="Arial"/>
                 <a:ea typeface="Arial"/>
               </a:rPr>
-              <a:t>	</a:t>
+              <a:t> A </a:t>
+            </a:r>
+            <a:r>
+              <a:rPr lang="en-US" dirty="0" err="1">
+                <a:latin typeface="Arial"/>
+                <a:ea typeface="Arial"/>
+              </a:rPr>
+              <a:t>và</a:t>
+            </a:r>
+            <a:r>
+              <a:rPr lang="en-US" dirty="0">
+                <a:latin typeface="Arial"/>
+                <a:ea typeface="Arial"/>
+              </a:rPr>
+              <a:t> </a:t>
+            </a:r>
+            <a:r>
+              <a:rPr lang="en-US" dirty="0" err="1">
+                <a:latin typeface="Arial"/>
+                <a:ea typeface="Arial"/>
+              </a:rPr>
+              <a:t>các</a:t>
+            </a:r>
+            <a:r>
+              <a:rPr lang="en-US" dirty="0">
+                <a:latin typeface="Arial"/>
+                <a:ea typeface="Arial"/>
+              </a:rPr>
+              <a:t> </a:t>
+            </a:r>
+            <a:r>
+              <a:rPr lang="en-US" dirty="0" err="1">
+                <a:latin typeface="Arial"/>
+                <a:ea typeface="Arial"/>
+              </a:rPr>
+              <a:t>lớp</a:t>
+            </a:r>
+            <a:r>
+              <a:rPr lang="en-US" dirty="0">
+                <a:latin typeface="Arial"/>
+                <a:ea typeface="Arial"/>
+              </a:rPr>
+              <a:t> </a:t>
+            </a:r>
+            <a:r>
+              <a:rPr lang="en-US" dirty="0" err="1">
+                <a:latin typeface="Arial"/>
+                <a:ea typeface="Arial"/>
+              </a:rPr>
+              <a:t>còn</a:t>
+            </a:r>
+            <a:r>
+              <a:rPr lang="en-US" dirty="0">
+                <a:latin typeface="Arial"/>
+                <a:ea typeface="Arial"/>
+              </a:rPr>
+              <a:t> </a:t>
+            </a:r>
+            <a:r>
+              <a:rPr lang="en-US" dirty="0" err="1">
+                <a:latin typeface="Arial"/>
+                <a:ea typeface="Arial"/>
+              </a:rPr>
+              <a:t>lại</a:t>
+            </a:r>
+            <a:r>
+              <a:rPr lang="en-US" dirty="0">
+                <a:latin typeface="Arial"/>
+                <a:ea typeface="Arial"/>
+              </a:rPr>
+              <a:t>.</a:t>
+            </a:r>
+            <a:endParaRPr lang="vi-VN" dirty="0">
+              <a:latin typeface="Arial"/>
+              <a:ea typeface="Arial"/>
+            </a:endParaRPr>
+          </a:p>
+          <a:p>
+            <a:pPr>
+              <a:defRPr sz="1550">
+                <a:solidFill>
+                  <a:srgbClr val="0F172A"/>
+                </a:solidFill>
+                <a:latin typeface="Arial"/>
+                <a:ea typeface="Arial"/>
+              </a:defRPr>
+            </a:pPr>
+            <a:endParaRPr lang="vi-VN" dirty="0">
+              <a:latin typeface="Arial"/>
+              <a:ea typeface="Arial"/>
+            </a:endParaRPr>
+          </a:p>
+          <a:p>
+            <a:pPr>
+              <a:defRPr sz="1550">
+                <a:solidFill>
+                  <a:srgbClr val="0F172A"/>
+                </a:solidFill>
+                <a:latin typeface="Arial"/>
+                <a:ea typeface="Arial"/>
+              </a:defRPr>
+            </a:pPr>
+            <a:r>
+              <a:rPr lang="vi-VN" dirty="0">
+                <a:latin typeface="Arial"/>
+                <a:ea typeface="Arial"/>
+              </a:rPr>
+              <a:t>• Hàm điểm:</a:t>
+            </a:r>
+          </a:p>
+          <a:p>
+            <a:pPr>
+              <a:defRPr sz="1550">
+                <a:solidFill>
+                  <a:srgbClr val="0F172A"/>
+                </a:solidFill>
+                <a:latin typeface="Arial"/>
+                <a:ea typeface="Arial"/>
+              </a:defRPr>
+            </a:pPr>
+            <a:endParaRPr lang="vi-VN" dirty="0">
+              <a:latin typeface="Arial"/>
+              <a:ea typeface="Arial"/>
+            </a:endParaRPr>
+          </a:p>
+          <a:p>
+            <a:pPr>
+              <a:defRPr sz="1550">
+                <a:solidFill>
+                  <a:srgbClr val="0F172A"/>
+                </a:solidFill>
+                <a:latin typeface="Arial"/>
+                <a:ea typeface="Arial"/>
+              </a:defRPr>
+            </a:pPr>
+            <a:r>
+              <a:rPr lang="en-US" dirty="0">
+                <a:latin typeface="Arial"/>
+                <a:ea typeface="Arial"/>
+              </a:rPr>
+              <a:t>   Trong </a:t>
+            </a:r>
+            <a:r>
+              <a:rPr lang="en-US" dirty="0" err="1">
+                <a:latin typeface="Arial"/>
+                <a:ea typeface="Arial"/>
+              </a:rPr>
+              <a:t>đó</a:t>
+            </a:r>
+            <a:endParaRPr lang="en-US" dirty="0">
+              <a:latin typeface="Arial"/>
+              <a:ea typeface="Arial"/>
+            </a:endParaRPr>
+          </a:p>
+          <a:p>
+            <a:pPr>
+              <a:defRPr sz="1550">
+                <a:solidFill>
+                  <a:srgbClr val="0F172A"/>
+                </a:solidFill>
+                <a:latin typeface="Arial"/>
+                <a:ea typeface="Arial"/>
+              </a:defRPr>
+            </a:pPr>
+            <a:endParaRPr lang="vi-VN" dirty="0">
+              <a:latin typeface="Arial"/>
+              <a:ea typeface="Arial"/>
+            </a:endParaRPr>
+          </a:p>
+          <a:p>
+            <a:pPr>
+              <a:defRPr sz="1550">
+                <a:solidFill>
+                  <a:srgbClr val="0F172A"/>
+                </a:solidFill>
+                <a:latin typeface="Arial"/>
+                <a:ea typeface="Arial"/>
+              </a:defRPr>
+            </a:pPr>
+            <a:r>
+              <a:rPr lang="vi-VN" dirty="0">
+                <a:latin typeface="Arial"/>
+                <a:ea typeface="Arial"/>
+              </a:rPr>
+              <a:t>   SVM tìm w_c và b_c bằng cách tối ưu:</a:t>
+            </a:r>
+            <a:r>
+              <a:rPr lang="en-US" dirty="0">
+                <a:latin typeface="Arial"/>
+                <a:ea typeface="Arial"/>
+              </a:rPr>
+              <a:t>  </a:t>
+            </a:r>
+          </a:p>
+          <a:p>
+            <a:pPr>
+              <a:defRPr sz="1550">
+                <a:solidFill>
+                  <a:srgbClr val="0F172A"/>
+                </a:solidFill>
+                <a:latin typeface="Arial"/>
+                <a:ea typeface="Arial"/>
+              </a:defRPr>
+            </a:pPr>
+            <a:r>
+              <a:rPr lang="en-US" dirty="0">
+                <a:latin typeface="Arial"/>
+                <a:ea typeface="Arial"/>
+              </a:rPr>
+              <a:t>   </a:t>
             </a:r>
           </a:p>
           <a:p>
@@ -4248,14 +4340,14 @@
                 <a:latin typeface="Arial"/>
                 <a:ea typeface="Arial"/>
               </a:rPr>
-              <a:t>	n </a:t>
+              <a:t>   </a:t>
             </a:r>
             <a:r>
               <a:rPr lang="en-US" dirty="0" err="1">
                 <a:latin typeface="Arial"/>
                 <a:ea typeface="Arial"/>
               </a:rPr>
-              <a:t>là</a:t>
+              <a:t>Với</a:t>
             </a:r>
             <a:r>
               <a:rPr lang="en-US" dirty="0">
@@ -4264,29 +4356,217 @@
               </a:rPr>
               <a:t> </a:t>
             </a:r>
+          </a:p>
+          <a:p>
+            <a:pPr>
+              <a:defRPr sz="1550">
+                <a:solidFill>
+                  <a:srgbClr val="0F172A"/>
+                </a:solidFill>
+                <a:latin typeface="Arial"/>
+                <a:ea typeface="Arial"/>
+              </a:defRPr>
+            </a:pPr>
+            <a:r>
+              <a:rPr lang="en-US" dirty="0">
+                <a:latin typeface="Arial"/>
+                <a:ea typeface="Arial"/>
+              </a:rPr>
+              <a:t> </a:t>
+            </a:r>
+          </a:p>
+          <a:p>
+            <a:pPr>
+              <a:defRPr sz="1550">
+                <a:solidFill>
+                  <a:srgbClr val="0F172A"/>
+                </a:solidFill>
+                <a:latin typeface="Arial"/>
+                <a:ea typeface="Arial"/>
+              </a:defRPr>
+            </a:pPr>
+            <a:r>
+              <a:rPr lang="en-US" dirty="0">
+                <a:latin typeface="Arial"/>
+                <a:ea typeface="Arial"/>
+              </a:rPr>
+              <a:t>  </a:t>
+            </a:r>
+          </a:p>
+          <a:p>
+            <a:pPr>
+              <a:defRPr sz="1550">
+                <a:solidFill>
+                  <a:srgbClr val="0F172A"/>
+                </a:solidFill>
+                <a:latin typeface="Arial"/>
+                <a:ea typeface="Arial"/>
+              </a:defRPr>
+            </a:pPr>
+            <a:r>
+              <a:rPr lang="en-US" dirty="0">
+                <a:latin typeface="Arial"/>
+                <a:ea typeface="Arial"/>
+              </a:rPr>
+              <a:t>   </a:t>
+            </a:r>
             <a:r>
               <a:rPr lang="en-US" dirty="0" err="1">
                 <a:latin typeface="Arial"/>
                 <a:ea typeface="Arial"/>
               </a:rPr>
-              <a:t>số</a:t>
+              <a:t>Ràng</a:t>
             </a:r>
             <a:r>
               <a:rPr lang="en-US" dirty="0">
                 <a:latin typeface="Arial"/>
                 <a:ea typeface="Arial"/>
               </a:rPr>
-              <a:t> feature.</a:t>
-            </a:r>
+              <a:t> </a:t>
+            </a:r>
+            <a:r>
+              <a:rPr lang="en-US" dirty="0" err="1">
+                <a:latin typeface="Arial"/>
+                <a:ea typeface="Arial"/>
+              </a:rPr>
+              <a:t>buộc</a:t>
+            </a:r>
+            <a:r>
+              <a:rPr lang="en-US" dirty="0">
+                <a:latin typeface="Arial"/>
+                <a:ea typeface="Arial"/>
+              </a:rPr>
+              <a:t>: </a:t>
+            </a:r>
+          </a:p>
+          <a:p>
+            <a:pPr>
+              <a:defRPr sz="1550">
+                <a:solidFill>
+                  <a:srgbClr val="0F172A"/>
+                </a:solidFill>
+                <a:latin typeface="Arial"/>
+                <a:ea typeface="Arial"/>
+              </a:defRPr>
+            </a:pPr>
+            <a:endParaRPr lang="en-US" dirty="0">
+              <a:latin typeface="Arial"/>
+              <a:ea typeface="Arial"/>
+            </a:endParaRPr>
+          </a:p>
+          <a:p>
+            <a:pPr>
+              <a:defRPr sz="1550">
+                <a:solidFill>
+                  <a:srgbClr val="0F172A"/>
+                </a:solidFill>
+                <a:latin typeface="Arial"/>
+                <a:ea typeface="Arial"/>
+              </a:defRPr>
+            </a:pPr>
+            <a:endParaRPr lang="en-US" dirty="0">
+              <a:latin typeface="Arial"/>
+              <a:ea typeface="Arial"/>
+            </a:endParaRPr>
+          </a:p>
+          <a:p>
+            <a:pPr>
+              <a:defRPr sz="1550">
+                <a:solidFill>
+                  <a:srgbClr val="0F172A"/>
+                </a:solidFill>
+                <a:latin typeface="Arial"/>
+                <a:ea typeface="Arial"/>
+              </a:defRPr>
+            </a:pPr>
+            <a:r>
+              <a:rPr lang="en-US" dirty="0">
+                <a:latin typeface="Arial"/>
+                <a:ea typeface="Arial"/>
+              </a:rPr>
+              <a:t>   </a:t>
+            </a:r>
+            <a:r>
+              <a:rPr lang="en-US" dirty="0" err="1">
+                <a:latin typeface="Arial"/>
+                <a:ea typeface="Arial"/>
+              </a:rPr>
+              <a:t>Dự</a:t>
+            </a:r>
+            <a:r>
+              <a:rPr lang="en-US" dirty="0">
+                <a:latin typeface="Arial"/>
+                <a:ea typeface="Arial"/>
+              </a:rPr>
+              <a:t> </a:t>
+            </a:r>
+            <a:r>
+              <a:rPr lang="en-US" dirty="0" err="1">
+                <a:latin typeface="Arial"/>
+                <a:ea typeface="Arial"/>
+              </a:rPr>
+              <a:t>đoán</a:t>
+            </a:r>
+            <a:r>
+              <a:rPr lang="en-US" dirty="0">
+                <a:latin typeface="Arial"/>
+                <a:ea typeface="Arial"/>
+              </a:rPr>
+              <a:t>: </a:t>
+            </a:r>
+          </a:p>
+          <a:p>
+            <a:pPr>
+              <a:defRPr sz="1550">
+                <a:solidFill>
+                  <a:srgbClr val="0F172A"/>
+                </a:solidFill>
+                <a:latin typeface="Arial"/>
+                <a:ea typeface="Arial"/>
+              </a:defRPr>
+            </a:pPr>
+            <a:endParaRPr lang="en-US" dirty="0">
+              <a:latin typeface="Arial"/>
+              <a:ea typeface="Arial"/>
+            </a:endParaRPr>
+          </a:p>
+          <a:p>
+            <a:pPr>
+              <a:defRPr sz="1550">
+                <a:solidFill>
+                  <a:srgbClr val="0F172A"/>
+                </a:solidFill>
+                <a:latin typeface="Arial"/>
+                <a:ea typeface="Arial"/>
+              </a:defRPr>
+            </a:pPr>
+            <a:r>
+              <a:rPr lang="vi-VN" dirty="0">
+                <a:latin typeface="Arial"/>
+                <a:ea typeface="Arial"/>
+              </a:rPr>
+              <a:t>  </a:t>
+            </a:r>
+            <a:r>
+              <a:rPr lang="en-US" dirty="0">
+                <a:latin typeface="Arial"/>
+                <a:ea typeface="Arial"/>
+              </a:rPr>
+              <a:t> </a:t>
+            </a:r>
+            <a:endParaRPr lang="vi-VN" dirty="0">
+              <a:latin typeface="Arial"/>
+              <a:ea typeface="Arial"/>
+            </a:endParaRPr>
           </a:p>
         </p:txBody>
       </p:sp>
       <p:pic>
         <p:nvPicPr>
-          <p:cNvPr id="7" name="Picture 6">
+          <p:cNvPr id="16" name="Picture 15">
             <a:extLst>
               <a:ext uri="{FF2B5EF4-FFF2-40B4-BE49-F238E27FC236}">
-                <a16:creationId xmlns:a16="http://schemas.microsoft.com/office/drawing/2014/main" id="{FF3378A0-8BA6-0567-193B-7F810A7643B2}"/>
+                <a16:creationId xmlns:a16="http://schemas.microsoft.com/office/drawing/2014/main" id="{78C14A94-6F59-4D41-37B1-3AC8D2CF900B}"/>
               </a:ext>
             </a:extLst>
           </p:cNvPr>
@@ -4303,8 +4583,158 @@
         </p:blipFill>
         <p:spPr>
           <a:xfrm>
-            <a:off x="1267251" y="1858864"/>
+            <a:off x="2016709" y="2694565"/>
+            <a:ext cx="1905266" cy="590632"/>
+          </a:xfrm>
+          <a:prstGeom prst="rect">
+            <a:avLst/>
+          </a:prstGeom>
+        </p:spPr>
+      </p:pic>
+      <p:pic>
+        <p:nvPicPr>
+          <p:cNvPr id="18" name="Picture 17">
+            <a:extLst>
+              <a:ext uri="{FF2B5EF4-FFF2-40B4-BE49-F238E27FC236}">
+                <a16:creationId xmlns:a16="http://schemas.microsoft.com/office/drawing/2014/main" id="{DFB5A620-8B2D-51CE-9DFE-772C3FA5B6F8}"/>
+              </a:ext>
+            </a:extLst>
+          </p:cNvPr>
+          <p:cNvPicPr>
+            <a:picLocks noChangeAspect="1"/>
+          </p:cNvPicPr>
+          <p:nvPr/>
+        </p:nvPicPr>
+        <p:blipFill>
+          <a:blip r:embed="rId3"/>
+          <a:stretch>
+            <a:fillRect/>
+          </a:stretch>
+        </p:blipFill>
+        <p:spPr>
+          <a:xfrm>
+            <a:off x="1819656" y="3274572"/>
             <a:ext cx="2695951" cy="247685"/>
+          </a:xfrm>
+          <a:prstGeom prst="rect">
+            <a:avLst/>
+          </a:prstGeom>
+        </p:spPr>
+      </p:pic>
+      <p:pic>
+        <p:nvPicPr>
+          <p:cNvPr id="21" name="Picture 20">
+            <a:extLst>
+              <a:ext uri="{FF2B5EF4-FFF2-40B4-BE49-F238E27FC236}">
+                <a16:creationId xmlns:a16="http://schemas.microsoft.com/office/drawing/2014/main" id="{E6B13598-5EDC-DBB1-4433-4D9A7C803121}"/>
+              </a:ext>
+            </a:extLst>
+          </p:cNvPr>
+          <p:cNvPicPr>
+            <a:picLocks noChangeAspect="1"/>
+          </p:cNvPicPr>
+          <p:nvPr/>
+        </p:nvPicPr>
+        <p:blipFill>
+          <a:blip r:embed="rId4"/>
+          <a:stretch>
+            <a:fillRect/>
+          </a:stretch>
+        </p:blipFill>
+        <p:spPr>
+          <a:xfrm>
+            <a:off x="2016709" y="5411816"/>
+            <a:ext cx="1523996" cy="380999"/>
+          </a:xfrm>
+          <a:prstGeom prst="rect">
+            <a:avLst/>
+          </a:prstGeom>
+        </p:spPr>
+      </p:pic>
+      <p:pic>
+        <p:nvPicPr>
+          <p:cNvPr id="8" name="Picture 7">
+            <a:extLst>
+              <a:ext uri="{FF2B5EF4-FFF2-40B4-BE49-F238E27FC236}">
+                <a16:creationId xmlns:a16="http://schemas.microsoft.com/office/drawing/2014/main" id="{18782067-9A94-BDAF-3068-775108B35483}"/>
+              </a:ext>
+            </a:extLst>
+          </p:cNvPr>
+          <p:cNvPicPr>
+            <a:picLocks noChangeAspect="1"/>
+          </p:cNvPicPr>
+          <p:nvPr/>
+        </p:nvPicPr>
+        <p:blipFill>
+          <a:blip r:embed="rId5"/>
+          <a:stretch>
+            <a:fillRect/>
+          </a:stretch>
+        </p:blipFill>
+        <p:spPr>
+          <a:xfrm>
+            <a:off x="2460986" y="4572566"/>
+            <a:ext cx="2495898" cy="676369"/>
+          </a:xfrm>
+          <a:prstGeom prst="rect">
+            <a:avLst/>
+          </a:prstGeom>
+        </p:spPr>
+      </p:pic>
+      <p:pic>
+        <p:nvPicPr>
+          <p:cNvPr id="9" name="Picture 8">
+            <a:extLst>
+              <a:ext uri="{FF2B5EF4-FFF2-40B4-BE49-F238E27FC236}">
+                <a16:creationId xmlns:a16="http://schemas.microsoft.com/office/drawing/2014/main" id="{1C8A8FAE-4882-E522-CBAE-714C8759709B}"/>
+              </a:ext>
+            </a:extLst>
+          </p:cNvPr>
+          <p:cNvPicPr>
+            <a:picLocks noChangeAspect="1"/>
+          </p:cNvPicPr>
+          <p:nvPr/>
+        </p:nvPicPr>
+        <p:blipFill>
+          <a:blip r:embed="rId6"/>
+          <a:stretch>
+            <a:fillRect/>
+          </a:stretch>
+        </p:blipFill>
+        <p:spPr>
+          <a:xfrm>
+            <a:off x="1524007" y="4078349"/>
+            <a:ext cx="4571993" cy="380999"/>
+          </a:xfrm>
+          <a:prstGeom prst="rect">
+            <a:avLst/>
+          </a:prstGeom>
+        </p:spPr>
+      </p:pic>
+      <p:pic>
+        <p:nvPicPr>
+          <p:cNvPr id="12" name="Picture 11">
+            <a:extLst>
+              <a:ext uri="{FF2B5EF4-FFF2-40B4-BE49-F238E27FC236}">
+                <a16:creationId xmlns:a16="http://schemas.microsoft.com/office/drawing/2014/main" id="{06CFF5CC-7D0E-2039-D992-0C7FF7F016FA}"/>
+              </a:ext>
+            </a:extLst>
+          </p:cNvPr>
+          <p:cNvPicPr>
+            <a:picLocks noChangeAspect="1"/>
+          </p:cNvPicPr>
+          <p:nvPr/>
+        </p:nvPicPr>
+        <p:blipFill>
+          <a:blip r:embed="rId7"/>
+          <a:stretch>
+            <a:fillRect/>
+          </a:stretch>
+        </p:blipFill>
+        <p:spPr>
+          <a:xfrm>
+            <a:off x="4439773" y="3326867"/>
+            <a:ext cx="3019846" cy="638264"/>
           </a:xfrm>
           <a:prstGeom prst="rect">
             <a:avLst/>
@@ -4314,7 +4744,7 @@
     </p:spTree>
     <p:extLst>
       <p:ext uri="{BB962C8B-B14F-4D97-AF65-F5344CB8AC3E}">
-        <p14:creationId xmlns:p14="http://schemas.microsoft.com/office/powerpoint/2010/main" val="4262217641"/>
+        <p14:creationId xmlns:p14="http://schemas.microsoft.com/office/powerpoint/2010/main" val="4284177420"/>
       </p:ext>
     </p:extLst>
   </p:cSld>
@@ -4516,7 +4946,7 @@
         </p:spPr>
         <p:txBody>
           <a:bodyPr wrap="square">
-            <a:normAutofit lnSpcReduction="10000"/>
+            <a:normAutofit fontScale="85000" lnSpcReduction="20000"/>
           </a:bodyPr>
           <a:lstStyle/>
           <a:p>
@@ -4534,7 +4964,7 @@
                 <a:latin typeface="Arial"/>
                 <a:ea typeface="Arial"/>
               </a:rPr>
-              <a:t>Linear SVM</a:t>
+              <a:t>Model Complexity</a:t>
             </a:r>
           </a:p>
           <a:p>
@@ -4567,7 +4997,7 @@
                 <a:latin typeface="Arial"/>
                 <a:ea typeface="Arial"/>
               </a:rPr>
-              <a:t>• Ý tưởng:</a:t>
+              <a:t>Ký hiệu:</a:t>
             </a:r>
           </a:p>
           <a:p>
@@ -4585,7 +5015,7 @@
                 <a:latin typeface="Arial"/>
                 <a:ea typeface="Arial"/>
               </a:rPr>
-              <a:t>  • Mỗi review sau TF-IDF là một vector.</a:t>
+              <a:t>N: số review train</a:t>
             </a:r>
           </a:p>
           <a:p>
@@ -4603,7 +5033,7 @@
                 <a:latin typeface="Arial"/>
                 <a:ea typeface="Arial"/>
               </a:rPr>
-              <a:t>  • SVM học siêu phẳng để tách các lớp.</a:t>
+              <a:t>V: số feature trong vocabulary</a:t>
             </a:r>
           </a:p>
           <a:p>
@@ -4621,35 +5051,43 @@
                 <a:latin typeface="Arial"/>
                 <a:ea typeface="Arial"/>
               </a:rPr>
-              <a:t>  • Ưu tiên khoảng cách phân tách lớn nhất giữa các lớp</a:t>
-            </a:r>
-            <a:r>
-              <a:rPr lang="en-US" dirty="0">
-                <a:latin typeface="Arial"/>
-                <a:ea typeface="Arial"/>
-              </a:rPr>
-              <a:t> “issue” </a:t>
-            </a:r>
-            <a:r>
-              <a:rPr lang="en-US" dirty="0" err="1">
-                <a:latin typeface="Arial"/>
-                <a:ea typeface="Arial"/>
-              </a:rPr>
-              <a:t>và</a:t>
-            </a:r>
-            <a:r>
-              <a:rPr lang="en-US" dirty="0">
-                <a:latin typeface="Arial"/>
-                <a:ea typeface="Arial"/>
-              </a:rPr>
-              <a:t> “non-issue”</a:t>
-            </a:r>
+              <a:t>K: số class</a:t>
+            </a:r>
+          </a:p>
+          <a:p>
+            <a:pPr>
+              <a:defRPr sz="1550">
+                <a:solidFill>
+                  <a:srgbClr val="0F172A"/>
+                </a:solidFill>
+                <a:latin typeface="Arial"/>
+                <a:ea typeface="Arial"/>
+              </a:defRPr>
+            </a:pPr>
             <a:r>
               <a:rPr lang="vi-VN" dirty="0">
                 <a:latin typeface="Arial"/>
                 <a:ea typeface="Arial"/>
               </a:rPr>
-              <a:t>.</a:t>
+              <a:t>L: số feature xuất hiện trong một review</a:t>
+            </a:r>
+          </a:p>
+          <a:p>
+            <a:pPr>
+              <a:defRPr sz="1550">
+                <a:solidFill>
+                  <a:srgbClr val="0F172A"/>
+                </a:solidFill>
+                <a:latin typeface="Arial"/>
+                <a:ea typeface="Arial"/>
+              </a:defRPr>
+            </a:pPr>
+            <a:r>
+              <a:rPr lang="vi-VN" dirty="0">
+                <a:latin typeface="Arial"/>
+                <a:ea typeface="Arial"/>
+              </a:rPr>
+              <a:t>I là số vòng lặp/tối ưu của Linear SVM.</a:t>
             </a:r>
           </a:p>
           <a:p>
@@ -4682,7 +5120,43 @@
                 <a:latin typeface="Arial"/>
                 <a:ea typeface="Arial"/>
               </a:rPr>
-              <a:t>• Hàm điểm:</a:t>
+              <a:t>Naive Bayes:</a:t>
+            </a:r>
+          </a:p>
+          <a:p>
+            <a:pPr>
+              <a:defRPr sz="1550">
+                <a:solidFill>
+                  <a:srgbClr val="0F172A"/>
+                </a:solidFill>
+                <a:latin typeface="Arial"/>
+                <a:ea typeface="Arial"/>
+              </a:defRPr>
+            </a:pPr>
+            <a:r>
+              <a:rPr lang="vi-VN" dirty="0">
+                <a:latin typeface="Arial"/>
+                <a:ea typeface="Arial"/>
+              </a:rPr>
+              <a:t>Train:</a:t>
+            </a:r>
+          </a:p>
+          <a:p>
+            <a:pPr>
+              <a:defRPr sz="1550">
+                <a:solidFill>
+                  <a:srgbClr val="0F172A"/>
+                </a:solidFill>
+                <a:latin typeface="Arial"/>
+                <a:ea typeface="Arial"/>
+              </a:defRPr>
+            </a:pPr>
+            <a:r>
+              <a:rPr lang="vi-VN" dirty="0">
+                <a:latin typeface="Arial"/>
+                <a:ea typeface="Arial"/>
+              </a:rPr>
+              <a:t>O(N × L)</a:t>
             </a:r>
           </a:p>
           <a:p>
@@ -4711,16 +5185,30 @@
               </a:defRPr>
             </a:pPr>
             <a:r>
-              <a:rPr lang="en-US" dirty="0" err="1">
-                <a:latin typeface="Arial"/>
-                <a:ea typeface="Arial"/>
-              </a:rPr>
-              <a:t>Với</a:t>
-            </a:r>
-            <a:endParaRPr lang="en-US" dirty="0">
-              <a:latin typeface="Arial"/>
-              <a:ea typeface="Arial"/>
-            </a:endParaRPr>
+              <a:rPr lang="vi-VN" dirty="0">
+                <a:latin typeface="Arial"/>
+                <a:ea typeface="Arial"/>
+              </a:rPr>
+              <a:t>Predict:</a:t>
+            </a:r>
+          </a:p>
+          <a:p>
+            <a:pPr>
+              <a:defRPr sz="1550">
+                <a:solidFill>
+                  <a:srgbClr val="0F172A"/>
+                </a:solidFill>
+                <a:latin typeface="Arial"/>
+                <a:ea typeface="Arial"/>
+              </a:defRPr>
+            </a:pPr>
+            <a:r>
+              <a:rPr lang="vi-VN" dirty="0">
+                <a:latin typeface="Arial"/>
+                <a:ea typeface="Arial"/>
+              </a:rPr>
+              <a:t>O(K × L)</a:t>
+            </a:r>
           </a:p>
           <a:p>
             <a:pPr>
@@ -4752,14 +5240,7 @@
                 <a:latin typeface="Arial"/>
                 <a:ea typeface="Arial"/>
               </a:rPr>
-              <a:t>   SVM tìm w_c và b_c bằng cách tối ưu:</a:t>
-            </a:r>
-            <a:r>
-              <a:rPr lang="en-US" dirty="0">
-                <a:latin typeface="Arial"/>
-                <a:ea typeface="Arial"/>
-              </a:rPr>
-              <a:t>  </a:t>
+              <a:t>Memory:</a:t>
             </a:r>
           </a:p>
           <a:p>
@@ -4773,11 +5254,11 @@
               </a:defRPr>
             </a:pPr>
             <a:r>
-              <a:rPr lang="en-US" dirty="0">
-                <a:latin typeface="Arial"/>
-                <a:ea typeface="Arial"/>
-              </a:rPr>
-              <a:t>   </a:t>
+              <a:rPr lang="vi-VN" dirty="0">
+                <a:latin typeface="Arial"/>
+                <a:ea typeface="Arial"/>
+              </a:rPr>
+              <a:t>O(K × V)</a:t>
             </a:r>
           </a:p>
           <a:p>
@@ -4790,431 +5271,184 @@
                 <a:ea typeface="Arial"/>
               </a:defRPr>
             </a:pPr>
-            <a:endParaRPr lang="en-US" dirty="0">
-              <a:latin typeface="Arial"/>
-              <a:ea typeface="Arial"/>
-            </a:endParaRPr>
-          </a:p>
-          <a:p>
-            <a:pPr>
-              <a:defRPr sz="1550">
-                <a:solidFill>
-                  <a:srgbClr val="0F172A"/>
-                </a:solidFill>
-                <a:latin typeface="Arial"/>
-                <a:ea typeface="Arial"/>
-              </a:defRPr>
-            </a:pPr>
-            <a:r>
-              <a:rPr lang="en-US" dirty="0">
-                <a:latin typeface="Arial"/>
-                <a:ea typeface="Arial"/>
-              </a:rPr>
-              <a:t>   </a:t>
-            </a:r>
-            <a:r>
-              <a:rPr lang="en-US" dirty="0" err="1">
-                <a:latin typeface="Arial"/>
-                <a:ea typeface="Arial"/>
-              </a:rPr>
-              <a:t>Với</a:t>
-            </a:r>
-            <a:r>
-              <a:rPr lang="en-US" dirty="0">
-                <a:latin typeface="Arial"/>
-                <a:ea typeface="Arial"/>
-              </a:rPr>
-              <a:t> </a:t>
-            </a:r>
-          </a:p>
-          <a:p>
-            <a:pPr>
-              <a:defRPr sz="1550">
-                <a:solidFill>
-                  <a:srgbClr val="0F172A"/>
-                </a:solidFill>
-                <a:latin typeface="Arial"/>
-                <a:ea typeface="Arial"/>
-              </a:defRPr>
-            </a:pPr>
-            <a:r>
-              <a:rPr lang="en-US" dirty="0">
-                <a:latin typeface="Arial"/>
-                <a:ea typeface="Arial"/>
-              </a:rPr>
-              <a:t> </a:t>
-            </a:r>
-          </a:p>
-          <a:p>
-            <a:pPr>
-              <a:defRPr sz="1550">
-                <a:solidFill>
-                  <a:srgbClr val="0F172A"/>
-                </a:solidFill>
-                <a:latin typeface="Arial"/>
-                <a:ea typeface="Arial"/>
-              </a:defRPr>
-            </a:pPr>
-            <a:r>
-              <a:rPr lang="en-US" dirty="0">
-                <a:latin typeface="Arial"/>
-                <a:ea typeface="Arial"/>
-              </a:rPr>
-              <a:t>  </a:t>
-            </a:r>
-          </a:p>
-          <a:p>
-            <a:pPr>
-              <a:defRPr sz="1550">
-                <a:solidFill>
-                  <a:srgbClr val="0F172A"/>
-                </a:solidFill>
-                <a:latin typeface="Arial"/>
-                <a:ea typeface="Arial"/>
-              </a:defRPr>
-            </a:pPr>
-            <a:r>
-              <a:rPr lang="en-US" dirty="0">
-                <a:latin typeface="Arial"/>
-                <a:ea typeface="Arial"/>
-              </a:rPr>
-              <a:t>   </a:t>
-            </a:r>
-            <a:r>
-              <a:rPr lang="en-US" dirty="0" err="1">
-                <a:latin typeface="Arial"/>
-                <a:ea typeface="Arial"/>
-              </a:rPr>
-              <a:t>Ràng</a:t>
-            </a:r>
-            <a:r>
-              <a:rPr lang="en-US" dirty="0">
-                <a:latin typeface="Arial"/>
-                <a:ea typeface="Arial"/>
-              </a:rPr>
-              <a:t> </a:t>
-            </a:r>
-            <a:r>
-              <a:rPr lang="en-US" dirty="0" err="1">
-                <a:latin typeface="Arial"/>
-                <a:ea typeface="Arial"/>
-              </a:rPr>
-              <a:t>buộc</a:t>
-            </a:r>
-            <a:r>
-              <a:rPr lang="en-US" dirty="0">
-                <a:latin typeface="Arial"/>
-                <a:ea typeface="Arial"/>
-              </a:rPr>
-              <a:t>: </a:t>
-            </a:r>
-          </a:p>
-          <a:p>
-            <a:pPr>
-              <a:defRPr sz="1550">
-                <a:solidFill>
-                  <a:srgbClr val="0F172A"/>
-                </a:solidFill>
-                <a:latin typeface="Arial"/>
-                <a:ea typeface="Arial"/>
-              </a:defRPr>
-            </a:pPr>
-            <a:endParaRPr lang="en-US" dirty="0">
-              <a:latin typeface="Arial"/>
-              <a:ea typeface="Arial"/>
-            </a:endParaRPr>
-          </a:p>
-          <a:p>
-            <a:pPr>
-              <a:defRPr sz="1550">
-                <a:solidFill>
-                  <a:srgbClr val="0F172A"/>
-                </a:solidFill>
-                <a:latin typeface="Arial"/>
-                <a:ea typeface="Arial"/>
-              </a:defRPr>
-            </a:pPr>
-            <a:endParaRPr lang="en-US" dirty="0">
-              <a:latin typeface="Arial"/>
-              <a:ea typeface="Arial"/>
-            </a:endParaRPr>
-          </a:p>
-          <a:p>
-            <a:pPr>
-              <a:defRPr sz="1550">
-                <a:solidFill>
-                  <a:srgbClr val="0F172A"/>
-                </a:solidFill>
-                <a:latin typeface="Arial"/>
-                <a:ea typeface="Arial"/>
-              </a:defRPr>
-            </a:pPr>
-            <a:r>
-              <a:rPr lang="en-US" dirty="0">
-                <a:latin typeface="Arial"/>
-                <a:ea typeface="Arial"/>
-              </a:rPr>
-              <a:t>   </a:t>
-            </a:r>
-            <a:r>
-              <a:rPr lang="en-US" dirty="0" err="1">
-                <a:latin typeface="Arial"/>
-                <a:ea typeface="Arial"/>
-              </a:rPr>
-              <a:t>Dự</a:t>
-            </a:r>
-            <a:r>
-              <a:rPr lang="en-US" dirty="0">
-                <a:latin typeface="Arial"/>
-                <a:ea typeface="Arial"/>
-              </a:rPr>
-              <a:t> </a:t>
-            </a:r>
-            <a:r>
-              <a:rPr lang="en-US" dirty="0" err="1">
-                <a:latin typeface="Arial"/>
-                <a:ea typeface="Arial"/>
-              </a:rPr>
-              <a:t>đoán</a:t>
-            </a:r>
-            <a:r>
-              <a:rPr lang="en-US" dirty="0">
-                <a:latin typeface="Arial"/>
-                <a:ea typeface="Arial"/>
-              </a:rPr>
-              <a:t>: </a:t>
-            </a:r>
-          </a:p>
-          <a:p>
-            <a:pPr>
-              <a:defRPr sz="1550">
-                <a:solidFill>
-                  <a:srgbClr val="0F172A"/>
-                </a:solidFill>
-                <a:latin typeface="Arial"/>
-                <a:ea typeface="Arial"/>
-              </a:defRPr>
-            </a:pPr>
-            <a:endParaRPr lang="en-US" dirty="0">
-              <a:latin typeface="Arial"/>
-              <a:ea typeface="Arial"/>
-            </a:endParaRPr>
-          </a:p>
-          <a:p>
-            <a:pPr>
-              <a:defRPr sz="1550">
-                <a:solidFill>
-                  <a:srgbClr val="0F172A"/>
-                </a:solidFill>
-                <a:latin typeface="Arial"/>
-                <a:ea typeface="Arial"/>
-              </a:defRPr>
-            </a:pPr>
-            <a:r>
-              <a:rPr lang="vi-VN" dirty="0">
-                <a:latin typeface="Arial"/>
-                <a:ea typeface="Arial"/>
-              </a:rPr>
-              <a:t>  </a:t>
-            </a:r>
-            <a:r>
-              <a:rPr lang="en-US" dirty="0">
-                <a:latin typeface="Arial"/>
-                <a:ea typeface="Arial"/>
-              </a:rPr>
-              <a:t> </a:t>
-            </a:r>
             <a:endParaRPr lang="vi-VN" dirty="0">
               <a:latin typeface="Arial"/>
               <a:ea typeface="Arial"/>
             </a:endParaRPr>
           </a:p>
-        </p:txBody>
-      </p:sp>
-      <p:pic>
-        <p:nvPicPr>
-          <p:cNvPr id="16" name="Picture 15">
-            <a:extLst>
-              <a:ext uri="{FF2B5EF4-FFF2-40B4-BE49-F238E27FC236}">
-                <a16:creationId xmlns:a16="http://schemas.microsoft.com/office/drawing/2014/main" id="{78C14A94-6F59-4D41-37B1-3AC8D2CF900B}"/>
-              </a:ext>
-            </a:extLst>
-          </p:cNvPr>
-          <p:cNvPicPr>
-            <a:picLocks noChangeAspect="1"/>
-          </p:cNvPicPr>
-          <p:nvPr/>
-        </p:nvPicPr>
-        <p:blipFill>
-          <a:blip r:embed="rId2"/>
-          <a:stretch>
-            <a:fillRect/>
-          </a:stretch>
-        </p:blipFill>
-        <p:spPr>
-          <a:xfrm>
-            <a:off x="2016709" y="2694565"/>
-            <a:ext cx="1905266" cy="590632"/>
-          </a:xfrm>
-          <a:prstGeom prst="rect">
-            <a:avLst/>
-          </a:prstGeom>
-        </p:spPr>
-      </p:pic>
-      <p:pic>
-        <p:nvPicPr>
-          <p:cNvPr id="18" name="Picture 17">
-            <a:extLst>
-              <a:ext uri="{FF2B5EF4-FFF2-40B4-BE49-F238E27FC236}">
-                <a16:creationId xmlns:a16="http://schemas.microsoft.com/office/drawing/2014/main" id="{DFB5A620-8B2D-51CE-9DFE-772C3FA5B6F8}"/>
-              </a:ext>
-            </a:extLst>
-          </p:cNvPr>
-          <p:cNvPicPr>
-            <a:picLocks noChangeAspect="1"/>
-          </p:cNvPicPr>
-          <p:nvPr/>
-        </p:nvPicPr>
-        <p:blipFill>
-          <a:blip r:embed="rId3"/>
-          <a:stretch>
-            <a:fillRect/>
-          </a:stretch>
-        </p:blipFill>
-        <p:spPr>
-          <a:xfrm>
-            <a:off x="1508760" y="3325597"/>
-            <a:ext cx="2695951" cy="247685"/>
-          </a:xfrm>
-          <a:prstGeom prst="rect">
-            <a:avLst/>
-          </a:prstGeom>
-        </p:spPr>
-      </p:pic>
-      <p:pic>
-        <p:nvPicPr>
-          <p:cNvPr id="19" name="Picture 18">
-            <a:extLst>
-              <a:ext uri="{FF2B5EF4-FFF2-40B4-BE49-F238E27FC236}">
-                <a16:creationId xmlns:a16="http://schemas.microsoft.com/office/drawing/2014/main" id="{0DFED1FB-547F-3215-EACC-24A274A404F4}"/>
-              </a:ext>
-            </a:extLst>
-          </p:cNvPr>
-          <p:cNvPicPr>
-            <a:picLocks noChangeAspect="1"/>
-          </p:cNvPicPr>
-          <p:nvPr/>
-        </p:nvPicPr>
-        <p:blipFill>
-          <a:blip r:embed="rId4"/>
-          <a:stretch>
-            <a:fillRect/>
-          </a:stretch>
-        </p:blipFill>
-        <p:spPr>
-          <a:xfrm>
-            <a:off x="4427877" y="3325597"/>
-            <a:ext cx="2425207" cy="671262"/>
-          </a:xfrm>
-          <a:prstGeom prst="rect">
-            <a:avLst/>
-          </a:prstGeom>
-        </p:spPr>
-      </p:pic>
-      <p:pic>
-        <p:nvPicPr>
-          <p:cNvPr id="21" name="Picture 20">
-            <a:extLst>
-              <a:ext uri="{FF2B5EF4-FFF2-40B4-BE49-F238E27FC236}">
-                <a16:creationId xmlns:a16="http://schemas.microsoft.com/office/drawing/2014/main" id="{E6B13598-5EDC-DBB1-4433-4D9A7C803121}"/>
-              </a:ext>
-            </a:extLst>
-          </p:cNvPr>
-          <p:cNvPicPr>
-            <a:picLocks noChangeAspect="1"/>
-          </p:cNvPicPr>
-          <p:nvPr/>
-        </p:nvPicPr>
-        <p:blipFill>
-          <a:blip r:embed="rId5"/>
-          <a:stretch>
-            <a:fillRect/>
-          </a:stretch>
-        </p:blipFill>
-        <p:spPr>
-          <a:xfrm>
-            <a:off x="2016709" y="5411816"/>
-            <a:ext cx="1523996" cy="380999"/>
-          </a:xfrm>
-          <a:prstGeom prst="rect">
-            <a:avLst/>
-          </a:prstGeom>
-        </p:spPr>
-      </p:pic>
-      <p:pic>
-        <p:nvPicPr>
-          <p:cNvPr id="8" name="Picture 7">
-            <a:extLst>
-              <a:ext uri="{FF2B5EF4-FFF2-40B4-BE49-F238E27FC236}">
-                <a16:creationId xmlns:a16="http://schemas.microsoft.com/office/drawing/2014/main" id="{18782067-9A94-BDAF-3068-775108B35483}"/>
-              </a:ext>
-            </a:extLst>
-          </p:cNvPr>
-          <p:cNvPicPr>
-            <a:picLocks noChangeAspect="1"/>
-          </p:cNvPicPr>
-          <p:nvPr/>
-        </p:nvPicPr>
-        <p:blipFill>
-          <a:blip r:embed="rId6"/>
-          <a:stretch>
-            <a:fillRect/>
-          </a:stretch>
-        </p:blipFill>
-        <p:spPr>
-          <a:xfrm>
-            <a:off x="2460986" y="4572566"/>
-            <a:ext cx="2495898" cy="676369"/>
-          </a:xfrm>
-          <a:prstGeom prst="rect">
-            <a:avLst/>
-          </a:prstGeom>
-        </p:spPr>
-      </p:pic>
-      <p:pic>
-        <p:nvPicPr>
-          <p:cNvPr id="9" name="Picture 8">
-            <a:extLst>
-              <a:ext uri="{FF2B5EF4-FFF2-40B4-BE49-F238E27FC236}">
-                <a16:creationId xmlns:a16="http://schemas.microsoft.com/office/drawing/2014/main" id="{1C8A8FAE-4882-E522-CBAE-714C8759709B}"/>
-              </a:ext>
-            </a:extLst>
-          </p:cNvPr>
-          <p:cNvPicPr>
-            <a:picLocks noChangeAspect="1"/>
-          </p:cNvPicPr>
-          <p:nvPr/>
-        </p:nvPicPr>
-        <p:blipFill>
-          <a:blip r:embed="rId7"/>
-          <a:stretch>
-            <a:fillRect/>
-          </a:stretch>
-        </p:blipFill>
-        <p:spPr>
-          <a:xfrm>
-            <a:off x="1524007" y="4078349"/>
-            <a:ext cx="4571993" cy="380999"/>
-          </a:xfrm>
-          <a:prstGeom prst="rect">
-            <a:avLst/>
-          </a:prstGeom>
-        </p:spPr>
-      </p:pic>
+          <a:p>
+            <a:pPr>
+              <a:defRPr sz="1550">
+                <a:solidFill>
+                  <a:srgbClr val="0F172A"/>
+                </a:solidFill>
+                <a:latin typeface="Arial"/>
+                <a:ea typeface="Arial"/>
+              </a:defRPr>
+            </a:pPr>
+            <a:r>
+              <a:rPr lang="vi-VN" dirty="0">
+                <a:latin typeface="Arial"/>
+                <a:ea typeface="Arial"/>
+              </a:rPr>
+              <a:t>Linear SVM:</a:t>
+            </a:r>
+          </a:p>
+          <a:p>
+            <a:pPr>
+              <a:defRPr sz="1550">
+                <a:solidFill>
+                  <a:srgbClr val="0F172A"/>
+                </a:solidFill>
+                <a:latin typeface="Arial"/>
+                <a:ea typeface="Arial"/>
+              </a:defRPr>
+            </a:pPr>
+            <a:r>
+              <a:rPr lang="vi-VN" dirty="0">
+                <a:latin typeface="Arial"/>
+                <a:ea typeface="Arial"/>
+              </a:rPr>
+              <a:t>Train:</a:t>
+            </a:r>
+          </a:p>
+          <a:p>
+            <a:pPr>
+              <a:defRPr sz="1550">
+                <a:solidFill>
+                  <a:srgbClr val="0F172A"/>
+                </a:solidFill>
+                <a:latin typeface="Arial"/>
+                <a:ea typeface="Arial"/>
+              </a:defRPr>
+            </a:pPr>
+            <a:r>
+              <a:rPr lang="vi-VN" dirty="0">
+                <a:latin typeface="Arial"/>
+                <a:ea typeface="Arial"/>
+              </a:rPr>
+              <a:t>O(I × N × L)</a:t>
+            </a:r>
+          </a:p>
+          <a:p>
+            <a:pPr>
+              <a:defRPr sz="1550">
+                <a:solidFill>
+                  <a:srgbClr val="0F172A"/>
+                </a:solidFill>
+                <a:latin typeface="Arial"/>
+                <a:ea typeface="Arial"/>
+              </a:defRPr>
+            </a:pPr>
+            <a:endParaRPr lang="vi-VN" dirty="0">
+              <a:latin typeface="Arial"/>
+              <a:ea typeface="Arial"/>
+            </a:endParaRPr>
+          </a:p>
+          <a:p>
+            <a:pPr>
+              <a:defRPr sz="1550">
+                <a:solidFill>
+                  <a:srgbClr val="0F172A"/>
+                </a:solidFill>
+                <a:latin typeface="Arial"/>
+                <a:ea typeface="Arial"/>
+              </a:defRPr>
+            </a:pPr>
+            <a:r>
+              <a:rPr lang="vi-VN" dirty="0">
+                <a:latin typeface="Arial"/>
+                <a:ea typeface="Arial"/>
+              </a:rPr>
+              <a:t>Predict:</a:t>
+            </a:r>
+          </a:p>
+          <a:p>
+            <a:pPr>
+              <a:defRPr sz="1550">
+                <a:solidFill>
+                  <a:srgbClr val="0F172A"/>
+                </a:solidFill>
+                <a:latin typeface="Arial"/>
+                <a:ea typeface="Arial"/>
+              </a:defRPr>
+            </a:pPr>
+            <a:r>
+              <a:rPr lang="vi-VN" dirty="0">
+                <a:latin typeface="Arial"/>
+                <a:ea typeface="Arial"/>
+              </a:rPr>
+              <a:t>O(K × L)</a:t>
+            </a:r>
+          </a:p>
+          <a:p>
+            <a:pPr>
+              <a:defRPr sz="1550">
+                <a:solidFill>
+                  <a:srgbClr val="0F172A"/>
+                </a:solidFill>
+                <a:latin typeface="Arial"/>
+                <a:ea typeface="Arial"/>
+              </a:defRPr>
+            </a:pPr>
+            <a:endParaRPr lang="vi-VN" dirty="0">
+              <a:latin typeface="Arial"/>
+              <a:ea typeface="Arial"/>
+            </a:endParaRPr>
+          </a:p>
+          <a:p>
+            <a:pPr>
+              <a:defRPr sz="1550">
+                <a:solidFill>
+                  <a:srgbClr val="0F172A"/>
+                </a:solidFill>
+                <a:latin typeface="Arial"/>
+                <a:ea typeface="Arial"/>
+              </a:defRPr>
+            </a:pPr>
+            <a:r>
+              <a:rPr lang="vi-VN" dirty="0">
+                <a:latin typeface="Arial"/>
+                <a:ea typeface="Arial"/>
+              </a:rPr>
+              <a:t>Memory:</a:t>
+            </a:r>
+          </a:p>
+          <a:p>
+            <a:pPr>
+              <a:defRPr sz="1550">
+                <a:solidFill>
+                  <a:srgbClr val="0F172A"/>
+                </a:solidFill>
+                <a:latin typeface="Arial"/>
+                <a:ea typeface="Arial"/>
+              </a:defRPr>
+            </a:pPr>
+            <a:r>
+              <a:rPr lang="vi-VN" dirty="0">
+                <a:latin typeface="Arial"/>
+                <a:ea typeface="Arial"/>
+              </a:rPr>
+              <a:t>O(K × </a:t>
+            </a:r>
+            <a:r>
+              <a:rPr lang="vi-VN">
+                <a:latin typeface="Arial"/>
+                <a:ea typeface="Arial"/>
+              </a:rPr>
+              <a:t>V)</a:t>
+            </a:r>
+            <a:endParaRPr lang="vi-VN" dirty="0">
+              <a:latin typeface="Arial"/>
+              <a:ea typeface="Arial"/>
+            </a:endParaRPr>
+          </a:p>
+        </p:txBody>
+      </p:sp>
     </p:spTree>
     <p:extLst>
       <p:ext uri="{BB962C8B-B14F-4D97-AF65-F5344CB8AC3E}">
-        <p14:creationId xmlns:p14="http://schemas.microsoft.com/office/powerpoint/2010/main" val="4284177420"/>
+        <p14:creationId xmlns:p14="http://schemas.microsoft.com/office/powerpoint/2010/main" val="2508544841"/>
       </p:ext>
     </p:extLst>
   </p:cSld>
@@ -5407,7 +5641,7 @@
         <p:spPr>
           <a:xfrm>
             <a:off x="685800" y="1143000"/>
-            <a:ext cx="4297680" cy="4480560"/>
+            <a:ext cx="4617720" cy="4480560"/>
           </a:xfrm>
           <a:prstGeom prst="rect">
             <a:avLst/>
@@ -5432,270 +5666,8 @@
               <a:rPr dirty="0">
                 <a:latin typeface="Arial"/>
               </a:rPr>
-              <a:t>• Train/test split: 80/20, stratified by label.</a:t>
-            </a:r>
-          </a:p>
-          <a:p>
-            <a:pPr>
-              <a:defRPr sz="1700">
-                <a:solidFill>
-                  <a:srgbClr val="0F172A"/>
-                </a:solidFill>
-                <a:latin typeface="Arial"/>
-              </a:defRPr>
-            </a:pPr>
-            <a:r>
-              <a:rPr lang="en-US" dirty="0">
-                <a:latin typeface="Arial"/>
-              </a:rPr>
-              <a:t>• Stratified split </a:t>
-            </a:r>
-            <a:r>
-              <a:rPr lang="en-US" dirty="0" err="1">
-                <a:latin typeface="Arial"/>
-              </a:rPr>
-              <a:t>theo</a:t>
-            </a:r>
-            <a:r>
-              <a:rPr lang="en-US" dirty="0">
-                <a:latin typeface="Arial"/>
-              </a:rPr>
-              <a:t> label.</a:t>
-            </a:r>
-          </a:p>
-          <a:p>
-            <a:pPr>
-              <a:defRPr sz="1700">
-                <a:solidFill>
-                  <a:srgbClr val="0F172A"/>
-                </a:solidFill>
-                <a:latin typeface="Arial"/>
-              </a:defRPr>
-            </a:pPr>
-            <a:r>
-              <a:rPr lang="en-US" dirty="0">
-                <a:latin typeface="Arial"/>
-              </a:rPr>
-              <a:t>  • </a:t>
-            </a:r>
-            <a:r>
-              <a:rPr lang="en-US" dirty="0" err="1">
-                <a:latin typeface="Arial"/>
-              </a:rPr>
-              <a:t>Giữ</a:t>
-            </a:r>
-            <a:r>
-              <a:rPr lang="en-US" dirty="0">
-                <a:latin typeface="Arial"/>
-              </a:rPr>
-              <a:t> </a:t>
-            </a:r>
-            <a:r>
-              <a:rPr lang="en-US" dirty="0" err="1">
-                <a:latin typeface="Arial"/>
-              </a:rPr>
-              <a:t>tỉ</a:t>
-            </a:r>
-            <a:r>
-              <a:rPr lang="en-US" dirty="0">
-                <a:latin typeface="Arial"/>
-              </a:rPr>
-              <a:t> </a:t>
-            </a:r>
-            <a:r>
-              <a:rPr lang="en-US" dirty="0" err="1">
-                <a:latin typeface="Arial"/>
-              </a:rPr>
-              <a:t>lệ</a:t>
-            </a:r>
-            <a:r>
-              <a:rPr lang="en-US" dirty="0">
-                <a:latin typeface="Arial"/>
-              </a:rPr>
-              <a:t> </a:t>
-            </a:r>
-            <a:r>
-              <a:rPr lang="en-US" dirty="0" err="1">
-                <a:latin typeface="Arial"/>
-              </a:rPr>
-              <a:t>các</a:t>
-            </a:r>
-            <a:r>
-              <a:rPr lang="en-US" dirty="0">
-                <a:latin typeface="Arial"/>
-              </a:rPr>
-              <a:t> </a:t>
-            </a:r>
-            <a:r>
-              <a:rPr lang="en-US" dirty="0" err="1">
-                <a:latin typeface="Arial"/>
-              </a:rPr>
-              <a:t>lớp</a:t>
-            </a:r>
-            <a:r>
-              <a:rPr lang="en-US" dirty="0">
-                <a:latin typeface="Arial"/>
-              </a:rPr>
-              <a:t> </a:t>
-            </a:r>
-            <a:r>
-              <a:rPr lang="en-US" dirty="0" err="1">
-                <a:latin typeface="Arial"/>
-              </a:rPr>
-              <a:t>trong</a:t>
-            </a:r>
-            <a:r>
-              <a:rPr lang="en-US" dirty="0">
-                <a:latin typeface="Arial"/>
-              </a:rPr>
-              <a:t> train/test </a:t>
-            </a:r>
-            <a:r>
-              <a:rPr lang="en-US" dirty="0" err="1">
-                <a:latin typeface="Arial"/>
-              </a:rPr>
-              <a:t>gần</a:t>
-            </a:r>
-            <a:r>
-              <a:rPr lang="en-US" dirty="0">
-                <a:latin typeface="Arial"/>
-              </a:rPr>
-              <a:t> </a:t>
-            </a:r>
-            <a:r>
-              <a:rPr lang="en-US" dirty="0" err="1">
-                <a:latin typeface="Arial"/>
-              </a:rPr>
-              <a:t>giống</a:t>
-            </a:r>
-            <a:r>
-              <a:rPr lang="en-US" dirty="0">
-                <a:latin typeface="Arial"/>
-              </a:rPr>
-              <a:t> </a:t>
-            </a:r>
-            <a:r>
-              <a:rPr lang="en-US" dirty="0" err="1">
-                <a:latin typeface="Arial"/>
-              </a:rPr>
-              <a:t>dữ</a:t>
-            </a:r>
-            <a:r>
-              <a:rPr lang="en-US" dirty="0">
-                <a:latin typeface="Arial"/>
-              </a:rPr>
-              <a:t> </a:t>
-            </a:r>
-            <a:r>
-              <a:rPr lang="en-US" dirty="0" err="1">
-                <a:latin typeface="Arial"/>
-              </a:rPr>
-              <a:t>liệu</a:t>
-            </a:r>
-            <a:r>
-              <a:rPr lang="en-US" dirty="0">
-                <a:latin typeface="Arial"/>
-              </a:rPr>
-              <a:t> </a:t>
-            </a:r>
-            <a:r>
-              <a:rPr lang="en-US" dirty="0" err="1">
-                <a:latin typeface="Arial"/>
-              </a:rPr>
-              <a:t>gốc</a:t>
-            </a:r>
-            <a:r>
-              <a:rPr lang="en-US" dirty="0">
-                <a:latin typeface="Arial"/>
-              </a:rPr>
-              <a:t>.</a:t>
-            </a:r>
-          </a:p>
-          <a:p>
-            <a:pPr>
-              <a:defRPr sz="1700">
-                <a:solidFill>
-                  <a:srgbClr val="0F172A"/>
-                </a:solidFill>
-                <a:latin typeface="Arial"/>
-              </a:defRPr>
-            </a:pPr>
-            <a:r>
-              <a:rPr lang="en-US" dirty="0">
-                <a:latin typeface="Arial"/>
-              </a:rPr>
-              <a:t>  • </a:t>
-            </a:r>
-            <a:r>
-              <a:rPr lang="en-US" dirty="0" err="1">
-                <a:latin typeface="Arial"/>
-              </a:rPr>
-              <a:t>Tránh</a:t>
-            </a:r>
-            <a:r>
-              <a:rPr lang="en-US" dirty="0">
-                <a:latin typeface="Arial"/>
-              </a:rPr>
-              <a:t> </a:t>
-            </a:r>
-            <a:r>
-              <a:rPr lang="en-US" dirty="0" err="1">
-                <a:latin typeface="Arial"/>
-              </a:rPr>
-              <a:t>tập</a:t>
-            </a:r>
-            <a:r>
-              <a:rPr lang="en-US" dirty="0">
-                <a:latin typeface="Arial"/>
-              </a:rPr>
-              <a:t> test </a:t>
-            </a:r>
-            <a:r>
-              <a:rPr lang="en-US" dirty="0" err="1">
-                <a:latin typeface="Arial"/>
-              </a:rPr>
-              <a:t>bị</a:t>
-            </a:r>
-            <a:r>
-              <a:rPr lang="en-US" dirty="0">
-                <a:latin typeface="Arial"/>
-              </a:rPr>
-              <a:t> </a:t>
-            </a:r>
-            <a:r>
-              <a:rPr lang="en-US" dirty="0" err="1">
-                <a:latin typeface="Arial"/>
-              </a:rPr>
-              <a:t>lệch</a:t>
-            </a:r>
-            <a:r>
-              <a:rPr lang="en-US" dirty="0">
-                <a:latin typeface="Arial"/>
-              </a:rPr>
-              <a:t> </a:t>
-            </a:r>
-            <a:r>
-              <a:rPr lang="en-US" dirty="0" err="1">
-                <a:latin typeface="Arial"/>
-              </a:rPr>
-              <a:t>nhãn</a:t>
-            </a:r>
-            <a:r>
-              <a:rPr lang="en-US" dirty="0">
-                <a:latin typeface="Arial"/>
-              </a:rPr>
-              <a:t>.</a:t>
-            </a:r>
-          </a:p>
-          <a:p>
-            <a:pPr>
-              <a:defRPr sz="1700">
-                <a:solidFill>
-                  <a:srgbClr val="0F172A"/>
-                </a:solidFill>
-                <a:latin typeface="Arial"/>
-              </a:defRPr>
-            </a:pPr>
+              <a:t>• Train/test split: 80/20</a:t>
+            </a:r>
             <a:endParaRPr lang="en-US" dirty="0">
               <a:latin typeface="Arial"/>
             </a:endParaRPr>
@@ -5713,7 +5685,19 @@
               <a:rPr lang="en-US" dirty="0">
                 <a:latin typeface="Arial"/>
               </a:rPr>
-              <a:t>• Random state: 62.</a:t>
+              <a:t>• Stratified split </a:t>
+            </a:r>
+            <a:r>
+              <a:rPr lang="en-US" dirty="0" err="1">
+                <a:latin typeface="Arial"/>
+              </a:rPr>
+              <a:t>theo</a:t>
+            </a:r>
+            <a:r>
+              <a:rPr lang="en-US" dirty="0">
+                <a:latin typeface="Arial"/>
+              </a:rPr>
+              <a:t> label.</a:t>
             </a:r>
           </a:p>
           <a:p>
@@ -5729,13 +5713,13 @@
               <a:rPr lang="en-US" dirty="0">
                 <a:latin typeface="Arial"/>
               </a:rPr>
-              <a:t>  • </a:t>
+              <a:t>• </a:t>
             </a:r>
             <a:r>
               <a:rPr lang="en-US" dirty="0" err="1">
                 <a:latin typeface="Arial"/>
               </a:rPr>
-              <a:t>Giúp</a:t>
+              <a:t>Giữ</a:t>
             </a:r>
             <a:r>
               <a:rPr lang="en-US" dirty="0">
@@ -5747,7 +5731,7 @@
               <a:rPr lang="en-US" dirty="0" err="1">
                 <a:latin typeface="Arial"/>
               </a:rPr>
-              <a:t>kết</a:t>
+              <a:t>tỉ</a:t>
             </a:r>
             <a:r>
               <a:rPr lang="en-US" dirty="0">
@@ -5759,18 +5743,78 @@
               <a:rPr lang="en-US" dirty="0" err="1">
                 <a:latin typeface="Arial"/>
               </a:rPr>
-              <a:t>quả</a:t>
+              <a:t>lệ</a:t>
             </a:r>
             <a:r>
               <a:rPr lang="en-US" dirty="0">
                 <a:latin typeface="Arial"/>
               </a:rPr>
-              <a:t> chia </a:t>
+              <a:t> </a:t>
             </a:r>
             <a:r>
               <a:rPr lang="en-US" dirty="0" err="1">
                 <a:latin typeface="Arial"/>
               </a:rPr>
+              <a:t>các</a:t>
+            </a:r>
+            <a:r>
+              <a:rPr lang="en-US" dirty="0">
+                <a:latin typeface="Arial"/>
+              </a:rPr>
+              <a:t> </a:t>
+            </a:r>
+            <a:r>
+              <a:rPr lang="en-US" dirty="0" err="1">
+                <a:latin typeface="Arial"/>
+              </a:rPr>
+              <a:t>lớp</a:t>
+            </a:r>
+            <a:r>
+              <a:rPr lang="en-US" dirty="0">
+                <a:latin typeface="Arial"/>
+              </a:rPr>
+              <a:t> </a:t>
+            </a:r>
+            <a:r>
+              <a:rPr lang="en-US" dirty="0" err="1">
+                <a:latin typeface="Arial"/>
+              </a:rPr>
+              <a:t>trong</a:t>
+            </a:r>
+            <a:r>
+              <a:rPr lang="en-US" dirty="0">
+                <a:latin typeface="Arial"/>
+              </a:rPr>
+              <a:t> train/test </a:t>
+            </a:r>
+            <a:r>
+              <a:rPr lang="en-US" dirty="0" err="1">
+                <a:latin typeface="Arial"/>
+              </a:rPr>
+              <a:t>gần</a:t>
+            </a:r>
+            <a:r>
+              <a:rPr lang="en-US" dirty="0">
+                <a:latin typeface="Arial"/>
+              </a:rPr>
+              <a:t> </a:t>
+            </a:r>
+            <a:r>
+              <a:rPr lang="en-US" dirty="0" err="1">
+                <a:latin typeface="Arial"/>
+              </a:rPr>
+              <a:t>giống</a:t>
+            </a:r>
+            <a:r>
+              <a:rPr lang="en-US" dirty="0">
+                <a:latin typeface="Arial"/>
+              </a:rPr>
+              <a:t> </a:t>
+            </a:r>
+            <a:r>
+              <a:rPr lang="en-US" dirty="0" err="1">
+                <a:latin typeface="Arial"/>
+              </a:rPr>
               <a:t>dữ</a:t>
             </a:r>
             <a:r>
@@ -5795,43 +5839,7 @@
               <a:rPr lang="en-US" dirty="0" err="1">
                 <a:latin typeface="Arial"/>
               </a:rPr>
-              <a:t>có</a:t>
-            </a:r>
-            <a:r>
-              <a:rPr lang="en-US" dirty="0">
-                <a:latin typeface="Arial"/>
-              </a:rPr>
-              <a:t> </a:t>
-            </a:r>
-            <a:r>
-              <a:rPr lang="en-US" dirty="0" err="1">
-                <a:latin typeface="Arial"/>
-              </a:rPr>
-              <a:t>thể</a:t>
-            </a:r>
-            <a:r>
-              <a:rPr lang="en-US" dirty="0">
-                <a:latin typeface="Arial"/>
-              </a:rPr>
-              <a:t> </a:t>
-            </a:r>
-            <a:r>
-              <a:rPr lang="en-US" dirty="0" err="1">
-                <a:latin typeface="Arial"/>
-              </a:rPr>
-              <a:t>lặp</a:t>
-            </a:r>
-            <a:r>
-              <a:rPr lang="en-US" dirty="0">
-                <a:latin typeface="Arial"/>
-              </a:rPr>
-              <a:t> </a:t>
-            </a:r>
-            <a:r>
-              <a:rPr lang="en-US" dirty="0" err="1">
-                <a:latin typeface="Arial"/>
-              </a:rPr>
-              <a:t>lại</a:t>
+              <a:t>gốc</a:t>
             </a:r>
             <a:r>
               <a:rPr lang="en-US" dirty="0">
@@ -5849,9 +5857,120 @@
                 <a:latin typeface="Arial"/>
               </a:defRPr>
             </a:pPr>
-            <a:endParaRPr lang="en-US" dirty="0">
-              <a:latin typeface="Arial"/>
-            </a:endParaRPr>
+            <a:r>
+              <a:rPr lang="en-US" dirty="0">
+                <a:latin typeface="Arial"/>
+              </a:rPr>
+              <a:t>• Random state: 62 - </a:t>
+            </a:r>
+            <a:r>
+              <a:rPr lang="en-US" dirty="0" err="1">
+                <a:latin typeface="Arial"/>
+              </a:rPr>
+              <a:t>Giúp</a:t>
+            </a:r>
+            <a:r>
+              <a:rPr lang="en-US" dirty="0">
+                <a:latin typeface="Arial"/>
+              </a:rPr>
+              <a:t> </a:t>
+            </a:r>
+            <a:r>
+              <a:rPr lang="en-US" dirty="0" err="1">
+                <a:latin typeface="Arial"/>
+              </a:rPr>
+              <a:t>kết</a:t>
+            </a:r>
+            <a:r>
+              <a:rPr lang="en-US" dirty="0">
+                <a:latin typeface="Arial"/>
+              </a:rPr>
+              <a:t> </a:t>
+            </a:r>
+            <a:r>
+              <a:rPr lang="en-US" dirty="0" err="1">
+                <a:latin typeface="Arial"/>
+              </a:rPr>
+              <a:t>quả</a:t>
+            </a:r>
+            <a:r>
+              <a:rPr lang="en-US" dirty="0">
+                <a:latin typeface="Arial"/>
+              </a:rPr>
+              <a:t> chia </a:t>
+            </a:r>
+            <a:r>
+              <a:rPr lang="en-US" dirty="0" err="1">
+                <a:latin typeface="Arial"/>
+              </a:rPr>
+              <a:t>dữ</a:t>
+            </a:r>
+            <a:r>
+              <a:rPr lang="en-US" dirty="0">
+                <a:latin typeface="Arial"/>
+              </a:rPr>
+              <a:t> </a:t>
+            </a:r>
+            <a:r>
+              <a:rPr lang="en-US" dirty="0" err="1">
+                <a:latin typeface="Arial"/>
+              </a:rPr>
+              <a:t>liệu</a:t>
+            </a:r>
+            <a:r>
+              <a:rPr lang="en-US" dirty="0">
+                <a:latin typeface="Arial"/>
+              </a:rPr>
+              <a:t> </a:t>
+            </a:r>
+            <a:r>
+              <a:rPr lang="en-US" dirty="0" err="1">
+                <a:latin typeface="Arial"/>
+              </a:rPr>
+              <a:t>có</a:t>
+            </a:r>
+            <a:r>
+              <a:rPr lang="en-US" dirty="0">
+                <a:latin typeface="Arial"/>
+              </a:rPr>
+              <a:t> </a:t>
+            </a:r>
+            <a:r>
+              <a:rPr lang="en-US" dirty="0" err="1">
+                <a:latin typeface="Arial"/>
+              </a:rPr>
+              <a:t>thể</a:t>
+            </a:r>
+            <a:r>
+              <a:rPr lang="en-US" dirty="0">
+                <a:latin typeface="Arial"/>
+              </a:rPr>
+              <a:t> </a:t>
+            </a:r>
+            <a:r>
+              <a:rPr lang="en-US" dirty="0" err="1">
+                <a:latin typeface="Arial"/>
+              </a:rPr>
+              <a:t>lặp</a:t>
+            </a:r>
+            <a:r>
+              <a:rPr lang="en-US" dirty="0">
+                <a:latin typeface="Arial"/>
+              </a:rPr>
+              <a:t> </a:t>
+            </a:r>
+            <a:r>
+              <a:rPr lang="en-US" dirty="0" err="1">
+                <a:latin typeface="Arial"/>
+              </a:rPr>
+              <a:t>lại</a:t>
+            </a:r>
+            <a:r>
+              <a:rPr lang="en-US" dirty="0">
+                <a:latin typeface="Arial"/>
+              </a:rPr>
+              <a:t>.</a:t>
+            </a:r>
           </a:p>
           <a:p>
             <a:pPr>
@@ -6153,152 +6272,6 @@
               <a:t>.</a:t>
             </a:r>
             <a:endParaRPr dirty="0">
-              <a:latin typeface="Arial"/>
-            </a:endParaRPr>
-          </a:p>
-        </p:txBody>
-      </p:sp>
-      <p:sp>
-        <p:nvSpPr>
-          <p:cNvPr id="8" name="Rounded Rectangle 7"/>
-          <p:cNvSpPr/>
-          <p:nvPr/>
-        </p:nvSpPr>
-        <p:spPr>
-          <a:xfrm>
-            <a:off x="5257800" y="1540764"/>
-            <a:ext cx="5989320" cy="1143000"/>
-          </a:xfrm>
-          <a:prstGeom prst="roundRect">
-            <a:avLst/>
-          </a:prstGeom>
-          <a:solidFill>
-            <a:srgbClr val="F8FAFC"/>
-          </a:solidFill>
-          <a:ln w="12700">
-            <a:solidFill>
-              <a:srgbClr val="CBD5E1"/>
-            </a:solidFill>
-          </a:ln>
-        </p:spPr>
-        <p:style>
-          <a:lnRef idx="1">
-            <a:schemeClr val="accent1"/>
-          </a:lnRef>
-          <a:fillRef idx="3">
-            <a:schemeClr val="accent1"/>
-          </a:fillRef>
-          <a:effectRef idx="2">
-            <a:schemeClr val="accent1"/>
-          </a:effectRef>
-          <a:fontRef idx="minor">
-            <a:schemeClr val="lt1"/>
-          </a:fontRef>
-        </p:style>
-        <p:txBody>
-          <a:bodyPr rtlCol="0" anchor="ctr"/>
-          <a:lstStyle/>
-          <a:p>
-            <a:pPr algn="ctr"/>
-            <a:endParaRPr/>
-          </a:p>
-        </p:txBody>
-      </p:sp>
-      <p:sp>
-        <p:nvSpPr>
-          <p:cNvPr id="9" name="TextBox 8"/>
-          <p:cNvSpPr txBox="1"/>
-          <p:nvPr/>
-        </p:nvSpPr>
-        <p:spPr>
-          <a:xfrm>
-            <a:off x="5257800" y="1565788"/>
-            <a:ext cx="1280160" cy="228600"/>
-          </a:xfrm>
-          <a:prstGeom prst="rect">
-            <a:avLst/>
-          </a:prstGeom>
-          <a:noFill/>
-        </p:spPr>
-        <p:txBody>
-          <a:bodyPr wrap="square">
-            <a:normAutofit fontScale="85000" lnSpcReduction="20000"/>
-          </a:bodyPr>
-          <a:lstStyle/>
-          <a:p>
-            <a:pPr algn="l"/>
-            <a:r>
-              <a:rPr sz="1300" b="1" dirty="0">
-                <a:solidFill>
-                  <a:srgbClr val="142A41"/>
-                </a:solidFill>
-                <a:latin typeface="Arial"/>
-              </a:rPr>
-              <a:t>Takeaway</a:t>
-            </a:r>
-          </a:p>
-        </p:txBody>
-      </p:sp>
-      <p:sp>
-        <p:nvSpPr>
-          <p:cNvPr id="10" name="TextBox 9"/>
-          <p:cNvSpPr txBox="1"/>
-          <p:nvPr/>
-        </p:nvSpPr>
-        <p:spPr>
-          <a:xfrm>
-            <a:off x="5257800" y="1794388"/>
-            <a:ext cx="5837073" cy="868680"/>
-          </a:xfrm>
-          <a:prstGeom prst="rect">
-            <a:avLst/>
-          </a:prstGeom>
-          <a:noFill/>
-        </p:spPr>
-        <p:txBody>
-          <a:bodyPr wrap="square">
-            <a:normAutofit fontScale="92500" lnSpcReduction="10000"/>
-          </a:bodyPr>
-          <a:lstStyle/>
-          <a:p>
-            <a:pPr algn="l"/>
-            <a:r>
-              <a:rPr lang="vi-VN" sz="1400" b="0" dirty="0">
-                <a:solidFill>
-                  <a:srgbClr val="0F172A"/>
-                </a:solidFill>
-                <a:latin typeface="Arial"/>
-              </a:rPr>
-              <a:t>TF-IDF + Linear SVM là mô hình chính vì cho kết quả tốt nhất trên dữ liệu review.</a:t>
-            </a:r>
-          </a:p>
-          <a:p>
-            <a:pPr algn="l"/>
-            <a:r>
-              <a:rPr lang="vi-VN" sz="1400" b="0" dirty="0">
-                <a:solidFill>
-                  <a:srgbClr val="0F172A"/>
-                </a:solidFill>
-                <a:latin typeface="Arial"/>
-              </a:rPr>
-              <a:t>Safe issue rules giúp cải thiện issue classification ở các trường hợp rõ ràng</a:t>
-            </a:r>
-          </a:p>
-          <a:p>
-            <a:pPr algn="l"/>
-            <a:r>
-              <a:rPr lang="vi-VN" sz="1400" b="0" dirty="0">
-                <a:solidFill>
-                  <a:srgbClr val="0F172A"/>
-                </a:solidFill>
-                <a:latin typeface="Arial"/>
-              </a:rPr>
-              <a:t>như giao chậm, thiếu hàng, giao sai hoặc đóng gói lỗi.</a:t>
-            </a:r>
-            <a:endParaRPr sz="1400" b="0" dirty="0">
-              <a:solidFill>
-                <a:srgbClr val="0F172A"/>
-              </a:solidFill>
               <a:latin typeface="Arial"/>
             </a:endParaRPr>
           </a:p>
@@ -9152,584 +9125,6 @@
                 </a:solidFill>
                 <a:latin typeface="Arial"/>
               </a:rPr>
-              <a:t>Demo</a:t>
-            </a:r>
-          </a:p>
-        </p:txBody>
-      </p:sp>
-      <p:sp>
-        <p:nvSpPr>
-          <p:cNvPr id="4" name="TextBox 3"/>
-          <p:cNvSpPr txBox="1"/>
-          <p:nvPr/>
-        </p:nvSpPr>
-        <p:spPr>
-          <a:xfrm>
-            <a:off x="10972800" y="347472"/>
-            <a:ext cx="685800" cy="274320"/>
-          </a:xfrm>
-          <a:prstGeom prst="rect">
-            <a:avLst/>
-          </a:prstGeom>
-          <a:noFill/>
-        </p:spPr>
-        <p:txBody>
-          <a:bodyPr wrap="square">
-            <a:normAutofit/>
-          </a:bodyPr>
-          <a:lstStyle/>
-          <a:p>
-            <a:pPr algn="r"/>
-            <a:r>
-              <a:rPr sz="1000" b="0">
-                <a:solidFill>
-                  <a:srgbClr val="475569"/>
-                </a:solidFill>
-                <a:latin typeface="Arial"/>
-              </a:rPr>
-              <a:t>14/15</a:t>
-            </a:r>
-          </a:p>
-        </p:txBody>
-      </p:sp>
-      <p:sp>
-        <p:nvSpPr>
-          <p:cNvPr id="5" name="TextBox 4"/>
-          <p:cNvSpPr txBox="1"/>
-          <p:nvPr/>
-        </p:nvSpPr>
-        <p:spPr>
-          <a:xfrm>
-            <a:off x="502920" y="6510528"/>
-            <a:ext cx="2011680" cy="182880"/>
-          </a:xfrm>
-          <a:prstGeom prst="rect">
-            <a:avLst/>
-          </a:prstGeom>
-          <a:noFill/>
-        </p:spPr>
-        <p:txBody>
-          <a:bodyPr wrap="square">
-            <a:normAutofit fontScale="77500" lnSpcReduction="20000"/>
-          </a:bodyPr>
-          <a:lstStyle/>
-          <a:p>
-            <a:pPr algn="l"/>
-            <a:r>
-              <a:rPr sz="900" b="0">
-                <a:solidFill>
-                  <a:srgbClr val="475569"/>
-                </a:solidFill>
-                <a:latin typeface="Arial"/>
-              </a:rPr>
-              <a:t>AIMiniProject</a:t>
-            </a:r>
-          </a:p>
-        </p:txBody>
-      </p:sp>
-      <p:sp>
-        <p:nvSpPr>
-          <p:cNvPr id="6" name="Rounded Rectangle 5"/>
-          <p:cNvSpPr/>
-          <p:nvPr/>
-        </p:nvSpPr>
-        <p:spPr>
-          <a:xfrm>
-            <a:off x="777240" y="1234440"/>
-            <a:ext cx="10698480" cy="960120"/>
-          </a:xfrm>
-          <a:prstGeom prst="roundRect">
-            <a:avLst/>
-          </a:prstGeom>
-          <a:solidFill>
-            <a:srgbClr val="EFF6FF"/>
-          </a:solidFill>
-          <a:ln w="12700">
-            <a:solidFill>
-              <a:srgbClr val="93C5FD"/>
-            </a:solidFill>
-          </a:ln>
-        </p:spPr>
-        <p:style>
-          <a:lnRef idx="1">
-            <a:schemeClr val="accent1"/>
-          </a:lnRef>
-          <a:fillRef idx="3">
-            <a:schemeClr val="accent1"/>
-          </a:fillRef>
-          <a:effectRef idx="2">
-            <a:schemeClr val="accent1"/>
-          </a:effectRef>
-          <a:fontRef idx="minor">
-            <a:schemeClr val="lt1"/>
-          </a:fontRef>
-        </p:style>
-        <p:txBody>
-          <a:bodyPr rtlCol="0" anchor="ctr"/>
-          <a:lstStyle/>
-          <a:p>
-            <a:pPr algn="ctr"/>
-            <a:endParaRPr/>
-          </a:p>
-        </p:txBody>
-      </p:sp>
-      <p:sp>
-        <p:nvSpPr>
-          <p:cNvPr id="7" name="TextBox 6"/>
-          <p:cNvSpPr txBox="1"/>
-          <p:nvPr/>
-        </p:nvSpPr>
-        <p:spPr>
-          <a:xfrm>
-            <a:off x="1051560" y="1444752"/>
-            <a:ext cx="685800" cy="274320"/>
-          </a:xfrm>
-          <a:prstGeom prst="rect">
-            <a:avLst/>
-          </a:prstGeom>
-          <a:noFill/>
-        </p:spPr>
-        <p:txBody>
-          <a:bodyPr wrap="square">
-            <a:normAutofit fontScale="92500" lnSpcReduction="10000"/>
-          </a:bodyPr>
-          <a:lstStyle/>
-          <a:p>
-            <a:pPr algn="l"/>
-            <a:r>
-              <a:rPr sz="1400" b="1">
-                <a:solidFill>
-                  <a:srgbClr val="2563EB"/>
-                </a:solidFill>
-                <a:latin typeface="Arial"/>
-              </a:rPr>
-              <a:t>Input</a:t>
-            </a:r>
-          </a:p>
-        </p:txBody>
-      </p:sp>
-      <p:sp>
-        <p:nvSpPr>
-          <p:cNvPr id="8" name="TextBox 7"/>
-          <p:cNvSpPr txBox="1"/>
-          <p:nvPr/>
-        </p:nvSpPr>
-        <p:spPr>
-          <a:xfrm>
-            <a:off x="1828800" y="1417320"/>
-            <a:ext cx="8686800" cy="777240"/>
-          </a:xfrm>
-          <a:prstGeom prst="rect">
-            <a:avLst/>
-          </a:prstGeom>
-          <a:noFill/>
-        </p:spPr>
-        <p:txBody>
-          <a:bodyPr wrap="square">
-            <a:normAutofit fontScale="85000" lnSpcReduction="20000"/>
-          </a:bodyPr>
-          <a:lstStyle/>
-          <a:p>
-            <a:pPr algn="l"/>
-            <a:r>
-              <a:rPr lang="vi-VN" sz="2100" dirty="0">
-                <a:solidFill>
-                  <a:srgbClr val="142A41"/>
-                </a:solidFill>
-                <a:latin typeface="Consolas"/>
-              </a:rPr>
-              <a:t>Giao hàng nhanh, đóng gói cũng đc tuy nhiên ốp bị ố ở viền , k lau sạch được ! Ốp cũng k ôm hết máy ! Bửa nhẹ phần viền để ốp máy vào thì bung! Hơi thất vọng!</a:t>
-            </a:r>
-            <a:endParaRPr sz="2100" dirty="0">
-              <a:solidFill>
-                <a:srgbClr val="142A41"/>
-              </a:solidFill>
-              <a:latin typeface="Consolas"/>
-            </a:endParaRPr>
-          </a:p>
-        </p:txBody>
-      </p:sp>
-      <p:graphicFrame>
-        <p:nvGraphicFramePr>
-          <p:cNvPr id="9" name="Table 8"/>
-          <p:cNvGraphicFramePr>
-            <a:graphicFrameLocks noGrp="1"/>
-          </p:cNvGraphicFramePr>
-          <p:nvPr>
-            <p:extLst>
-              <p:ext uri="{D42A27DB-BD31-4B8C-83A1-F6EECF244321}">
-                <p14:modId xmlns:p14="http://schemas.microsoft.com/office/powerpoint/2010/main" val="4087847612"/>
-              </p:ext>
-            </p:extLst>
-          </p:nvPr>
-        </p:nvGraphicFramePr>
-        <p:xfrm>
-          <a:off x="1325880" y="2743200"/>
-          <a:ext cx="9509760" cy="1516380"/>
-        </p:xfrm>
-        <a:graphic>
-          <a:graphicData uri="http://schemas.openxmlformats.org/drawingml/2006/table">
-            <a:tbl>
-              <a:tblPr firstRow="1" bandRow="1">
-                <a:tableStyleId>{5C22544A-7EE6-4342-B048-85BDC9FD1C3A}</a:tableStyleId>
-              </a:tblPr>
-              <a:tblGrid>
-                <a:gridCol w="2286000">
-                  <a:extLst>
-                    <a:ext uri="{9D8B030D-6E8A-4147-A177-3AD203B41FA5}">
-                      <a16:colId xmlns:a16="http://schemas.microsoft.com/office/drawing/2014/main" val="20000"/>
-                    </a:ext>
-                  </a:extLst>
-                </a:gridCol>
-                <a:gridCol w="7223760">
-                  <a:extLst>
-                    <a:ext uri="{9D8B030D-6E8A-4147-A177-3AD203B41FA5}">
-                      <a16:colId xmlns:a16="http://schemas.microsoft.com/office/drawing/2014/main" val="20001"/>
-                    </a:ext>
-                  </a:extLst>
-                </a:gridCol>
-              </a:tblGrid>
-              <a:tr h="373380">
-                <a:tc>
-                  <a:txBody>
-                    <a:bodyPr/>
-                    <a:lstStyle/>
-                    <a:p>
-                      <a:pPr>
-                        <a:defRPr sz="1100" b="1">
-                          <a:solidFill>
-                            <a:srgbClr val="FFFFFF"/>
-                          </a:solidFill>
-                          <a:latin typeface="Arial"/>
-                        </a:defRPr>
-                      </a:pPr>
-                      <a:r>
-                        <a:t>Field</a:t>
-                      </a:r>
-                    </a:p>
-                  </a:txBody>
-                  <a:tcPr>
-                    <a:solidFill>
-                      <a:srgbClr val="142A41"/>
-                    </a:solidFill>
-                  </a:tcPr>
-                </a:tc>
-                <a:tc>
-                  <a:txBody>
-                    <a:bodyPr/>
-                    <a:lstStyle/>
-                    <a:p>
-                      <a:pPr>
-                        <a:defRPr sz="1100" b="1">
-                          <a:solidFill>
-                            <a:srgbClr val="FFFFFF"/>
-                          </a:solidFill>
-                          <a:latin typeface="Arial"/>
-                        </a:defRPr>
-                      </a:pPr>
-                      <a:r>
-                        <a:t>Output</a:t>
-                      </a:r>
-                    </a:p>
-                  </a:txBody>
-                  <a:tcPr>
-                    <a:solidFill>
-                      <a:srgbClr val="142A41"/>
-                    </a:solidFill>
-                  </a:tcPr>
-                </a:tc>
-                <a:extLst>
-                  <a:ext uri="{0D108BD9-81ED-4DB2-BD59-A6C34878D82A}">
-                    <a16:rowId xmlns:a16="http://schemas.microsoft.com/office/drawing/2014/main" val="10000"/>
-                  </a:ext>
-                </a:extLst>
-              </a:tr>
-              <a:tr h="373380">
-                <a:tc>
-                  <a:txBody>
-                    <a:bodyPr/>
-                    <a:lstStyle/>
-                    <a:p>
-                      <a:pPr>
-                        <a:defRPr sz="1100" b="0">
-                          <a:solidFill>
-                            <a:srgbClr val="0F172A"/>
-                          </a:solidFill>
-                          <a:latin typeface="Arial"/>
-                        </a:defRPr>
-                      </a:pPr>
-                      <a:r>
-                        <a:t>Processed text</a:t>
-                      </a:r>
-                    </a:p>
-                  </a:txBody>
-                  <a:tcPr>
-                    <a:solidFill>
-                      <a:srgbClr val="F8FAFC"/>
-                    </a:solidFill>
-                  </a:tcPr>
-                </a:tc>
-                <a:tc>
-                  <a:txBody>
-                    <a:bodyPr/>
-                    <a:lstStyle/>
-                    <a:p>
-                      <a:pPr>
-                        <a:defRPr sz="1000" b="0">
-                          <a:solidFill>
-                            <a:srgbClr val="0F172A"/>
-                          </a:solidFill>
-                          <a:latin typeface="Arial"/>
-                        </a:defRPr>
-                      </a:pPr>
-                      <a:r>
-                        <a:rPr lang="vi-VN" dirty="0"/>
-                        <a:t>giao hàng nhanh đóng gói cũng duoc tuy nhiên ốp bị ố ở viền khong lau sạch duoc ốp cũng khong ôm hết máy bửa nhẹ phần viền để ốp máy vào thì bung hơi thất vọng</a:t>
-                      </a:r>
-                      <a:endParaRPr dirty="0"/>
-                    </a:p>
-                  </a:txBody>
-                  <a:tcPr>
-                    <a:solidFill>
-                      <a:srgbClr val="F8FAFC"/>
-                    </a:solidFill>
-                  </a:tcPr>
-                </a:tc>
-                <a:extLst>
-                  <a:ext uri="{0D108BD9-81ED-4DB2-BD59-A6C34878D82A}">
-                    <a16:rowId xmlns:a16="http://schemas.microsoft.com/office/drawing/2014/main" val="10001"/>
-                  </a:ext>
-                </a:extLst>
-              </a:tr>
-              <a:tr h="373380">
-                <a:tc>
-                  <a:txBody>
-                    <a:bodyPr/>
-                    <a:lstStyle/>
-                    <a:p>
-                      <a:pPr>
-                        <a:defRPr sz="1100" b="0">
-                          <a:solidFill>
-                            <a:srgbClr val="0F172A"/>
-                          </a:solidFill>
-                          <a:latin typeface="Arial"/>
-                        </a:defRPr>
-                      </a:pPr>
-                      <a:r>
-                        <a:t>Sentiment</a:t>
-                      </a:r>
-                    </a:p>
-                  </a:txBody>
-                  <a:tcPr>
-                    <a:solidFill>
-                      <a:srgbClr val="FFFFFF"/>
-                    </a:solidFill>
-                  </a:tcPr>
-                </a:tc>
-                <a:tc>
-                  <a:txBody>
-                    <a:bodyPr/>
-                    <a:lstStyle/>
-                    <a:p>
-                      <a:pPr>
-                        <a:defRPr sz="1100" b="0">
-                          <a:solidFill>
-                            <a:srgbClr val="0F172A"/>
-                          </a:solidFill>
-                          <a:latin typeface="Arial"/>
-                        </a:defRPr>
-                      </a:pPr>
-                      <a:r>
-                        <a:t>negative</a:t>
-                      </a:r>
-                    </a:p>
-                  </a:txBody>
-                  <a:tcPr>
-                    <a:solidFill>
-                      <a:srgbClr val="FFFFFF"/>
-                    </a:solidFill>
-                  </a:tcPr>
-                </a:tc>
-                <a:extLst>
-                  <a:ext uri="{0D108BD9-81ED-4DB2-BD59-A6C34878D82A}">
-                    <a16:rowId xmlns:a16="http://schemas.microsoft.com/office/drawing/2014/main" val="10002"/>
-                  </a:ext>
-                </a:extLst>
-              </a:tr>
-              <a:tr h="373380">
-                <a:tc>
-                  <a:txBody>
-                    <a:bodyPr/>
-                    <a:lstStyle/>
-                    <a:p>
-                      <a:pPr>
-                        <a:defRPr sz="1100" b="0">
-                          <a:solidFill>
-                            <a:srgbClr val="0F172A"/>
-                          </a:solidFill>
-                          <a:latin typeface="Arial"/>
-                        </a:defRPr>
-                      </a:pPr>
-                      <a:r>
-                        <a:rPr dirty="0"/>
-                        <a:t>Issue</a:t>
-                      </a:r>
-                    </a:p>
-                  </a:txBody>
-                  <a:tcPr>
-                    <a:solidFill>
-                      <a:srgbClr val="F8FAFC"/>
-                    </a:solidFill>
-                  </a:tcPr>
-                </a:tc>
-                <a:tc>
-                  <a:txBody>
-                    <a:bodyPr/>
-                    <a:lstStyle/>
-                    <a:p>
-                      <a:pPr>
-                        <a:defRPr sz="1100" b="0">
-                          <a:solidFill>
-                            <a:srgbClr val="0F172A"/>
-                          </a:solidFill>
-                          <a:latin typeface="Arial"/>
-                        </a:defRPr>
-                      </a:pPr>
-                      <a:r>
-                        <a:rPr lang="en-US" dirty="0" err="1"/>
-                        <a:t>product_quality</a:t>
-                      </a:r>
-                      <a:endParaRPr dirty="0"/>
-                    </a:p>
-                  </a:txBody>
-                  <a:tcPr>
-                    <a:solidFill>
-                      <a:srgbClr val="F8FAFC"/>
-                    </a:solidFill>
-                  </a:tcPr>
-                </a:tc>
-                <a:extLst>
-                  <a:ext uri="{0D108BD9-81ED-4DB2-BD59-A6C34878D82A}">
-                    <a16:rowId xmlns:a16="http://schemas.microsoft.com/office/drawing/2014/main" val="10003"/>
-                  </a:ext>
-                </a:extLst>
-              </a:tr>
-            </a:tbl>
-          </a:graphicData>
-        </a:graphic>
-      </p:graphicFrame>
-    </p:spTree>
-    <p:extLst>
-      <p:ext uri="{BB962C8B-B14F-4D97-AF65-F5344CB8AC3E}">
-        <p14:creationId xmlns:p14="http://schemas.microsoft.com/office/powerpoint/2010/main" val="1572754077"/>
-      </p:ext>
-    </p:extLst>
-  </p:cSld>
-  <p:clrMapOvr>
-    <a:masterClrMapping/>
-  </p:clrMapOvr>
-</p:sld>
-</file>
-
-<file path=ppt/slides/slide19.xml><?xml version="1.0" encoding="utf-8"?>
-<p:sld xmlns:a="http://schemas.openxmlformats.org/drawingml/2006/main" xmlns:r="http://schemas.openxmlformats.org/officeDocument/2006/relationships" xmlns:p="http://schemas.openxmlformats.org/presentationml/2006/main">
-  <p:cSld>
-    <p:bg>
-      <p:bgPr>
-        <a:solidFill>
-          <a:srgbClr val="FFFFFF"/>
-        </a:solidFill>
-        <a:effectLst/>
-      </p:bgPr>
-    </p:bg>
-    <p:spTree>
-      <p:nvGrpSpPr>
-        <p:cNvPr id="1" name=""/>
-        <p:cNvGrpSpPr/>
-        <p:nvPr/>
-      </p:nvGrpSpPr>
-      <p:grpSpPr>
-        <a:xfrm>
-          <a:off x="0" y="0"/>
-          <a:ext cx="0" cy="0"/>
-          <a:chOff x="0" y="0"/>
-          <a:chExt cx="0" cy="0"/>
-        </a:xfrm>
-      </p:grpSpPr>
-      <p:sp>
-        <p:nvSpPr>
-          <p:cNvPr id="2" name="Rectangle 1"/>
-          <p:cNvSpPr/>
-          <p:nvPr/>
-        </p:nvSpPr>
-        <p:spPr>
-          <a:xfrm>
-            <a:off x="0" y="0"/>
-            <a:ext cx="12191695" cy="164592"/>
-          </a:xfrm>
-          <a:prstGeom prst="rect">
-            <a:avLst/>
-          </a:prstGeom>
-          <a:solidFill>
-            <a:srgbClr val="0F766E"/>
-          </a:solidFill>
-          <a:ln>
-            <a:noFill/>
-          </a:ln>
-        </p:spPr>
-        <p:style>
-          <a:lnRef idx="1">
-            <a:schemeClr val="accent1"/>
-          </a:lnRef>
-          <a:fillRef idx="3">
-            <a:schemeClr val="accent1"/>
-          </a:fillRef>
-          <a:effectRef idx="2">
-            <a:schemeClr val="accent1"/>
-          </a:effectRef>
-          <a:fontRef idx="minor">
-            <a:schemeClr val="lt1"/>
-          </a:fontRef>
-        </p:style>
-        <p:txBody>
-          <a:bodyPr rtlCol="0" anchor="ctr"/>
-          <a:lstStyle/>
-          <a:p>
-            <a:pPr algn="ctr"/>
-            <a:endParaRPr/>
-          </a:p>
-        </p:txBody>
-      </p:sp>
-      <p:sp>
-        <p:nvSpPr>
-          <p:cNvPr id="3" name="TextBox 2"/>
-          <p:cNvSpPr txBox="1"/>
-          <p:nvPr/>
-        </p:nvSpPr>
-        <p:spPr>
-          <a:xfrm>
-            <a:off x="502920" y="320040"/>
-            <a:ext cx="9509760" cy="502920"/>
-          </a:xfrm>
-          <a:prstGeom prst="rect">
-            <a:avLst/>
-          </a:prstGeom>
-          <a:noFill/>
-        </p:spPr>
-        <p:txBody>
-          <a:bodyPr wrap="square">
-            <a:normAutofit lnSpcReduction="10000"/>
-          </a:bodyPr>
-          <a:lstStyle/>
-          <a:p>
-            <a:pPr algn="l"/>
-            <a:r>
-              <a:rPr sz="2800" b="1">
-                <a:solidFill>
-                  <a:srgbClr val="142A41"/>
-                </a:solidFill>
-                <a:latin typeface="Arial"/>
-              </a:rPr>
               <a:t>Conclusion</a:t>
             </a:r>
           </a:p>
@@ -10952,190 +10347,10 @@
               </a:defRPr>
             </a:pPr>
             <a:r>
-              <a:rPr dirty="0">
-                <a:latin typeface="Arial"/>
-              </a:rPr>
-              <a:t>• </a:t>
-            </a:r>
-            <a:r>
-              <a:rPr dirty="0" err="1">
-                <a:latin typeface="Arial"/>
-              </a:rPr>
-              <a:t>Dự</a:t>
-            </a:r>
-            <a:r>
-              <a:rPr dirty="0">
-                <a:latin typeface="Arial"/>
-              </a:rPr>
-              <a:t> </a:t>
-            </a:r>
-            <a:r>
-              <a:rPr dirty="0" err="1">
-                <a:latin typeface="Arial"/>
-              </a:rPr>
-              <a:t>án</a:t>
-            </a:r>
-            <a:r>
-              <a:rPr dirty="0">
-                <a:latin typeface="Arial"/>
-              </a:rPr>
-              <a:t> </a:t>
-            </a:r>
-            <a:r>
-              <a:rPr dirty="0" err="1">
-                <a:latin typeface="Arial"/>
-              </a:rPr>
-              <a:t>xây</a:t>
-            </a:r>
-            <a:r>
-              <a:rPr dirty="0">
-                <a:latin typeface="Arial"/>
-              </a:rPr>
-              <a:t> </a:t>
-            </a:r>
-            <a:r>
-              <a:rPr dirty="0" err="1">
-                <a:latin typeface="Arial"/>
-              </a:rPr>
-              <a:t>dựng</a:t>
-            </a:r>
-            <a:r>
-              <a:rPr dirty="0">
-                <a:latin typeface="Arial"/>
-              </a:rPr>
-              <a:t> pipeline </a:t>
-            </a:r>
-            <a:r>
-              <a:rPr dirty="0" err="1">
-                <a:latin typeface="Arial"/>
-              </a:rPr>
-              <a:t>học</a:t>
-            </a:r>
-            <a:r>
-              <a:rPr dirty="0">
-                <a:latin typeface="Arial"/>
-              </a:rPr>
-              <a:t> </a:t>
-            </a:r>
-            <a:r>
-              <a:rPr dirty="0" err="1">
-                <a:latin typeface="Arial"/>
-              </a:rPr>
-              <a:t>máy</a:t>
-            </a:r>
-            <a:r>
-              <a:rPr dirty="0">
-                <a:latin typeface="Arial"/>
-              </a:rPr>
-              <a:t> </a:t>
-            </a:r>
-            <a:r>
-              <a:rPr dirty="0" err="1">
-                <a:latin typeface="Arial"/>
-              </a:rPr>
-              <a:t>có</a:t>
-            </a:r>
-            <a:r>
-              <a:rPr dirty="0">
-                <a:latin typeface="Arial"/>
-              </a:rPr>
-              <a:t> </a:t>
-            </a:r>
-            <a:r>
-              <a:rPr dirty="0" err="1">
-                <a:latin typeface="Arial"/>
-              </a:rPr>
-              <a:t>giám</a:t>
-            </a:r>
-            <a:r>
-              <a:rPr dirty="0">
-                <a:latin typeface="Arial"/>
-              </a:rPr>
-              <a:t> </a:t>
-            </a:r>
-            <a:r>
-              <a:rPr dirty="0" err="1">
-                <a:latin typeface="Arial"/>
-              </a:rPr>
-              <a:t>sát</a:t>
-            </a:r>
-            <a:r>
-              <a:rPr dirty="0">
-                <a:latin typeface="Arial"/>
-              </a:rPr>
-              <a:t> </a:t>
-            </a:r>
-            <a:r>
-              <a:rPr dirty="0" err="1">
-                <a:latin typeface="Arial"/>
-              </a:rPr>
-              <a:t>cho</a:t>
-            </a:r>
-            <a:r>
-              <a:rPr dirty="0">
-                <a:latin typeface="Arial"/>
-              </a:rPr>
-              <a:t> </a:t>
-            </a:r>
-            <a:r>
-              <a:rPr dirty="0" err="1">
-                <a:latin typeface="Arial"/>
-              </a:rPr>
-              <a:t>bình</a:t>
-            </a:r>
-            <a:r>
-              <a:rPr dirty="0">
-                <a:latin typeface="Arial"/>
-              </a:rPr>
-              <a:t> </a:t>
-            </a:r>
-            <a:r>
-              <a:rPr dirty="0" err="1">
-                <a:latin typeface="Arial"/>
-              </a:rPr>
-              <a:t>luận</a:t>
-            </a:r>
-            <a:r>
-              <a:rPr dirty="0">
-                <a:latin typeface="Arial"/>
-              </a:rPr>
-              <a:t> </a:t>
-            </a:r>
-            <a:r>
-              <a:rPr dirty="0" err="1">
-                <a:latin typeface="Arial"/>
-              </a:rPr>
-              <a:t>khách</a:t>
-            </a:r>
-            <a:r>
-              <a:rPr dirty="0">
-                <a:latin typeface="Arial"/>
-              </a:rPr>
-              <a:t> </a:t>
-            </a:r>
-            <a:r>
-              <a:rPr dirty="0" err="1">
-                <a:latin typeface="Arial"/>
-              </a:rPr>
-              <a:t>hàng</a:t>
-            </a:r>
-            <a:r>
-              <a:rPr dirty="0">
-                <a:latin typeface="Arial"/>
-              </a:rPr>
-              <a:t> </a:t>
-            </a:r>
-            <a:r>
-              <a:rPr dirty="0" err="1">
-                <a:latin typeface="Arial"/>
-              </a:rPr>
-              <a:t>trên</a:t>
-            </a:r>
-            <a:r>
-              <a:rPr dirty="0">
-                <a:latin typeface="Arial"/>
-              </a:rPr>
-              <a:t> Shopee.</a:t>
+              <a:rPr lang="vi-VN" dirty="0">
+                <a:latin typeface="Arial"/>
+              </a:rPr>
+              <a:t>• Dự án xây dựng pipeline học máy có giám sát cho bình luận khách hàng trên Shopee.</a:t>
             </a:r>
           </a:p>
           <a:p>
@@ -11148,238 +10363,10 @@
               </a:defRPr>
             </a:pPr>
             <a:r>
-              <a:rPr dirty="0">
-                <a:latin typeface="Arial"/>
-              </a:rPr>
-              <a:t>• </a:t>
-            </a:r>
-            <a:r>
-              <a:rPr dirty="0" err="1">
-                <a:latin typeface="Arial"/>
-              </a:rPr>
-              <a:t>Bài</a:t>
-            </a:r>
-            <a:r>
-              <a:rPr dirty="0">
-                <a:latin typeface="Arial"/>
-              </a:rPr>
-              <a:t> </a:t>
-            </a:r>
-            <a:r>
-              <a:rPr dirty="0" err="1">
-                <a:latin typeface="Arial"/>
-              </a:rPr>
-              <a:t>toán</a:t>
-            </a:r>
-            <a:r>
-              <a:rPr dirty="0">
-                <a:latin typeface="Arial"/>
-              </a:rPr>
-              <a:t> </a:t>
-            </a:r>
-            <a:r>
-              <a:rPr dirty="0" err="1">
-                <a:latin typeface="Arial"/>
-              </a:rPr>
-              <a:t>gồm</a:t>
-            </a:r>
-            <a:r>
-              <a:rPr dirty="0">
-                <a:latin typeface="Arial"/>
-              </a:rPr>
-              <a:t> </a:t>
-            </a:r>
-            <a:r>
-              <a:rPr dirty="0" err="1">
-                <a:latin typeface="Arial"/>
-              </a:rPr>
-              <a:t>hai</a:t>
-            </a:r>
-            <a:r>
-              <a:rPr dirty="0">
-                <a:latin typeface="Arial"/>
-              </a:rPr>
-              <a:t> </a:t>
-            </a:r>
-            <a:r>
-              <a:rPr dirty="0" err="1">
-                <a:latin typeface="Arial"/>
-              </a:rPr>
-              <a:t>nhiệm</a:t>
-            </a:r>
-            <a:r>
-              <a:rPr dirty="0">
-                <a:latin typeface="Arial"/>
-              </a:rPr>
-              <a:t> </a:t>
-            </a:r>
-            <a:r>
-              <a:rPr dirty="0" err="1">
-                <a:latin typeface="Arial"/>
-              </a:rPr>
-              <a:t>vụ</a:t>
-            </a:r>
-            <a:r>
-              <a:rPr dirty="0">
-                <a:latin typeface="Arial"/>
-              </a:rPr>
-              <a:t>: </a:t>
-            </a:r>
-            <a:r>
-              <a:rPr dirty="0" err="1">
-                <a:latin typeface="Arial"/>
-              </a:rPr>
-              <a:t>phân</a:t>
-            </a:r>
-            <a:r>
-              <a:rPr dirty="0">
-                <a:latin typeface="Arial"/>
-              </a:rPr>
-              <a:t> </a:t>
-            </a:r>
-            <a:r>
-              <a:rPr dirty="0" err="1">
-                <a:latin typeface="Arial"/>
-              </a:rPr>
-              <a:t>loại</a:t>
-            </a:r>
-            <a:r>
-              <a:rPr dirty="0">
-                <a:latin typeface="Arial"/>
-              </a:rPr>
-              <a:t> </a:t>
-            </a:r>
-            <a:r>
-              <a:rPr dirty="0" err="1">
-                <a:latin typeface="Arial"/>
-              </a:rPr>
-              <a:t>cảm</a:t>
-            </a:r>
-            <a:r>
-              <a:rPr dirty="0">
-                <a:latin typeface="Arial"/>
-              </a:rPr>
-              <a:t> </a:t>
-            </a:r>
-            <a:r>
-              <a:rPr dirty="0" err="1">
-                <a:latin typeface="Arial"/>
-              </a:rPr>
-              <a:t>xúc</a:t>
-            </a:r>
-            <a:r>
-              <a:rPr dirty="0">
-                <a:latin typeface="Arial"/>
-              </a:rPr>
-              <a:t> </a:t>
-            </a:r>
-            <a:r>
-              <a:rPr dirty="0" err="1">
-                <a:latin typeface="Arial"/>
-              </a:rPr>
-              <a:t>và</a:t>
-            </a:r>
-            <a:r>
-              <a:rPr dirty="0">
-                <a:latin typeface="Arial"/>
-              </a:rPr>
-              <a:t> </a:t>
-            </a:r>
-            <a:r>
-              <a:rPr dirty="0" err="1">
-                <a:latin typeface="Arial"/>
-              </a:rPr>
-              <a:t>phân</a:t>
-            </a:r>
-            <a:r>
-              <a:rPr dirty="0">
-                <a:latin typeface="Arial"/>
-              </a:rPr>
-              <a:t> </a:t>
-            </a:r>
-            <a:r>
-              <a:rPr dirty="0" err="1">
-                <a:latin typeface="Arial"/>
-              </a:rPr>
-              <a:t>loại</a:t>
-            </a:r>
-            <a:r>
-              <a:rPr dirty="0">
-                <a:latin typeface="Arial"/>
-              </a:rPr>
-              <a:t> </a:t>
-            </a:r>
-            <a:r>
-              <a:rPr dirty="0" err="1">
-                <a:latin typeface="Arial"/>
-              </a:rPr>
-              <a:t>vấn</a:t>
-            </a:r>
-            <a:r>
-              <a:rPr dirty="0">
-                <a:latin typeface="Arial"/>
-              </a:rPr>
-              <a:t> </a:t>
-            </a:r>
-            <a:r>
-              <a:rPr dirty="0" err="1">
-                <a:latin typeface="Arial"/>
-              </a:rPr>
-              <a:t>đề</a:t>
-            </a:r>
-            <a:r>
-              <a:rPr dirty="0">
-                <a:latin typeface="Arial"/>
-              </a:rPr>
-              <a:t> </a:t>
-            </a:r>
-            <a:r>
-              <a:rPr dirty="0" err="1">
-                <a:latin typeface="Arial"/>
-              </a:rPr>
-              <a:t>chính</a:t>
-            </a:r>
-            <a:r>
-              <a:rPr dirty="0">
-                <a:latin typeface="Arial"/>
-              </a:rPr>
-              <a:t> </a:t>
-            </a:r>
-            <a:r>
-              <a:rPr dirty="0" err="1">
-                <a:latin typeface="Arial"/>
-              </a:rPr>
-              <a:t>trong</a:t>
-            </a:r>
-            <a:r>
-              <a:rPr dirty="0">
-                <a:latin typeface="Arial"/>
-              </a:rPr>
-              <a:t> </a:t>
-            </a:r>
-            <a:r>
-              <a:rPr dirty="0" err="1">
-                <a:latin typeface="Arial"/>
-              </a:rPr>
-              <a:t>bình</a:t>
-            </a:r>
-            <a:r>
-              <a:rPr dirty="0">
-                <a:latin typeface="Arial"/>
-              </a:rPr>
-              <a:t> </a:t>
-            </a:r>
-            <a:r>
-              <a:rPr dirty="0" err="1">
-                <a:latin typeface="Arial"/>
-              </a:rPr>
-              <a:t>luận</a:t>
-            </a:r>
-            <a:r>
-              <a:rPr dirty="0">
-                <a:latin typeface="Arial"/>
-              </a:rPr>
-              <a:t>.</a:t>
+              <a:rPr lang="vi-VN" dirty="0">
+                <a:latin typeface="Arial"/>
+              </a:rPr>
+              <a:t>• Bài toán gồm hai nhiệm vụ: phân loại cảm xúc và phân loại vấn đề chính trong bình luận.</a:t>
             </a:r>
           </a:p>
           <a:p>
@@ -11392,166 +10379,22 @@
               </a:defRPr>
             </a:pPr>
             <a:r>
-              <a:rPr dirty="0">
-                <a:latin typeface="Arial"/>
-              </a:rPr>
-              <a:t>• Pipeline </a:t>
-            </a:r>
-            <a:r>
-              <a:rPr dirty="0" err="1">
-                <a:latin typeface="Arial"/>
-              </a:rPr>
-              <a:t>sử</a:t>
-            </a:r>
-            <a:r>
-              <a:rPr dirty="0">
-                <a:latin typeface="Arial"/>
-              </a:rPr>
-              <a:t> </a:t>
-            </a:r>
-            <a:r>
-              <a:rPr dirty="0" err="1">
-                <a:latin typeface="Arial"/>
-              </a:rPr>
-              <a:t>dụng</a:t>
-            </a:r>
-            <a:r>
-              <a:rPr dirty="0">
-                <a:latin typeface="Arial"/>
-              </a:rPr>
-              <a:t> </a:t>
-            </a:r>
-            <a:r>
-              <a:rPr dirty="0" err="1">
-                <a:latin typeface="Arial"/>
-              </a:rPr>
-              <a:t>tiền</a:t>
-            </a:r>
-            <a:r>
-              <a:rPr dirty="0">
-                <a:latin typeface="Arial"/>
-              </a:rPr>
-              <a:t> </a:t>
-            </a:r>
-            <a:r>
-              <a:rPr dirty="0" err="1">
-                <a:latin typeface="Arial"/>
-              </a:rPr>
-              <a:t>xử</a:t>
-            </a:r>
-            <a:r>
-              <a:rPr dirty="0">
-                <a:latin typeface="Arial"/>
-              </a:rPr>
-              <a:t> </a:t>
-            </a:r>
-            <a:r>
-              <a:rPr dirty="0" err="1">
-                <a:latin typeface="Arial"/>
-              </a:rPr>
-              <a:t>lý</a:t>
-            </a:r>
-            <a:r>
-              <a:rPr dirty="0">
-                <a:latin typeface="Arial"/>
-              </a:rPr>
-              <a:t> </a:t>
-            </a:r>
-            <a:r>
-              <a:rPr dirty="0" err="1">
-                <a:latin typeface="Arial"/>
-              </a:rPr>
-              <a:t>tiếng</a:t>
-            </a:r>
-            <a:r>
-              <a:rPr dirty="0">
-                <a:latin typeface="Arial"/>
-              </a:rPr>
-              <a:t> </a:t>
-            </a:r>
-            <a:r>
-              <a:rPr dirty="0" err="1">
-                <a:latin typeface="Arial"/>
-              </a:rPr>
-              <a:t>Việt</a:t>
-            </a:r>
-            <a:r>
-              <a:rPr dirty="0">
-                <a:latin typeface="Arial"/>
-              </a:rPr>
-              <a:t>, </a:t>
-            </a:r>
-            <a:r>
-              <a:rPr dirty="0" err="1">
-                <a:latin typeface="Arial"/>
-              </a:rPr>
-              <a:t>đặc</a:t>
-            </a:r>
-            <a:r>
-              <a:rPr dirty="0">
-                <a:latin typeface="Arial"/>
-              </a:rPr>
-              <a:t> </a:t>
-            </a:r>
-            <a:r>
-              <a:rPr dirty="0" err="1">
-                <a:latin typeface="Arial"/>
-              </a:rPr>
-              <a:t>trưng</a:t>
-            </a:r>
-            <a:r>
-              <a:rPr dirty="0">
-                <a:latin typeface="Arial"/>
-              </a:rPr>
-              <a:t> TF-IDF, baseline Naive Bayes, Linear SVM </a:t>
-            </a:r>
-            <a:r>
-              <a:rPr dirty="0" err="1">
-                <a:latin typeface="Arial"/>
-              </a:rPr>
-              <a:t>và</a:t>
-            </a:r>
-            <a:r>
-              <a:rPr dirty="0">
-                <a:latin typeface="Arial"/>
-              </a:rPr>
-              <a:t> </a:t>
-            </a:r>
-            <a:r>
-              <a:rPr dirty="0" err="1">
-                <a:latin typeface="Arial"/>
-              </a:rPr>
-              <a:t>một</a:t>
-            </a:r>
-            <a:r>
-              <a:rPr dirty="0">
-                <a:latin typeface="Arial"/>
-              </a:rPr>
-              <a:t> </a:t>
-            </a:r>
-            <a:r>
-              <a:rPr dirty="0" err="1">
-                <a:latin typeface="Arial"/>
-              </a:rPr>
-              <a:t>lớp</a:t>
-            </a:r>
-            <a:r>
-              <a:rPr dirty="0">
-                <a:latin typeface="Arial"/>
-              </a:rPr>
-              <a:t> rule an </a:t>
-            </a:r>
-            <a:r>
-              <a:rPr dirty="0" err="1">
-                <a:latin typeface="Arial"/>
-              </a:rPr>
-              <a:t>toàn</a:t>
-            </a:r>
-            <a:r>
-              <a:rPr dirty="0">
-                <a:latin typeface="Arial"/>
-              </a:rPr>
-              <a:t>.</a:t>
+              <a:rPr lang="vi-VN" dirty="0">
+                <a:latin typeface="Arial"/>
+              </a:rPr>
+              <a:t>• Pipeline sử dụng tiền xử lý tiếng Việt, đặc trưng TF</a:t>
+            </a:r>
+            <a:r>
+              <a:rPr lang="en-US" dirty="0">
+                <a:latin typeface="Arial"/>
+              </a:rPr>
+              <a:t>-</a:t>
+            </a:r>
+            <a:r>
+              <a:rPr lang="vi-VN" dirty="0">
+                <a:latin typeface="Arial"/>
+              </a:rPr>
+              <a:t>IDF, baseline Naive Bayes, Linear SVM và một lớp rule an toàn.</a:t>
             </a:r>
           </a:p>
           <a:p>
@@ -11564,47 +10407,14 @@
               </a:defRPr>
             </a:pPr>
             <a:r>
-              <a:rPr dirty="0">
-                <a:latin typeface="Arial"/>
-              </a:rPr>
-              <a:t>• </a:t>
-            </a:r>
-            <a:r>
-              <a:rPr dirty="0" err="1">
-                <a:latin typeface="Arial"/>
-              </a:rPr>
-              <a:t>Kết</a:t>
-            </a:r>
-            <a:r>
-              <a:rPr dirty="0">
-                <a:latin typeface="Arial"/>
-              </a:rPr>
-              <a:t> </a:t>
-            </a:r>
-            <a:r>
-              <a:rPr dirty="0" err="1">
-                <a:latin typeface="Arial"/>
-              </a:rPr>
-              <a:t>quả</a:t>
-            </a:r>
-            <a:r>
-              <a:rPr dirty="0">
-                <a:latin typeface="Arial"/>
-              </a:rPr>
-              <a:t> </a:t>
-            </a:r>
-            <a:r>
-              <a:rPr dirty="0" err="1">
-                <a:latin typeface="Arial"/>
-              </a:rPr>
-              <a:t>cuối</a:t>
-            </a:r>
-            <a:r>
-              <a:rPr dirty="0">
-                <a:latin typeface="Arial"/>
-              </a:rPr>
-              <a:t>: sentiment Accuracy 0.8410 / Macro F1 0.8093; issue Accuracy 0.7849 / Macro F1 0.7323.</a:t>
-            </a:r>
+              <a:rPr lang="vi-VN" dirty="0">
+                <a:latin typeface="Arial"/>
+              </a:rPr>
+              <a:t>• Kết quả cuối: sentiment Accuracy 0.8410 / Macro F1 0.8093; issue Accuracy 0.7849 / Macro F1 0.7323.</a:t>
+            </a:r>
+            <a:endParaRPr dirty="0">
+              <a:latin typeface="Arial"/>
+            </a:endParaRPr>
           </a:p>
         </p:txBody>
       </p:sp>
@@ -14463,7 +13273,7 @@
                 </a:solidFill>
                 <a:latin typeface="Arial"/>
               </a:rPr>
-              <a:t>Related Work</a:t>
+              <a:t>Method Overview</a:t>
             </a:r>
           </a:p>
         </p:txBody>
@@ -14498,7 +13308,7 @@
                 </a:solidFill>
                 <a:latin typeface="Arial"/>
               </a:rPr>
-              <a:t>5/15</a:t>
+              <a:t>6/15</a:t>
             </a:r>
           </a:p>
         </p:txBody>
@@ -14540,14 +13350,60 @@
       </p:sp>
       <p:sp>
         <p:nvSpPr>
-          <p:cNvPr id="6" name="TextBox 5"/>
+          <p:cNvPr id="6" name="Rounded Rectangle 5"/>
+          <p:cNvSpPr/>
+          <p:nvPr/>
+        </p:nvSpPr>
+        <p:spPr>
+          <a:xfrm>
+            <a:off x="502920" y="1234440"/>
+            <a:ext cx="3154680" cy="868680"/>
+          </a:xfrm>
+          <a:prstGeom prst="roundRect">
+            <a:avLst/>
+          </a:prstGeom>
+          <a:solidFill>
+            <a:srgbClr val="F8FAFC"/>
+          </a:solidFill>
+          <a:ln w="12700">
+            <a:solidFill>
+              <a:srgbClr val="0F766E"/>
+            </a:solidFill>
+          </a:ln>
+        </p:spPr>
+        <p:style>
+          <a:lnRef idx="1">
+            <a:schemeClr val="accent1"/>
+          </a:lnRef>
+          <a:fillRef idx="3">
+            <a:schemeClr val="accent1"/>
+          </a:fillRef>
+          <a:effectRef idx="2">
+            <a:schemeClr val="accent1"/>
+          </a:effectRef>
+          <a:fontRef idx="minor">
+            <a:schemeClr val="lt1"/>
+          </a:fontRef>
+        </p:style>
+        <p:txBody>
+          <a:bodyPr rtlCol="0" anchor="ctr"/>
+          <a:lstStyle/>
+          <a:p>
+            <a:pPr algn="ctr"/>
+            <a:endParaRPr/>
+          </a:p>
+        </p:txBody>
+      </p:sp>
+      <p:sp>
+        <p:nvSpPr>
+          <p:cNvPr id="7" name="TextBox 6"/>
           <p:cNvSpPr txBox="1"/>
           <p:nvPr/>
         </p:nvSpPr>
         <p:spPr>
           <a:xfrm>
-            <a:off x="777240" y="1143000"/>
-            <a:ext cx="10698480" cy="5074920"/>
+            <a:off x="667512" y="1417320"/>
+            <a:ext cx="329184" cy="329184"/>
           </a:xfrm>
           <a:prstGeom prst="rect">
             <a:avLst/>
@@ -14560,50 +13416,1192 @@
           </a:bodyPr>
           <a:lstStyle/>
           <a:p>
-            <a:pPr>
-              <a:defRPr sz="1900">
-                <a:solidFill>
-                  <a:srgbClr val="0F172A"/>
-                </a:solidFill>
-                <a:latin typeface="Arial"/>
-              </a:defRPr>
-            </a:pPr>
-            <a:r>
-              <a:rPr lang="vi-VN" dirty="0"/>
-              <a:t>• Phân loại cảm xúc là bài toán phổ biến trong NLP.</a:t>
-            </a:r>
-            <a:br>
-              <a:rPr lang="vi-VN" dirty="0"/>
-            </a:br>
-            <a:r>
-              <a:rPr lang="vi-VN" dirty="0"/>
-              <a:t>• Các phương pháp truyền thống: Naive Bayes, Logistic Regression, SVM.</a:t>
-            </a:r>
-            <a:br>
-              <a:rPr lang="vi-VN" dirty="0"/>
-            </a:br>
-            <a:r>
-              <a:rPr lang="vi-VN" dirty="0"/>
-              <a:t>• Cách biểu diễn văn bản phổ biến: Bag-of-Words, TF-IDF.</a:t>
-            </a:r>
-            <a:br>
-              <a:rPr lang="vi-VN"/>
-            </a:br>
-            <a:r>
-              <a:rPr lang="vi-VN">
-                <a:latin typeface="Arial"/>
-              </a:rPr>
-              <a:t>• </a:t>
-            </a:r>
-            <a:r>
-              <a:rPr lang="vi-VN" dirty="0">
-                <a:latin typeface="Arial"/>
-              </a:rPr>
-              <a:t>Project kết hợp Naive Bayes baseline, TF-IDF + Linear SVM và safe issue rules.</a:t>
-            </a:r>
-            <a:endParaRPr dirty="0">
-              <a:latin typeface="Arial"/>
-            </a:endParaRPr>
+            <a:pPr algn="ctr"/>
+            <a:r>
+              <a:rPr sz="1400" b="1">
+                <a:solidFill>
+                  <a:srgbClr val="0F766E"/>
+                </a:solidFill>
+                <a:latin typeface="Arial"/>
+              </a:rPr>
+              <a:t>1</a:t>
+            </a:r>
+          </a:p>
+        </p:txBody>
+      </p:sp>
+      <p:sp>
+        <p:nvSpPr>
+          <p:cNvPr id="8" name="TextBox 7"/>
+          <p:cNvSpPr txBox="1"/>
+          <p:nvPr/>
+        </p:nvSpPr>
+        <p:spPr>
+          <a:xfrm>
+            <a:off x="1069848" y="1371600"/>
+            <a:ext cx="2414016" cy="649224"/>
+          </a:xfrm>
+          <a:prstGeom prst="rect">
+            <a:avLst/>
+          </a:prstGeom>
+          <a:noFill/>
+        </p:spPr>
+        <p:txBody>
+          <a:bodyPr wrap="square">
+            <a:normAutofit lnSpcReduction="10000"/>
+          </a:bodyPr>
+          <a:lstStyle/>
+          <a:p>
+            <a:pPr algn="l"/>
+            <a:r>
+              <a:rPr sz="1300" b="0" dirty="0">
+                <a:solidFill>
+                  <a:srgbClr val="0F172A"/>
+                </a:solidFill>
+                <a:latin typeface="Arial"/>
+              </a:rPr>
+              <a:t>Thu </a:t>
+            </a:r>
+            <a:r>
+              <a:rPr sz="1300" b="0" dirty="0" err="1">
+                <a:solidFill>
+                  <a:srgbClr val="0F172A"/>
+                </a:solidFill>
+                <a:latin typeface="Arial"/>
+              </a:rPr>
+              <a:t>thập</a:t>
+            </a:r>
+            <a:r>
+              <a:rPr sz="1300" b="0" dirty="0">
+                <a:solidFill>
+                  <a:srgbClr val="0F172A"/>
+                </a:solidFill>
+                <a:latin typeface="Arial"/>
+              </a:rPr>
+              <a:t> </a:t>
+            </a:r>
+            <a:r>
+              <a:rPr sz="1300" b="0" dirty="0" err="1">
+                <a:solidFill>
+                  <a:srgbClr val="0F172A"/>
+                </a:solidFill>
+                <a:latin typeface="Arial"/>
+              </a:rPr>
+              <a:t>và</a:t>
+            </a:r>
+            <a:r>
+              <a:rPr sz="1300" b="0" dirty="0">
+                <a:solidFill>
+                  <a:srgbClr val="0F172A"/>
+                </a:solidFill>
+                <a:latin typeface="Arial"/>
+              </a:rPr>
+              <a:t> </a:t>
+            </a:r>
+            <a:r>
+              <a:rPr sz="1300" b="0" dirty="0" err="1">
+                <a:solidFill>
+                  <a:srgbClr val="0F172A"/>
+                </a:solidFill>
+                <a:latin typeface="Arial"/>
+              </a:rPr>
+              <a:t>gán</a:t>
+            </a:r>
+            <a:r>
+              <a:rPr sz="1300" b="0" dirty="0">
+                <a:solidFill>
+                  <a:srgbClr val="0F172A"/>
+                </a:solidFill>
+                <a:latin typeface="Arial"/>
+              </a:rPr>
+              <a:t> </a:t>
+            </a:r>
+            <a:r>
+              <a:rPr sz="1300" b="0" dirty="0" err="1">
+                <a:solidFill>
+                  <a:srgbClr val="0F172A"/>
+                </a:solidFill>
+                <a:latin typeface="Arial"/>
+              </a:rPr>
+              <a:t>nhãn</a:t>
+            </a:r>
+            <a:r>
+              <a:rPr sz="1300" b="0" dirty="0">
+                <a:solidFill>
+                  <a:srgbClr val="0F172A"/>
+                </a:solidFill>
+                <a:latin typeface="Arial"/>
+              </a:rPr>
+              <a:t> review</a:t>
+            </a:r>
+            <a:r>
+              <a:rPr lang="en-US" sz="1300" b="0" dirty="0">
+                <a:solidFill>
+                  <a:srgbClr val="0F172A"/>
+                </a:solidFill>
+                <a:latin typeface="Arial"/>
+              </a:rPr>
+              <a:t> (</a:t>
+            </a:r>
+            <a:r>
+              <a:rPr lang="en-US" sz="1300" b="0" dirty="0" err="1">
+                <a:solidFill>
+                  <a:srgbClr val="0F172A"/>
+                </a:solidFill>
+                <a:latin typeface="Arial"/>
+              </a:rPr>
+              <a:t>đã</a:t>
+            </a:r>
+            <a:r>
+              <a:rPr lang="en-US" sz="1300" b="0" dirty="0">
+                <a:solidFill>
+                  <a:srgbClr val="0F172A"/>
+                </a:solidFill>
+                <a:latin typeface="Arial"/>
+              </a:rPr>
+              <a:t> </a:t>
+            </a:r>
+            <a:r>
+              <a:rPr lang="en-US" sz="1300" b="0" dirty="0" err="1">
+                <a:solidFill>
+                  <a:srgbClr val="0F172A"/>
+                </a:solidFill>
+                <a:latin typeface="Arial"/>
+              </a:rPr>
+              <a:t>được</a:t>
+            </a:r>
+            <a:r>
+              <a:rPr lang="en-US" sz="1300" b="0" dirty="0">
+                <a:solidFill>
+                  <a:srgbClr val="0F172A"/>
+                </a:solidFill>
+                <a:latin typeface="Arial"/>
+              </a:rPr>
+              <a:t> </a:t>
+            </a:r>
+            <a:r>
+              <a:rPr lang="en-US" sz="1300" b="0" dirty="0" err="1">
+                <a:solidFill>
+                  <a:srgbClr val="0F172A"/>
+                </a:solidFill>
+                <a:latin typeface="Arial"/>
+              </a:rPr>
+              <a:t>định</a:t>
+            </a:r>
+            <a:r>
+              <a:rPr lang="en-US" sz="1300" b="0" dirty="0">
+                <a:solidFill>
+                  <a:srgbClr val="0F172A"/>
+                </a:solidFill>
+                <a:latin typeface="Arial"/>
+              </a:rPr>
+              <a:t> </a:t>
+            </a:r>
+            <a:r>
+              <a:rPr lang="en-US" sz="1300" b="0" dirty="0" err="1">
+                <a:solidFill>
+                  <a:srgbClr val="0F172A"/>
+                </a:solidFill>
+                <a:latin typeface="Arial"/>
+              </a:rPr>
+              <a:t>nghĩa</a:t>
+            </a:r>
+            <a:r>
+              <a:rPr lang="en-US" sz="1300" b="0" dirty="0">
+                <a:solidFill>
+                  <a:srgbClr val="0F172A"/>
+                </a:solidFill>
+                <a:latin typeface="Arial"/>
+              </a:rPr>
+              <a:t> </a:t>
+            </a:r>
+            <a:r>
+              <a:rPr lang="en-US" sz="1300" b="0" dirty="0" err="1">
+                <a:solidFill>
+                  <a:srgbClr val="0F172A"/>
+                </a:solidFill>
+                <a:latin typeface="Arial"/>
+              </a:rPr>
+              <a:t>rõ</a:t>
+            </a:r>
+            <a:r>
+              <a:rPr lang="en-US" sz="1300" b="0" dirty="0">
+                <a:solidFill>
+                  <a:srgbClr val="0F172A"/>
+                </a:solidFill>
+                <a:latin typeface="Arial"/>
+              </a:rPr>
+              <a:t> </a:t>
+            </a:r>
+            <a:r>
+              <a:rPr lang="en-US" sz="1300" b="0" dirty="0" err="1">
+                <a:solidFill>
+                  <a:srgbClr val="0F172A"/>
+                </a:solidFill>
+                <a:latin typeface="Arial"/>
+              </a:rPr>
+              <a:t>ràng</a:t>
+            </a:r>
+            <a:r>
+              <a:rPr lang="en-US" sz="1300" b="0" dirty="0">
+                <a:solidFill>
+                  <a:srgbClr val="0F172A"/>
+                </a:solidFill>
+                <a:latin typeface="Arial"/>
+              </a:rPr>
+              <a:t>)</a:t>
+            </a:r>
+            <a:r>
+              <a:rPr sz="1300" b="0" dirty="0">
+                <a:solidFill>
+                  <a:srgbClr val="0F172A"/>
+                </a:solidFill>
+                <a:latin typeface="Arial"/>
+              </a:rPr>
+              <a:t> </a:t>
+            </a:r>
+            <a:r>
+              <a:rPr lang="en-US" sz="1300" b="0" dirty="0">
+                <a:solidFill>
+                  <a:srgbClr val="0F172A"/>
+                </a:solidFill>
+                <a:latin typeface="Arial"/>
+              </a:rPr>
+              <a:t>ở </a:t>
+            </a:r>
+            <a:r>
+              <a:rPr sz="1300" b="0" dirty="0">
+                <a:solidFill>
+                  <a:srgbClr val="0F172A"/>
+                </a:solidFill>
+                <a:latin typeface="Arial"/>
+              </a:rPr>
+              <a:t>Shopee.</a:t>
+            </a:r>
+          </a:p>
+        </p:txBody>
+      </p:sp>
+      <p:sp>
+        <p:nvSpPr>
+          <p:cNvPr id="9" name="Rounded Rectangle 8"/>
+          <p:cNvSpPr/>
+          <p:nvPr/>
+        </p:nvSpPr>
+        <p:spPr>
+          <a:xfrm>
+            <a:off x="4251960" y="1234440"/>
+            <a:ext cx="3154680" cy="868680"/>
+          </a:xfrm>
+          <a:prstGeom prst="roundRect">
+            <a:avLst/>
+          </a:prstGeom>
+          <a:solidFill>
+            <a:srgbClr val="F8FAFC"/>
+          </a:solidFill>
+          <a:ln w="12700">
+            <a:solidFill>
+              <a:srgbClr val="2563EB"/>
+            </a:solidFill>
+          </a:ln>
+        </p:spPr>
+        <p:style>
+          <a:lnRef idx="1">
+            <a:schemeClr val="accent1"/>
+          </a:lnRef>
+          <a:fillRef idx="3">
+            <a:schemeClr val="accent1"/>
+          </a:fillRef>
+          <a:effectRef idx="2">
+            <a:schemeClr val="accent1"/>
+          </a:effectRef>
+          <a:fontRef idx="minor">
+            <a:schemeClr val="lt1"/>
+          </a:fontRef>
+        </p:style>
+        <p:txBody>
+          <a:bodyPr rtlCol="0" anchor="ctr"/>
+          <a:lstStyle/>
+          <a:p>
+            <a:pPr algn="ctr"/>
+            <a:endParaRPr/>
+          </a:p>
+        </p:txBody>
+      </p:sp>
+      <p:sp>
+        <p:nvSpPr>
+          <p:cNvPr id="10" name="TextBox 9"/>
+          <p:cNvSpPr txBox="1"/>
+          <p:nvPr/>
+        </p:nvSpPr>
+        <p:spPr>
+          <a:xfrm>
+            <a:off x="4416552" y="1417320"/>
+            <a:ext cx="329184" cy="329184"/>
+          </a:xfrm>
+          <a:prstGeom prst="rect">
+            <a:avLst/>
+          </a:prstGeom>
+          <a:noFill/>
+        </p:spPr>
+        <p:txBody>
+          <a:bodyPr wrap="square">
+            <a:normAutofit/>
+          </a:bodyPr>
+          <a:lstStyle/>
+          <a:p>
+            <a:pPr algn="ctr"/>
+            <a:r>
+              <a:rPr sz="1400" b="1">
+                <a:solidFill>
+                  <a:srgbClr val="2563EB"/>
+                </a:solidFill>
+                <a:latin typeface="Arial"/>
+              </a:rPr>
+              <a:t>2</a:t>
+            </a:r>
+          </a:p>
+        </p:txBody>
+      </p:sp>
+      <p:sp>
+        <p:nvSpPr>
+          <p:cNvPr id="11" name="TextBox 10"/>
+          <p:cNvSpPr txBox="1"/>
+          <p:nvPr/>
+        </p:nvSpPr>
+        <p:spPr>
+          <a:xfrm>
+            <a:off x="4818888" y="1371600"/>
+            <a:ext cx="2331720" cy="502920"/>
+          </a:xfrm>
+          <a:prstGeom prst="rect">
+            <a:avLst/>
+          </a:prstGeom>
+          <a:noFill/>
+        </p:spPr>
+        <p:txBody>
+          <a:bodyPr wrap="square">
+            <a:normAutofit/>
+          </a:bodyPr>
+          <a:lstStyle/>
+          <a:p>
+            <a:pPr algn="l"/>
+            <a:r>
+              <a:rPr sz="1300" b="0">
+                <a:solidFill>
+                  <a:srgbClr val="0F172A"/>
+                </a:solidFill>
+                <a:latin typeface="Arial"/>
+              </a:rPr>
+              <a:t>Tiền xử lý văn bản review.</a:t>
+            </a:r>
+          </a:p>
+        </p:txBody>
+      </p:sp>
+      <p:sp>
+        <p:nvSpPr>
+          <p:cNvPr id="12" name="Rounded Rectangle 11"/>
+          <p:cNvSpPr/>
+          <p:nvPr/>
+        </p:nvSpPr>
+        <p:spPr>
+          <a:xfrm>
+            <a:off x="8001000" y="1234440"/>
+            <a:ext cx="3154680" cy="868680"/>
+          </a:xfrm>
+          <a:prstGeom prst="roundRect">
+            <a:avLst/>
+          </a:prstGeom>
+          <a:solidFill>
+            <a:srgbClr val="F8FAFC"/>
+          </a:solidFill>
+          <a:ln w="12700">
+            <a:solidFill>
+              <a:srgbClr val="D97706"/>
+            </a:solidFill>
+          </a:ln>
+        </p:spPr>
+        <p:style>
+          <a:lnRef idx="1">
+            <a:schemeClr val="accent1"/>
+          </a:lnRef>
+          <a:fillRef idx="3">
+            <a:schemeClr val="accent1"/>
+          </a:fillRef>
+          <a:effectRef idx="2">
+            <a:schemeClr val="accent1"/>
+          </a:effectRef>
+          <a:fontRef idx="minor">
+            <a:schemeClr val="lt1"/>
+          </a:fontRef>
+        </p:style>
+        <p:txBody>
+          <a:bodyPr rtlCol="0" anchor="ctr"/>
+          <a:lstStyle/>
+          <a:p>
+            <a:pPr algn="ctr"/>
+            <a:endParaRPr/>
+          </a:p>
+        </p:txBody>
+      </p:sp>
+      <p:sp>
+        <p:nvSpPr>
+          <p:cNvPr id="13" name="TextBox 12"/>
+          <p:cNvSpPr txBox="1"/>
+          <p:nvPr/>
+        </p:nvSpPr>
+        <p:spPr>
+          <a:xfrm>
+            <a:off x="8165592" y="1417320"/>
+            <a:ext cx="329184" cy="329184"/>
+          </a:xfrm>
+          <a:prstGeom prst="rect">
+            <a:avLst/>
+          </a:prstGeom>
+          <a:noFill/>
+        </p:spPr>
+        <p:txBody>
+          <a:bodyPr wrap="square">
+            <a:normAutofit/>
+          </a:bodyPr>
+          <a:lstStyle/>
+          <a:p>
+            <a:pPr algn="ctr"/>
+            <a:r>
+              <a:rPr sz="1400" b="1">
+                <a:solidFill>
+                  <a:srgbClr val="D97706"/>
+                </a:solidFill>
+                <a:latin typeface="Arial"/>
+              </a:rPr>
+              <a:t>3</a:t>
+            </a:r>
+          </a:p>
+        </p:txBody>
+      </p:sp>
+      <p:sp>
+        <p:nvSpPr>
+          <p:cNvPr id="14" name="TextBox 13"/>
+          <p:cNvSpPr txBox="1"/>
+          <p:nvPr/>
+        </p:nvSpPr>
+        <p:spPr>
+          <a:xfrm>
+            <a:off x="8567928" y="1371600"/>
+            <a:ext cx="2331720" cy="502920"/>
+          </a:xfrm>
+          <a:prstGeom prst="rect">
+            <a:avLst/>
+          </a:prstGeom>
+          <a:noFill/>
+        </p:spPr>
+        <p:txBody>
+          <a:bodyPr wrap="square">
+            <a:normAutofit/>
+          </a:bodyPr>
+          <a:lstStyle/>
+          <a:p>
+            <a:pPr algn="l"/>
+            <a:r>
+              <a:rPr sz="1300" b="0" dirty="0">
+                <a:solidFill>
+                  <a:srgbClr val="0F172A"/>
+                </a:solidFill>
+                <a:latin typeface="Arial"/>
+              </a:rPr>
+              <a:t>Chia train/test </a:t>
+            </a:r>
+            <a:r>
+              <a:rPr sz="1300" b="0" dirty="0" err="1">
+                <a:solidFill>
+                  <a:srgbClr val="0F172A"/>
+                </a:solidFill>
+                <a:latin typeface="Arial"/>
+              </a:rPr>
+              <a:t>theo</a:t>
+            </a:r>
+            <a:r>
+              <a:rPr sz="1300" b="0" dirty="0">
+                <a:solidFill>
+                  <a:srgbClr val="0F172A"/>
+                </a:solidFill>
+                <a:latin typeface="Arial"/>
+              </a:rPr>
+              <a:t> </a:t>
+            </a:r>
+            <a:r>
+              <a:rPr sz="1300" b="0" dirty="0" err="1">
+                <a:solidFill>
+                  <a:srgbClr val="0F172A"/>
+                </a:solidFill>
+                <a:latin typeface="Arial"/>
+              </a:rPr>
+              <a:t>tỉ</a:t>
+            </a:r>
+            <a:r>
+              <a:rPr sz="1300" b="0" dirty="0">
+                <a:solidFill>
+                  <a:srgbClr val="0F172A"/>
+                </a:solidFill>
+                <a:latin typeface="Arial"/>
+              </a:rPr>
+              <a:t> </a:t>
+            </a:r>
+            <a:r>
+              <a:rPr sz="1300" b="0" dirty="0" err="1">
+                <a:solidFill>
+                  <a:srgbClr val="0F172A"/>
+                </a:solidFill>
+                <a:latin typeface="Arial"/>
+              </a:rPr>
+              <a:t>lệ</a:t>
+            </a:r>
+            <a:r>
+              <a:rPr sz="1300" b="0" dirty="0">
+                <a:solidFill>
+                  <a:srgbClr val="0F172A"/>
+                </a:solidFill>
+                <a:latin typeface="Arial"/>
+              </a:rPr>
+              <a:t> 80/20 </a:t>
+            </a:r>
+            <a:r>
+              <a:rPr sz="1300" b="0" dirty="0" err="1">
+                <a:solidFill>
+                  <a:srgbClr val="0F172A"/>
+                </a:solidFill>
+                <a:latin typeface="Arial"/>
+              </a:rPr>
+              <a:t>và</a:t>
+            </a:r>
+            <a:r>
+              <a:rPr sz="1300" b="0" dirty="0">
+                <a:solidFill>
+                  <a:srgbClr val="0F172A"/>
+                </a:solidFill>
+                <a:latin typeface="Arial"/>
+              </a:rPr>
+              <a:t> stratify </a:t>
+            </a:r>
+            <a:r>
+              <a:rPr sz="1300" b="0" dirty="0" err="1">
+                <a:solidFill>
+                  <a:srgbClr val="0F172A"/>
+                </a:solidFill>
+                <a:latin typeface="Arial"/>
+              </a:rPr>
+              <a:t>theo</a:t>
+            </a:r>
+            <a:r>
+              <a:rPr sz="1300" b="0" dirty="0">
+                <a:solidFill>
+                  <a:srgbClr val="0F172A"/>
+                </a:solidFill>
+                <a:latin typeface="Arial"/>
+              </a:rPr>
+              <a:t> </a:t>
+            </a:r>
+            <a:r>
+              <a:rPr sz="1300" b="0" dirty="0" err="1">
+                <a:solidFill>
+                  <a:srgbClr val="0F172A"/>
+                </a:solidFill>
+                <a:latin typeface="Arial"/>
+              </a:rPr>
+              <a:t>nhãn</a:t>
+            </a:r>
+            <a:r>
+              <a:rPr sz="1300" b="0" dirty="0">
+                <a:solidFill>
+                  <a:srgbClr val="0F172A"/>
+                </a:solidFill>
+                <a:latin typeface="Arial"/>
+              </a:rPr>
+              <a:t>.</a:t>
+            </a:r>
+          </a:p>
+        </p:txBody>
+      </p:sp>
+      <p:sp>
+        <p:nvSpPr>
+          <p:cNvPr id="15" name="Rounded Rectangle 14"/>
+          <p:cNvSpPr/>
+          <p:nvPr/>
+        </p:nvSpPr>
+        <p:spPr>
+          <a:xfrm>
+            <a:off x="502920" y="2788920"/>
+            <a:ext cx="3154680" cy="868680"/>
+          </a:xfrm>
+          <a:prstGeom prst="roundRect">
+            <a:avLst/>
+          </a:prstGeom>
+          <a:solidFill>
+            <a:srgbClr val="F8FAFC"/>
+          </a:solidFill>
+          <a:ln w="12700">
+            <a:solidFill>
+              <a:srgbClr val="166534"/>
+            </a:solidFill>
+          </a:ln>
+        </p:spPr>
+        <p:style>
+          <a:lnRef idx="1">
+            <a:schemeClr val="accent1"/>
+          </a:lnRef>
+          <a:fillRef idx="3">
+            <a:schemeClr val="accent1"/>
+          </a:fillRef>
+          <a:effectRef idx="2">
+            <a:schemeClr val="accent1"/>
+          </a:effectRef>
+          <a:fontRef idx="minor">
+            <a:schemeClr val="lt1"/>
+          </a:fontRef>
+        </p:style>
+        <p:txBody>
+          <a:bodyPr rtlCol="0" anchor="ctr"/>
+          <a:lstStyle/>
+          <a:p>
+            <a:pPr algn="ctr"/>
+            <a:endParaRPr/>
+          </a:p>
+        </p:txBody>
+      </p:sp>
+      <p:sp>
+        <p:nvSpPr>
+          <p:cNvPr id="16" name="TextBox 15"/>
+          <p:cNvSpPr txBox="1"/>
+          <p:nvPr/>
+        </p:nvSpPr>
+        <p:spPr>
+          <a:xfrm>
+            <a:off x="667512" y="2971800"/>
+            <a:ext cx="329184" cy="329184"/>
+          </a:xfrm>
+          <a:prstGeom prst="rect">
+            <a:avLst/>
+          </a:prstGeom>
+          <a:noFill/>
+        </p:spPr>
+        <p:txBody>
+          <a:bodyPr wrap="square">
+            <a:normAutofit/>
+          </a:bodyPr>
+          <a:lstStyle/>
+          <a:p>
+            <a:pPr algn="ctr"/>
+            <a:r>
+              <a:rPr sz="1400" b="1">
+                <a:solidFill>
+                  <a:srgbClr val="166534"/>
+                </a:solidFill>
+                <a:latin typeface="Arial"/>
+              </a:rPr>
+              <a:t>4</a:t>
+            </a:r>
+          </a:p>
+        </p:txBody>
+      </p:sp>
+      <p:sp>
+        <p:nvSpPr>
+          <p:cNvPr id="17" name="TextBox 16"/>
+          <p:cNvSpPr txBox="1"/>
+          <p:nvPr/>
+        </p:nvSpPr>
+        <p:spPr>
+          <a:xfrm>
+            <a:off x="1069848" y="2926079"/>
+            <a:ext cx="2331720" cy="502920"/>
+          </a:xfrm>
+          <a:prstGeom prst="rect">
+            <a:avLst/>
+          </a:prstGeom>
+          <a:noFill/>
+        </p:spPr>
+        <p:txBody>
+          <a:bodyPr wrap="square">
+            <a:normAutofit/>
+          </a:bodyPr>
+          <a:lstStyle/>
+          <a:p>
+            <a:pPr algn="l"/>
+            <a:r>
+              <a:rPr sz="1300" b="0">
+                <a:solidFill>
+                  <a:srgbClr val="0F172A"/>
+                </a:solidFill>
+                <a:latin typeface="Arial"/>
+              </a:rPr>
+              <a:t>Chuyển văn bản thành vector TF-IDF.</a:t>
+            </a:r>
+          </a:p>
+        </p:txBody>
+      </p:sp>
+      <p:sp>
+        <p:nvSpPr>
+          <p:cNvPr id="18" name="Rounded Rectangle 17"/>
+          <p:cNvSpPr/>
+          <p:nvPr/>
+        </p:nvSpPr>
+        <p:spPr>
+          <a:xfrm>
+            <a:off x="4251960" y="2788920"/>
+            <a:ext cx="3154680" cy="868680"/>
+          </a:xfrm>
+          <a:prstGeom prst="roundRect">
+            <a:avLst/>
+          </a:prstGeom>
+          <a:solidFill>
+            <a:srgbClr val="F8FAFC"/>
+          </a:solidFill>
+          <a:ln w="12700">
+            <a:solidFill>
+              <a:srgbClr val="142A41"/>
+            </a:solidFill>
+          </a:ln>
+        </p:spPr>
+        <p:style>
+          <a:lnRef idx="1">
+            <a:schemeClr val="accent1"/>
+          </a:lnRef>
+          <a:fillRef idx="3">
+            <a:schemeClr val="accent1"/>
+          </a:fillRef>
+          <a:effectRef idx="2">
+            <a:schemeClr val="accent1"/>
+          </a:effectRef>
+          <a:fontRef idx="minor">
+            <a:schemeClr val="lt1"/>
+          </a:fontRef>
+        </p:style>
+        <p:txBody>
+          <a:bodyPr rtlCol="0" anchor="ctr"/>
+          <a:lstStyle/>
+          <a:p>
+            <a:pPr algn="ctr"/>
+            <a:endParaRPr/>
+          </a:p>
+        </p:txBody>
+      </p:sp>
+      <p:sp>
+        <p:nvSpPr>
+          <p:cNvPr id="19" name="TextBox 18"/>
+          <p:cNvSpPr txBox="1"/>
+          <p:nvPr/>
+        </p:nvSpPr>
+        <p:spPr>
+          <a:xfrm>
+            <a:off x="4416552" y="2971800"/>
+            <a:ext cx="329184" cy="329184"/>
+          </a:xfrm>
+          <a:prstGeom prst="rect">
+            <a:avLst/>
+          </a:prstGeom>
+          <a:noFill/>
+        </p:spPr>
+        <p:txBody>
+          <a:bodyPr wrap="square">
+            <a:normAutofit/>
+          </a:bodyPr>
+          <a:lstStyle/>
+          <a:p>
+            <a:pPr algn="ctr"/>
+            <a:r>
+              <a:rPr sz="1400" b="1" dirty="0">
+                <a:solidFill>
+                  <a:srgbClr val="142A41"/>
+                </a:solidFill>
+                <a:latin typeface="Arial"/>
+              </a:rPr>
+              <a:t>5</a:t>
+            </a:r>
+          </a:p>
+        </p:txBody>
+      </p:sp>
+      <p:sp>
+        <p:nvSpPr>
+          <p:cNvPr id="20" name="TextBox 19"/>
+          <p:cNvSpPr txBox="1"/>
+          <p:nvPr/>
+        </p:nvSpPr>
+        <p:spPr>
+          <a:xfrm>
+            <a:off x="4818888" y="2926079"/>
+            <a:ext cx="2331720" cy="502920"/>
+          </a:xfrm>
+          <a:prstGeom prst="rect">
+            <a:avLst/>
+          </a:prstGeom>
+          <a:noFill/>
+        </p:spPr>
+        <p:txBody>
+          <a:bodyPr wrap="square">
+            <a:normAutofit fontScale="85000" lnSpcReduction="10000"/>
+          </a:bodyPr>
+          <a:lstStyle/>
+          <a:p>
+            <a:pPr algn="l"/>
+            <a:r>
+              <a:rPr dirty="0"/>
+              <a:t>Train </a:t>
+            </a:r>
+            <a:r>
+              <a:rPr dirty="0" err="1"/>
+              <a:t>và</a:t>
+            </a:r>
+            <a:r>
+              <a:rPr lang="en-US" dirty="0"/>
+              <a:t> so</a:t>
+            </a:r>
+            <a:r>
+              <a:rPr dirty="0"/>
+              <a:t> </a:t>
+            </a:r>
+            <a:r>
+              <a:rPr dirty="0" err="1"/>
+              <a:t>sánh</a:t>
+            </a:r>
+            <a:r>
+              <a:rPr dirty="0"/>
+              <a:t> Naive Bayes </a:t>
+            </a:r>
+            <a:r>
+              <a:rPr dirty="0" err="1"/>
+              <a:t>với</a:t>
+            </a:r>
+            <a:r>
+              <a:rPr dirty="0"/>
+              <a:t> Linear SVM.</a:t>
+            </a:r>
+          </a:p>
+        </p:txBody>
+      </p:sp>
+      <p:sp>
+        <p:nvSpPr>
+          <p:cNvPr id="21" name="Rounded Rectangle 20"/>
+          <p:cNvSpPr/>
+          <p:nvPr/>
+        </p:nvSpPr>
+        <p:spPr>
+          <a:xfrm>
+            <a:off x="8001000" y="2788920"/>
+            <a:ext cx="3154680" cy="868680"/>
+          </a:xfrm>
+          <a:prstGeom prst="roundRect">
+            <a:avLst/>
+          </a:prstGeom>
+          <a:solidFill>
+            <a:srgbClr val="F8FAFC"/>
+          </a:solidFill>
+          <a:ln w="12700">
+            <a:solidFill>
+              <a:srgbClr val="0F766E"/>
+            </a:solidFill>
+          </a:ln>
+        </p:spPr>
+        <p:style>
+          <a:lnRef idx="1">
+            <a:schemeClr val="accent1"/>
+          </a:lnRef>
+          <a:fillRef idx="3">
+            <a:schemeClr val="accent1"/>
+          </a:fillRef>
+          <a:effectRef idx="2">
+            <a:schemeClr val="accent1"/>
+          </a:effectRef>
+          <a:fontRef idx="minor">
+            <a:schemeClr val="lt1"/>
+          </a:fontRef>
+        </p:style>
+        <p:txBody>
+          <a:bodyPr rtlCol="0" anchor="ctr"/>
+          <a:lstStyle/>
+          <a:p>
+            <a:pPr algn="ctr"/>
+            <a:endParaRPr/>
+          </a:p>
+        </p:txBody>
+      </p:sp>
+      <p:sp>
+        <p:nvSpPr>
+          <p:cNvPr id="22" name="TextBox 21"/>
+          <p:cNvSpPr txBox="1"/>
+          <p:nvPr/>
+        </p:nvSpPr>
+        <p:spPr>
+          <a:xfrm>
+            <a:off x="8165592" y="2971800"/>
+            <a:ext cx="329184" cy="329184"/>
+          </a:xfrm>
+          <a:prstGeom prst="rect">
+            <a:avLst/>
+          </a:prstGeom>
+          <a:noFill/>
+        </p:spPr>
+        <p:txBody>
+          <a:bodyPr wrap="square">
+            <a:normAutofit/>
+          </a:bodyPr>
+          <a:lstStyle/>
+          <a:p>
+            <a:pPr algn="ctr"/>
+            <a:r>
+              <a:rPr sz="1400" b="1">
+                <a:solidFill>
+                  <a:srgbClr val="0F766E"/>
+                </a:solidFill>
+                <a:latin typeface="Arial"/>
+              </a:rPr>
+              <a:t>6</a:t>
+            </a:r>
+          </a:p>
+        </p:txBody>
+      </p:sp>
+      <p:sp>
+        <p:nvSpPr>
+          <p:cNvPr id="23" name="TextBox 22"/>
+          <p:cNvSpPr txBox="1"/>
+          <p:nvPr/>
+        </p:nvSpPr>
+        <p:spPr>
+          <a:xfrm>
+            <a:off x="8567928" y="2926079"/>
+            <a:ext cx="2331720" cy="502920"/>
+          </a:xfrm>
+          <a:prstGeom prst="rect">
+            <a:avLst/>
+          </a:prstGeom>
+          <a:noFill/>
+        </p:spPr>
+        <p:txBody>
+          <a:bodyPr wrap="square">
+            <a:normAutofit/>
+          </a:bodyPr>
+          <a:lstStyle/>
+          <a:p>
+            <a:pPr algn="l"/>
+            <a:r>
+              <a:rPr sz="1300" b="0">
+                <a:solidFill>
+                  <a:srgbClr val="0F172A"/>
+                </a:solidFill>
+                <a:latin typeface="Arial"/>
+              </a:rPr>
+              <a:t>Áp dụng safe issue rules cho các lỗi rõ ràng.</a:t>
+            </a:r>
+          </a:p>
+        </p:txBody>
+      </p:sp>
+      <p:sp>
+        <p:nvSpPr>
+          <p:cNvPr id="24" name="Rounded Rectangle 23"/>
+          <p:cNvSpPr/>
+          <p:nvPr/>
+        </p:nvSpPr>
+        <p:spPr>
+          <a:xfrm>
+            <a:off x="4251960" y="4343400"/>
+            <a:ext cx="3154680" cy="868680"/>
+          </a:xfrm>
+          <a:prstGeom prst="roundRect">
+            <a:avLst/>
+          </a:prstGeom>
+          <a:solidFill>
+            <a:srgbClr val="F8FAFC"/>
+          </a:solidFill>
+          <a:ln w="12700">
+            <a:solidFill>
+              <a:srgbClr val="2563EB"/>
+            </a:solidFill>
+          </a:ln>
+        </p:spPr>
+        <p:style>
+          <a:lnRef idx="1">
+            <a:schemeClr val="accent1"/>
+          </a:lnRef>
+          <a:fillRef idx="3">
+            <a:schemeClr val="accent1"/>
+          </a:fillRef>
+          <a:effectRef idx="2">
+            <a:schemeClr val="accent1"/>
+          </a:effectRef>
+          <a:fontRef idx="minor">
+            <a:schemeClr val="lt1"/>
+          </a:fontRef>
+        </p:style>
+        <p:txBody>
+          <a:bodyPr rtlCol="0" anchor="ctr"/>
+          <a:lstStyle/>
+          <a:p>
+            <a:pPr algn="ctr"/>
+            <a:endParaRPr/>
+          </a:p>
+        </p:txBody>
+      </p:sp>
+      <p:sp>
+        <p:nvSpPr>
+          <p:cNvPr id="25" name="TextBox 24"/>
+          <p:cNvSpPr txBox="1"/>
+          <p:nvPr/>
+        </p:nvSpPr>
+        <p:spPr>
+          <a:xfrm>
+            <a:off x="4416552" y="4526280"/>
+            <a:ext cx="329184" cy="329184"/>
+          </a:xfrm>
+          <a:prstGeom prst="rect">
+            <a:avLst/>
+          </a:prstGeom>
+          <a:noFill/>
+        </p:spPr>
+        <p:txBody>
+          <a:bodyPr wrap="square">
+            <a:normAutofit/>
+          </a:bodyPr>
+          <a:lstStyle/>
+          <a:p>
+            <a:pPr algn="ctr"/>
+            <a:r>
+              <a:rPr sz="1400" b="1">
+                <a:solidFill>
+                  <a:srgbClr val="2563EB"/>
+                </a:solidFill>
+                <a:latin typeface="Arial"/>
+              </a:rPr>
+              <a:t>7</a:t>
+            </a:r>
+          </a:p>
+        </p:txBody>
+      </p:sp>
+      <p:sp>
+        <p:nvSpPr>
+          <p:cNvPr id="26" name="TextBox 25"/>
+          <p:cNvSpPr txBox="1"/>
+          <p:nvPr/>
+        </p:nvSpPr>
+        <p:spPr>
+          <a:xfrm>
+            <a:off x="4818888" y="4480560"/>
+            <a:ext cx="2331720" cy="502920"/>
+          </a:xfrm>
+          <a:prstGeom prst="rect">
+            <a:avLst/>
+          </a:prstGeom>
+          <a:noFill/>
+        </p:spPr>
+        <p:txBody>
+          <a:bodyPr wrap="square">
+            <a:normAutofit fontScale="85000" lnSpcReduction="20000"/>
+          </a:bodyPr>
+          <a:lstStyle/>
+          <a:p>
+            <a:pPr algn="l"/>
+            <a:r>
+              <a:rPr sz="1300" b="0" dirty="0" err="1">
+                <a:solidFill>
+                  <a:srgbClr val="0F172A"/>
+                </a:solidFill>
+                <a:latin typeface="Arial"/>
+              </a:rPr>
+              <a:t>Đánh</a:t>
+            </a:r>
+            <a:r>
+              <a:rPr sz="1300" b="0" dirty="0">
+                <a:solidFill>
+                  <a:srgbClr val="0F172A"/>
+                </a:solidFill>
+                <a:latin typeface="Arial"/>
+              </a:rPr>
+              <a:t> </a:t>
+            </a:r>
+            <a:r>
+              <a:rPr sz="1300" b="0" dirty="0" err="1">
+                <a:solidFill>
+                  <a:srgbClr val="0F172A"/>
+                </a:solidFill>
+                <a:latin typeface="Arial"/>
+              </a:rPr>
+              <a:t>giá</a:t>
+            </a:r>
+            <a:r>
+              <a:rPr sz="1300" b="0" dirty="0">
+                <a:solidFill>
+                  <a:srgbClr val="0F172A"/>
+                </a:solidFill>
+                <a:latin typeface="Arial"/>
+              </a:rPr>
+              <a:t> </a:t>
+            </a:r>
+            <a:r>
+              <a:rPr sz="1300" b="0" dirty="0" err="1">
+                <a:solidFill>
+                  <a:srgbClr val="0F172A"/>
+                </a:solidFill>
+                <a:latin typeface="Arial"/>
+              </a:rPr>
+              <a:t>bằng</a:t>
+            </a:r>
+            <a:r>
+              <a:rPr sz="1300" b="0" dirty="0">
+                <a:solidFill>
+                  <a:srgbClr val="0F172A"/>
+                </a:solidFill>
+                <a:latin typeface="Arial"/>
+              </a:rPr>
+              <a:t> Accuracy, Macro F1, classification report </a:t>
+            </a:r>
+            <a:r>
+              <a:rPr sz="1300" b="0" dirty="0" err="1">
+                <a:solidFill>
+                  <a:srgbClr val="0F172A"/>
+                </a:solidFill>
+                <a:latin typeface="Arial"/>
+              </a:rPr>
+              <a:t>và</a:t>
+            </a:r>
+            <a:r>
+              <a:rPr sz="1300" b="0" dirty="0">
+                <a:solidFill>
+                  <a:srgbClr val="0F172A"/>
+                </a:solidFill>
+                <a:latin typeface="Arial"/>
+              </a:rPr>
+              <a:t> confusion matrix.</a:t>
+            </a:r>
+          </a:p>
+        </p:txBody>
+      </p:sp>
+      <p:sp>
+        <p:nvSpPr>
+          <p:cNvPr id="27" name="TextBox 26"/>
+          <p:cNvSpPr txBox="1"/>
+          <p:nvPr/>
+        </p:nvSpPr>
+        <p:spPr>
+          <a:xfrm>
+            <a:off x="731520" y="5806440"/>
+            <a:ext cx="10515600" cy="292608"/>
+          </a:xfrm>
+          <a:prstGeom prst="rect">
+            <a:avLst/>
+          </a:prstGeom>
+          <a:noFill/>
+        </p:spPr>
+        <p:txBody>
+          <a:bodyPr wrap="square">
+            <a:normAutofit fontScale="92500" lnSpcReduction="20000"/>
+          </a:bodyPr>
+          <a:lstStyle/>
+          <a:p>
+            <a:pPr algn="ctr"/>
+            <a:r>
+              <a:rPr sz="1600" b="1">
+                <a:solidFill>
+                  <a:srgbClr val="142A41"/>
+                </a:solidFill>
+                <a:latin typeface="Arial"/>
+              </a:rPr>
+              <a:t>Repeatable training and evaluation pipeline</a:t>
+            </a:r>
           </a:p>
         </p:txBody>
       </p:sp>
@@ -14708,13 +14706,13 @@
           <a:p>
             <a:pPr algn="l"/>
             <a:r>
-              <a:rPr sz="2800" b="1" dirty="0">
+              <a:rPr sz="2800" b="1">
                 <a:solidFill>
                   <a:srgbClr val="142A41"/>
                 </a:solidFill>
                 <a:latin typeface="Arial"/>
               </a:rPr>
-              <a:t>Method Overview</a:t>
+              <a:t>Preprocessing and Features</a:t>
             </a:r>
           </a:p>
         </p:txBody>
@@ -14749,7 +14747,7 @@
                 </a:solidFill>
                 <a:latin typeface="Arial"/>
               </a:rPr>
-              <a:t>6/15</a:t>
+              <a:t>7/15</a:t>
             </a:r>
           </a:p>
         </p:txBody>
@@ -14791,60 +14789,14 @@
       </p:sp>
       <p:sp>
         <p:nvSpPr>
-          <p:cNvPr id="6" name="Rounded Rectangle 5"/>
-          <p:cNvSpPr/>
-          <p:nvPr/>
-        </p:nvSpPr>
-        <p:spPr>
-          <a:xfrm>
-            <a:off x="502920" y="1234440"/>
-            <a:ext cx="3154680" cy="868680"/>
-          </a:xfrm>
-          <a:prstGeom prst="roundRect">
-            <a:avLst/>
-          </a:prstGeom>
-          <a:solidFill>
-            <a:srgbClr val="F8FAFC"/>
-          </a:solidFill>
-          <a:ln w="12700">
-            <a:solidFill>
-              <a:srgbClr val="0F766E"/>
-            </a:solidFill>
-          </a:ln>
-        </p:spPr>
-        <p:style>
-          <a:lnRef idx="1">
-            <a:schemeClr val="accent1"/>
-          </a:lnRef>
-          <a:fillRef idx="3">
-            <a:schemeClr val="accent1"/>
-          </a:fillRef>
-          <a:effectRef idx="2">
-            <a:schemeClr val="accent1"/>
-          </a:effectRef>
-          <a:fontRef idx="minor">
-            <a:schemeClr val="lt1"/>
-          </a:fontRef>
-        </p:style>
-        <p:txBody>
-          <a:bodyPr rtlCol="0" anchor="ctr"/>
-          <a:lstStyle/>
-          <a:p>
-            <a:pPr algn="ctr"/>
-            <a:endParaRPr/>
-          </a:p>
-        </p:txBody>
-      </p:sp>
-      <p:sp>
-        <p:nvSpPr>
-          <p:cNvPr id="7" name="TextBox 6"/>
+          <p:cNvPr id="6" name="TextBox 5"/>
           <p:cNvSpPr txBox="1"/>
           <p:nvPr/>
         </p:nvSpPr>
         <p:spPr>
           <a:xfrm>
-            <a:off x="667512" y="1417320"/>
-            <a:ext cx="329184" cy="329184"/>
+            <a:off x="777240" y="1143000"/>
+            <a:ext cx="10698480" cy="5074920"/>
           </a:xfrm>
           <a:prstGeom prst="rect">
             <a:avLst/>
@@ -14857,1135 +14809,147 @@
           </a:bodyPr>
           <a:lstStyle/>
           <a:p>
-            <a:pPr algn="ctr"/>
-            <a:r>
-              <a:rPr sz="1400" b="1">
-                <a:solidFill>
-                  <a:srgbClr val="0F766E"/>
-                </a:solidFill>
-                <a:latin typeface="Arial"/>
-              </a:rPr>
-              <a:t>1</a:t>
-            </a:r>
-          </a:p>
-        </p:txBody>
-      </p:sp>
-      <p:sp>
-        <p:nvSpPr>
-          <p:cNvPr id="8" name="TextBox 7"/>
-          <p:cNvSpPr txBox="1"/>
-          <p:nvPr/>
-        </p:nvSpPr>
-        <p:spPr>
-          <a:xfrm>
-            <a:off x="1069848" y="1371600"/>
-            <a:ext cx="2414016" cy="649224"/>
-          </a:xfrm>
-          <a:prstGeom prst="rect">
-            <a:avLst/>
-          </a:prstGeom>
-          <a:noFill/>
-        </p:spPr>
-        <p:txBody>
-          <a:bodyPr wrap="square">
-            <a:normAutofit lnSpcReduction="10000"/>
-          </a:bodyPr>
-          <a:lstStyle/>
-          <a:p>
-            <a:pPr algn="l"/>
-            <a:r>
-              <a:rPr sz="1300" b="0" dirty="0">
-                <a:solidFill>
-                  <a:srgbClr val="0F172A"/>
-                </a:solidFill>
-                <a:latin typeface="Arial"/>
-              </a:rPr>
-              <a:t>Thu </a:t>
-            </a:r>
-            <a:r>
-              <a:rPr sz="1300" b="0" dirty="0" err="1">
-                <a:solidFill>
-                  <a:srgbClr val="0F172A"/>
-                </a:solidFill>
-                <a:latin typeface="Arial"/>
-              </a:rPr>
-              <a:t>thập</a:t>
-            </a:r>
-            <a:r>
-              <a:rPr sz="1300" b="0" dirty="0">
-                <a:solidFill>
-                  <a:srgbClr val="0F172A"/>
-                </a:solidFill>
-                <a:latin typeface="Arial"/>
-              </a:rPr>
-              <a:t> </a:t>
-            </a:r>
-            <a:r>
-              <a:rPr sz="1300" b="0" dirty="0" err="1">
-                <a:solidFill>
-                  <a:srgbClr val="0F172A"/>
-                </a:solidFill>
-                <a:latin typeface="Arial"/>
-              </a:rPr>
-              <a:t>và</a:t>
-            </a:r>
-            <a:r>
-              <a:rPr sz="1300" b="0" dirty="0">
-                <a:solidFill>
-                  <a:srgbClr val="0F172A"/>
-                </a:solidFill>
-                <a:latin typeface="Arial"/>
-              </a:rPr>
-              <a:t> </a:t>
-            </a:r>
-            <a:r>
-              <a:rPr sz="1300" b="0" dirty="0" err="1">
-                <a:solidFill>
-                  <a:srgbClr val="0F172A"/>
-                </a:solidFill>
-                <a:latin typeface="Arial"/>
-              </a:rPr>
-              <a:t>gán</a:t>
-            </a:r>
-            <a:r>
-              <a:rPr sz="1300" b="0" dirty="0">
-                <a:solidFill>
-                  <a:srgbClr val="0F172A"/>
-                </a:solidFill>
-                <a:latin typeface="Arial"/>
-              </a:rPr>
-              <a:t> </a:t>
-            </a:r>
-            <a:r>
-              <a:rPr sz="1300" b="0" dirty="0" err="1">
-                <a:solidFill>
-                  <a:srgbClr val="0F172A"/>
-                </a:solidFill>
-                <a:latin typeface="Arial"/>
-              </a:rPr>
-              <a:t>nhãn</a:t>
-            </a:r>
-            <a:r>
-              <a:rPr sz="1300" b="0" dirty="0">
-                <a:solidFill>
-                  <a:srgbClr val="0F172A"/>
-                </a:solidFill>
-                <a:latin typeface="Arial"/>
-              </a:rPr>
-              <a:t> review</a:t>
-            </a:r>
-            <a:r>
-              <a:rPr lang="en-US" sz="1300" b="0" dirty="0">
-                <a:solidFill>
-                  <a:srgbClr val="0F172A"/>
-                </a:solidFill>
-                <a:latin typeface="Arial"/>
-              </a:rPr>
-              <a:t> (</a:t>
-            </a:r>
-            <a:r>
-              <a:rPr lang="en-US" sz="1300" b="0" dirty="0" err="1">
-                <a:solidFill>
-                  <a:srgbClr val="0F172A"/>
-                </a:solidFill>
-                <a:latin typeface="Arial"/>
-              </a:rPr>
-              <a:t>đã</a:t>
-            </a:r>
-            <a:r>
-              <a:rPr lang="en-US" sz="1300" b="0" dirty="0">
-                <a:solidFill>
-                  <a:srgbClr val="0F172A"/>
-                </a:solidFill>
-                <a:latin typeface="Arial"/>
-              </a:rPr>
-              <a:t> </a:t>
-            </a:r>
-            <a:r>
-              <a:rPr lang="en-US" sz="1300" b="0" dirty="0" err="1">
-                <a:solidFill>
-                  <a:srgbClr val="0F172A"/>
-                </a:solidFill>
-                <a:latin typeface="Arial"/>
-              </a:rPr>
-              <a:t>được</a:t>
-            </a:r>
-            <a:r>
-              <a:rPr lang="en-US" sz="1300" b="0" dirty="0">
-                <a:solidFill>
-                  <a:srgbClr val="0F172A"/>
-                </a:solidFill>
-                <a:latin typeface="Arial"/>
-              </a:rPr>
-              <a:t> </a:t>
-            </a:r>
-            <a:r>
-              <a:rPr lang="en-US" sz="1300" b="0" dirty="0" err="1">
-                <a:solidFill>
-                  <a:srgbClr val="0F172A"/>
-                </a:solidFill>
-                <a:latin typeface="Arial"/>
-              </a:rPr>
-              <a:t>định</a:t>
-            </a:r>
-            <a:r>
-              <a:rPr lang="en-US" sz="1300" b="0" dirty="0">
-                <a:solidFill>
-                  <a:srgbClr val="0F172A"/>
-                </a:solidFill>
-                <a:latin typeface="Arial"/>
-              </a:rPr>
-              <a:t> </a:t>
-            </a:r>
-            <a:r>
-              <a:rPr lang="en-US" sz="1300" b="0" dirty="0" err="1">
-                <a:solidFill>
-                  <a:srgbClr val="0F172A"/>
-                </a:solidFill>
-                <a:latin typeface="Arial"/>
-              </a:rPr>
-              <a:t>nghĩa</a:t>
-            </a:r>
-            <a:r>
-              <a:rPr lang="en-US" sz="1300" b="0" dirty="0">
-                <a:solidFill>
-                  <a:srgbClr val="0F172A"/>
-                </a:solidFill>
-                <a:latin typeface="Arial"/>
-              </a:rPr>
-              <a:t> </a:t>
-            </a:r>
-            <a:r>
-              <a:rPr lang="en-US" sz="1300" b="0" dirty="0" err="1">
-                <a:solidFill>
-                  <a:srgbClr val="0F172A"/>
-                </a:solidFill>
-                <a:latin typeface="Arial"/>
-              </a:rPr>
-              <a:t>rõ</a:t>
-            </a:r>
-            <a:r>
-              <a:rPr lang="en-US" sz="1300" b="0" dirty="0">
-                <a:solidFill>
-                  <a:srgbClr val="0F172A"/>
-                </a:solidFill>
-                <a:latin typeface="Arial"/>
-              </a:rPr>
-              <a:t> </a:t>
-            </a:r>
-            <a:r>
-              <a:rPr lang="en-US" sz="1300" b="0" dirty="0" err="1">
-                <a:solidFill>
-                  <a:srgbClr val="0F172A"/>
-                </a:solidFill>
-                <a:latin typeface="Arial"/>
-              </a:rPr>
-              <a:t>ràng</a:t>
-            </a:r>
-            <a:r>
-              <a:rPr lang="en-US" sz="1300" b="0" dirty="0">
-                <a:solidFill>
-                  <a:srgbClr val="0F172A"/>
-                </a:solidFill>
-                <a:latin typeface="Arial"/>
-              </a:rPr>
-              <a:t>)</a:t>
-            </a:r>
-            <a:r>
-              <a:rPr sz="1300" b="0" dirty="0">
-                <a:solidFill>
-                  <a:srgbClr val="0F172A"/>
-                </a:solidFill>
-                <a:latin typeface="Arial"/>
-              </a:rPr>
-              <a:t> </a:t>
-            </a:r>
-            <a:r>
-              <a:rPr lang="en-US" sz="1300" b="0" dirty="0">
-                <a:solidFill>
-                  <a:srgbClr val="0F172A"/>
-                </a:solidFill>
-                <a:latin typeface="Arial"/>
-              </a:rPr>
-              <a:t>ở </a:t>
-            </a:r>
-            <a:r>
-              <a:rPr sz="1300" b="0" dirty="0">
-                <a:solidFill>
-                  <a:srgbClr val="0F172A"/>
-                </a:solidFill>
-                <a:latin typeface="Arial"/>
-              </a:rPr>
-              <a:t>Shopee.</a:t>
-            </a:r>
-          </a:p>
-        </p:txBody>
-      </p:sp>
-      <p:sp>
-        <p:nvSpPr>
-          <p:cNvPr id="9" name="Rounded Rectangle 8"/>
-          <p:cNvSpPr/>
-          <p:nvPr/>
-        </p:nvSpPr>
-        <p:spPr>
-          <a:xfrm>
-            <a:off x="4251960" y="1234440"/>
-            <a:ext cx="3154680" cy="868680"/>
-          </a:xfrm>
-          <a:prstGeom prst="roundRect">
-            <a:avLst/>
-          </a:prstGeom>
-          <a:solidFill>
-            <a:srgbClr val="F8FAFC"/>
-          </a:solidFill>
-          <a:ln w="12700">
-            <a:solidFill>
-              <a:srgbClr val="2563EB"/>
-            </a:solidFill>
-          </a:ln>
-        </p:spPr>
-        <p:style>
-          <a:lnRef idx="1">
-            <a:schemeClr val="accent1"/>
-          </a:lnRef>
-          <a:fillRef idx="3">
-            <a:schemeClr val="accent1"/>
-          </a:fillRef>
-          <a:effectRef idx="2">
-            <a:schemeClr val="accent1"/>
-          </a:effectRef>
-          <a:fontRef idx="minor">
-            <a:schemeClr val="lt1"/>
-          </a:fontRef>
-        </p:style>
-        <p:txBody>
-          <a:bodyPr rtlCol="0" anchor="ctr"/>
-          <a:lstStyle/>
-          <a:p>
-            <a:pPr algn="ctr"/>
-            <a:endParaRPr/>
-          </a:p>
-        </p:txBody>
-      </p:sp>
-      <p:sp>
-        <p:nvSpPr>
-          <p:cNvPr id="10" name="TextBox 9"/>
-          <p:cNvSpPr txBox="1"/>
-          <p:nvPr/>
-        </p:nvSpPr>
-        <p:spPr>
-          <a:xfrm>
-            <a:off x="4416552" y="1417320"/>
-            <a:ext cx="329184" cy="329184"/>
-          </a:xfrm>
-          <a:prstGeom prst="rect">
-            <a:avLst/>
-          </a:prstGeom>
-          <a:noFill/>
-        </p:spPr>
-        <p:txBody>
-          <a:bodyPr wrap="square">
-            <a:normAutofit/>
-          </a:bodyPr>
-          <a:lstStyle/>
-          <a:p>
-            <a:pPr algn="ctr"/>
-            <a:r>
-              <a:rPr sz="1400" b="1">
-                <a:solidFill>
-                  <a:srgbClr val="2563EB"/>
-                </a:solidFill>
-                <a:latin typeface="Arial"/>
-              </a:rPr>
-              <a:t>2</a:t>
-            </a:r>
-          </a:p>
-        </p:txBody>
-      </p:sp>
-      <p:sp>
-        <p:nvSpPr>
-          <p:cNvPr id="11" name="TextBox 10"/>
-          <p:cNvSpPr txBox="1"/>
-          <p:nvPr/>
-        </p:nvSpPr>
-        <p:spPr>
-          <a:xfrm>
-            <a:off x="4818888" y="1371600"/>
-            <a:ext cx="2331720" cy="502920"/>
-          </a:xfrm>
-          <a:prstGeom prst="rect">
-            <a:avLst/>
-          </a:prstGeom>
-          <a:noFill/>
-        </p:spPr>
-        <p:txBody>
-          <a:bodyPr wrap="square">
-            <a:normAutofit/>
-          </a:bodyPr>
-          <a:lstStyle/>
-          <a:p>
-            <a:pPr algn="l"/>
-            <a:r>
-              <a:rPr sz="1300" b="0">
-                <a:solidFill>
-                  <a:srgbClr val="0F172A"/>
-                </a:solidFill>
-                <a:latin typeface="Arial"/>
-              </a:rPr>
-              <a:t>Tiền xử lý văn bản review.</a:t>
-            </a:r>
-          </a:p>
-        </p:txBody>
-      </p:sp>
-      <p:sp>
-        <p:nvSpPr>
-          <p:cNvPr id="12" name="Rounded Rectangle 11"/>
-          <p:cNvSpPr/>
-          <p:nvPr/>
-        </p:nvSpPr>
-        <p:spPr>
-          <a:xfrm>
-            <a:off x="8001000" y="1234440"/>
-            <a:ext cx="3154680" cy="868680"/>
-          </a:xfrm>
-          <a:prstGeom prst="roundRect">
-            <a:avLst/>
-          </a:prstGeom>
-          <a:solidFill>
-            <a:srgbClr val="F8FAFC"/>
-          </a:solidFill>
-          <a:ln w="12700">
-            <a:solidFill>
-              <a:srgbClr val="D97706"/>
-            </a:solidFill>
-          </a:ln>
-        </p:spPr>
-        <p:style>
-          <a:lnRef idx="1">
-            <a:schemeClr val="accent1"/>
-          </a:lnRef>
-          <a:fillRef idx="3">
-            <a:schemeClr val="accent1"/>
-          </a:fillRef>
-          <a:effectRef idx="2">
-            <a:schemeClr val="accent1"/>
-          </a:effectRef>
-          <a:fontRef idx="minor">
-            <a:schemeClr val="lt1"/>
-          </a:fontRef>
-        </p:style>
-        <p:txBody>
-          <a:bodyPr rtlCol="0" anchor="ctr"/>
-          <a:lstStyle/>
-          <a:p>
-            <a:pPr algn="ctr"/>
-            <a:endParaRPr/>
-          </a:p>
-        </p:txBody>
-      </p:sp>
-      <p:sp>
-        <p:nvSpPr>
-          <p:cNvPr id="13" name="TextBox 12"/>
-          <p:cNvSpPr txBox="1"/>
-          <p:nvPr/>
-        </p:nvSpPr>
-        <p:spPr>
-          <a:xfrm>
-            <a:off x="8165592" y="1417320"/>
-            <a:ext cx="329184" cy="329184"/>
-          </a:xfrm>
-          <a:prstGeom prst="rect">
-            <a:avLst/>
-          </a:prstGeom>
-          <a:noFill/>
-        </p:spPr>
-        <p:txBody>
-          <a:bodyPr wrap="square">
-            <a:normAutofit/>
-          </a:bodyPr>
-          <a:lstStyle/>
-          <a:p>
-            <a:pPr algn="ctr"/>
-            <a:r>
-              <a:rPr sz="1400" b="1">
-                <a:solidFill>
-                  <a:srgbClr val="D97706"/>
-                </a:solidFill>
-                <a:latin typeface="Arial"/>
-              </a:rPr>
-              <a:t>3</a:t>
-            </a:r>
-          </a:p>
-        </p:txBody>
-      </p:sp>
-      <p:sp>
-        <p:nvSpPr>
-          <p:cNvPr id="14" name="TextBox 13"/>
-          <p:cNvSpPr txBox="1"/>
-          <p:nvPr/>
-        </p:nvSpPr>
-        <p:spPr>
-          <a:xfrm>
-            <a:off x="8567928" y="1371600"/>
-            <a:ext cx="2331720" cy="502920"/>
-          </a:xfrm>
-          <a:prstGeom prst="rect">
-            <a:avLst/>
-          </a:prstGeom>
-          <a:noFill/>
-        </p:spPr>
-        <p:txBody>
-          <a:bodyPr wrap="square">
-            <a:normAutofit/>
-          </a:bodyPr>
-          <a:lstStyle/>
-          <a:p>
-            <a:pPr algn="l"/>
-            <a:r>
-              <a:rPr sz="1300" b="0" dirty="0">
-                <a:solidFill>
-                  <a:srgbClr val="0F172A"/>
-                </a:solidFill>
-                <a:latin typeface="Arial"/>
-              </a:rPr>
-              <a:t>Chia train/test </a:t>
-            </a:r>
-            <a:r>
-              <a:rPr sz="1300" b="0" dirty="0" err="1">
-                <a:solidFill>
-                  <a:srgbClr val="0F172A"/>
-                </a:solidFill>
-                <a:latin typeface="Arial"/>
-              </a:rPr>
-              <a:t>theo</a:t>
-            </a:r>
-            <a:r>
-              <a:rPr sz="1300" b="0" dirty="0">
-                <a:solidFill>
-                  <a:srgbClr val="0F172A"/>
-                </a:solidFill>
-                <a:latin typeface="Arial"/>
-              </a:rPr>
-              <a:t> </a:t>
-            </a:r>
-            <a:r>
-              <a:rPr sz="1300" b="0" dirty="0" err="1">
-                <a:solidFill>
-                  <a:srgbClr val="0F172A"/>
-                </a:solidFill>
-                <a:latin typeface="Arial"/>
-              </a:rPr>
-              <a:t>tỉ</a:t>
-            </a:r>
-            <a:r>
-              <a:rPr sz="1300" b="0" dirty="0">
-                <a:solidFill>
-                  <a:srgbClr val="0F172A"/>
-                </a:solidFill>
-                <a:latin typeface="Arial"/>
-              </a:rPr>
-              <a:t> </a:t>
-            </a:r>
-            <a:r>
-              <a:rPr sz="1300" b="0" dirty="0" err="1">
-                <a:solidFill>
-                  <a:srgbClr val="0F172A"/>
-                </a:solidFill>
-                <a:latin typeface="Arial"/>
-              </a:rPr>
-              <a:t>lệ</a:t>
-            </a:r>
-            <a:r>
-              <a:rPr sz="1300" b="0" dirty="0">
-                <a:solidFill>
-                  <a:srgbClr val="0F172A"/>
-                </a:solidFill>
-                <a:latin typeface="Arial"/>
-              </a:rPr>
-              <a:t> 80/20 </a:t>
-            </a:r>
-            <a:r>
-              <a:rPr sz="1300" b="0" dirty="0" err="1">
-                <a:solidFill>
-                  <a:srgbClr val="0F172A"/>
-                </a:solidFill>
-                <a:latin typeface="Arial"/>
-              </a:rPr>
-              <a:t>và</a:t>
-            </a:r>
-            <a:r>
-              <a:rPr sz="1300" b="0" dirty="0">
-                <a:solidFill>
-                  <a:srgbClr val="0F172A"/>
-                </a:solidFill>
-                <a:latin typeface="Arial"/>
-              </a:rPr>
-              <a:t> stratify </a:t>
-            </a:r>
-            <a:r>
-              <a:rPr sz="1300" b="0" dirty="0" err="1">
-                <a:solidFill>
-                  <a:srgbClr val="0F172A"/>
-                </a:solidFill>
-                <a:latin typeface="Arial"/>
-              </a:rPr>
-              <a:t>theo</a:t>
-            </a:r>
-            <a:r>
-              <a:rPr sz="1300" b="0" dirty="0">
-                <a:solidFill>
-                  <a:srgbClr val="0F172A"/>
-                </a:solidFill>
-                <a:latin typeface="Arial"/>
-              </a:rPr>
-              <a:t> </a:t>
-            </a:r>
-            <a:r>
-              <a:rPr sz="1300" b="0" dirty="0" err="1">
-                <a:solidFill>
-                  <a:srgbClr val="0F172A"/>
-                </a:solidFill>
-                <a:latin typeface="Arial"/>
-              </a:rPr>
-              <a:t>nhãn</a:t>
-            </a:r>
-            <a:r>
-              <a:rPr sz="1300" b="0" dirty="0">
-                <a:solidFill>
-                  <a:srgbClr val="0F172A"/>
-                </a:solidFill>
-                <a:latin typeface="Arial"/>
-              </a:rPr>
-              <a:t>.</a:t>
-            </a:r>
-          </a:p>
-        </p:txBody>
-      </p:sp>
-      <p:sp>
-        <p:nvSpPr>
-          <p:cNvPr id="15" name="Rounded Rectangle 14"/>
-          <p:cNvSpPr/>
-          <p:nvPr/>
-        </p:nvSpPr>
-        <p:spPr>
-          <a:xfrm>
-            <a:off x="502920" y="2788920"/>
-            <a:ext cx="3154680" cy="868680"/>
-          </a:xfrm>
-          <a:prstGeom prst="roundRect">
-            <a:avLst/>
-          </a:prstGeom>
-          <a:solidFill>
-            <a:srgbClr val="F8FAFC"/>
-          </a:solidFill>
-          <a:ln w="12700">
-            <a:solidFill>
-              <a:srgbClr val="166534"/>
-            </a:solidFill>
-          </a:ln>
-        </p:spPr>
-        <p:style>
-          <a:lnRef idx="1">
-            <a:schemeClr val="accent1"/>
-          </a:lnRef>
-          <a:fillRef idx="3">
-            <a:schemeClr val="accent1"/>
-          </a:fillRef>
-          <a:effectRef idx="2">
-            <a:schemeClr val="accent1"/>
-          </a:effectRef>
-          <a:fontRef idx="minor">
-            <a:schemeClr val="lt1"/>
-          </a:fontRef>
-        </p:style>
-        <p:txBody>
-          <a:bodyPr rtlCol="0" anchor="ctr"/>
-          <a:lstStyle/>
-          <a:p>
-            <a:pPr algn="ctr"/>
-            <a:endParaRPr/>
-          </a:p>
-        </p:txBody>
-      </p:sp>
-      <p:sp>
-        <p:nvSpPr>
-          <p:cNvPr id="16" name="TextBox 15"/>
-          <p:cNvSpPr txBox="1"/>
-          <p:nvPr/>
-        </p:nvSpPr>
-        <p:spPr>
-          <a:xfrm>
-            <a:off x="667512" y="2971800"/>
-            <a:ext cx="329184" cy="329184"/>
-          </a:xfrm>
-          <a:prstGeom prst="rect">
-            <a:avLst/>
-          </a:prstGeom>
-          <a:noFill/>
-        </p:spPr>
-        <p:txBody>
-          <a:bodyPr wrap="square">
-            <a:normAutofit/>
-          </a:bodyPr>
-          <a:lstStyle/>
-          <a:p>
-            <a:pPr algn="ctr"/>
-            <a:r>
-              <a:rPr sz="1400" b="1">
-                <a:solidFill>
-                  <a:srgbClr val="166534"/>
-                </a:solidFill>
-                <a:latin typeface="Arial"/>
-              </a:rPr>
-              <a:t>4</a:t>
-            </a:r>
-          </a:p>
-        </p:txBody>
-      </p:sp>
-      <p:sp>
-        <p:nvSpPr>
-          <p:cNvPr id="17" name="TextBox 16"/>
-          <p:cNvSpPr txBox="1"/>
-          <p:nvPr/>
-        </p:nvSpPr>
-        <p:spPr>
-          <a:xfrm>
-            <a:off x="1069848" y="2926079"/>
-            <a:ext cx="2331720" cy="502920"/>
-          </a:xfrm>
-          <a:prstGeom prst="rect">
-            <a:avLst/>
-          </a:prstGeom>
-          <a:noFill/>
-        </p:spPr>
-        <p:txBody>
-          <a:bodyPr wrap="square">
-            <a:normAutofit/>
-          </a:bodyPr>
-          <a:lstStyle/>
-          <a:p>
-            <a:pPr algn="l"/>
-            <a:r>
-              <a:rPr sz="1300" b="0">
-                <a:solidFill>
-                  <a:srgbClr val="0F172A"/>
-                </a:solidFill>
-                <a:latin typeface="Arial"/>
-              </a:rPr>
-              <a:t>Chuyển văn bản thành vector TF-IDF.</a:t>
-            </a:r>
-          </a:p>
-        </p:txBody>
-      </p:sp>
-      <p:sp>
-        <p:nvSpPr>
-          <p:cNvPr id="18" name="Rounded Rectangle 17"/>
-          <p:cNvSpPr/>
-          <p:nvPr/>
-        </p:nvSpPr>
-        <p:spPr>
-          <a:xfrm>
-            <a:off x="4251960" y="2788920"/>
-            <a:ext cx="3154680" cy="868680"/>
-          </a:xfrm>
-          <a:prstGeom prst="roundRect">
-            <a:avLst/>
-          </a:prstGeom>
-          <a:solidFill>
-            <a:srgbClr val="F8FAFC"/>
-          </a:solidFill>
-          <a:ln w="12700">
-            <a:solidFill>
-              <a:srgbClr val="142A41"/>
-            </a:solidFill>
-          </a:ln>
-        </p:spPr>
-        <p:style>
-          <a:lnRef idx="1">
-            <a:schemeClr val="accent1"/>
-          </a:lnRef>
-          <a:fillRef idx="3">
-            <a:schemeClr val="accent1"/>
-          </a:fillRef>
-          <a:effectRef idx="2">
-            <a:schemeClr val="accent1"/>
-          </a:effectRef>
-          <a:fontRef idx="minor">
-            <a:schemeClr val="lt1"/>
-          </a:fontRef>
-        </p:style>
-        <p:txBody>
-          <a:bodyPr rtlCol="0" anchor="ctr"/>
-          <a:lstStyle/>
-          <a:p>
-            <a:pPr algn="ctr"/>
-            <a:endParaRPr/>
-          </a:p>
-        </p:txBody>
-      </p:sp>
-      <p:sp>
-        <p:nvSpPr>
-          <p:cNvPr id="19" name="TextBox 18"/>
-          <p:cNvSpPr txBox="1"/>
-          <p:nvPr/>
-        </p:nvSpPr>
-        <p:spPr>
-          <a:xfrm>
-            <a:off x="4416552" y="2971800"/>
-            <a:ext cx="329184" cy="329184"/>
-          </a:xfrm>
-          <a:prstGeom prst="rect">
-            <a:avLst/>
-          </a:prstGeom>
-          <a:noFill/>
-        </p:spPr>
-        <p:txBody>
-          <a:bodyPr wrap="square">
-            <a:normAutofit/>
-          </a:bodyPr>
-          <a:lstStyle/>
-          <a:p>
-            <a:pPr algn="ctr"/>
-            <a:r>
-              <a:rPr sz="1400" b="1" dirty="0">
-                <a:solidFill>
-                  <a:srgbClr val="142A41"/>
-                </a:solidFill>
-                <a:latin typeface="Arial"/>
-              </a:rPr>
-              <a:t>5</a:t>
-            </a:r>
-          </a:p>
-        </p:txBody>
-      </p:sp>
-      <p:sp>
-        <p:nvSpPr>
-          <p:cNvPr id="20" name="TextBox 19"/>
-          <p:cNvSpPr txBox="1"/>
-          <p:nvPr/>
-        </p:nvSpPr>
-        <p:spPr>
-          <a:xfrm>
-            <a:off x="4818888" y="2926079"/>
-            <a:ext cx="2331720" cy="502920"/>
-          </a:xfrm>
-          <a:prstGeom prst="rect">
-            <a:avLst/>
-          </a:prstGeom>
-          <a:noFill/>
-        </p:spPr>
-        <p:txBody>
-          <a:bodyPr wrap="square">
-            <a:normAutofit fontScale="85000" lnSpcReduction="10000"/>
-          </a:bodyPr>
-          <a:lstStyle/>
-          <a:p>
-            <a:pPr algn="l"/>
-            <a:r>
-              <a:rPr dirty="0"/>
-              <a:t>Train </a:t>
-            </a:r>
-            <a:r>
-              <a:rPr dirty="0" err="1"/>
-              <a:t>và</a:t>
-            </a:r>
-            <a:r>
-              <a:rPr dirty="0"/>
-              <a:t> </a:t>
-            </a:r>
-            <a:r>
-              <a:rPr dirty="0">
-                <a:latin typeface="Arial" panose="020B0604020202020204" pitchFamily="34" charset="0"/>
-                <a:cs typeface="Arial" panose="020B0604020202020204" pitchFamily="34" charset="0"/>
-              </a:rPr>
-              <a:t>so</a:t>
-            </a:r>
-            <a:r>
-              <a:rPr dirty="0"/>
-              <a:t> </a:t>
-            </a:r>
-            <a:r>
-              <a:rPr dirty="0" err="1"/>
-              <a:t>sánh</a:t>
-            </a:r>
-            <a:r>
-              <a:rPr dirty="0"/>
-              <a:t> Naive Bayes </a:t>
-            </a:r>
-            <a:r>
-              <a:rPr dirty="0" err="1"/>
-              <a:t>với</a:t>
-            </a:r>
-            <a:r>
-              <a:rPr dirty="0"/>
-              <a:t> Linear SVM.</a:t>
-            </a:r>
-          </a:p>
-        </p:txBody>
-      </p:sp>
-      <p:sp>
-        <p:nvSpPr>
-          <p:cNvPr id="21" name="Rounded Rectangle 20"/>
-          <p:cNvSpPr/>
-          <p:nvPr/>
-        </p:nvSpPr>
-        <p:spPr>
-          <a:xfrm>
-            <a:off x="8001000" y="2788920"/>
-            <a:ext cx="3154680" cy="868680"/>
-          </a:xfrm>
-          <a:prstGeom prst="roundRect">
-            <a:avLst/>
-          </a:prstGeom>
-          <a:solidFill>
-            <a:srgbClr val="F8FAFC"/>
-          </a:solidFill>
-          <a:ln w="12700">
-            <a:solidFill>
-              <a:srgbClr val="0F766E"/>
-            </a:solidFill>
-          </a:ln>
-        </p:spPr>
-        <p:style>
-          <a:lnRef idx="1">
-            <a:schemeClr val="accent1"/>
-          </a:lnRef>
-          <a:fillRef idx="3">
-            <a:schemeClr val="accent1"/>
-          </a:fillRef>
-          <a:effectRef idx="2">
-            <a:schemeClr val="accent1"/>
-          </a:effectRef>
-          <a:fontRef idx="minor">
-            <a:schemeClr val="lt1"/>
-          </a:fontRef>
-        </p:style>
-        <p:txBody>
-          <a:bodyPr rtlCol="0" anchor="ctr"/>
-          <a:lstStyle/>
-          <a:p>
-            <a:pPr algn="ctr"/>
-            <a:endParaRPr/>
-          </a:p>
-        </p:txBody>
-      </p:sp>
-      <p:sp>
-        <p:nvSpPr>
-          <p:cNvPr id="22" name="TextBox 21"/>
-          <p:cNvSpPr txBox="1"/>
-          <p:nvPr/>
-        </p:nvSpPr>
-        <p:spPr>
-          <a:xfrm>
-            <a:off x="8165592" y="2971800"/>
-            <a:ext cx="329184" cy="329184"/>
-          </a:xfrm>
-          <a:prstGeom prst="rect">
-            <a:avLst/>
-          </a:prstGeom>
-          <a:noFill/>
-        </p:spPr>
-        <p:txBody>
-          <a:bodyPr wrap="square">
-            <a:normAutofit/>
-          </a:bodyPr>
-          <a:lstStyle/>
-          <a:p>
-            <a:pPr algn="ctr"/>
-            <a:r>
-              <a:rPr sz="1400" b="1">
-                <a:solidFill>
-                  <a:srgbClr val="0F766E"/>
-                </a:solidFill>
-                <a:latin typeface="Arial"/>
-              </a:rPr>
-              <a:t>6</a:t>
-            </a:r>
-          </a:p>
-        </p:txBody>
-      </p:sp>
-      <p:sp>
-        <p:nvSpPr>
-          <p:cNvPr id="23" name="TextBox 22"/>
-          <p:cNvSpPr txBox="1"/>
-          <p:nvPr/>
-        </p:nvSpPr>
-        <p:spPr>
-          <a:xfrm>
-            <a:off x="8567928" y="2926079"/>
-            <a:ext cx="2331720" cy="502920"/>
-          </a:xfrm>
-          <a:prstGeom prst="rect">
-            <a:avLst/>
-          </a:prstGeom>
-          <a:noFill/>
-        </p:spPr>
-        <p:txBody>
-          <a:bodyPr wrap="square">
-            <a:normAutofit/>
-          </a:bodyPr>
-          <a:lstStyle/>
-          <a:p>
-            <a:pPr algn="l"/>
-            <a:r>
-              <a:rPr sz="1300" b="0">
-                <a:solidFill>
-                  <a:srgbClr val="0F172A"/>
-                </a:solidFill>
-                <a:latin typeface="Arial"/>
-              </a:rPr>
-              <a:t>Áp dụng safe issue rules cho các lỗi rõ ràng.</a:t>
-            </a:r>
-          </a:p>
-        </p:txBody>
-      </p:sp>
-      <p:sp>
-        <p:nvSpPr>
-          <p:cNvPr id="24" name="Rounded Rectangle 23"/>
-          <p:cNvSpPr/>
-          <p:nvPr/>
-        </p:nvSpPr>
-        <p:spPr>
-          <a:xfrm>
-            <a:off x="4251960" y="4343400"/>
-            <a:ext cx="3154680" cy="868680"/>
-          </a:xfrm>
-          <a:prstGeom prst="roundRect">
-            <a:avLst/>
-          </a:prstGeom>
-          <a:solidFill>
-            <a:srgbClr val="F8FAFC"/>
-          </a:solidFill>
-          <a:ln w="12700">
-            <a:solidFill>
-              <a:srgbClr val="2563EB"/>
-            </a:solidFill>
-          </a:ln>
-        </p:spPr>
-        <p:style>
-          <a:lnRef idx="1">
-            <a:schemeClr val="accent1"/>
-          </a:lnRef>
-          <a:fillRef idx="3">
-            <a:schemeClr val="accent1"/>
-          </a:fillRef>
-          <a:effectRef idx="2">
-            <a:schemeClr val="accent1"/>
-          </a:effectRef>
-          <a:fontRef idx="minor">
-            <a:schemeClr val="lt1"/>
-          </a:fontRef>
-        </p:style>
-        <p:txBody>
-          <a:bodyPr rtlCol="0" anchor="ctr"/>
-          <a:lstStyle/>
-          <a:p>
-            <a:pPr algn="ctr"/>
-            <a:endParaRPr/>
-          </a:p>
-        </p:txBody>
-      </p:sp>
-      <p:sp>
-        <p:nvSpPr>
-          <p:cNvPr id="25" name="TextBox 24"/>
-          <p:cNvSpPr txBox="1"/>
-          <p:nvPr/>
-        </p:nvSpPr>
-        <p:spPr>
-          <a:xfrm>
-            <a:off x="4416552" y="4526280"/>
-            <a:ext cx="329184" cy="329184"/>
-          </a:xfrm>
-          <a:prstGeom prst="rect">
-            <a:avLst/>
-          </a:prstGeom>
-          <a:noFill/>
-        </p:spPr>
-        <p:txBody>
-          <a:bodyPr wrap="square">
-            <a:normAutofit/>
-          </a:bodyPr>
-          <a:lstStyle/>
-          <a:p>
-            <a:pPr algn="ctr"/>
-            <a:r>
-              <a:rPr sz="1400" b="1">
-                <a:solidFill>
-                  <a:srgbClr val="2563EB"/>
-                </a:solidFill>
-                <a:latin typeface="Arial"/>
-              </a:rPr>
-              <a:t>7</a:t>
-            </a:r>
-          </a:p>
-        </p:txBody>
-      </p:sp>
-      <p:sp>
-        <p:nvSpPr>
-          <p:cNvPr id="26" name="TextBox 25"/>
-          <p:cNvSpPr txBox="1"/>
-          <p:nvPr/>
-        </p:nvSpPr>
-        <p:spPr>
-          <a:xfrm>
-            <a:off x="4818888" y="4480560"/>
-            <a:ext cx="2331720" cy="502920"/>
-          </a:xfrm>
-          <a:prstGeom prst="rect">
-            <a:avLst/>
-          </a:prstGeom>
-          <a:noFill/>
-        </p:spPr>
-        <p:txBody>
-          <a:bodyPr wrap="square">
-            <a:normAutofit fontScale="85000" lnSpcReduction="20000"/>
-          </a:bodyPr>
-          <a:lstStyle/>
-          <a:p>
-            <a:pPr algn="l"/>
-            <a:r>
-              <a:rPr sz="1300" b="0">
-                <a:solidFill>
-                  <a:srgbClr val="0F172A"/>
-                </a:solidFill>
-                <a:latin typeface="Arial"/>
-              </a:rPr>
-              <a:t>Đánh giá bằng Accuracy, Macro F1, classification report và confusion matrix.</a:t>
-            </a:r>
-          </a:p>
-        </p:txBody>
-      </p:sp>
-      <p:sp>
-        <p:nvSpPr>
-          <p:cNvPr id="27" name="TextBox 26"/>
-          <p:cNvSpPr txBox="1"/>
-          <p:nvPr/>
-        </p:nvSpPr>
-        <p:spPr>
-          <a:xfrm>
-            <a:off x="731520" y="5806440"/>
-            <a:ext cx="10515600" cy="292608"/>
-          </a:xfrm>
-          <a:prstGeom prst="rect">
-            <a:avLst/>
-          </a:prstGeom>
-          <a:noFill/>
-        </p:spPr>
-        <p:txBody>
-          <a:bodyPr wrap="square">
-            <a:normAutofit fontScale="92500" lnSpcReduction="20000"/>
-          </a:bodyPr>
-          <a:lstStyle/>
-          <a:p>
-            <a:pPr algn="ctr"/>
-            <a:r>
-              <a:rPr sz="1600" b="1">
-                <a:solidFill>
-                  <a:srgbClr val="142A41"/>
-                </a:solidFill>
-                <a:latin typeface="Arial"/>
-              </a:rPr>
-              <a:t>Repeatable training and evaluation pipeline</a:t>
+            <a:pPr>
+              <a:defRPr sz="1900">
+                <a:solidFill>
+                  <a:srgbClr val="0F172A"/>
+                </a:solidFill>
+                <a:latin typeface="Arial"/>
+              </a:defRPr>
+            </a:pPr>
+            <a:r>
+              <a:rPr>
+                <a:latin typeface="Arial"/>
+              </a:rPr>
+              <a:t>• File tiền xử lý chính: src/preprocess.py.</a:t>
+            </a:r>
+          </a:p>
+          <a:p>
+            <a:pPr>
+              <a:defRPr sz="1900">
+                <a:solidFill>
+                  <a:srgbClr val="0F172A"/>
+                </a:solidFill>
+                <a:latin typeface="Arial"/>
+              </a:defRPr>
+            </a:pPr>
+            <a:r>
+              <a:rPr>
+                <a:latin typeface="Arial"/>
+              </a:rPr>
+              <a:t>• Các bước chính:</a:t>
+            </a:r>
+          </a:p>
+          <a:p>
+            <a:pPr lvl="1">
+              <a:defRPr sz="1600">
+                <a:solidFill>
+                  <a:srgbClr val="475569"/>
+                </a:solidFill>
+                <a:latin typeface="Arial"/>
+              </a:defRPr>
+            </a:pPr>
+            <a:r>
+              <a:rPr>
+                <a:latin typeface="Arial"/>
+              </a:rPr>
+              <a:t>• Chuẩn hóa Unicode và chuyển chữ thường.</a:t>
+            </a:r>
+          </a:p>
+          <a:p>
+            <a:pPr lvl="1">
+              <a:defRPr sz="1600">
+                <a:solidFill>
+                  <a:srgbClr val="475569"/>
+                </a:solidFill>
+                <a:latin typeface="Arial"/>
+              </a:defRPr>
+            </a:pPr>
+            <a:r>
+              <a:rPr>
+                <a:latin typeface="Arial"/>
+              </a:rPr>
+              <a:t>• Chuẩn hóa teencode thương mại điện tử như ko, k, dc, sp.</a:t>
+            </a:r>
+          </a:p>
+          <a:p>
+            <a:pPr lvl="1">
+              <a:defRPr sz="1600">
+                <a:solidFill>
+                  <a:srgbClr val="475569"/>
+                </a:solidFill>
+                <a:latin typeface="Arial"/>
+              </a:defRPr>
+            </a:pPr>
+            <a:r>
+              <a:rPr>
+                <a:latin typeface="Arial"/>
+              </a:rPr>
+              <a:t>• Xóa URL, emoji và ký tự nhiễu.</a:t>
+            </a:r>
+          </a:p>
+          <a:p>
+            <a:pPr lvl="1">
+              <a:defRPr sz="1600">
+                <a:solidFill>
+                  <a:srgbClr val="475569"/>
+                </a:solidFill>
+                <a:latin typeface="Arial"/>
+              </a:defRPr>
+            </a:pPr>
+            <a:r>
+              <a:rPr>
+                <a:latin typeface="Arial"/>
+              </a:rPr>
+              <a:t>• Giữ lại từ quan trọng như khong, chua, loi, cham, sai.</a:t>
+            </a:r>
+          </a:p>
+          <a:p>
+            <a:pPr>
+              <a:defRPr sz="1900">
+                <a:solidFill>
+                  <a:srgbClr val="0F172A"/>
+                </a:solidFill>
+                <a:latin typeface="Arial"/>
+              </a:defRPr>
+            </a:pPr>
+            <a:r>
+              <a:rPr>
+                <a:latin typeface="Arial"/>
+              </a:rPr>
+              <a:t>• Đặc trưng:</a:t>
+            </a:r>
+          </a:p>
+          <a:p>
+            <a:pPr lvl="1">
+              <a:defRPr sz="1600">
+                <a:solidFill>
+                  <a:srgbClr val="475569"/>
+                </a:solidFill>
+                <a:latin typeface="Arial"/>
+              </a:defRPr>
+            </a:pPr>
+            <a:r>
+              <a:rPr>
+                <a:latin typeface="Arial"/>
+              </a:rPr>
+              <a:t>• Sentiment: TF-IDF unigram + bigram.</a:t>
+            </a:r>
+          </a:p>
+          <a:p>
+            <a:pPr lvl="1">
+              <a:defRPr sz="1600">
+                <a:solidFill>
+                  <a:srgbClr val="475569"/>
+                </a:solidFill>
+                <a:latin typeface="Arial"/>
+              </a:defRPr>
+            </a:pPr>
+            <a:r>
+              <a:rPr>
+                <a:latin typeface="Arial"/>
+              </a:rPr>
+              <a:t>• Issue: TF-IDF word + character n-grams.</a:t>
             </a:r>
           </a:p>
         </p:txBody>
@@ -16091,13 +15055,13 @@
           <a:p>
             <a:pPr algn="l"/>
             <a:r>
-              <a:rPr sz="2800" b="1">
+              <a:rPr sz="2800" b="1" dirty="0">
                 <a:solidFill>
                   <a:srgbClr val="142A41"/>
                 </a:solidFill>
                 <a:latin typeface="Arial"/>
               </a:rPr>
-              <a:t>Preprocessing and Features</a:t>
+              <a:t>Models and Baseline</a:t>
             </a:r>
           </a:p>
         </p:txBody>
@@ -16132,7 +15096,7 @@
                 </a:solidFill>
                 <a:latin typeface="Arial"/>
               </a:rPr>
-              <a:t>7/15</a:t>
+              <a:t>8/15</a:t>
             </a:r>
           </a:p>
         </p:txBody>
@@ -16195,147 +15159,235 @@
           <a:lstStyle/>
           <a:p>
             <a:pPr>
-              <a:defRPr sz="1900">
-                <a:solidFill>
-                  <a:srgbClr val="0F172A"/>
-                </a:solidFill>
-                <a:latin typeface="Arial"/>
+              <a:defRPr sz="1550">
+                <a:solidFill>
+                  <a:srgbClr val="0F172A"/>
+                </a:solidFill>
+                <a:latin typeface="Arial"/>
+                <a:ea typeface="Arial"/>
               </a:defRPr>
             </a:pPr>
             <a:r>
-              <a:rPr>
-                <a:latin typeface="Arial"/>
-              </a:rPr>
-              <a:t>• File tiền xử lý chính: src/preprocess.py.</a:t>
+              <a:rPr lang="vi-VN" dirty="0">
+                <a:latin typeface="Arial"/>
+                <a:ea typeface="Arial"/>
+              </a:rPr>
+              <a:t>• Baseline model:</a:t>
             </a:r>
           </a:p>
           <a:p>
             <a:pPr>
-              <a:defRPr sz="1900">
-                <a:solidFill>
-                  <a:srgbClr val="0F172A"/>
-                </a:solidFill>
-                <a:latin typeface="Arial"/>
+              <a:defRPr sz="1550">
+                <a:solidFill>
+                  <a:srgbClr val="0F172A"/>
+                </a:solidFill>
+                <a:latin typeface="Arial"/>
+                <a:ea typeface="Arial"/>
               </a:defRPr>
             </a:pPr>
             <a:r>
-              <a:rPr>
-                <a:latin typeface="Arial"/>
-              </a:rPr>
-              <a:t>• Các bước chính:</a:t>
-            </a:r>
-          </a:p>
-          <a:p>
-            <a:pPr lvl="1">
-              <a:defRPr sz="1600">
-                <a:solidFill>
-                  <a:srgbClr val="475569"/>
-                </a:solidFill>
-                <a:latin typeface="Arial"/>
+              <a:rPr lang="vi-VN" dirty="0">
+                <a:latin typeface="Arial"/>
+                <a:ea typeface="Arial"/>
+              </a:rPr>
+              <a:t>  • Multinomial Naive Bayes</a:t>
+            </a:r>
+          </a:p>
+          <a:p>
+            <a:pPr>
+              <a:defRPr sz="1550">
+                <a:solidFill>
+                  <a:srgbClr val="0F172A"/>
+                </a:solidFill>
+                <a:latin typeface="Arial"/>
+                <a:ea typeface="Arial"/>
               </a:defRPr>
             </a:pPr>
             <a:r>
-              <a:rPr>
-                <a:latin typeface="Arial"/>
-              </a:rPr>
-              <a:t>• Chuẩn hóa Unicode và chuyển chữ thường.</a:t>
-            </a:r>
-          </a:p>
-          <a:p>
-            <a:pPr lvl="1">
-              <a:defRPr sz="1600">
-                <a:solidFill>
-                  <a:srgbClr val="475569"/>
-                </a:solidFill>
-                <a:latin typeface="Arial"/>
+              <a:rPr lang="vi-VN" dirty="0">
+                <a:latin typeface="Arial"/>
+                <a:ea typeface="Arial"/>
+              </a:rPr>
+              <a:t>  • unigram + bigram đếm tần suất</a:t>
+            </a:r>
+          </a:p>
+          <a:p>
+            <a:pPr>
+              <a:defRPr sz="1550">
+                <a:solidFill>
+                  <a:srgbClr val="0F172A"/>
+                </a:solidFill>
+                <a:latin typeface="Arial"/>
+                <a:ea typeface="Arial"/>
               </a:defRPr>
             </a:pPr>
             <a:r>
-              <a:rPr>
-                <a:latin typeface="Arial"/>
-              </a:rPr>
-              <a:t>• Chuẩn hóa teencode thương mại điện tử như ko, k, dc, sp.</a:t>
-            </a:r>
-          </a:p>
-          <a:p>
-            <a:pPr lvl="1">
-              <a:defRPr sz="1600">
-                <a:solidFill>
-                  <a:srgbClr val="475569"/>
-                </a:solidFill>
-                <a:latin typeface="Arial"/>
+              <a:rPr lang="vi-VN" dirty="0">
+                <a:latin typeface="Arial"/>
+                <a:ea typeface="Arial"/>
+              </a:rPr>
+              <a:t>  </a:t>
+            </a:r>
+          </a:p>
+          <a:p>
+            <a:pPr>
+              <a:defRPr sz="1550">
+                <a:solidFill>
+                  <a:srgbClr val="0F172A"/>
+                </a:solidFill>
+                <a:latin typeface="Arial"/>
+                <a:ea typeface="Arial"/>
               </a:defRPr>
             </a:pPr>
             <a:r>
-              <a:rPr>
-                <a:latin typeface="Arial"/>
-              </a:rPr>
-              <a:t>• Xóa URL, emoji và ký tự nhiễu.</a:t>
-            </a:r>
-          </a:p>
-          <a:p>
-            <a:pPr lvl="1">
-              <a:defRPr sz="1600">
-                <a:solidFill>
-                  <a:srgbClr val="475569"/>
-                </a:solidFill>
-                <a:latin typeface="Arial"/>
+              <a:rPr lang="vi-VN" dirty="0">
+                <a:latin typeface="Arial"/>
+                <a:ea typeface="Arial"/>
+              </a:rPr>
+              <a:t>• Strong model:</a:t>
+            </a:r>
+          </a:p>
+          <a:p>
+            <a:pPr>
+              <a:defRPr sz="1550">
+                <a:solidFill>
+                  <a:srgbClr val="0F172A"/>
+                </a:solidFill>
+                <a:latin typeface="Arial"/>
+                <a:ea typeface="Arial"/>
               </a:defRPr>
             </a:pPr>
             <a:r>
-              <a:rPr>
-                <a:latin typeface="Arial"/>
-              </a:rPr>
-              <a:t>• Giữ lại từ quan trọng như khong, chua, loi, cham, sai.</a:t>
+              <a:rPr lang="vi-VN" dirty="0">
+                <a:latin typeface="Arial"/>
+                <a:ea typeface="Arial"/>
+              </a:rPr>
+              <a:t>  • TF-IDF + Linear SVM</a:t>
             </a:r>
           </a:p>
           <a:p>
             <a:pPr>
-              <a:defRPr sz="1900">
-                <a:solidFill>
-                  <a:srgbClr val="0F172A"/>
-                </a:solidFill>
-                <a:latin typeface="Arial"/>
+              <a:defRPr sz="1550">
+                <a:solidFill>
+                  <a:srgbClr val="0F172A"/>
+                </a:solidFill>
+                <a:latin typeface="Arial"/>
+                <a:ea typeface="Arial"/>
               </a:defRPr>
             </a:pPr>
-            <a:r>
-              <a:rPr>
-                <a:latin typeface="Arial"/>
-              </a:rPr>
-              <a:t>• Đặc trưng:</a:t>
-            </a:r>
-          </a:p>
-          <a:p>
-            <a:pPr lvl="1">
-              <a:defRPr sz="1600">
-                <a:solidFill>
-                  <a:srgbClr val="475569"/>
-                </a:solidFill>
-                <a:latin typeface="Arial"/>
+            <a:endParaRPr lang="vi-VN" dirty="0">
+              <a:latin typeface="Arial"/>
+              <a:ea typeface="Arial"/>
+            </a:endParaRPr>
+          </a:p>
+          <a:p>
+            <a:pPr>
+              <a:defRPr sz="1550">
+                <a:solidFill>
+                  <a:srgbClr val="0F172A"/>
+                </a:solidFill>
+                <a:latin typeface="Arial"/>
+                <a:ea typeface="Arial"/>
               </a:defRPr>
             </a:pPr>
             <a:r>
-              <a:rPr>
-                <a:latin typeface="Arial"/>
-              </a:rPr>
-              <a:t>• Sentiment: TF-IDF unigram + bigram.</a:t>
-            </a:r>
-          </a:p>
-          <a:p>
-            <a:pPr lvl="1">
-              <a:defRPr sz="1600">
-                <a:solidFill>
-                  <a:srgbClr val="475569"/>
-                </a:solidFill>
-                <a:latin typeface="Arial"/>
+              <a:rPr lang="vi-VN" dirty="0">
+                <a:latin typeface="Arial"/>
+                <a:ea typeface="Arial"/>
+              </a:rPr>
+              <a:t>• Rule layer:</a:t>
+            </a:r>
+          </a:p>
+          <a:p>
+            <a:pPr>
+              <a:defRPr sz="1550">
+                <a:solidFill>
+                  <a:srgbClr val="0F172A"/>
+                </a:solidFill>
+                <a:latin typeface="Arial"/>
+                <a:ea typeface="Arial"/>
               </a:defRPr>
             </a:pPr>
             <a:r>
-              <a:rPr>
-                <a:latin typeface="Arial"/>
-              </a:rPr>
-              <a:t>• Issue: TF-IDF word + character n-grams.</a:t>
-            </a:r>
+              <a:rPr lang="vi-VN" dirty="0">
+                <a:latin typeface="Arial"/>
+                <a:ea typeface="Arial"/>
+              </a:rPr>
+              <a:t>  • Safe issue rules cho các lỗi rõ ràng trong bài toán issue</a:t>
+            </a:r>
+          </a:p>
+          <a:p>
+            <a:pPr>
+              <a:defRPr sz="1550">
+                <a:solidFill>
+                  <a:srgbClr val="0F172A"/>
+                </a:solidFill>
+                <a:latin typeface="Arial"/>
+                <a:ea typeface="Arial"/>
+              </a:defRPr>
+            </a:pPr>
+            <a:endParaRPr lang="vi-VN" dirty="0">
+              <a:latin typeface="Arial"/>
+              <a:ea typeface="Arial"/>
+            </a:endParaRPr>
+          </a:p>
+          <a:p>
+            <a:pPr>
+              <a:defRPr sz="1550">
+                <a:solidFill>
+                  <a:srgbClr val="0F172A"/>
+                </a:solidFill>
+                <a:latin typeface="Arial"/>
+                <a:ea typeface="Arial"/>
+              </a:defRPr>
+            </a:pPr>
+            <a:r>
+              <a:rPr lang="vi-VN" dirty="0">
+                <a:latin typeface="Arial"/>
+                <a:ea typeface="Arial"/>
+              </a:rPr>
+              <a:t>• Final models:</a:t>
+            </a:r>
+          </a:p>
+          <a:p>
+            <a:pPr>
+              <a:defRPr sz="1550">
+                <a:solidFill>
+                  <a:srgbClr val="0F172A"/>
+                </a:solidFill>
+                <a:latin typeface="Arial"/>
+                <a:ea typeface="Arial"/>
+              </a:defRPr>
+            </a:pPr>
+            <a:r>
+              <a:rPr lang="vi-VN" dirty="0">
+                <a:latin typeface="Arial"/>
+                <a:ea typeface="Arial"/>
+              </a:rPr>
+              <a:t>  • Sentiment: TF-IDF word unigram + bigram + Linear SVM</a:t>
+            </a:r>
+          </a:p>
+          <a:p>
+            <a:pPr>
+              <a:defRPr sz="1550">
+                <a:solidFill>
+                  <a:srgbClr val="0F172A"/>
+                </a:solidFill>
+                <a:latin typeface="Arial"/>
+                <a:ea typeface="Arial"/>
+              </a:defRPr>
+            </a:pPr>
+            <a:r>
+              <a:rPr lang="vi-VN" dirty="0">
+                <a:latin typeface="Arial"/>
+                <a:ea typeface="Arial"/>
+              </a:rPr>
+              <a:t>  • Issue: TF-IDF word/char n-grams + Linear SVM + safe issue rules</a:t>
+            </a:r>
+            <a:endParaRPr dirty="0">
+              <a:latin typeface="Arial"/>
+              <a:ea typeface="Arial"/>
+            </a:endParaRPr>
           </a:p>
         </p:txBody>
       </p:sp>
@@ -16553,11 +15605,11 @@
               </a:defRPr>
             </a:pPr>
             <a:r>
-              <a:rPr lang="vi-VN" dirty="0">
-                <a:latin typeface="Arial"/>
-                <a:ea typeface="Arial"/>
-              </a:rPr>
-              <a:t>• Baseline model:</a:t>
+              <a:rPr lang="en-US" dirty="0">
+                <a:latin typeface="Arial"/>
+                <a:ea typeface="Arial"/>
+              </a:rPr>
+              <a:t>Naïve Bayes</a:t>
             </a:r>
           </a:p>
           <a:p>
@@ -16575,7 +15627,7 @@
                 <a:latin typeface="Arial"/>
                 <a:ea typeface="Arial"/>
               </a:rPr>
-              <a:t>  • Multinomial Naive Bayes</a:t>
+              <a:t>• Ý tưởng:</a:t>
             </a:r>
           </a:p>
           <a:p>
@@ -16593,7 +15645,7 @@
                 <a:latin typeface="Arial"/>
                 <a:ea typeface="Arial"/>
               </a:rPr>
-              <a:t>  • unigram + bigram đếm tần suất</a:t>
+              <a:t>  • Tính xác suất một review thuộc từng lớp.</a:t>
             </a:r>
           </a:p>
           <a:p>
@@ -16611,7 +15663,7 @@
                 <a:latin typeface="Arial"/>
                 <a:ea typeface="Arial"/>
               </a:rPr>
-              <a:t>  </a:t>
+              <a:t>  • Chọn lớp có xác suất lớn nhất.</a:t>
             </a:r>
           </a:p>
           <a:p>
@@ -16629,25 +15681,7 @@
                 <a:latin typeface="Arial"/>
                 <a:ea typeface="Arial"/>
               </a:rPr>
-              <a:t>• Strong model:</a:t>
-            </a:r>
-          </a:p>
-          <a:p>
-            <a:pPr>
-              <a:defRPr sz="1550">
-                <a:solidFill>
-                  <a:srgbClr val="0F172A"/>
-                </a:solidFill>
-                <a:latin typeface="Arial"/>
-                <a:ea typeface="Arial"/>
-              </a:defRPr>
-            </a:pPr>
-            <a:r>
-              <a:rPr lang="vi-VN" dirty="0">
-                <a:latin typeface="Arial"/>
-                <a:ea typeface="Arial"/>
-              </a:rPr>
-              <a:t>  • TF-IDF + Linear SVM</a:t>
+              <a:t>  • Giả định các từ độc lập có điều kiện theo lớp.</a:t>
             </a:r>
           </a:p>
           <a:p>
@@ -16680,7 +15714,7 @@
                 <a:latin typeface="Arial"/>
                 <a:ea typeface="Arial"/>
               </a:rPr>
-              <a:t>• Rule layer:</a:t>
+              <a:t>• Công thức:</a:t>
             </a:r>
           </a:p>
           <a:p>
@@ -16693,13 +15727,10 @@
                 <a:ea typeface="Arial"/>
               </a:defRPr>
             </a:pPr>
-            <a:r>
-              <a:rPr lang="vi-VN" dirty="0">
-                <a:latin typeface="Arial"/>
-                <a:ea typeface="Arial"/>
-              </a:rPr>
-              <a:t>  • Safe issue rules cho các lỗi rõ ràng trong bài toán issue</a:t>
-            </a:r>
+            <a:endParaRPr lang="en-US" dirty="0">
+              <a:latin typeface="Arial"/>
+              <a:ea typeface="Arial"/>
+            </a:endParaRPr>
           </a:p>
           <a:p>
             <a:pPr>
@@ -16731,52 +15762,204 @@
                 <a:latin typeface="Arial"/>
                 <a:ea typeface="Arial"/>
               </a:rPr>
-              <a:t>• Final models:</a:t>
-            </a:r>
-          </a:p>
-          <a:p>
-            <a:pPr>
-              <a:defRPr sz="1550">
-                <a:solidFill>
-                  <a:srgbClr val="0F172A"/>
-                </a:solidFill>
-                <a:latin typeface="Arial"/>
-                <a:ea typeface="Arial"/>
-              </a:defRPr>
-            </a:pPr>
-            <a:r>
-              <a:rPr lang="vi-VN" dirty="0">
-                <a:latin typeface="Arial"/>
-                <a:ea typeface="Arial"/>
-              </a:rPr>
-              <a:t>  • Sentiment: TF-IDF word unigram + bigram + Linear SVM</a:t>
-            </a:r>
-          </a:p>
-          <a:p>
-            <a:pPr>
-              <a:defRPr sz="1550">
-                <a:solidFill>
-                  <a:srgbClr val="0F172A"/>
-                </a:solidFill>
-                <a:latin typeface="Arial"/>
-                <a:ea typeface="Arial"/>
-              </a:defRPr>
-            </a:pPr>
-            <a:r>
-              <a:rPr lang="vi-VN" dirty="0">
-                <a:latin typeface="Arial"/>
-                <a:ea typeface="Arial"/>
-              </a:rPr>
-              <a:t>  • Issue: TF-IDF word/char n-grams + Linear SVM + safe issue rules</a:t>
-            </a:r>
-            <a:endParaRPr dirty="0">
+              <a:t>•</a:t>
+            </a:r>
+            <a:r>
+              <a:rPr lang="en-US" dirty="0">
+                <a:latin typeface="Arial"/>
+                <a:ea typeface="Arial"/>
+              </a:rPr>
+              <a:t> </a:t>
+            </a:r>
+            <a:r>
+              <a:rPr lang="en-US" dirty="0" err="1">
+                <a:latin typeface="Arial"/>
+                <a:ea typeface="Arial"/>
+              </a:rPr>
+              <a:t>Với</a:t>
+            </a:r>
+            <a:r>
+              <a:rPr lang="en-US" dirty="0">
+                <a:latin typeface="Arial"/>
+                <a:ea typeface="Arial"/>
+              </a:rPr>
+              <a:t>:</a:t>
+            </a:r>
+            <a:endParaRPr lang="vi-VN" dirty="0">
               <a:latin typeface="Arial"/>
               <a:ea typeface="Arial"/>
             </a:endParaRPr>
           </a:p>
-        </p:txBody>
-      </p:sp>
+          <a:p>
+            <a:pPr>
+              <a:defRPr sz="1550">
+                <a:solidFill>
+                  <a:srgbClr val="0F172A"/>
+                </a:solidFill>
+                <a:latin typeface="Arial"/>
+                <a:ea typeface="Arial"/>
+              </a:defRPr>
+            </a:pPr>
+            <a:endParaRPr lang="en-US" dirty="0">
+              <a:latin typeface="Arial"/>
+              <a:ea typeface="Arial"/>
+            </a:endParaRPr>
+          </a:p>
+          <a:p>
+            <a:pPr>
+              <a:defRPr sz="1550">
+                <a:solidFill>
+                  <a:srgbClr val="0F172A"/>
+                </a:solidFill>
+                <a:latin typeface="Arial"/>
+                <a:ea typeface="Arial"/>
+              </a:defRPr>
+            </a:pPr>
+            <a:endParaRPr lang="en-US" dirty="0">
+              <a:latin typeface="Arial"/>
+              <a:ea typeface="Arial"/>
+            </a:endParaRPr>
+          </a:p>
+          <a:p>
+            <a:pPr>
+              <a:defRPr sz="1550">
+                <a:solidFill>
+                  <a:srgbClr val="0F172A"/>
+                </a:solidFill>
+                <a:latin typeface="Arial"/>
+                <a:ea typeface="Arial"/>
+              </a:defRPr>
+            </a:pPr>
+            <a:r>
+              <a:rPr lang="vi-VN" dirty="0">
+                <a:latin typeface="Arial"/>
+                <a:ea typeface="Arial"/>
+              </a:rPr>
+              <a:t>• Trong project:</a:t>
+            </a:r>
+          </a:p>
+          <a:p>
+            <a:pPr>
+              <a:defRPr sz="1550">
+                <a:solidFill>
+                  <a:srgbClr val="0F172A"/>
+                </a:solidFill>
+                <a:latin typeface="Arial"/>
+                <a:ea typeface="Arial"/>
+              </a:defRPr>
+            </a:pPr>
+            <a:r>
+              <a:rPr lang="en-US" dirty="0">
+                <a:latin typeface="Arial"/>
+                <a:ea typeface="Arial"/>
+              </a:rPr>
+              <a:t>  </a:t>
+            </a:r>
+            <a:r>
+              <a:rPr lang="vi-VN" dirty="0">
+                <a:latin typeface="Arial"/>
+                <a:ea typeface="Arial"/>
+              </a:rPr>
+              <a:t>• Đặc trưng: unigram + bigram counts.</a:t>
+            </a:r>
+          </a:p>
+          <a:p>
+            <a:pPr>
+              <a:defRPr sz="1550">
+                <a:solidFill>
+                  <a:srgbClr val="0F172A"/>
+                </a:solidFill>
+                <a:latin typeface="Arial"/>
+                <a:ea typeface="Arial"/>
+              </a:defRPr>
+            </a:pPr>
+            <a:r>
+              <a:rPr lang="vi-VN" dirty="0">
+                <a:latin typeface="Arial"/>
+                <a:ea typeface="Arial"/>
+              </a:rPr>
+              <a:t>  • </a:t>
+            </a:r>
+            <a:r>
+              <a:rPr lang="el-GR" dirty="0">
+                <a:latin typeface="Arial"/>
+                <a:ea typeface="Arial"/>
+              </a:rPr>
+              <a:t>α = 1.0.</a:t>
+            </a:r>
+            <a:endParaRPr lang="en-US" dirty="0">
+              <a:latin typeface="Arial"/>
+              <a:ea typeface="Arial"/>
+            </a:endParaRPr>
+          </a:p>
+        </p:txBody>
+      </p:sp>
+      <p:pic>
+        <p:nvPicPr>
+          <p:cNvPr id="24" name="Picture 23">
+            <a:extLst>
+              <a:ext uri="{FF2B5EF4-FFF2-40B4-BE49-F238E27FC236}">
+                <a16:creationId xmlns:a16="http://schemas.microsoft.com/office/drawing/2014/main" id="{E4EFD0DE-EF9A-FEE2-10A0-11C2FC1F55E5}"/>
+              </a:ext>
+            </a:extLst>
+          </p:cNvPr>
+          <p:cNvPicPr>
+            <a:picLocks noChangeAspect="1"/>
+          </p:cNvPicPr>
+          <p:nvPr/>
+        </p:nvPicPr>
+        <p:blipFill>
+          <a:blip r:embed="rId2"/>
+          <a:stretch>
+            <a:fillRect/>
+          </a:stretch>
+        </p:blipFill>
+        <p:spPr>
+          <a:xfrm>
+            <a:off x="905256" y="2834544"/>
+            <a:ext cx="2772162" cy="457264"/>
+          </a:xfrm>
+          <a:prstGeom prst="rect">
+            <a:avLst/>
+          </a:prstGeom>
+        </p:spPr>
+      </p:pic>
+      <p:pic>
+        <p:nvPicPr>
+          <p:cNvPr id="26" name="Picture 25">
+            <a:extLst>
+              <a:ext uri="{FF2B5EF4-FFF2-40B4-BE49-F238E27FC236}">
+                <a16:creationId xmlns:a16="http://schemas.microsoft.com/office/drawing/2014/main" id="{43F3AFFD-284D-3142-6302-0AD8AE223843}"/>
+              </a:ext>
+            </a:extLst>
+          </p:cNvPr>
+          <p:cNvPicPr>
+            <a:picLocks noChangeAspect="1"/>
+          </p:cNvPicPr>
+          <p:nvPr/>
+        </p:nvPicPr>
+        <p:blipFill>
+          <a:blip r:embed="rId3"/>
+          <a:stretch>
+            <a:fillRect/>
+          </a:stretch>
+        </p:blipFill>
+        <p:spPr>
+          <a:xfrm>
+            <a:off x="1022067" y="3566193"/>
+            <a:ext cx="2229161" cy="409632"/>
+          </a:xfrm>
+          <a:prstGeom prst="rect">
+            <a:avLst/>
+          </a:prstGeom>
+        </p:spPr>
+      </p:pic>
     </p:spTree>
+    <p:extLst>
+      <p:ext uri="{BB962C8B-B14F-4D97-AF65-F5344CB8AC3E}">
+        <p14:creationId xmlns:p14="http://schemas.microsoft.com/office/powerpoint/2010/main" val="261470906"/>
+      </p:ext>
+    </p:extLst>
   </p:cSld>
   <p:clrMapOvr>
     <a:masterClrMapping/>
@@ -16994,7 +16177,7 @@
                 <a:latin typeface="Arial"/>
                 <a:ea typeface="Arial"/>
               </a:rPr>
-              <a:t>• Naive Bayes là mô hình phân loại dựa trên xác suất Bayes.</a:t>
+              <a:t>TF-IDF</a:t>
             </a:r>
           </a:p>
           <a:p>
@@ -17012,7 +16195,7 @@
                 <a:latin typeface="Arial"/>
                 <a:ea typeface="Arial"/>
               </a:rPr>
-              <a:t>• Ý tưởng:</a:t>
+              <a:t>• Mục đích:</a:t>
             </a:r>
           </a:p>
           <a:p>
@@ -17030,43 +16213,7 @@
                 <a:latin typeface="Arial"/>
                 <a:ea typeface="Arial"/>
               </a:rPr>
-              <a:t>  • Tính xác suất một review thuộc từng lớp.</a:t>
-            </a:r>
-          </a:p>
-          <a:p>
-            <a:pPr>
-              <a:defRPr sz="1550">
-                <a:solidFill>
-                  <a:srgbClr val="0F172A"/>
-                </a:solidFill>
-                <a:latin typeface="Arial"/>
-                <a:ea typeface="Arial"/>
-              </a:defRPr>
-            </a:pPr>
-            <a:r>
-              <a:rPr lang="vi-VN" dirty="0">
-                <a:latin typeface="Arial"/>
-                <a:ea typeface="Arial"/>
-              </a:rPr>
-              <a:t>  • Chọn lớp có xác suất lớn nhất.</a:t>
-            </a:r>
-          </a:p>
-          <a:p>
-            <a:pPr>
-              <a:defRPr sz="1550">
-                <a:solidFill>
-                  <a:srgbClr val="0F172A"/>
-                </a:solidFill>
-                <a:latin typeface="Arial"/>
-                <a:ea typeface="Arial"/>
-              </a:defRPr>
-            </a:pPr>
-            <a:r>
-              <a:rPr lang="vi-VN" dirty="0">
-                <a:latin typeface="Arial"/>
-                <a:ea typeface="Arial"/>
-              </a:rPr>
-              <a:t>  • Giả định các từ độc lập có điều kiện theo lớp.</a:t>
+              <a:t>  Biến văn bản review thành vector số để mô hình học máy xử lý được.</a:t>
             </a:r>
           </a:p>
           <a:p>
@@ -17099,7 +16246,179 @@
                 <a:latin typeface="Arial"/>
                 <a:ea typeface="Arial"/>
               </a:rPr>
-              <a:t>• Công thức:</a:t>
+              <a:t>• Ý tưởng:</a:t>
+            </a:r>
+          </a:p>
+          <a:p>
+            <a:pPr>
+              <a:defRPr sz="1550">
+                <a:solidFill>
+                  <a:srgbClr val="0F172A"/>
+                </a:solidFill>
+                <a:latin typeface="Arial"/>
+                <a:ea typeface="Arial"/>
+              </a:defRPr>
+            </a:pPr>
+            <a:r>
+              <a:rPr lang="vi-VN" dirty="0">
+                <a:latin typeface="Arial"/>
+                <a:ea typeface="Arial"/>
+              </a:rPr>
+              <a:t>  Từ/cụm từ quan trọng là từ xuất hiện nhiều trong một review</a:t>
+            </a:r>
+          </a:p>
+          <a:p>
+            <a:pPr>
+              <a:defRPr sz="1550">
+                <a:solidFill>
+                  <a:srgbClr val="0F172A"/>
+                </a:solidFill>
+                <a:latin typeface="Arial"/>
+                <a:ea typeface="Arial"/>
+              </a:defRPr>
+            </a:pPr>
+            <a:r>
+              <a:rPr lang="vi-VN" dirty="0">
+                <a:latin typeface="Arial"/>
+                <a:ea typeface="Arial"/>
+              </a:rPr>
+              <a:t>  nhưng không xuất hiện quá phổ biến trong toàn bộ dataset.</a:t>
+            </a:r>
+          </a:p>
+          <a:p>
+            <a:pPr>
+              <a:defRPr sz="1550">
+                <a:solidFill>
+                  <a:srgbClr val="0F172A"/>
+                </a:solidFill>
+                <a:latin typeface="Arial"/>
+                <a:ea typeface="Arial"/>
+              </a:defRPr>
+            </a:pPr>
+            <a:endParaRPr lang="vi-VN" dirty="0">
+              <a:latin typeface="Arial"/>
+              <a:ea typeface="Arial"/>
+            </a:endParaRPr>
+          </a:p>
+          <a:p>
+            <a:pPr>
+              <a:defRPr sz="1550">
+                <a:solidFill>
+                  <a:srgbClr val="0F172A"/>
+                </a:solidFill>
+                <a:latin typeface="Arial"/>
+                <a:ea typeface="Arial"/>
+              </a:defRPr>
+            </a:pPr>
+            <a:r>
+              <a:rPr lang="vi-VN" dirty="0">
+                <a:latin typeface="Arial"/>
+                <a:ea typeface="Arial"/>
+              </a:rPr>
+              <a:t> Bước 1: Tạo vocabulary từ tập train</a:t>
+            </a:r>
+          </a:p>
+          <a:p>
+            <a:pPr>
+              <a:defRPr sz="1550">
+                <a:solidFill>
+                  <a:srgbClr val="0F172A"/>
+                </a:solidFill>
+                <a:latin typeface="Arial"/>
+                <a:ea typeface="Arial"/>
+              </a:defRPr>
+            </a:pPr>
+            <a:r>
+              <a:rPr lang="en-US" dirty="0">
+                <a:latin typeface="Arial"/>
+                <a:ea typeface="Arial"/>
+              </a:rPr>
+              <a:t> </a:t>
+            </a:r>
+            <a:r>
+              <a:rPr lang="vi-VN" dirty="0">
+                <a:latin typeface="Arial"/>
+                <a:ea typeface="Arial"/>
+              </a:rPr>
+              <a:t>Bước 2: Mỗi feature là một chiều vector</a:t>
+            </a:r>
+            <a:endParaRPr lang="en-US" dirty="0">
+              <a:latin typeface="Arial"/>
+              <a:ea typeface="Arial"/>
+            </a:endParaRPr>
+          </a:p>
+          <a:p>
+            <a:pPr>
+              <a:defRPr sz="1550">
+                <a:solidFill>
+                  <a:srgbClr val="0F172A"/>
+                </a:solidFill>
+                <a:latin typeface="Arial"/>
+                <a:ea typeface="Arial"/>
+              </a:defRPr>
+            </a:pPr>
+            <a:r>
+              <a:rPr lang="en-US" dirty="0">
+                <a:latin typeface="Arial"/>
+                <a:ea typeface="Arial"/>
+              </a:rPr>
+              <a:t> </a:t>
+            </a:r>
+            <a:r>
+              <a:rPr lang="en-US" dirty="0" err="1">
+                <a:latin typeface="Arial"/>
+                <a:ea typeface="Arial"/>
+              </a:rPr>
+              <a:t>Bước</a:t>
+            </a:r>
+            <a:r>
+              <a:rPr lang="en-US" dirty="0">
+                <a:latin typeface="Arial"/>
+                <a:ea typeface="Arial"/>
+              </a:rPr>
+              <a:t> 3: </a:t>
+            </a:r>
+            <a:r>
+              <a:rPr lang="en-US" dirty="0" err="1">
+                <a:latin typeface="Arial"/>
+                <a:ea typeface="Arial"/>
+              </a:rPr>
+              <a:t>Tính</a:t>
+            </a:r>
+            <a:r>
+              <a:rPr lang="en-US" dirty="0">
+                <a:latin typeface="Arial"/>
+                <a:ea typeface="Arial"/>
+              </a:rPr>
+              <a:t> TF-IDF </a:t>
+            </a:r>
+            <a:r>
+              <a:rPr lang="en-US" dirty="0" err="1">
+                <a:latin typeface="Arial"/>
+                <a:ea typeface="Arial"/>
+              </a:rPr>
+              <a:t>cho</a:t>
+            </a:r>
+            <a:r>
+              <a:rPr lang="en-US" dirty="0">
+                <a:latin typeface="Arial"/>
+                <a:ea typeface="Arial"/>
+              </a:rPr>
+              <a:t> </a:t>
+            </a:r>
+            <a:r>
+              <a:rPr lang="en-US" dirty="0" err="1">
+                <a:latin typeface="Arial"/>
+                <a:ea typeface="Arial"/>
+              </a:rPr>
+              <a:t>từng</a:t>
+            </a:r>
+            <a:r>
+              <a:rPr lang="en-US" dirty="0">
+                <a:latin typeface="Arial"/>
+                <a:ea typeface="Arial"/>
+              </a:rPr>
+              <a:t> feature</a:t>
             </a:r>
           </a:p>
           <a:p>
@@ -17127,57 +16446,6 @@
                 <a:ea typeface="Arial"/>
               </a:defRPr>
             </a:pPr>
-            <a:endParaRPr lang="vi-VN" dirty="0">
-              <a:latin typeface="Arial"/>
-              <a:ea typeface="Arial"/>
-            </a:endParaRPr>
-          </a:p>
-          <a:p>
-            <a:pPr>
-              <a:defRPr sz="1550">
-                <a:solidFill>
-                  <a:srgbClr val="0F172A"/>
-                </a:solidFill>
-                <a:latin typeface="Arial"/>
-                <a:ea typeface="Arial"/>
-              </a:defRPr>
-            </a:pPr>
-            <a:r>
-              <a:rPr lang="vi-VN" dirty="0">
-                <a:latin typeface="Arial"/>
-                <a:ea typeface="Arial"/>
-              </a:rPr>
-              <a:t>• Với Laplace smoothing:</a:t>
-            </a:r>
-          </a:p>
-          <a:p>
-            <a:pPr>
-              <a:defRPr sz="1550">
-                <a:solidFill>
-                  <a:srgbClr val="0F172A"/>
-                </a:solidFill>
-                <a:latin typeface="Arial"/>
-                <a:ea typeface="Arial"/>
-              </a:defRPr>
-            </a:pPr>
-            <a:r>
-              <a:rPr lang="vi-VN" dirty="0">
-                <a:latin typeface="Arial"/>
-                <a:ea typeface="Arial"/>
-              </a:rPr>
-              <a:t>  </a:t>
-            </a:r>
-          </a:p>
-          <a:p>
-            <a:pPr>
-              <a:defRPr sz="1550">
-                <a:solidFill>
-                  <a:srgbClr val="0F172A"/>
-                </a:solidFill>
-                <a:latin typeface="Arial"/>
-                <a:ea typeface="Arial"/>
-              </a:defRPr>
-            </a:pPr>
             <a:endParaRPr lang="en-US" dirty="0">
               <a:latin typeface="Arial"/>
               <a:ea typeface="Arial"/>
@@ -17187,10 +16455,10 @@
       </p:sp>
       <p:pic>
         <p:nvPicPr>
-          <p:cNvPr id="24" name="Picture 23">
+          <p:cNvPr id="8" name="Picture 7">
             <a:extLst>
               <a:ext uri="{FF2B5EF4-FFF2-40B4-BE49-F238E27FC236}">
-                <a16:creationId xmlns:a16="http://schemas.microsoft.com/office/drawing/2014/main" id="{E4EFD0DE-EF9A-FEE2-10A0-11C2FC1F55E5}"/>
+                <a16:creationId xmlns:a16="http://schemas.microsoft.com/office/drawing/2014/main" id="{50DF576F-9607-2724-35EE-C1D682CCC13D}"/>
               </a:ext>
             </a:extLst>
           </p:cNvPr>
@@ -17207,38 +16475,8 @@
         </p:blipFill>
         <p:spPr>
           <a:xfrm>
-            <a:off x="905256" y="2834544"/>
-            <a:ext cx="2772162" cy="457264"/>
-          </a:xfrm>
-          <a:prstGeom prst="rect">
-            <a:avLst/>
-          </a:prstGeom>
-        </p:spPr>
-      </p:pic>
-      <p:pic>
-        <p:nvPicPr>
-          <p:cNvPr id="26" name="Picture 25">
-            <a:extLst>
-              <a:ext uri="{FF2B5EF4-FFF2-40B4-BE49-F238E27FC236}">
-                <a16:creationId xmlns:a16="http://schemas.microsoft.com/office/drawing/2014/main" id="{43F3AFFD-284D-3142-6302-0AD8AE223843}"/>
-              </a:ext>
-            </a:extLst>
-          </p:cNvPr>
-          <p:cNvPicPr>
-            <a:picLocks noChangeAspect="1"/>
-          </p:cNvPicPr>
-          <p:nvPr/>
-        </p:nvPicPr>
-        <p:blipFill>
-          <a:blip r:embed="rId3"/>
-          <a:stretch>
-            <a:fillRect/>
-          </a:stretch>
-        </p:blipFill>
-        <p:spPr>
-          <a:xfrm>
-            <a:off x="1022067" y="3566193"/>
-            <a:ext cx="2229161" cy="409632"/>
+            <a:off x="4356100" y="3628103"/>
+            <a:ext cx="3336347" cy="2589817"/>
           </a:xfrm>
           <a:prstGeom prst="rect">
             <a:avLst/>
@@ -17248,7 +16486,7 @@
     </p:spTree>
     <p:extLst>
       <p:ext uri="{BB962C8B-B14F-4D97-AF65-F5344CB8AC3E}">
-        <p14:creationId xmlns:p14="http://schemas.microsoft.com/office/powerpoint/2010/main" val="261470906"/>
+        <p14:creationId xmlns:p14="http://schemas.microsoft.com/office/powerpoint/2010/main" val="2383931361"/>
       </p:ext>
     </p:extLst>
   </p:cSld>
